--- a/outputs/presentation/memory-solution-ladder.pptx
+++ b/outputs/presentation/memory-solution-ladder.pptx
@@ -502,7 +502,7 @@
           <a:lstStyle/>
           <a:p>
             <a:r>
-              <a:t>메모리 해법 사다리 한 장입니다. 명제는 하나입니다. 단품 특성이 고객 요구를 단품 가격에서 못 채우면 해법은 그 부품을 쓰는 상위 계층으로 올라갑니다. 왼쪽 차트는 1990년부터 2030년까지 NAND와 DRAM이 어느 계층에서 한계를 풀었는지 보여줍니다. NAND는 셀의 RBER·P/E 한계를 셀에서 푼 적이 없습니다. 1991년 SSD와 1995년 FTL이 컨트롤러 계층에서 흡수했고, 2x nm의 RBER 급증은 2014~15년 LDPC 컨트롤러가, 그 다음 WAF·OP·QLC 내구성은 호스트 계층(TRIM 2009, Open-Channel·Streams 2017, ZNS 2020, FDP 2022)과 애플리케이션 계층(CacheLib FDP 2025)이 흡수하고 있습니다. 디바이스 칸에서 호스트 칸까지 31년입니다. KV 캐시 관리자 칸은 아직 비어 있습니다. DRAM은 순서가 반대였습니다. 첫 한계가 대역폭이라 물리 집적, 즉 HBM(2013)이라는 자기 진화가 먼저 왔고, Row Hammer(2014)가 셀 한계를 규명한 뒤 on-die ECC(2020)로 단품이 흡수하다가 RFM(2021)·PRAC(2024)이라는 호스트 협력 규격으로 올라섰습니다. PRAC는 DRAM이 행별 활성화 횟수를 세고 호스트에 경보를 보내 완화 시간을 받는 협력 프로토콜로, 구조적으로 FDP와 같습니다. CXL은 시스템 패브릭 칸입니다. 애플리케이션 칸은 아직 없습니다. 오른쪽은 두 축입니다. ① 이관은 관리 로직이 필요한 한계가 위로 올라가는 축, ② 자기 진화는 물리 집적으로 풀리는 축이며 둘은 병행합니다. NAND는 이관이 먼저였고 자기 진화 패키지(HBF)는 35년 뒤에 왔습니다. DRAM은 자기 진화가 6~11년 먼저였습니다. HBF는 시대 역행이 아니라 NAND 자기 진화 축의 늦은 도착이며, Hot Chips 2026에서 지적된 사용성 한계는 결국 상위 계층이 읽기 중심 워크로드를 골라 주어야 성립함을 보여줍니다. 함의는 셋입니다. QLC의 호스트 협력은 예외가 아니라 사다리의 다음 칸입니다. DRAM도 PRAC·CXL로 같은 사다리에 올라섰으므로 5번째 칸이 열리기 전에 같은 조직 역량이 필요합니다. 자기 진화 축(3D 400+층·HBM4E 커스텀 베이스 다이·HBF)은 이관 축과 같은 로드맵에 놓아야 합니다. 팩트 등급은 보고서 부록 A에 있고, 원문 대조는 후속 과제입니다.</a:t>
+              <a:t>메모리 해법 사다리를 네 숫자로 설명하는 한 장입니다. 왼쪽 차트는 인과 순서입니다. ① 셀의 한계: 비트/셀을 늘릴수록 셀이 견디는 P/E 사이클이 SLC 30K~100K에서 QLC 100~1K로 100배 줄었습니다. ② 컨트롤러의 응답: 같은 기간 RBER은 SLC 10의 -9~-7승에서 QLC 10의 -3~-2승으로 약 백만 배 올랐지만, 고객의 UBER 요구(JESD218: 클라이언트 10의 -15승, 엔터프라이즈 10의 -16승)는 고정이었습니다. 그 폭을 컨트롤러가 ECC로 메웠습니다. 1비트/512B에서 BCH 60비트/KB, LDPC 120비트/KB로 약 60배입니다. 셀은 보존·사이클링·리드 디스터브로 시간에 따라 산포가 움직이는 것을 스스로 고치지 못하므로, 이것이 NAND에서 SSD로의 1단계 이관의 실체입니다. ③ 결과: ECC는 BER을 막지만 P/E를 늘리지는 못합니다. 정격 DWPD는 X25-E SLC 17(2008, 2PB 보증 환산), S3700 eMLC 10(2012), P4510 TLC 0.7(2018), P5316 QLC 0.41(2021, 22,930TBW 환산), 최신 QLC 0.075~0.6으로 내려왔는데, 추론 캐시 계층의 요구는 TLC 수준 1~3, ScaleFlux가 제시한 유효 요구는 7~10입니다. 10~40배 갭입니다. ④ 남은 지렛대: DWPD = P/E × (1+OP) ÷ (WAF × 365 × 년)에서 P/E는 셀, OP는 디바이스, 년과 요구 DWPD는 고객이 정합니다. P/E가 100배 줄었으니 남은 변수는 WAF뿐이고, WAF는 랜덤 쓰기 대표값 3, CacheLib FDP 없음 3.22에서 FDP 배치로 1.03이 됐습니다. 68% 감소, 유효 DWPD 3.1배입니다. WAF를 1로 내리는 것은 컨트롤러가 아니라 호스트가 데이터 수명을 알려 줄 때만 가능합니다. 오른쪽 위는 산식과 항별 소유자, 아래는 두 단계의 대칭입니다. 1단계는 요구 UBER 고정, RBER 악화, ECC로 메움. 2단계는 요구 DWPD 고정, P/E 악화, WAF로 메움. 같은 구조입니다. 결론: QLC의 호스트 협력은 선택이 아니라 산식의 결과입니다. RBER 대표값과 환산 DWPD의 등급은 보고서 부록 A F28~F35에 있습니다.</a:t>
             </a:r>
           </a:p>
         </p:txBody>
@@ -3623,7 +3623,7 @@
                 <a:latin typeface="Arial"/>
                 <a:ea typeface="Arial"/>
               </a:rPr>
-              <a:t>메모리 해법 사다리 · 단품 한계와 상위 계층</a:t>
+              <a:t>메모리 해법 사다리 · P/E · BER · DWPD · WAF</a:t>
             </a:r>
           </a:p>
         </p:txBody>
@@ -3663,7 +3663,7 @@
                 <a:latin typeface="Arial"/>
                 <a:ea typeface="Arial"/>
               </a:rPr>
-              <a:t>단품의 한계는 상위 계층에서 해결돼 왔습니다. QLC의 호스트 협력은 그 사다리의 다음 칸입니다</a:t>
+              <a:t>단품이 잃은 P/E 100배를 컨트롤러가 ECC로 버텼고, 남은 지렛대 WAF는 호스트 협력에 있습니다</a:t>
             </a:r>
           </a:p>
         </p:txBody>
@@ -3703,7 +3703,7 @@
                 <a:latin typeface="Arial"/>
                 <a:ea typeface="Arial"/>
               </a:rPr>
-              <a:t>NAND는 컨트롤러(1991)→호스트(2022)→애플리케이션(2025)으로 올랐고, DRAM은 HBM(2013) 뒤 PRAC(2024)·CXL로 뒤따릅니다.</a:t>
+              <a:t>셀이 못 지킨 BER을 SSD가 ECC로 지켰고, SSD가 못 지키는 DWPD를 이제 호스트 배치가 WAF로 지킬 차례입니다.</a:t>
             </a:r>
           </a:p>
         </p:txBody>
@@ -3754,7 +3754,7 @@
       </p:sp>
       <p:pic>
         <p:nvPicPr>
-          <p:cNvPr id="8" name="Picture 7" descr="solution_ladder_chart.png"/>
+          <p:cNvPr id="8" name="Picture 7" descr="solution_metrics_chart.png"/>
           <p:cNvPicPr>
             <a:picLocks noChangeAspect="1"/>
           </p:cNvPicPr>
@@ -3784,8 +3784,8 @@
         </p:nvSpPr>
         <p:spPr>
           <a:xfrm>
-            <a:off x="11337174" y="2560320"/>
-            <a:ext cx="6228449" cy="3054096"/>
+            <a:off x="11318886" y="2560320"/>
+            <a:ext cx="6246737" cy="1572768"/>
           </a:xfrm>
           <a:prstGeom prst="rect">
             <a:avLst/>
@@ -3830,8 +3830,8 @@
         </p:nvSpPr>
         <p:spPr>
           <a:xfrm>
-            <a:off x="11593206" y="2688336"/>
-            <a:ext cx="5716385" cy="274320"/>
+            <a:off x="11556630" y="2670048"/>
+            <a:ext cx="5771249" cy="256032"/>
           </a:xfrm>
           <a:prstGeom prst="rect">
             <a:avLst/>
@@ -3850,14 +3850,14 @@
               </a:lnSpc>
             </a:pPr>
             <a:r>
-              <a:rPr sz="1725" b="1">
+              <a:rPr sz="1500" b="1">
                 <a:solidFill>
                   <a:srgbClr val="1428A0"/>
                 </a:solidFill>
                 <a:latin typeface="Arial"/>
                 <a:ea typeface="Arial"/>
               </a:rPr>
-              <a:t>두 축</a:t>
+              <a:t>산식 — 누가 어느 항을 정하나</a:t>
             </a:r>
           </a:p>
         </p:txBody>
@@ -3870,17 +3870,19 @@
         </p:nvSpPr>
         <p:spPr>
           <a:xfrm>
-            <a:off x="12032118" y="3072384"/>
-            <a:ext cx="5277473" cy="365760"/>
+            <a:off x="11415591" y="3035808"/>
+            <a:ext cx="932688" cy="420624"/>
           </a:xfrm>
           <a:prstGeom prst="rect">
             <a:avLst/>
           </a:prstGeom>
           <a:solidFill>
-            <a:srgbClr val="1428A0"/>
+            <a:srgbClr val="F4F6FC"/>
           </a:solidFill>
-          <a:ln>
-            <a:noFill/>
+          <a:ln w="12700">
+            <a:solidFill>
+              <a:srgbClr val="AAB8E8"/>
+            </a:solidFill>
           </a:ln>
           <a:effectLst/>
         </p:spPr>
@@ -3914,8 +3916,8 @@
         </p:nvSpPr>
         <p:spPr>
           <a:xfrm>
-            <a:off x="12141846" y="3072384"/>
-            <a:ext cx="1572768" cy="365760"/>
+            <a:off x="11415591" y="3035808"/>
+            <a:ext cx="932688" cy="420624"/>
           </a:xfrm>
           <a:prstGeom prst="rect">
             <a:avLst/>
@@ -3928,20 +3930,20 @@
           </a:bodyPr>
           <a:lstStyle/>
           <a:p>
-            <a:pPr algn="l">
+            <a:pPr algn="ctr">
               <a:lnSpc>
                 <a:spcPct val="112000"/>
               </a:lnSpc>
             </a:pPr>
             <a:r>
-              <a:rPr sz="1125" b="1">
+              <a:rPr sz="1350" b="1">
                 <a:solidFill>
-                  <a:srgbClr val="FFFFFF"/>
+                  <a:srgbClr val="1A1A1A"/>
                 </a:solidFill>
                 <a:latin typeface="Arial"/>
                 <a:ea typeface="Arial"/>
               </a:rPr>
-              <a:t>애플리케이션</a:t>
+              <a:t>DWPD</a:t>
             </a:r>
           </a:p>
         </p:txBody>
@@ -3954,8 +3956,8 @@
         </p:nvSpPr>
         <p:spPr>
           <a:xfrm>
-            <a:off x="13732902" y="3072384"/>
-            <a:ext cx="3485249" cy="365760"/>
+            <a:off x="11324151" y="3493008"/>
+            <a:ext cx="1115568" cy="201168"/>
           </a:xfrm>
           <a:prstGeom prst="rect">
             <a:avLst/>
@@ -3963,12 +3965,12 @@
           <a:noFill/>
         </p:spPr>
         <p:txBody>
-          <a:bodyPr wrap="square" anchor="ctr" lIns="0" rIns="0" tIns="0" bIns="0">
+          <a:bodyPr wrap="square" anchor="t" lIns="0" rIns="0" tIns="0" bIns="0">
             <a:spAutoFit/>
           </a:bodyPr>
           <a:lstStyle/>
           <a:p>
-            <a:pPr algn="l">
+            <a:pPr algn="ctr">
               <a:lnSpc>
                 <a:spcPct val="112000"/>
               </a:lnSpc>
@@ -3976,35 +3978,77 @@
             <a:r>
               <a:rPr sz="975" b="0">
                 <a:solidFill>
-                  <a:srgbClr val="FFFFFF"/>
+                  <a:srgbClr val="8A8A8A"/>
                 </a:solidFill>
                 <a:latin typeface="Arial"/>
                 <a:ea typeface="Arial"/>
               </a:rPr>
-              <a:t>NAND 2025 · DRAM 미도달</a:t>
-            </a:r>
-          </a:p>
-        </p:txBody>
-      </p:sp>
-      <p:sp>
-        <p:nvSpPr>
-          <p:cNvPr id="14" name="Rectangle 13"/>
+              <a:t>고객 요구</a:t>
+            </a:r>
+          </a:p>
+        </p:txBody>
+      </p:sp>
+      <p:sp>
+        <p:nvSpPr>
+          <p:cNvPr id="14" name="TextBox 13"/>
+          <p:cNvSpPr txBox="1"/>
+          <p:nvPr/>
+        </p:nvSpPr>
+        <p:spPr>
+          <a:xfrm>
+            <a:off x="12403143" y="3035808"/>
+            <a:ext cx="237744" cy="420624"/>
+          </a:xfrm>
+          <a:prstGeom prst="rect">
+            <a:avLst/>
+          </a:prstGeom>
+          <a:noFill/>
+        </p:spPr>
+        <p:txBody>
+          <a:bodyPr wrap="square" anchor="ctr" lIns="0" rIns="0" tIns="0" bIns="0">
+            <a:spAutoFit/>
+          </a:bodyPr>
+          <a:lstStyle/>
+          <a:p>
+            <a:pPr algn="ctr">
+              <a:lnSpc>
+                <a:spcPct val="112000"/>
+              </a:lnSpc>
+            </a:pPr>
+            <a:r>
+              <a:rPr sz="1500" b="0">
+                <a:solidFill>
+                  <a:srgbClr val="555555"/>
+                </a:solidFill>
+                <a:latin typeface="Arial"/>
+                <a:ea typeface="Arial"/>
+              </a:rPr>
+              <a:t>=</a:t>
+            </a:r>
+          </a:p>
+        </p:txBody>
+      </p:sp>
+      <p:sp>
+        <p:nvSpPr>
+          <p:cNvPr id="15" name="Rectangle 14"/>
           <p:cNvSpPr/>
           <p:nvPr/>
         </p:nvSpPr>
         <p:spPr>
           <a:xfrm>
-            <a:off x="12032118" y="3511296"/>
-            <a:ext cx="5277473" cy="365760"/>
+            <a:off x="12695751" y="3035808"/>
+            <a:ext cx="932688" cy="420624"/>
           </a:xfrm>
           <a:prstGeom prst="rect">
             <a:avLst/>
           </a:prstGeom>
           <a:solidFill>
-            <a:srgbClr val="1428A0"/>
+            <a:srgbClr val="FFFFFF"/>
           </a:solidFill>
-          <a:ln>
-            <a:noFill/>
+          <a:ln w="9525">
+            <a:solidFill>
+              <a:srgbClr val="D9D9D9"/>
+            </a:solidFill>
           </a:ln>
           <a:effectLst/>
         </p:spPr>
@@ -4032,14 +4076,14 @@
       </p:sp>
       <p:sp>
         <p:nvSpPr>
-          <p:cNvPr id="15" name="TextBox 14"/>
+          <p:cNvPr id="16" name="TextBox 15"/>
           <p:cNvSpPr txBox="1"/>
           <p:nvPr/>
         </p:nvSpPr>
         <p:spPr>
           <a:xfrm>
-            <a:off x="12141846" y="3511296"/>
-            <a:ext cx="1572768" cy="365760"/>
+            <a:off x="12695751" y="3035808"/>
+            <a:ext cx="932688" cy="420624"/>
           </a:xfrm>
           <a:prstGeom prst="rect">
             <a:avLst/>
@@ -4052,34 +4096,34 @@
           </a:bodyPr>
           <a:lstStyle/>
           <a:p>
-            <a:pPr algn="l">
+            <a:pPr algn="ctr">
               <a:lnSpc>
                 <a:spcPct val="112000"/>
               </a:lnSpc>
             </a:pPr>
             <a:r>
-              <a:rPr sz="1125" b="1">
+              <a:rPr sz="1350" b="1">
                 <a:solidFill>
-                  <a:srgbClr val="FFFFFF"/>
+                  <a:srgbClr val="1A1A1A"/>
                 </a:solidFill>
                 <a:latin typeface="Arial"/>
                 <a:ea typeface="Arial"/>
               </a:rPr>
-              <a:t>호스트 · 프로토콜</a:t>
-            </a:r>
-          </a:p>
-        </p:txBody>
-      </p:sp>
-      <p:sp>
-        <p:nvSpPr>
-          <p:cNvPr id="16" name="TextBox 15"/>
+              <a:t>P/E</a:t>
+            </a:r>
+          </a:p>
+        </p:txBody>
+      </p:sp>
+      <p:sp>
+        <p:nvSpPr>
+          <p:cNvPr id="17" name="TextBox 16"/>
           <p:cNvSpPr txBox="1"/>
           <p:nvPr/>
         </p:nvSpPr>
         <p:spPr>
           <a:xfrm>
-            <a:off x="13732902" y="3511296"/>
-            <a:ext cx="3485249" cy="365760"/>
+            <a:off x="12604311" y="3493008"/>
+            <a:ext cx="1115568" cy="201168"/>
           </a:xfrm>
           <a:prstGeom prst="rect">
             <a:avLst/>
@@ -4087,12 +4131,12 @@
           <a:noFill/>
         </p:spPr>
         <p:txBody>
-          <a:bodyPr wrap="square" anchor="ctr" lIns="0" rIns="0" tIns="0" bIns="0">
+          <a:bodyPr wrap="square" anchor="t" lIns="0" rIns="0" tIns="0" bIns="0">
             <a:spAutoFit/>
           </a:bodyPr>
           <a:lstStyle/>
           <a:p>
-            <a:pPr algn="l">
+            <a:pPr algn="ctr">
               <a:lnSpc>
                 <a:spcPct val="112000"/>
               </a:lnSpc>
@@ -4100,35 +4144,77 @@
             <a:r>
               <a:rPr sz="975" b="0">
                 <a:solidFill>
-                  <a:srgbClr val="FFFFFF"/>
+                  <a:srgbClr val="8A8A8A"/>
                 </a:solidFill>
                 <a:latin typeface="Arial"/>
                 <a:ea typeface="Arial"/>
               </a:rPr>
-              <a:t>NAND 2022 FDP · DRAM 2024 PRAC</a:t>
-            </a:r>
-          </a:p>
-        </p:txBody>
-      </p:sp>
-      <p:sp>
-        <p:nvSpPr>
-          <p:cNvPr id="17" name="Rectangle 16"/>
+              <a:t>셀 · 다이</a:t>
+            </a:r>
+          </a:p>
+        </p:txBody>
+      </p:sp>
+      <p:sp>
+        <p:nvSpPr>
+          <p:cNvPr id="18" name="TextBox 17"/>
+          <p:cNvSpPr txBox="1"/>
+          <p:nvPr/>
+        </p:nvSpPr>
+        <p:spPr>
+          <a:xfrm>
+            <a:off x="13683303" y="3035808"/>
+            <a:ext cx="237744" cy="420624"/>
+          </a:xfrm>
+          <a:prstGeom prst="rect">
+            <a:avLst/>
+          </a:prstGeom>
+          <a:noFill/>
+        </p:spPr>
+        <p:txBody>
+          <a:bodyPr wrap="square" anchor="ctr" lIns="0" rIns="0" tIns="0" bIns="0">
+            <a:spAutoFit/>
+          </a:bodyPr>
+          <a:lstStyle/>
+          <a:p>
+            <a:pPr algn="ctr">
+              <a:lnSpc>
+                <a:spcPct val="112000"/>
+              </a:lnSpc>
+            </a:pPr>
+            <a:r>
+              <a:rPr sz="1500" b="0">
+                <a:solidFill>
+                  <a:srgbClr val="555555"/>
+                </a:solidFill>
+                <a:latin typeface="Arial"/>
+                <a:ea typeface="Arial"/>
+              </a:rPr>
+              <a:t>×</a:t>
+            </a:r>
+          </a:p>
+        </p:txBody>
+      </p:sp>
+      <p:sp>
+        <p:nvSpPr>
+          <p:cNvPr id="19" name="Rectangle 18"/>
           <p:cNvSpPr/>
           <p:nvPr/>
         </p:nvSpPr>
         <p:spPr>
           <a:xfrm>
-            <a:off x="12032118" y="3950208"/>
-            <a:ext cx="5277473" cy="365760"/>
+            <a:off x="13975911" y="3035808"/>
+            <a:ext cx="932688" cy="420624"/>
           </a:xfrm>
           <a:prstGeom prst="rect">
             <a:avLst/>
           </a:prstGeom>
           <a:solidFill>
-            <a:srgbClr val="1428A0"/>
+            <a:srgbClr val="FFFFFF"/>
           </a:solidFill>
-          <a:ln>
-            <a:noFill/>
+          <a:ln w="9525">
+            <a:solidFill>
+              <a:srgbClr val="D9D9D9"/>
+            </a:solidFill>
           </a:ln>
           <a:effectLst/>
         </p:spPr>
@@ -4156,14 +4242,14 @@
       </p:sp>
       <p:sp>
         <p:nvSpPr>
-          <p:cNvPr id="18" name="TextBox 17"/>
+          <p:cNvPr id="20" name="TextBox 19"/>
           <p:cNvSpPr txBox="1"/>
           <p:nvPr/>
         </p:nvSpPr>
         <p:spPr>
           <a:xfrm>
-            <a:off x="12141846" y="3950208"/>
-            <a:ext cx="1572768" cy="365760"/>
+            <a:off x="13975911" y="3035808"/>
+            <a:ext cx="932688" cy="420624"/>
           </a:xfrm>
           <a:prstGeom prst="rect">
             <a:avLst/>
@@ -4176,34 +4262,34 @@
           </a:bodyPr>
           <a:lstStyle/>
           <a:p>
-            <a:pPr algn="l">
+            <a:pPr algn="ctr">
               <a:lnSpc>
                 <a:spcPct val="112000"/>
               </a:lnSpc>
             </a:pPr>
             <a:r>
-              <a:rPr sz="1125" b="1">
+              <a:rPr sz="1350" b="1">
                 <a:solidFill>
-                  <a:srgbClr val="FFFFFF"/>
+                  <a:srgbClr val="1A1A1A"/>
                 </a:solidFill>
                 <a:latin typeface="Arial"/>
                 <a:ea typeface="Arial"/>
               </a:rPr>
-              <a:t>컨트롤러 · 디바이스</a:t>
-            </a:r>
-          </a:p>
-        </p:txBody>
-      </p:sp>
-      <p:sp>
-        <p:nvSpPr>
-          <p:cNvPr id="19" name="TextBox 18"/>
+              <a:t>1 + OP</a:t>
+            </a:r>
+          </a:p>
+        </p:txBody>
+      </p:sp>
+      <p:sp>
+        <p:nvSpPr>
+          <p:cNvPr id="21" name="TextBox 20"/>
           <p:cNvSpPr txBox="1"/>
           <p:nvPr/>
         </p:nvSpPr>
         <p:spPr>
           <a:xfrm>
-            <a:off x="13732902" y="3950208"/>
-            <a:ext cx="3485249" cy="365760"/>
+            <a:off x="13884471" y="3493008"/>
+            <a:ext cx="1115568" cy="201168"/>
           </a:xfrm>
           <a:prstGeom prst="rect">
             <a:avLst/>
@@ -4211,12 +4297,12 @@
           <a:noFill/>
         </p:spPr>
         <p:txBody>
-          <a:bodyPr wrap="square" anchor="ctr" lIns="0" rIns="0" tIns="0" bIns="0">
+          <a:bodyPr wrap="square" anchor="t" lIns="0" rIns="0" tIns="0" bIns="0">
             <a:spAutoFit/>
           </a:bodyPr>
           <a:lstStyle/>
           <a:p>
-            <a:pPr algn="l">
+            <a:pPr algn="ctr">
               <a:lnSpc>
                 <a:spcPct val="112000"/>
               </a:lnSpc>
@@ -4224,37 +4310,75 @@
             <a:r>
               <a:rPr sz="975" b="0">
                 <a:solidFill>
-                  <a:srgbClr val="FFFFFF"/>
+                  <a:srgbClr val="8A8A8A"/>
                 </a:solidFill>
                 <a:latin typeface="Arial"/>
                 <a:ea typeface="Arial"/>
               </a:rPr>
-              <a:t>NAND 1991 SSD · DRAM 1997 Chipkill</a:t>
-            </a:r>
-          </a:p>
-        </p:txBody>
-      </p:sp>
-      <p:sp>
-        <p:nvSpPr>
-          <p:cNvPr id="20" name="Rectangle 19"/>
+              <a:t>디바이스</a:t>
+            </a:r>
+          </a:p>
+        </p:txBody>
+      </p:sp>
+      <p:sp>
+        <p:nvSpPr>
+          <p:cNvPr id="22" name="TextBox 21"/>
+          <p:cNvSpPr txBox="1"/>
+          <p:nvPr/>
+        </p:nvSpPr>
+        <p:spPr>
+          <a:xfrm>
+            <a:off x="14963463" y="3035808"/>
+            <a:ext cx="237744" cy="420624"/>
+          </a:xfrm>
+          <a:prstGeom prst="rect">
+            <a:avLst/>
+          </a:prstGeom>
+          <a:noFill/>
+        </p:spPr>
+        <p:txBody>
+          <a:bodyPr wrap="square" anchor="ctr" lIns="0" rIns="0" tIns="0" bIns="0">
+            <a:spAutoFit/>
+          </a:bodyPr>
+          <a:lstStyle/>
+          <a:p>
+            <a:pPr algn="ctr">
+              <a:lnSpc>
+                <a:spcPct val="112000"/>
+              </a:lnSpc>
+            </a:pPr>
+            <a:r>
+              <a:rPr sz="1500" b="0">
+                <a:solidFill>
+                  <a:srgbClr val="555555"/>
+                </a:solidFill>
+                <a:latin typeface="Arial"/>
+                <a:ea typeface="Arial"/>
+              </a:rPr>
+              <a:t>÷</a:t>
+            </a:r>
+          </a:p>
+        </p:txBody>
+      </p:sp>
+      <p:sp>
+        <p:nvSpPr>
+          <p:cNvPr id="23" name="Rectangle 22"/>
           <p:cNvSpPr/>
           <p:nvPr/>
         </p:nvSpPr>
         <p:spPr>
           <a:xfrm>
-            <a:off x="12032118" y="4389120"/>
-            <a:ext cx="5277473" cy="365760"/>
+            <a:off x="15256071" y="3035808"/>
+            <a:ext cx="932688" cy="420624"/>
           </a:xfrm>
           <a:prstGeom prst="rect">
             <a:avLst/>
           </a:prstGeom>
           <a:solidFill>
-            <a:srgbClr val="F4F6FC"/>
+            <a:srgbClr val="1428A0"/>
           </a:solidFill>
-          <a:ln w="9525">
-            <a:solidFill>
-              <a:srgbClr val="D9D9D9"/>
-            </a:solidFill>
+          <a:ln>
+            <a:noFill/>
           </a:ln>
           <a:effectLst/>
         </p:spPr>
@@ -4282,14 +4406,14 @@
       </p:sp>
       <p:sp>
         <p:nvSpPr>
-          <p:cNvPr id="21" name="TextBox 20"/>
+          <p:cNvPr id="24" name="TextBox 23"/>
           <p:cNvSpPr txBox="1"/>
           <p:nvPr/>
         </p:nvSpPr>
         <p:spPr>
           <a:xfrm>
-            <a:off x="12141846" y="4389120"/>
-            <a:ext cx="1572768" cy="365760"/>
+            <a:off x="15256071" y="3035808"/>
+            <a:ext cx="932688" cy="420624"/>
           </a:xfrm>
           <a:prstGeom prst="rect">
             <a:avLst/>
@@ -4302,34 +4426,34 @@
           </a:bodyPr>
           <a:lstStyle/>
           <a:p>
-            <a:pPr algn="l">
+            <a:pPr algn="ctr">
               <a:lnSpc>
                 <a:spcPct val="112000"/>
               </a:lnSpc>
             </a:pPr>
             <a:r>
-              <a:rPr sz="1125" b="1">
+              <a:rPr sz="1350" b="1">
                 <a:solidFill>
-                  <a:srgbClr val="1A1A1A"/>
+                  <a:srgbClr val="FFFFFF"/>
                 </a:solidFill>
                 <a:latin typeface="Arial"/>
                 <a:ea typeface="Arial"/>
               </a:rPr>
-              <a:t>패키지 · 모듈</a:t>
-            </a:r>
-          </a:p>
-        </p:txBody>
-      </p:sp>
-      <p:sp>
-        <p:nvSpPr>
-          <p:cNvPr id="22" name="TextBox 21"/>
+              <a:t>WAF</a:t>
+            </a:r>
+          </a:p>
+        </p:txBody>
+      </p:sp>
+      <p:sp>
+        <p:nvSpPr>
+          <p:cNvPr id="25" name="TextBox 24"/>
           <p:cNvSpPr txBox="1"/>
           <p:nvPr/>
         </p:nvSpPr>
         <p:spPr>
           <a:xfrm>
-            <a:off x="13732902" y="4389120"/>
-            <a:ext cx="3485249" cy="365760"/>
+            <a:off x="15164631" y="3493008"/>
+            <a:ext cx="1115568" cy="201168"/>
           </a:xfrm>
           <a:prstGeom prst="rect">
             <a:avLst/>
@@ -4337,39 +4461,79 @@
           <a:noFill/>
         </p:spPr>
         <p:txBody>
-          <a:bodyPr wrap="square" anchor="ctr" lIns="0" rIns="0" tIns="0" bIns="0">
+          <a:bodyPr wrap="square" anchor="t" lIns="0" rIns="0" tIns="0" bIns="0">
             <a:spAutoFit/>
           </a:bodyPr>
           <a:lstStyle/>
           <a:p>
-            <a:pPr algn="l">
+            <a:pPr algn="ctr">
               <a:lnSpc>
                 <a:spcPct val="112000"/>
               </a:lnSpc>
             </a:pPr>
             <a:r>
-              <a:rPr sz="975" b="0">
+              <a:rPr sz="975" b="1">
+                <a:solidFill>
+                  <a:srgbClr val="1428A0"/>
+                </a:solidFill>
+                <a:latin typeface="Arial"/>
+                <a:ea typeface="Arial"/>
+              </a:rPr>
+              <a:t>호스트 · 앱</a:t>
+            </a:r>
+          </a:p>
+        </p:txBody>
+      </p:sp>
+      <p:sp>
+        <p:nvSpPr>
+          <p:cNvPr id="26" name="TextBox 25"/>
+          <p:cNvSpPr txBox="1"/>
+          <p:nvPr/>
+        </p:nvSpPr>
+        <p:spPr>
+          <a:xfrm>
+            <a:off x="16243623" y="3035808"/>
+            <a:ext cx="237744" cy="420624"/>
+          </a:xfrm>
+          <a:prstGeom prst="rect">
+            <a:avLst/>
+          </a:prstGeom>
+          <a:noFill/>
+        </p:spPr>
+        <p:txBody>
+          <a:bodyPr wrap="square" anchor="ctr" lIns="0" rIns="0" tIns="0" bIns="0">
+            <a:spAutoFit/>
+          </a:bodyPr>
+          <a:lstStyle/>
+          <a:p>
+            <a:pPr algn="ctr">
+              <a:lnSpc>
+                <a:spcPct val="112000"/>
+              </a:lnSpc>
+            </a:pPr>
+            <a:r>
+              <a:rPr sz="1500" b="0">
                 <a:solidFill>
                   <a:srgbClr val="555555"/>
                 </a:solidFill>
                 <a:latin typeface="Arial"/>
                 <a:ea typeface="Arial"/>
               </a:rPr>
-              <a:t>HBM 2013 · MRDIMM 2024 · HBF 2026</a:t>
-            </a:r>
-          </a:p>
-        </p:txBody>
-      </p:sp>
-      <p:sp>
-        <p:nvSpPr>
-          <p:cNvPr id="23" name="Rectangle 22"/>
+              <a:t>÷</a:t>
+            </a:r>
+          </a:p>
+        </p:txBody>
+      </p:sp>
+      <p:sp>
+        <p:nvSpPr>
+          <p:cNvPr id="27" name="Rectangle 26"/>
           <p:cNvSpPr/>
           <p:nvPr/>
         </p:nvSpPr>
         <p:spPr>
           <a:xfrm>
-            <a:off x="12032118" y="4828032"/>
-            <a:ext cx="5277473" cy="365760"/>
+            <a:off x="16536231" y="3035808"/>
+            <a:ext cx="932688" cy="420624"/>
           </a:xfrm>
           <a:prstGeom prst="rect">
             <a:avLst/>
@@ -4377,9 +4541,9 @@
           <a:solidFill>
             <a:srgbClr val="F4F6FC"/>
           </a:solidFill>
-          <a:ln w="9525">
+          <a:ln w="12700">
             <a:solidFill>
-              <a:srgbClr val="D9D9D9"/>
+              <a:srgbClr val="AAB8E8"/>
             </a:solidFill>
           </a:ln>
           <a:effectLst/>
@@ -4408,14 +4572,14 @@
       </p:sp>
       <p:sp>
         <p:nvSpPr>
-          <p:cNvPr id="24" name="TextBox 23"/>
+          <p:cNvPr id="28" name="TextBox 27"/>
           <p:cNvSpPr txBox="1"/>
           <p:nvPr/>
         </p:nvSpPr>
         <p:spPr>
           <a:xfrm>
-            <a:off x="12141846" y="4828032"/>
-            <a:ext cx="1572768" cy="365760"/>
+            <a:off x="16536231" y="3035808"/>
+            <a:ext cx="932688" cy="420624"/>
           </a:xfrm>
           <a:prstGeom prst="rect">
             <a:avLst/>
@@ -4428,34 +4592,34 @@
           </a:bodyPr>
           <a:lstStyle/>
           <a:p>
-            <a:pPr algn="l">
+            <a:pPr algn="ctr">
               <a:lnSpc>
                 <a:spcPct val="112000"/>
               </a:lnSpc>
             </a:pPr>
             <a:r>
-              <a:rPr sz="1125" b="1">
+              <a:rPr sz="1350" b="1">
                 <a:solidFill>
                   <a:srgbClr val="1A1A1A"/>
                 </a:solidFill>
                 <a:latin typeface="Arial"/>
                 <a:ea typeface="Arial"/>
               </a:rPr>
-              <a:t>셀 · 다이</a:t>
-            </a:r>
-          </a:p>
-        </p:txBody>
-      </p:sp>
-      <p:sp>
-        <p:nvSpPr>
-          <p:cNvPr id="25" name="TextBox 24"/>
+              <a:t>365 × 년</a:t>
+            </a:r>
+          </a:p>
+        </p:txBody>
+      </p:sp>
+      <p:sp>
+        <p:nvSpPr>
+          <p:cNvPr id="29" name="TextBox 28"/>
           <p:cNvSpPr txBox="1"/>
           <p:nvPr/>
         </p:nvSpPr>
         <p:spPr>
           <a:xfrm>
-            <a:off x="13732902" y="4828032"/>
-            <a:ext cx="3485249" cy="365760"/>
+            <a:off x="16444791" y="3493008"/>
+            <a:ext cx="1115568" cy="201168"/>
           </a:xfrm>
           <a:prstGeom prst="rect">
             <a:avLst/>
@@ -4463,48 +4627,110 @@
           <a:noFill/>
         </p:spPr>
         <p:txBody>
-          <a:bodyPr wrap="square" anchor="ctr" lIns="0" rIns="0" tIns="0" bIns="0">
+          <a:bodyPr wrap="square" anchor="t" lIns="0" rIns="0" tIns="0" bIns="0">
             <a:spAutoFit/>
           </a:bodyPr>
           <a:lstStyle/>
           <a:p>
-            <a:pPr algn="l">
+            <a:pPr algn="ctr">
               <a:lnSpc>
                 <a:spcPct val="112000"/>
               </a:lnSpc>
             </a:pPr>
             <a:r>
               <a:rPr sz="975" b="0">
+                <a:solidFill>
+                  <a:srgbClr val="8A8A8A"/>
+                </a:solidFill>
+                <a:latin typeface="Arial"/>
+                <a:ea typeface="Arial"/>
+              </a:rPr>
+              <a:t>고객 요구</a:t>
+            </a:r>
+          </a:p>
+        </p:txBody>
+      </p:sp>
+      <p:sp>
+        <p:nvSpPr>
+          <p:cNvPr id="30" name="TextBox 29"/>
+          <p:cNvSpPr txBox="1"/>
+          <p:nvPr/>
+        </p:nvSpPr>
+        <p:spPr>
+          <a:xfrm>
+            <a:off x="11556630" y="3749039"/>
+            <a:ext cx="5771249" cy="274320"/>
+          </a:xfrm>
+          <a:prstGeom prst="rect">
+            <a:avLst/>
+          </a:prstGeom>
+          <a:noFill/>
+        </p:spPr>
+        <p:txBody>
+          <a:bodyPr wrap="square" anchor="t" lIns="0" rIns="0" tIns="0" bIns="0">
+            <a:spAutoFit/>
+          </a:bodyPr>
+          <a:lstStyle/>
+          <a:p>
+            <a:pPr algn="l">
+              <a:lnSpc>
+                <a:spcPct val="100000"/>
+              </a:lnSpc>
+            </a:pPr>
+            <a:r>
+              <a:rPr sz="1050" b="0">
                 <a:solidFill>
                   <a:srgbClr val="555555"/>
                 </a:solidFill>
                 <a:latin typeface="Arial"/>
                 <a:ea typeface="Arial"/>
               </a:rPr>
-              <a:t>3D 2013 · QLC 2018 · on-die ECC 2020</a:t>
-            </a:r>
-          </a:p>
-        </p:txBody>
-      </p:sp>
-      <p:sp>
-        <p:nvSpPr>
-          <p:cNvPr id="26" name="Up Arrow 25"/>
+              <a:t>P/E가 100배 줄었으니 요구 DWPD를 지킬 변수는 </a:t>
+            </a:r>
+            <a:r>
+              <a:rPr sz="1050" b="1">
+                <a:solidFill>
+                  <a:srgbClr val="1428A0"/>
+                </a:solidFill>
+                <a:latin typeface="Arial"/>
+                <a:ea typeface="Arial"/>
+              </a:rPr>
+              <a:t>WAF</a:t>
+            </a:r>
+            <a:r>
+              <a:rPr sz="1050" b="0">
+                <a:solidFill>
+                  <a:srgbClr val="555555"/>
+                </a:solidFill>
+                <a:latin typeface="Arial"/>
+                <a:ea typeface="Arial"/>
+              </a:rPr>
+              <a:t>뿐이고, WAF는 호스트가 데이터 수명을 알려 줄 때만 1에 수렴합니다</a:t>
+            </a:r>
+          </a:p>
+        </p:txBody>
+      </p:sp>
+      <p:sp>
+        <p:nvSpPr>
+          <p:cNvPr id="31" name="Rectangle 30"/>
           <p:cNvSpPr/>
           <p:nvPr/>
         </p:nvSpPr>
         <p:spPr>
           <a:xfrm>
-            <a:off x="11593206" y="3072384"/>
-            <a:ext cx="310896" cy="1243584"/>
-          </a:xfrm>
-          <a:prstGeom prst="upArrow">
+            <a:off x="11318886" y="4297679"/>
+            <a:ext cx="6246737" cy="4133088"/>
+          </a:xfrm>
+          <a:prstGeom prst="rect">
             <a:avLst/>
           </a:prstGeom>
           <a:solidFill>
-            <a:srgbClr val="1428A0"/>
+            <a:srgbClr val="FFFFFF"/>
           </a:solidFill>
-          <a:ln>
-            <a:noFill/>
+          <a:ln w="9525">
+            <a:solidFill>
+              <a:srgbClr val="D9D9D9"/>
+            </a:solidFill>
           </a:ln>
           <a:effectLst/>
         </p:spPr>
@@ -4532,23 +4758,105 @@
       </p:sp>
       <p:sp>
         <p:nvSpPr>
-          <p:cNvPr id="27" name="Right Arrow 26"/>
+          <p:cNvPr id="32" name="TextBox 31"/>
+          <p:cNvSpPr txBox="1"/>
+          <p:nvPr/>
+        </p:nvSpPr>
+        <p:spPr>
+          <a:xfrm>
+            <a:off x="11556630" y="4407407"/>
+            <a:ext cx="5771249" cy="256032"/>
+          </a:xfrm>
+          <a:prstGeom prst="rect">
+            <a:avLst/>
+          </a:prstGeom>
+          <a:noFill/>
+        </p:spPr>
+        <p:txBody>
+          <a:bodyPr wrap="square" anchor="t" lIns="0" rIns="0" tIns="0" bIns="0">
+            <a:spAutoFit/>
+          </a:bodyPr>
+          <a:lstStyle/>
+          <a:p>
+            <a:pPr algn="l">
+              <a:lnSpc>
+                <a:spcPct val="112000"/>
+              </a:lnSpc>
+            </a:pPr>
+            <a:r>
+              <a:rPr sz="1500" b="1">
+                <a:solidFill>
+                  <a:srgbClr val="1428A0"/>
+                </a:solidFill>
+                <a:latin typeface="Arial"/>
+                <a:ea typeface="Arial"/>
+              </a:rPr>
+              <a:t>두 단계의 대칭 — 요구는 고정, 단품은 악화, 상위 계층이 메운다</a:t>
+            </a:r>
+          </a:p>
+        </p:txBody>
+      </p:sp>
+      <p:sp>
+        <p:nvSpPr>
+          <p:cNvPr id="33" name="TextBox 32"/>
+          <p:cNvSpPr txBox="1"/>
+          <p:nvPr/>
+        </p:nvSpPr>
+        <p:spPr>
+          <a:xfrm>
+            <a:off x="11556630" y="4809744"/>
+            <a:ext cx="5771249" cy="219456"/>
+          </a:xfrm>
+          <a:prstGeom prst="rect">
+            <a:avLst/>
+          </a:prstGeom>
+          <a:noFill/>
+        </p:spPr>
+        <p:txBody>
+          <a:bodyPr wrap="square" anchor="t" lIns="0" rIns="0" tIns="0" bIns="0">
+            <a:spAutoFit/>
+          </a:bodyPr>
+          <a:lstStyle/>
+          <a:p>
+            <a:pPr algn="l">
+              <a:lnSpc>
+                <a:spcPct val="112000"/>
+              </a:lnSpc>
+            </a:pPr>
+            <a:r>
+              <a:rPr sz="1125" b="1">
+                <a:solidFill>
+                  <a:srgbClr val="1A1A1A"/>
+                </a:solidFill>
+                <a:latin typeface="Arial"/>
+                <a:ea typeface="Arial"/>
+              </a:rPr>
+              <a:t>1단계  NAND → SSD  (1991~)</a:t>
+            </a:r>
+          </a:p>
+        </p:txBody>
+      </p:sp>
+      <p:sp>
+        <p:nvSpPr>
+          <p:cNvPr id="34" name="Rectangle 33"/>
           <p:cNvSpPr/>
           <p:nvPr/>
         </p:nvSpPr>
         <p:spPr>
           <a:xfrm>
-            <a:off x="11593206" y="4535424"/>
-            <a:ext cx="310896" cy="512064"/>
-          </a:xfrm>
-          <a:prstGeom prst="rightArrow">
+            <a:off x="11556630" y="5102352"/>
+            <a:ext cx="1716485" cy="713232"/>
+          </a:xfrm>
+          <a:prstGeom prst="rect">
             <a:avLst/>
           </a:prstGeom>
           <a:solidFill>
-            <a:srgbClr val="AAB8E8"/>
+            <a:srgbClr val="FFFFFF"/>
           </a:solidFill>
-          <a:ln>
-            <a:noFill/>
+          <a:ln w="9525">
+            <a:solidFill>
+              <a:srgbClr val="D9D9D9"/>
+            </a:solidFill>
           </a:ln>
           <a:effectLst/>
         </p:spPr>
@@ -4576,14 +4884,14 @@
       </p:sp>
       <p:sp>
         <p:nvSpPr>
-          <p:cNvPr id="28" name="TextBox 27"/>
+          <p:cNvPr id="35" name="TextBox 34"/>
           <p:cNvSpPr txBox="1"/>
           <p:nvPr/>
         </p:nvSpPr>
         <p:spPr>
           <a:xfrm>
-            <a:off x="11593206" y="4334255"/>
-            <a:ext cx="5716385" cy="0"/>
+            <a:off x="11648070" y="5175504"/>
+            <a:ext cx="1533605" cy="237744"/>
           </a:xfrm>
           <a:prstGeom prst="rect">
             <a:avLst/>
@@ -4602,28 +4910,28 @@
               </a:lnSpc>
             </a:pPr>
             <a:r>
-              <a:rPr sz="100" b="0">
+              <a:rPr sz="1050" b="0">
                 <a:solidFill>
-                  <a:srgbClr val="555555"/>
+                  <a:srgbClr val="8A8A8A"/>
                 </a:solidFill>
                 <a:latin typeface="Arial"/>
                 <a:ea typeface="Arial"/>
               </a:rPr>
-              <a:t/>
-            </a:r>
-          </a:p>
-        </p:txBody>
-      </p:sp>
-      <p:sp>
-        <p:nvSpPr>
-          <p:cNvPr id="29" name="TextBox 28"/>
+              <a:t>셀</a:t>
+            </a:r>
+          </a:p>
+        </p:txBody>
+      </p:sp>
+      <p:sp>
+        <p:nvSpPr>
+          <p:cNvPr id="36" name="TextBox 35"/>
           <p:cNvSpPr txBox="1"/>
           <p:nvPr/>
         </p:nvSpPr>
         <p:spPr>
           <a:xfrm>
-            <a:off x="11593206" y="5230368"/>
-            <a:ext cx="5716385" cy="329184"/>
+            <a:off x="11648070" y="5413248"/>
+            <a:ext cx="1533605" cy="329184"/>
           </a:xfrm>
           <a:prstGeom prst="rect">
             <a:avLst/>
@@ -4642,69 +4950,37 @@
               </a:lnSpc>
             </a:pPr>
             <a:r>
-              <a:rPr sz="1050" b="1">
+              <a:rPr sz="1200" b="1">
                 <a:solidFill>
-                  <a:srgbClr val="1428A0"/>
+                  <a:srgbClr val="1A1A1A"/>
                 </a:solidFill>
                 <a:latin typeface="Arial"/>
                 <a:ea typeface="Arial"/>
               </a:rPr>
-              <a:t>① 이관 </a:t>
-            </a:r>
-            <a:r>
-              <a:rPr sz="1050" b="0">
-                <a:solidFill>
-                  <a:srgbClr val="555555"/>
-                </a:solidFill>
-                <a:latin typeface="Arial"/>
-                <a:ea typeface="Arial"/>
-              </a:rPr>
-              <a:t>관리 로직이 필요한 한계 → 위로   </a:t>
-            </a:r>
-            <a:r>
-              <a:rPr sz="1050" b="1">
-                <a:solidFill>
-                  <a:srgbClr val="1428A0"/>
-                </a:solidFill>
-                <a:latin typeface="Arial"/>
-                <a:ea typeface="Arial"/>
-              </a:rPr>
-              <a:t>② 자기 진화 </a:t>
-            </a:r>
-            <a:r>
-              <a:rPr sz="1050" b="0">
-                <a:solidFill>
-                  <a:srgbClr val="555555"/>
-                </a:solidFill>
-                <a:latin typeface="Arial"/>
-                <a:ea typeface="Arial"/>
-              </a:rPr>
-              <a:t>물리 집적으로 풀리는 한계</a:t>
-            </a:r>
-          </a:p>
-        </p:txBody>
-      </p:sp>
-      <p:sp>
-        <p:nvSpPr>
-          <p:cNvPr id="30" name="Rectangle 29"/>
+              <a:t>RBER 백만 배 ↑</a:t>
+            </a:r>
+          </a:p>
+        </p:txBody>
+      </p:sp>
+      <p:sp>
+        <p:nvSpPr>
+          <p:cNvPr id="37" name="Right Arrow 36"/>
           <p:cNvSpPr/>
           <p:nvPr/>
         </p:nvSpPr>
         <p:spPr>
           <a:xfrm>
-            <a:off x="11337174" y="5760720"/>
-            <a:ext cx="6228449" cy="676656"/>
-          </a:xfrm>
-          <a:prstGeom prst="rect">
+            <a:off x="13318836" y="5367528"/>
+            <a:ext cx="219456" cy="182880"/>
+          </a:xfrm>
+          <a:prstGeom prst="rightArrow">
             <a:avLst/>
           </a:prstGeom>
           <a:solidFill>
-            <a:srgbClr val="FFFFFF"/>
+            <a:srgbClr val="1428A0"/>
           </a:solidFill>
-          <a:ln w="9525">
-            <a:solidFill>
-              <a:srgbClr val="D9D9D9"/>
-            </a:solidFill>
+          <a:ln>
+            <a:noFill/>
           </a:ln>
           <a:effectLst/>
         </p:spPr>
@@ -4732,105 +5008,23 @@
       </p:sp>
       <p:sp>
         <p:nvSpPr>
-          <p:cNvPr id="31" name="TextBox 30"/>
-          <p:cNvSpPr txBox="1"/>
-          <p:nvPr/>
-        </p:nvSpPr>
-        <p:spPr>
-          <a:xfrm>
-            <a:off x="11593206" y="5760720"/>
-            <a:ext cx="1737360" cy="676656"/>
-          </a:xfrm>
-          <a:prstGeom prst="rect">
-            <a:avLst/>
-          </a:prstGeom>
-          <a:noFill/>
-        </p:spPr>
-        <p:txBody>
-          <a:bodyPr wrap="square" anchor="ctr" lIns="0" rIns="0" tIns="0" bIns="0">
-            <a:spAutoFit/>
-          </a:bodyPr>
-          <a:lstStyle/>
-          <a:p>
-            <a:pPr algn="l">
-              <a:lnSpc>
-                <a:spcPct val="112000"/>
-              </a:lnSpc>
-            </a:pPr>
-            <a:r>
-              <a:rPr sz="2400" b="1">
-                <a:solidFill>
-                  <a:srgbClr val="1428A0"/>
-                </a:solidFill>
-                <a:latin typeface="Arial"/>
-                <a:ea typeface="Arial"/>
-              </a:rPr>
-              <a:t>31년</a:t>
-            </a:r>
-          </a:p>
-        </p:txBody>
-      </p:sp>
-      <p:sp>
-        <p:nvSpPr>
-          <p:cNvPr id="32" name="TextBox 31"/>
-          <p:cNvSpPr txBox="1"/>
-          <p:nvPr/>
-        </p:nvSpPr>
-        <p:spPr>
-          <a:xfrm>
-            <a:off x="13348854" y="5760720"/>
-            <a:ext cx="3997313" cy="676656"/>
-          </a:xfrm>
-          <a:prstGeom prst="rect">
-            <a:avLst/>
-          </a:prstGeom>
-          <a:noFill/>
-        </p:spPr>
-        <p:txBody>
-          <a:bodyPr wrap="square" anchor="ctr" lIns="0" rIns="0" tIns="0" bIns="0">
-            <a:spAutoFit/>
-          </a:bodyPr>
-          <a:lstStyle/>
-          <a:p>
-            <a:pPr algn="l">
-              <a:lnSpc>
-                <a:spcPct val="104000"/>
-              </a:lnSpc>
-            </a:pPr>
-            <a:r>
-              <a:rPr sz="1125" b="0">
-                <a:solidFill>
-                  <a:srgbClr val="555555"/>
-                </a:solidFill>
-                <a:latin typeface="Arial"/>
-                <a:ea typeface="Arial"/>
-              </a:rPr>
-              <a:t>NAND 이관 소요: 디바이스(1991) → 호스트 FDP(2022)</a:t>
-            </a:r>
-          </a:p>
-        </p:txBody>
-      </p:sp>
-      <p:sp>
-        <p:nvSpPr>
-          <p:cNvPr id="33" name="Rectangle 32"/>
+          <p:cNvPr id="38" name="Rectangle 37"/>
           <p:cNvSpPr/>
           <p:nvPr/>
         </p:nvSpPr>
         <p:spPr>
           <a:xfrm>
-            <a:off x="11337174" y="6528816"/>
-            <a:ext cx="6228449" cy="676656"/>
+            <a:off x="13584012" y="5102352"/>
+            <a:ext cx="1716485" cy="713232"/>
           </a:xfrm>
           <a:prstGeom prst="rect">
             <a:avLst/>
           </a:prstGeom>
           <a:solidFill>
-            <a:srgbClr val="FFFFFF"/>
+            <a:srgbClr val="1428A0"/>
           </a:solidFill>
-          <a:ln w="9525">
-            <a:solidFill>
-              <a:srgbClr val="D9D9D9"/>
-            </a:solidFill>
+          <a:ln>
+            <a:noFill/>
           </a:ln>
           <a:effectLst/>
         </p:spPr>
@@ -4858,14 +5052,14 @@
       </p:sp>
       <p:sp>
         <p:nvSpPr>
-          <p:cNvPr id="34" name="TextBox 33"/>
+          <p:cNvPr id="39" name="TextBox 38"/>
           <p:cNvSpPr txBox="1"/>
           <p:nvPr/>
         </p:nvSpPr>
         <p:spPr>
           <a:xfrm>
-            <a:off x="11593206" y="6528816"/>
-            <a:ext cx="1737360" cy="676656"/>
+            <a:off x="13675452" y="5175504"/>
+            <a:ext cx="1533605" cy="237744"/>
           </a:xfrm>
           <a:prstGeom prst="rect">
             <a:avLst/>
@@ -4873,7 +5067,7 @@
           <a:noFill/>
         </p:spPr>
         <p:txBody>
-          <a:bodyPr wrap="square" anchor="ctr" lIns="0" rIns="0" tIns="0" bIns="0">
+          <a:bodyPr wrap="square" anchor="t" lIns="0" rIns="0" tIns="0" bIns="0">
             <a:spAutoFit/>
           </a:bodyPr>
           <a:lstStyle/>
@@ -4884,28 +5078,28 @@
               </a:lnSpc>
             </a:pPr>
             <a:r>
-              <a:rPr sz="2400" b="1">
+              <a:rPr sz="1050" b="0">
                 <a:solidFill>
-                  <a:srgbClr val="1428A0"/>
+                  <a:srgbClr val="FFFFFF"/>
                 </a:solidFill>
                 <a:latin typeface="Arial"/>
                 <a:ea typeface="Arial"/>
               </a:rPr>
-              <a:t>6년</a:t>
-            </a:r>
-          </a:p>
-        </p:txBody>
-      </p:sp>
-      <p:sp>
-        <p:nvSpPr>
-          <p:cNvPr id="35" name="TextBox 34"/>
+              <a:t>컨트롤러</a:t>
+            </a:r>
+          </a:p>
+        </p:txBody>
+      </p:sp>
+      <p:sp>
+        <p:nvSpPr>
+          <p:cNvPr id="40" name="TextBox 39"/>
           <p:cNvSpPr txBox="1"/>
           <p:nvPr/>
         </p:nvSpPr>
         <p:spPr>
           <a:xfrm>
-            <a:off x="13348854" y="6528816"/>
-            <a:ext cx="3997313" cy="676656"/>
+            <a:off x="13675452" y="5413248"/>
+            <a:ext cx="1533605" cy="329184"/>
           </a:xfrm>
           <a:prstGeom prst="rect">
             <a:avLst/>
@@ -4920,38 +5114,38 @@
           <a:p>
             <a:pPr algn="l">
               <a:lnSpc>
-                <a:spcPct val="104000"/>
+                <a:spcPct val="112000"/>
               </a:lnSpc>
             </a:pPr>
             <a:r>
-              <a:rPr sz="1125" b="0">
+              <a:rPr sz="1200" b="1">
                 <a:solidFill>
-                  <a:srgbClr val="555555"/>
+                  <a:srgbClr val="FFFFFF"/>
                 </a:solidFill>
                 <a:latin typeface="Arial"/>
                 <a:ea typeface="Arial"/>
               </a:rPr>
-              <a:t>DRAM은 자기 진화(HBM 2013)가 시스템 해법(CXL 2019)보다 앞섰다</a:t>
-            </a:r>
-          </a:p>
-        </p:txBody>
-      </p:sp>
-      <p:sp>
-        <p:nvSpPr>
-          <p:cNvPr id="36" name="Rectangle 35"/>
+              <a:t>ECC 60배 ↑</a:t>
+            </a:r>
+          </a:p>
+        </p:txBody>
+      </p:sp>
+      <p:sp>
+        <p:nvSpPr>
+          <p:cNvPr id="41" name="Right Arrow 40"/>
           <p:cNvSpPr/>
           <p:nvPr/>
         </p:nvSpPr>
         <p:spPr>
           <a:xfrm>
-            <a:off x="11337174" y="7296912"/>
-            <a:ext cx="6228449" cy="676656"/>
-          </a:xfrm>
-          <a:prstGeom prst="rect">
+            <a:off x="15346218" y="5367528"/>
+            <a:ext cx="219456" cy="182880"/>
+          </a:xfrm>
+          <a:prstGeom prst="rightArrow">
             <a:avLst/>
           </a:prstGeom>
           <a:solidFill>
-            <a:srgbClr val="F4F6FC"/>
+            <a:srgbClr val="1428A0"/>
           </a:solidFill>
           <a:ln>
             <a:noFill/>
@@ -4982,23 +5176,25 @@
       </p:sp>
       <p:sp>
         <p:nvSpPr>
-          <p:cNvPr id="37" name="Rectangle 36"/>
+          <p:cNvPr id="42" name="Rectangle 41"/>
           <p:cNvSpPr/>
           <p:nvPr/>
         </p:nvSpPr>
         <p:spPr>
           <a:xfrm>
-            <a:off x="11337174" y="7296912"/>
-            <a:ext cx="73152" cy="676656"/>
+            <a:off x="15611394" y="5102352"/>
+            <a:ext cx="1716485" cy="713232"/>
           </a:xfrm>
           <a:prstGeom prst="rect">
             <a:avLst/>
           </a:prstGeom>
           <a:solidFill>
-            <a:srgbClr val="1428A0"/>
+            <a:srgbClr val="F4F6FC"/>
           </a:solidFill>
-          <a:ln>
-            <a:noFill/>
+          <a:ln w="12700">
+            <a:solidFill>
+              <a:srgbClr val="AAB8E8"/>
+            </a:solidFill>
           </a:ln>
           <a:effectLst/>
         </p:spPr>
@@ -5026,14 +5222,14 @@
       </p:sp>
       <p:sp>
         <p:nvSpPr>
-          <p:cNvPr id="38" name="TextBox 37"/>
+          <p:cNvPr id="43" name="TextBox 42"/>
           <p:cNvSpPr txBox="1"/>
           <p:nvPr/>
         </p:nvSpPr>
         <p:spPr>
           <a:xfrm>
-            <a:off x="11593206" y="7296912"/>
-            <a:ext cx="1737360" cy="676656"/>
+            <a:off x="15702834" y="5175504"/>
+            <a:ext cx="1533605" cy="237744"/>
           </a:xfrm>
           <a:prstGeom prst="rect">
             <a:avLst/>
@@ -5041,7 +5237,7 @@
           <a:noFill/>
         </p:spPr>
         <p:txBody>
-          <a:bodyPr wrap="square" anchor="ctr" lIns="0" rIns="0" tIns="0" bIns="0">
+          <a:bodyPr wrap="square" anchor="t" lIns="0" rIns="0" tIns="0" bIns="0">
             <a:spAutoFit/>
           </a:bodyPr>
           <a:lstStyle/>
@@ -5049,86 +5245,6 @@
             <a:pPr algn="l">
               <a:lnSpc>
                 <a:spcPct val="112000"/>
-              </a:lnSpc>
-            </a:pPr>
-            <a:r>
-              <a:rPr sz="2400" b="1">
-                <a:solidFill>
-                  <a:srgbClr val="1428A0"/>
-                </a:solidFill>
-                <a:latin typeface="Arial"/>
-                <a:ea typeface="Arial"/>
-              </a:rPr>
-              <a:t>10~40배</a:t>
-            </a:r>
-          </a:p>
-        </p:txBody>
-      </p:sp>
-      <p:sp>
-        <p:nvSpPr>
-          <p:cNvPr id="39" name="TextBox 38"/>
-          <p:cNvSpPr txBox="1"/>
-          <p:nvPr/>
-        </p:nvSpPr>
-        <p:spPr>
-          <a:xfrm>
-            <a:off x="13348854" y="7296912"/>
-            <a:ext cx="3997313" cy="676656"/>
-          </a:xfrm>
-          <a:prstGeom prst="rect">
-            <a:avLst/>
-          </a:prstGeom>
-          <a:noFill/>
-        </p:spPr>
-        <p:txBody>
-          <a:bodyPr wrap="square" anchor="ctr" lIns="0" rIns="0" tIns="0" bIns="0">
-            <a:spAutoFit/>
-          </a:bodyPr>
-          <a:lstStyle/>
-          <a:p>
-            <a:pPr algn="l">
-              <a:lnSpc>
-                <a:spcPct val="104000"/>
-              </a:lnSpc>
-            </a:pPr>
-            <a:r>
-              <a:rPr sz="1125" b="0">
-                <a:solidFill>
-                  <a:srgbClr val="555555"/>
-                </a:solidFill>
-                <a:latin typeface="Arial"/>
-                <a:ea typeface="Arial"/>
-              </a:rPr>
-              <a:t>QLC 정격 DWPD 갭 = 다음 칸(호스트·애플리케이션)이 필요한 이유</a:t>
-            </a:r>
-          </a:p>
-        </p:txBody>
-      </p:sp>
-      <p:sp>
-        <p:nvSpPr>
-          <p:cNvPr id="40" name="TextBox 39"/>
-          <p:cNvSpPr txBox="1"/>
-          <p:nvPr/>
-        </p:nvSpPr>
-        <p:spPr>
-          <a:xfrm>
-            <a:off x="11337174" y="8083296"/>
-            <a:ext cx="6228449" cy="420624"/>
-          </a:xfrm>
-          <a:prstGeom prst="rect">
-            <a:avLst/>
-          </a:prstGeom>
-          <a:noFill/>
-        </p:spPr>
-        <p:txBody>
-          <a:bodyPr wrap="square" anchor="t" lIns="0" rIns="0" tIns="0" bIns="0">
-            <a:spAutoFit/>
-          </a:bodyPr>
-          <a:lstStyle/>
-          <a:p>
-            <a:pPr algn="l">
-              <a:lnSpc>
-                <a:spcPct val="104000"/>
               </a:lnSpc>
             </a:pPr>
             <a:r>
@@ -5139,30 +5255,112 @@
                 <a:latin typeface="Arial"/>
                 <a:ea typeface="Arial"/>
               </a:rPr>
-              <a:t>HBF는 시대 역행이 아니라 NAND 자기 진화 축의 늦은 도착이며, 상위 계층이 워크로드를 골라 주어야 성립합니다</a:t>
-            </a:r>
-          </a:p>
-        </p:txBody>
-      </p:sp>
-      <p:sp>
-        <p:nvSpPr>
-          <p:cNvPr id="41" name="Rectangle 40"/>
+              <a:t>고객</a:t>
+            </a:r>
+          </a:p>
+        </p:txBody>
+      </p:sp>
+      <p:sp>
+        <p:nvSpPr>
+          <p:cNvPr id="44" name="TextBox 43"/>
+          <p:cNvSpPr txBox="1"/>
+          <p:nvPr/>
+        </p:nvSpPr>
+        <p:spPr>
+          <a:xfrm>
+            <a:off x="15702834" y="5413248"/>
+            <a:ext cx="1533605" cy="329184"/>
+          </a:xfrm>
+          <a:prstGeom prst="rect">
+            <a:avLst/>
+          </a:prstGeom>
+          <a:noFill/>
+        </p:spPr>
+        <p:txBody>
+          <a:bodyPr wrap="square" anchor="ctr" lIns="0" rIns="0" tIns="0" bIns="0">
+            <a:spAutoFit/>
+          </a:bodyPr>
+          <a:lstStyle/>
+          <a:p>
+            <a:pPr algn="l">
+              <a:lnSpc>
+                <a:spcPct val="112000"/>
+              </a:lnSpc>
+            </a:pPr>
+            <a:r>
+              <a:rPr sz="1200" b="1">
+                <a:solidFill>
+                  <a:srgbClr val="1A1A1A"/>
+                </a:solidFill>
+                <a:latin typeface="Arial"/>
+                <a:ea typeface="Arial"/>
+              </a:rPr>
+              <a:t>UBER 요구 유지</a:t>
+            </a:r>
+          </a:p>
+        </p:txBody>
+      </p:sp>
+      <p:sp>
+        <p:nvSpPr>
+          <p:cNvPr id="45" name="TextBox 44"/>
+          <p:cNvSpPr txBox="1"/>
+          <p:nvPr/>
+        </p:nvSpPr>
+        <p:spPr>
+          <a:xfrm>
+            <a:off x="11556630" y="6053328"/>
+            <a:ext cx="5771249" cy="219456"/>
+          </a:xfrm>
+          <a:prstGeom prst="rect">
+            <a:avLst/>
+          </a:prstGeom>
+          <a:noFill/>
+        </p:spPr>
+        <p:txBody>
+          <a:bodyPr wrap="square" anchor="t" lIns="0" rIns="0" tIns="0" bIns="0">
+            <a:spAutoFit/>
+          </a:bodyPr>
+          <a:lstStyle/>
+          <a:p>
+            <a:pPr algn="l">
+              <a:lnSpc>
+                <a:spcPct val="112000"/>
+              </a:lnSpc>
+            </a:pPr>
+            <a:r>
+              <a:rPr sz="1125" b="1">
+                <a:solidFill>
+                  <a:srgbClr val="1A1A1A"/>
+                </a:solidFill>
+                <a:latin typeface="Arial"/>
+                <a:ea typeface="Arial"/>
+              </a:rPr>
+              <a:t>2단계  SSD → 호스트  (2022~)</a:t>
+            </a:r>
+          </a:p>
+        </p:txBody>
+      </p:sp>
+      <p:sp>
+        <p:nvSpPr>
+          <p:cNvPr id="46" name="Rectangle 45"/>
           <p:cNvSpPr/>
           <p:nvPr/>
         </p:nvSpPr>
         <p:spPr>
           <a:xfrm>
-            <a:off x="722376" y="8613648"/>
-            <a:ext cx="16843248" cy="731520"/>
+            <a:off x="11556630" y="6345936"/>
+            <a:ext cx="1716485" cy="713232"/>
           </a:xfrm>
           <a:prstGeom prst="rect">
             <a:avLst/>
           </a:prstGeom>
           <a:solidFill>
-            <a:srgbClr val="1428A0"/>
+            <a:srgbClr val="FFFFFF"/>
           </a:solidFill>
-          <a:ln>
-            <a:noFill/>
+          <a:ln w="9525">
+            <a:solidFill>
+              <a:srgbClr val="D9D9D9"/>
+            </a:solidFill>
           </a:ln>
           <a:effectLst/>
         </p:spPr>
@@ -5190,7 +5388,509 @@
       </p:sp>
       <p:sp>
         <p:nvSpPr>
-          <p:cNvPr id="42" name="TextBox 41"/>
+          <p:cNvPr id="47" name="TextBox 46"/>
+          <p:cNvSpPr txBox="1"/>
+          <p:nvPr/>
+        </p:nvSpPr>
+        <p:spPr>
+          <a:xfrm>
+            <a:off x="11648070" y="6419088"/>
+            <a:ext cx="1533605" cy="237744"/>
+          </a:xfrm>
+          <a:prstGeom prst="rect">
+            <a:avLst/>
+          </a:prstGeom>
+          <a:noFill/>
+        </p:spPr>
+        <p:txBody>
+          <a:bodyPr wrap="square" anchor="t" lIns="0" rIns="0" tIns="0" bIns="0">
+            <a:spAutoFit/>
+          </a:bodyPr>
+          <a:lstStyle/>
+          <a:p>
+            <a:pPr algn="l">
+              <a:lnSpc>
+                <a:spcPct val="112000"/>
+              </a:lnSpc>
+            </a:pPr>
+            <a:r>
+              <a:rPr sz="1050" b="0">
+                <a:solidFill>
+                  <a:srgbClr val="8A8A8A"/>
+                </a:solidFill>
+                <a:latin typeface="Arial"/>
+                <a:ea typeface="Arial"/>
+              </a:rPr>
+              <a:t>셀 · SSD</a:t>
+            </a:r>
+          </a:p>
+        </p:txBody>
+      </p:sp>
+      <p:sp>
+        <p:nvSpPr>
+          <p:cNvPr id="48" name="TextBox 47"/>
+          <p:cNvSpPr txBox="1"/>
+          <p:nvPr/>
+        </p:nvSpPr>
+        <p:spPr>
+          <a:xfrm>
+            <a:off x="11648070" y="6656832"/>
+            <a:ext cx="1533605" cy="329184"/>
+          </a:xfrm>
+          <a:prstGeom prst="rect">
+            <a:avLst/>
+          </a:prstGeom>
+          <a:noFill/>
+        </p:spPr>
+        <p:txBody>
+          <a:bodyPr wrap="square" anchor="ctr" lIns="0" rIns="0" tIns="0" bIns="0">
+            <a:spAutoFit/>
+          </a:bodyPr>
+          <a:lstStyle/>
+          <a:p>
+            <a:pPr algn="l">
+              <a:lnSpc>
+                <a:spcPct val="112000"/>
+              </a:lnSpc>
+            </a:pPr>
+            <a:r>
+              <a:rPr sz="1200" b="1">
+                <a:solidFill>
+                  <a:srgbClr val="1A1A1A"/>
+                </a:solidFill>
+                <a:latin typeface="Arial"/>
+                <a:ea typeface="Arial"/>
+              </a:rPr>
+              <a:t>P/E 100배 ↓, DWPD 0.4</a:t>
+            </a:r>
+          </a:p>
+        </p:txBody>
+      </p:sp>
+      <p:sp>
+        <p:nvSpPr>
+          <p:cNvPr id="49" name="Right Arrow 48"/>
+          <p:cNvSpPr/>
+          <p:nvPr/>
+        </p:nvSpPr>
+        <p:spPr>
+          <a:xfrm>
+            <a:off x="13318836" y="6611112"/>
+            <a:ext cx="219456" cy="182880"/>
+          </a:xfrm>
+          <a:prstGeom prst="rightArrow">
+            <a:avLst/>
+          </a:prstGeom>
+          <a:solidFill>
+            <a:srgbClr val="1428A0"/>
+          </a:solidFill>
+          <a:ln>
+            <a:noFill/>
+          </a:ln>
+          <a:effectLst/>
+        </p:spPr>
+        <p:style>
+          <a:lnRef idx="1">
+            <a:schemeClr val="accent1"/>
+          </a:lnRef>
+          <a:fillRef idx="3">
+            <a:schemeClr val="accent1"/>
+          </a:fillRef>
+          <a:effectRef idx="2">
+            <a:schemeClr val="accent1"/>
+          </a:effectRef>
+          <a:fontRef idx="minor">
+            <a:schemeClr val="lt1"/>
+          </a:fontRef>
+        </p:style>
+        <p:txBody>
+          <a:bodyPr rtlCol="0" anchor="ctr"/>
+          <a:lstStyle/>
+          <a:p>
+            <a:pPr algn="ctr"/>
+          </a:p>
+        </p:txBody>
+      </p:sp>
+      <p:sp>
+        <p:nvSpPr>
+          <p:cNvPr id="50" name="Rectangle 49"/>
+          <p:cNvSpPr/>
+          <p:nvPr/>
+        </p:nvSpPr>
+        <p:spPr>
+          <a:xfrm>
+            <a:off x="13584012" y="6345936"/>
+            <a:ext cx="1716485" cy="713232"/>
+          </a:xfrm>
+          <a:prstGeom prst="rect">
+            <a:avLst/>
+          </a:prstGeom>
+          <a:solidFill>
+            <a:srgbClr val="1428A0"/>
+          </a:solidFill>
+          <a:ln>
+            <a:noFill/>
+          </a:ln>
+          <a:effectLst/>
+        </p:spPr>
+        <p:style>
+          <a:lnRef idx="1">
+            <a:schemeClr val="accent1"/>
+          </a:lnRef>
+          <a:fillRef idx="3">
+            <a:schemeClr val="accent1"/>
+          </a:fillRef>
+          <a:effectRef idx="2">
+            <a:schemeClr val="accent1"/>
+          </a:effectRef>
+          <a:fontRef idx="minor">
+            <a:schemeClr val="lt1"/>
+          </a:fontRef>
+        </p:style>
+        <p:txBody>
+          <a:bodyPr rtlCol="0" anchor="ctr"/>
+          <a:lstStyle/>
+          <a:p>
+            <a:pPr algn="ctr"/>
+          </a:p>
+        </p:txBody>
+      </p:sp>
+      <p:sp>
+        <p:nvSpPr>
+          <p:cNvPr id="51" name="TextBox 50"/>
+          <p:cNvSpPr txBox="1"/>
+          <p:nvPr/>
+        </p:nvSpPr>
+        <p:spPr>
+          <a:xfrm>
+            <a:off x="13675452" y="6419088"/>
+            <a:ext cx="1533605" cy="237744"/>
+          </a:xfrm>
+          <a:prstGeom prst="rect">
+            <a:avLst/>
+          </a:prstGeom>
+          <a:noFill/>
+        </p:spPr>
+        <p:txBody>
+          <a:bodyPr wrap="square" anchor="t" lIns="0" rIns="0" tIns="0" bIns="0">
+            <a:spAutoFit/>
+          </a:bodyPr>
+          <a:lstStyle/>
+          <a:p>
+            <a:pPr algn="l">
+              <a:lnSpc>
+                <a:spcPct val="112000"/>
+              </a:lnSpc>
+            </a:pPr>
+            <a:r>
+              <a:rPr sz="1050" b="0">
+                <a:solidFill>
+                  <a:srgbClr val="FFFFFF"/>
+                </a:solidFill>
+                <a:latin typeface="Arial"/>
+                <a:ea typeface="Arial"/>
+              </a:rPr>
+              <a:t>호스트 · 앱</a:t>
+            </a:r>
+          </a:p>
+        </p:txBody>
+      </p:sp>
+      <p:sp>
+        <p:nvSpPr>
+          <p:cNvPr id="52" name="TextBox 51"/>
+          <p:cNvSpPr txBox="1"/>
+          <p:nvPr/>
+        </p:nvSpPr>
+        <p:spPr>
+          <a:xfrm>
+            <a:off x="13675452" y="6656832"/>
+            <a:ext cx="1533605" cy="329184"/>
+          </a:xfrm>
+          <a:prstGeom prst="rect">
+            <a:avLst/>
+          </a:prstGeom>
+          <a:noFill/>
+        </p:spPr>
+        <p:txBody>
+          <a:bodyPr wrap="square" anchor="ctr" lIns="0" rIns="0" tIns="0" bIns="0">
+            <a:spAutoFit/>
+          </a:bodyPr>
+          <a:lstStyle/>
+          <a:p>
+            <a:pPr algn="l">
+              <a:lnSpc>
+                <a:spcPct val="112000"/>
+              </a:lnSpc>
+            </a:pPr>
+            <a:r>
+              <a:rPr sz="1200" b="1">
+                <a:solidFill>
+                  <a:srgbClr val="FFFFFF"/>
+                </a:solidFill>
+                <a:latin typeface="Arial"/>
+                <a:ea typeface="Arial"/>
+              </a:rPr>
+              <a:t>WAF 3.2 → 1.0</a:t>
+            </a:r>
+          </a:p>
+        </p:txBody>
+      </p:sp>
+      <p:sp>
+        <p:nvSpPr>
+          <p:cNvPr id="53" name="Right Arrow 52"/>
+          <p:cNvSpPr/>
+          <p:nvPr/>
+        </p:nvSpPr>
+        <p:spPr>
+          <a:xfrm>
+            <a:off x="15346218" y="6611112"/>
+            <a:ext cx="219456" cy="182880"/>
+          </a:xfrm>
+          <a:prstGeom prst="rightArrow">
+            <a:avLst/>
+          </a:prstGeom>
+          <a:solidFill>
+            <a:srgbClr val="1428A0"/>
+          </a:solidFill>
+          <a:ln>
+            <a:noFill/>
+          </a:ln>
+          <a:effectLst/>
+        </p:spPr>
+        <p:style>
+          <a:lnRef idx="1">
+            <a:schemeClr val="accent1"/>
+          </a:lnRef>
+          <a:fillRef idx="3">
+            <a:schemeClr val="accent1"/>
+          </a:fillRef>
+          <a:effectRef idx="2">
+            <a:schemeClr val="accent1"/>
+          </a:effectRef>
+          <a:fontRef idx="minor">
+            <a:schemeClr val="lt1"/>
+          </a:fontRef>
+        </p:style>
+        <p:txBody>
+          <a:bodyPr rtlCol="0" anchor="ctr"/>
+          <a:lstStyle/>
+          <a:p>
+            <a:pPr algn="ctr"/>
+          </a:p>
+        </p:txBody>
+      </p:sp>
+      <p:sp>
+        <p:nvSpPr>
+          <p:cNvPr id="54" name="Rectangle 53"/>
+          <p:cNvSpPr/>
+          <p:nvPr/>
+        </p:nvSpPr>
+        <p:spPr>
+          <a:xfrm>
+            <a:off x="15611394" y="6345936"/>
+            <a:ext cx="1716485" cy="713232"/>
+          </a:xfrm>
+          <a:prstGeom prst="rect">
+            <a:avLst/>
+          </a:prstGeom>
+          <a:solidFill>
+            <a:srgbClr val="F4F6FC"/>
+          </a:solidFill>
+          <a:ln w="12700">
+            <a:solidFill>
+              <a:srgbClr val="AAB8E8"/>
+            </a:solidFill>
+          </a:ln>
+          <a:effectLst/>
+        </p:spPr>
+        <p:style>
+          <a:lnRef idx="1">
+            <a:schemeClr val="accent1"/>
+          </a:lnRef>
+          <a:fillRef idx="3">
+            <a:schemeClr val="accent1"/>
+          </a:fillRef>
+          <a:effectRef idx="2">
+            <a:schemeClr val="accent1"/>
+          </a:effectRef>
+          <a:fontRef idx="minor">
+            <a:schemeClr val="lt1"/>
+          </a:fontRef>
+        </p:style>
+        <p:txBody>
+          <a:bodyPr rtlCol="0" anchor="ctr"/>
+          <a:lstStyle/>
+          <a:p>
+            <a:pPr algn="ctr"/>
+          </a:p>
+        </p:txBody>
+      </p:sp>
+      <p:sp>
+        <p:nvSpPr>
+          <p:cNvPr id="55" name="TextBox 54"/>
+          <p:cNvSpPr txBox="1"/>
+          <p:nvPr/>
+        </p:nvSpPr>
+        <p:spPr>
+          <a:xfrm>
+            <a:off x="15702834" y="6419088"/>
+            <a:ext cx="1533605" cy="237744"/>
+          </a:xfrm>
+          <a:prstGeom prst="rect">
+            <a:avLst/>
+          </a:prstGeom>
+          <a:noFill/>
+        </p:spPr>
+        <p:txBody>
+          <a:bodyPr wrap="square" anchor="t" lIns="0" rIns="0" tIns="0" bIns="0">
+            <a:spAutoFit/>
+          </a:bodyPr>
+          <a:lstStyle/>
+          <a:p>
+            <a:pPr algn="l">
+              <a:lnSpc>
+                <a:spcPct val="112000"/>
+              </a:lnSpc>
+            </a:pPr>
+            <a:r>
+              <a:rPr sz="1050" b="0">
+                <a:solidFill>
+                  <a:srgbClr val="8A8A8A"/>
+                </a:solidFill>
+                <a:latin typeface="Arial"/>
+                <a:ea typeface="Arial"/>
+              </a:rPr>
+              <a:t>고객</a:t>
+            </a:r>
+          </a:p>
+        </p:txBody>
+      </p:sp>
+      <p:sp>
+        <p:nvSpPr>
+          <p:cNvPr id="56" name="TextBox 55"/>
+          <p:cNvSpPr txBox="1"/>
+          <p:nvPr/>
+        </p:nvSpPr>
+        <p:spPr>
+          <a:xfrm>
+            <a:off x="15702834" y="6656832"/>
+            <a:ext cx="1533605" cy="329184"/>
+          </a:xfrm>
+          <a:prstGeom prst="rect">
+            <a:avLst/>
+          </a:prstGeom>
+          <a:noFill/>
+        </p:spPr>
+        <p:txBody>
+          <a:bodyPr wrap="square" anchor="ctr" lIns="0" rIns="0" tIns="0" bIns="0">
+            <a:spAutoFit/>
+          </a:bodyPr>
+          <a:lstStyle/>
+          <a:p>
+            <a:pPr algn="l">
+              <a:lnSpc>
+                <a:spcPct val="112000"/>
+              </a:lnSpc>
+            </a:pPr>
+            <a:r>
+              <a:rPr sz="1200" b="1">
+                <a:solidFill>
+                  <a:srgbClr val="1A1A1A"/>
+                </a:solidFill>
+                <a:latin typeface="Arial"/>
+                <a:ea typeface="Arial"/>
+              </a:rPr>
+              <a:t>DWPD 요구 유지</a:t>
+            </a:r>
+          </a:p>
+        </p:txBody>
+      </p:sp>
+      <p:sp>
+        <p:nvSpPr>
+          <p:cNvPr id="57" name="TextBox 56"/>
+          <p:cNvSpPr txBox="1"/>
+          <p:nvPr/>
+        </p:nvSpPr>
+        <p:spPr>
+          <a:xfrm>
+            <a:off x="11556630" y="7863840"/>
+            <a:ext cx="5771249" cy="475488"/>
+          </a:xfrm>
+          <a:prstGeom prst="rect">
+            <a:avLst/>
+          </a:prstGeom>
+          <a:noFill/>
+        </p:spPr>
+        <p:txBody>
+          <a:bodyPr wrap="square" anchor="t" lIns="0" rIns="0" tIns="0" bIns="0">
+            <a:spAutoFit/>
+          </a:bodyPr>
+          <a:lstStyle/>
+          <a:p>
+            <a:pPr algn="l">
+              <a:lnSpc>
+                <a:spcPct val="102000"/>
+              </a:lnSpc>
+            </a:pPr>
+            <a:r>
+              <a:rPr sz="1050" b="0">
+                <a:solidFill>
+                  <a:srgbClr val="555555"/>
+                </a:solidFill>
+                <a:latin typeface="Arial"/>
+                <a:ea typeface="Arial"/>
+              </a:rPr>
+              <a:t>같은 구조가 두 번 반복됐습니다. QLC의 호스트 협력은 선택이 아니라 산식의 결과이며, 2단계의 WAF 지렛대는 호스트·애플리케이션 계층에 있습니다</a:t>
+            </a:r>
+          </a:p>
+        </p:txBody>
+      </p:sp>
+      <p:sp>
+        <p:nvSpPr>
+          <p:cNvPr id="58" name="Rectangle 57"/>
+          <p:cNvSpPr/>
+          <p:nvPr/>
+        </p:nvSpPr>
+        <p:spPr>
+          <a:xfrm>
+            <a:off x="722376" y="8613648"/>
+            <a:ext cx="16843248" cy="731520"/>
+          </a:xfrm>
+          <a:prstGeom prst="rect">
+            <a:avLst/>
+          </a:prstGeom>
+          <a:solidFill>
+            <a:srgbClr val="1428A0"/>
+          </a:solidFill>
+          <a:ln>
+            <a:noFill/>
+          </a:ln>
+          <a:effectLst/>
+        </p:spPr>
+        <p:style>
+          <a:lnRef idx="1">
+            <a:schemeClr val="accent1"/>
+          </a:lnRef>
+          <a:fillRef idx="3">
+            <a:schemeClr val="accent1"/>
+          </a:fillRef>
+          <a:effectRef idx="2">
+            <a:schemeClr val="accent1"/>
+          </a:effectRef>
+          <a:fontRef idx="minor">
+            <a:schemeClr val="lt1"/>
+          </a:fontRef>
+        </p:style>
+        <p:txBody>
+          <a:bodyPr rtlCol="0" anchor="ctr"/>
+          <a:lstStyle/>
+          <a:p>
+            <a:pPr algn="ctr"/>
+          </a:p>
+        </p:txBody>
+      </p:sp>
+      <p:sp>
+        <p:nvSpPr>
+          <p:cNvPr id="59" name="TextBox 58"/>
           <p:cNvSpPr txBox="1"/>
           <p:nvPr/>
         </p:nvSpPr>
@@ -5230,7 +5930,7 @@
       </p:sp>
       <p:sp>
         <p:nvSpPr>
-          <p:cNvPr id="43" name="TextBox 42"/>
+          <p:cNvPr id="60" name="TextBox 59"/>
           <p:cNvSpPr txBox="1"/>
           <p:nvPr/>
         </p:nvSpPr>
@@ -5256,21 +5956,38 @@
               </a:lnSpc>
             </a:pPr>
             <a:r>
-              <a:rPr sz="1900" b="1">
+              <a:rPr sz="1800" b="1">
                 <a:solidFill>
                   <a:srgbClr val="FFFFFF"/>
                 </a:solidFill>
                 <a:latin typeface="Arial"/>
                 <a:ea typeface="Arial"/>
               </a:rPr>
-              <a:t>QLC의 호스트 협력은 예외가 아니라 사다리의 다음 칸이며, DRAM도 PRAC·CXL로 같은 사다리에 올라섰습니다. 자기 진화 축은 병행합니다</a:t>
-            </a:r>
-          </a:p>
-        </p:txBody>
-      </p:sp>
-      <p:sp>
-        <p:nvSpPr>
-          <p:cNvPr id="44" name="TextBox 43"/>
+              <a:t>요구(UBER·DWPD)는 고정되고 단품 지표(RBER·P/E)는 악화되며, 그 폭은 상위 계층의 변수(ECC·WAF)가 메워 왔습니다.</a:t>
+            </a:r>
+          </a:p>
+          <a:p>
+            <a:pPr algn="l">
+              <a:lnSpc>
+                <a:spcPct val="108000"/>
+              </a:lnSpc>
+            </a:pPr>
+            <a:r>
+              <a:rPr sz="1800" b="1">
+                <a:solidFill>
+                  <a:srgbClr val="FFFFFF"/>
+                </a:solidFill>
+                <a:latin typeface="Arial"/>
+                <a:ea typeface="Arial"/>
+              </a:rPr>
+              <a:t>QLC의 호스트 협력은 선택이 아니라 산식의 결과입니다</a:t>
+            </a:r>
+          </a:p>
+        </p:txBody>
+      </p:sp>
+      <p:sp>
+        <p:nvSpPr>
+          <p:cNvPr id="61" name="TextBox 60"/>
           <p:cNvSpPr txBox="1"/>
           <p:nvPr/>
         </p:nvSpPr>
@@ -5303,14 +6020,14 @@
                 <a:latin typeface="Arial"/>
                 <a:ea typeface="Arial"/>
               </a:rPr>
-              <a:t>출처: JEDEC(JESD79-5/5A/5C · JESD235 · JESD270-4), NVM Express(ZNS · FDP), CXL 컨소시엄, USENIX FAST'13/'17, ISCA 2014, SanDisk · Micron 보도자료, Kioxia 기술 브리프 · 검색 요약 기반, 등급은 보고서 부록 A</a:t>
-            </a:r>
-          </a:p>
-        </p:txBody>
-      </p:sp>
-      <p:sp>
-        <p:nvSpPr>
-          <p:cNvPr id="45" name="TextBox 44"/>
+              <a:t>출처: JESD218(UBER·보존), ATP·Kioxia(DWPD 산식·WAF 3), Intel X25-E·S3700·P4510 및 Solidigm P5316 사양(정격 DWPD), Mielke·Cai(RBER), WD ECC/DSP 백서(LDPC 120bit/KB), CacheLib FDP(WAF) · RBER 대표값·환산 DWPD 등급은 보고서 부록 A F28~F35</a:t>
+            </a:r>
+          </a:p>
+        </p:txBody>
+      </p:sp>
+      <p:sp>
+        <p:nvSpPr>
+          <p:cNvPr id="62" name="TextBox 61"/>
           <p:cNvSpPr txBox="1"/>
           <p:nvPr/>
         </p:nvSpPr>

--- a/outputs/presentation/memory-solution-ladder.pptx
+++ b/outputs/presentation/memory-solution-ladder.pptx
@@ -502,7 +502,7 @@
           <a:lstStyle/>
           <a:p>
             <a:r>
-              <a:t>메모리 해법 사다리를 네 숫자로 설명하는 한 장입니다. 왼쪽 차트는 인과 순서입니다. ① 셀의 한계: 비트/셀을 늘릴수록 셀이 견디는 P/E 사이클이 SLC 30K~100K에서 QLC 100~1K로 100배 줄었습니다. ② 컨트롤러의 응답: 같은 기간 RBER은 SLC 10의 -9~-7승에서 QLC 10의 -3~-2승으로 약 백만 배 올랐지만, 고객의 UBER 요구(JESD218: 클라이언트 10의 -15승, 엔터프라이즈 10의 -16승)는 고정이었습니다. 그 폭을 컨트롤러가 ECC로 메웠습니다. 1비트/512B에서 BCH 60비트/KB, LDPC 120비트/KB로 약 60배입니다. 셀은 보존·사이클링·리드 디스터브로 시간에 따라 산포가 움직이는 것을 스스로 고치지 못하므로, 이것이 NAND에서 SSD로의 1단계 이관의 실체입니다. ③ 결과: ECC는 BER을 막지만 P/E를 늘리지는 못합니다. 정격 DWPD는 X25-E SLC 17(2008, 2PB 보증 환산), S3700 eMLC 10(2012), P4510 TLC 0.7(2018), P5316 QLC 0.41(2021, 22,930TBW 환산), 최신 QLC 0.075~0.6으로 내려왔는데, 추론 캐시 계층의 요구는 TLC 수준 1~3, ScaleFlux가 제시한 유효 요구는 7~10입니다. 10~40배 갭입니다. ④ 남은 지렛대: DWPD = P/E × (1+OP) ÷ (WAF × 365 × 년)에서 P/E는 셀, OP는 디바이스, 년과 요구 DWPD는 고객이 정합니다. P/E가 100배 줄었으니 남은 변수는 WAF뿐이고, WAF는 랜덤 쓰기 대표값 3, CacheLib FDP 없음 3.22에서 FDP 배치로 1.03이 됐습니다. 68% 감소, 유효 DWPD 3.1배입니다. WAF를 1로 내리는 것은 컨트롤러가 아니라 호스트가 데이터 수명을 알려 줄 때만 가능합니다. 오른쪽 위는 산식과 항별 소유자, 아래는 두 단계의 대칭입니다. 1단계는 요구 UBER 고정, RBER 악화, ECC로 메움. 2단계는 요구 DWPD 고정, P/E 악화, WAF로 메움. 같은 구조입니다. 결론: QLC의 호스트 협력은 선택이 아니라 산식의 결과입니다. RBER 대표값과 환산 DWPD의 등급은 보고서 부록 A F28~F35에 있습니다.</a:t>
+              <a:t>1장은 QLC의 내구성 격차를 어느 계층이 해소하는가를 네 지표로 답합니다. 왼쪽 차트는 인과 순서입니다. ① 셀의 한계: 비트/셀을 늘릴수록 셀이 견디는 P/E 사이클이 SLC 30K~100K에서 QLC 100~1K로 100배 감소했습니다. ② 컨트롤러의 보상: 같은 기간 RBER은 SLC 10의 -9~-7승에서 QLC 10의 -3~-2승으로 약 백만 배 상승했지만, 고객의 UBER 요구(JESD218: 클라이언트 10의 -15승, 엔터프라이즈 10의 -16승)는 고정이었습니다. 그 격차를 컨트롤러가 ECC로 보상했습니다. 1비트/512B에서 BCH 60비트/KB, LDPC 120비트/KB로 약 60배입니다. 셀은 보존·사이클링·리드 디스터브로 시간에 따라 변하는 산포를 단독으로 보정하지 못하므로, 이것이 NAND에서 SSD로의 1단계 이관입니다. ③ 결과: ECC는 BER을 보상하지만 P/E를 늘리지는 못합니다. 정격 DWPD는 X25-E SLC 17(2008, 2PB 보증 환산), S3700 eMLC 10(2012), P4510 TLC 0.7(2018), P5316 QLC 0.41(2021, 22,930TBW 환산), 최신 QLC 0.075~0.6으로 하락했는데, 추론 캐시 계층의 요구는 TLC 수준 1~3, ScaleFlux가 제시한 유효 요구는 7~10입니다. 10~40배 격차입니다. ④ 남은 변수: DWPD = P/E × (1+OP) ÷ (WAF × 365 × 년)에서 P/E는 셀, OP는 디바이스, 년과 요구 DWPD는 고객이 결정합니다. P/E가 100배 감소했으므로 남은 보상 변수는 WAF뿐이고, WAF는 랜덤 쓰기 대표값 3, CacheLib 배치 표준 미적용 3.22에서 적용 시 1.03이 됐습니다. 68% 감소, 유효 DWPD 3.1배입니다. WAF를 1로 낮추는 것은 컨트롤러가 아니라 호스트가 데이터 수명에 따라 배치를 결정할 때만 가능합니다. 오른쪽 위는 산식과 항별 결정 주체, 아래는 이관 구조의 반복입니다. 1단계는 요구 UBER 고정, RBER 악화, ECC로 보상. 2단계는 요구 DWPD 고정, P/E 악화, WAF로 보상. 3단계는 본 덱의 제안입니다. 호스트 계층의 배치 규격은 KV 캐시 관리자 코드에 아직 미정의이고, 삼성이 FDE 상주와 전략적 협약으로 고객과 규격을 공동 정의해 DWPD·TCO를 보증합니다. 결론: QLC의 호스트 협력은 선택이 아니라 산식의 귀결입니다. 그 규격이 언제 정의되는지가 2장입니다. RBER 대표값과 환산 DWPD의 등급은 보고서 부록 A F28~F35에 있습니다.</a:t>
             </a:r>
           </a:p>
         </p:txBody>
@@ -3663,7 +3663,7 @@
                 <a:latin typeface="Arial"/>
                 <a:ea typeface="Arial"/>
               </a:rPr>
-              <a:t>단품이 잃은 P/E 100배를 컨트롤러가 ECC로 버텼고, 남은 지렛대 WAF는 호스트 협력에 있습니다</a:t>
+              <a:t>RBER 상승은 컨트롤러 ECC가 보상했고, P/E 감소의 보상 변수 WAF는 호스트 계층에 있습니다</a:t>
             </a:r>
           </a:p>
         </p:txBody>
@@ -3703,7 +3703,7 @@
                 <a:latin typeface="Arial"/>
                 <a:ea typeface="Arial"/>
               </a:rPr>
-              <a:t>셀이 못 지킨 BER을 SSD가 ECC로 지켰고, SSD가 못 지키는 DWPD를 이제 호스트 배치가 WAF로 지킬 차례입니다.</a:t>
+              <a:t>QLC의 내구성 격차를 어느 계층이 해소하는가: P/E · BER · DWPD · WAF 네 지표의 세대별 변화로 확인합니다.</a:t>
             </a:r>
           </a:p>
         </p:txBody>
@@ -3785,7 +3785,7 @@
         <p:spPr>
           <a:xfrm>
             <a:off x="11318886" y="2560320"/>
-            <a:ext cx="6246737" cy="1572768"/>
+            <a:ext cx="6246737" cy="1243584"/>
           </a:xfrm>
           <a:prstGeom prst="rect">
             <a:avLst/>
@@ -3857,7 +3857,7 @@
                 <a:latin typeface="Arial"/>
                 <a:ea typeface="Arial"/>
               </a:rPr>
-              <a:t>산식 — 누가 어느 항을 정하나</a:t>
+              <a:t>DWPD 산식 — 항별 결정 주체</a:t>
             </a:r>
           </a:p>
         </p:txBody>
@@ -3870,7 +3870,7 @@
         </p:nvSpPr>
         <p:spPr>
           <a:xfrm>
-            <a:off x="11415591" y="3035808"/>
+            <a:off x="11415591" y="3054096"/>
             <a:ext cx="932688" cy="420624"/>
           </a:xfrm>
           <a:prstGeom prst="rect">
@@ -3916,7 +3916,7 @@
         </p:nvSpPr>
         <p:spPr>
           <a:xfrm>
-            <a:off x="11415591" y="3035808"/>
+            <a:off x="11415591" y="3054096"/>
             <a:ext cx="932688" cy="420624"/>
           </a:xfrm>
           <a:prstGeom prst="rect">
@@ -3956,7 +3956,7 @@
         </p:nvSpPr>
         <p:spPr>
           <a:xfrm>
-            <a:off x="11324151" y="3493008"/>
+            <a:off x="11324151" y="3511296"/>
             <a:ext cx="1115568" cy="201168"/>
           </a:xfrm>
           <a:prstGeom prst="rect">
@@ -3996,7 +3996,7 @@
         </p:nvSpPr>
         <p:spPr>
           <a:xfrm>
-            <a:off x="12403143" y="3035808"/>
+            <a:off x="12403143" y="3054096"/>
             <a:ext cx="237744" cy="420624"/>
           </a:xfrm>
           <a:prstGeom prst="rect">
@@ -4036,7 +4036,7 @@
         </p:nvSpPr>
         <p:spPr>
           <a:xfrm>
-            <a:off x="12695751" y="3035808"/>
+            <a:off x="12695751" y="3054096"/>
             <a:ext cx="932688" cy="420624"/>
           </a:xfrm>
           <a:prstGeom prst="rect">
@@ -4082,7 +4082,7 @@
         </p:nvSpPr>
         <p:spPr>
           <a:xfrm>
-            <a:off x="12695751" y="3035808"/>
+            <a:off x="12695751" y="3054096"/>
             <a:ext cx="932688" cy="420624"/>
           </a:xfrm>
           <a:prstGeom prst="rect">
@@ -4122,7 +4122,7 @@
         </p:nvSpPr>
         <p:spPr>
           <a:xfrm>
-            <a:off x="12604311" y="3493008"/>
+            <a:off x="12604311" y="3511296"/>
             <a:ext cx="1115568" cy="201168"/>
           </a:xfrm>
           <a:prstGeom prst="rect">
@@ -4162,7 +4162,7 @@
         </p:nvSpPr>
         <p:spPr>
           <a:xfrm>
-            <a:off x="13683303" y="3035808"/>
+            <a:off x="13683303" y="3054096"/>
             <a:ext cx="237744" cy="420624"/>
           </a:xfrm>
           <a:prstGeom prst="rect">
@@ -4202,7 +4202,7 @@
         </p:nvSpPr>
         <p:spPr>
           <a:xfrm>
-            <a:off x="13975911" y="3035808"/>
+            <a:off x="13975911" y="3054096"/>
             <a:ext cx="932688" cy="420624"/>
           </a:xfrm>
           <a:prstGeom prst="rect">
@@ -4248,7 +4248,7 @@
         </p:nvSpPr>
         <p:spPr>
           <a:xfrm>
-            <a:off x="13975911" y="3035808"/>
+            <a:off x="13975911" y="3054096"/>
             <a:ext cx="932688" cy="420624"/>
           </a:xfrm>
           <a:prstGeom prst="rect">
@@ -4288,7 +4288,7 @@
         </p:nvSpPr>
         <p:spPr>
           <a:xfrm>
-            <a:off x="13884471" y="3493008"/>
+            <a:off x="13884471" y="3511296"/>
             <a:ext cx="1115568" cy="201168"/>
           </a:xfrm>
           <a:prstGeom prst="rect">
@@ -4328,7 +4328,7 @@
         </p:nvSpPr>
         <p:spPr>
           <a:xfrm>
-            <a:off x="14963463" y="3035808"/>
+            <a:off x="14963463" y="3054096"/>
             <a:ext cx="237744" cy="420624"/>
           </a:xfrm>
           <a:prstGeom prst="rect">
@@ -4368,7 +4368,7 @@
         </p:nvSpPr>
         <p:spPr>
           <a:xfrm>
-            <a:off x="15256071" y="3035808"/>
+            <a:off x="15256071" y="3054096"/>
             <a:ext cx="932688" cy="420624"/>
           </a:xfrm>
           <a:prstGeom prst="rect">
@@ -4412,7 +4412,7 @@
         </p:nvSpPr>
         <p:spPr>
           <a:xfrm>
-            <a:off x="15256071" y="3035808"/>
+            <a:off x="15256071" y="3054096"/>
             <a:ext cx="932688" cy="420624"/>
           </a:xfrm>
           <a:prstGeom prst="rect">
@@ -4452,7 +4452,7 @@
         </p:nvSpPr>
         <p:spPr>
           <a:xfrm>
-            <a:off x="15164631" y="3493008"/>
+            <a:off x="15164631" y="3511296"/>
             <a:ext cx="1115568" cy="201168"/>
           </a:xfrm>
           <a:prstGeom prst="rect">
@@ -4492,7 +4492,7 @@
         </p:nvSpPr>
         <p:spPr>
           <a:xfrm>
-            <a:off x="16243623" y="3035808"/>
+            <a:off x="16243623" y="3054096"/>
             <a:ext cx="237744" cy="420624"/>
           </a:xfrm>
           <a:prstGeom prst="rect">
@@ -4532,7 +4532,7 @@
         </p:nvSpPr>
         <p:spPr>
           <a:xfrm>
-            <a:off x="16536231" y="3035808"/>
+            <a:off x="16536231" y="3054096"/>
             <a:ext cx="932688" cy="420624"/>
           </a:xfrm>
           <a:prstGeom prst="rect">
@@ -4578,7 +4578,7 @@
         </p:nvSpPr>
         <p:spPr>
           <a:xfrm>
-            <a:off x="16536231" y="3035808"/>
+            <a:off x="16536231" y="3054096"/>
             <a:ext cx="932688" cy="420624"/>
           </a:xfrm>
           <a:prstGeom prst="rect">
@@ -4618,7 +4618,7 @@
         </p:nvSpPr>
         <p:spPr>
           <a:xfrm>
-            <a:off x="16444791" y="3493008"/>
+            <a:off x="16444791" y="3511296"/>
             <a:ext cx="1115568" cy="201168"/>
           </a:xfrm>
           <a:prstGeom prst="rect">
@@ -4652,74 +4652,14 @@
       </p:sp>
       <p:sp>
         <p:nvSpPr>
-          <p:cNvPr id="30" name="TextBox 29"/>
-          <p:cNvSpPr txBox="1"/>
-          <p:nvPr/>
-        </p:nvSpPr>
-        <p:spPr>
-          <a:xfrm>
-            <a:off x="11556630" y="3749039"/>
-            <a:ext cx="5771249" cy="274320"/>
-          </a:xfrm>
-          <a:prstGeom prst="rect">
-            <a:avLst/>
-          </a:prstGeom>
-          <a:noFill/>
-        </p:spPr>
-        <p:txBody>
-          <a:bodyPr wrap="square" anchor="t" lIns="0" rIns="0" tIns="0" bIns="0">
-            <a:spAutoFit/>
-          </a:bodyPr>
-          <a:lstStyle/>
-          <a:p>
-            <a:pPr algn="l">
-              <a:lnSpc>
-                <a:spcPct val="100000"/>
-              </a:lnSpc>
-            </a:pPr>
-            <a:r>
-              <a:rPr sz="1050" b="0">
-                <a:solidFill>
-                  <a:srgbClr val="555555"/>
-                </a:solidFill>
-                <a:latin typeface="Arial"/>
-                <a:ea typeface="Arial"/>
-              </a:rPr>
-              <a:t>P/E가 100배 줄었으니 요구 DWPD를 지킬 변수는 </a:t>
-            </a:r>
-            <a:r>
-              <a:rPr sz="1050" b="1">
-                <a:solidFill>
-                  <a:srgbClr val="1428A0"/>
-                </a:solidFill>
-                <a:latin typeface="Arial"/>
-                <a:ea typeface="Arial"/>
-              </a:rPr>
-              <a:t>WAF</a:t>
-            </a:r>
-            <a:r>
-              <a:rPr sz="1050" b="0">
-                <a:solidFill>
-                  <a:srgbClr val="555555"/>
-                </a:solidFill>
-                <a:latin typeface="Arial"/>
-                <a:ea typeface="Arial"/>
-              </a:rPr>
-              <a:t>뿐이고, WAF는 호스트가 데이터 수명을 알려 줄 때만 1에 수렴합니다</a:t>
-            </a:r>
-          </a:p>
-        </p:txBody>
-      </p:sp>
-      <p:sp>
-        <p:nvSpPr>
-          <p:cNvPr id="31" name="Rectangle 30"/>
+          <p:cNvPr id="30" name="Rectangle 29"/>
           <p:cNvSpPr/>
           <p:nvPr/>
         </p:nvSpPr>
         <p:spPr>
           <a:xfrm>
-            <a:off x="11318886" y="4297679"/>
-            <a:ext cx="6246737" cy="4133088"/>
+            <a:off x="11318886" y="3968496"/>
+            <a:ext cx="6246737" cy="4462272"/>
           </a:xfrm>
           <a:prstGeom prst="rect">
             <a:avLst/>
@@ -4758,13 +4698,13 @@
       </p:sp>
       <p:sp>
         <p:nvSpPr>
-          <p:cNvPr id="32" name="TextBox 31"/>
+          <p:cNvPr id="31" name="TextBox 30"/>
           <p:cNvSpPr txBox="1"/>
           <p:nvPr/>
         </p:nvSpPr>
         <p:spPr>
           <a:xfrm>
-            <a:off x="11556630" y="4407407"/>
+            <a:off x="11556630" y="4078224"/>
             <a:ext cx="5771249" cy="256032"/>
           </a:xfrm>
           <a:prstGeom prst="rect">
@@ -4791,20 +4731,20 @@
                 <a:latin typeface="Arial"/>
                 <a:ea typeface="Arial"/>
               </a:rPr>
-              <a:t>두 단계의 대칭 — 요구는 고정, 단품은 악화, 상위 계층이 메운다</a:t>
-            </a:r>
-          </a:p>
-        </p:txBody>
-      </p:sp>
-      <p:sp>
-        <p:nvSpPr>
-          <p:cNvPr id="33" name="TextBox 32"/>
+              <a:t>이관 구조의 반복 — 요구 고정 · 단품 지표 악화 · 상위 계층 보상</a:t>
+            </a:r>
+          </a:p>
+        </p:txBody>
+      </p:sp>
+      <p:sp>
+        <p:nvSpPr>
+          <p:cNvPr id="32" name="TextBox 31"/>
           <p:cNvSpPr txBox="1"/>
           <p:nvPr/>
         </p:nvSpPr>
         <p:spPr>
           <a:xfrm>
-            <a:off x="11556630" y="4809744"/>
+            <a:off x="11556630" y="4480560"/>
             <a:ext cx="5771249" cy="219456"/>
           </a:xfrm>
           <a:prstGeom prst="rect">
@@ -4838,14 +4778,14 @@
       </p:sp>
       <p:sp>
         <p:nvSpPr>
-          <p:cNvPr id="34" name="Rectangle 33"/>
+          <p:cNvPr id="33" name="Rectangle 32"/>
           <p:cNvSpPr/>
           <p:nvPr/>
         </p:nvSpPr>
         <p:spPr>
           <a:xfrm>
-            <a:off x="11556630" y="5102352"/>
-            <a:ext cx="1716485" cy="713232"/>
+            <a:off x="11556630" y="4773168"/>
+            <a:ext cx="1716485" cy="731520"/>
           </a:xfrm>
           <a:prstGeom prst="rect">
             <a:avLst/>
@@ -4884,13 +4824,13 @@
       </p:sp>
       <p:sp>
         <p:nvSpPr>
-          <p:cNvPr id="35" name="TextBox 34"/>
+          <p:cNvPr id="34" name="TextBox 33"/>
           <p:cNvSpPr txBox="1"/>
           <p:nvPr/>
         </p:nvSpPr>
         <p:spPr>
           <a:xfrm>
-            <a:off x="11648070" y="5175504"/>
+            <a:off x="11648070" y="4846320"/>
             <a:ext cx="1533605" cy="237744"/>
           </a:xfrm>
           <a:prstGeom prst="rect">
@@ -4924,14 +4864,14 @@
       </p:sp>
       <p:sp>
         <p:nvSpPr>
-          <p:cNvPr id="36" name="TextBox 35"/>
+          <p:cNvPr id="35" name="TextBox 34"/>
           <p:cNvSpPr txBox="1"/>
           <p:nvPr/>
         </p:nvSpPr>
         <p:spPr>
           <a:xfrm>
-            <a:off x="11648070" y="5413248"/>
-            <a:ext cx="1533605" cy="329184"/>
+            <a:off x="11648070" y="5084064"/>
+            <a:ext cx="1533605" cy="347472"/>
           </a:xfrm>
           <a:prstGeom prst="rect">
             <a:avLst/>
@@ -4964,13 +4904,13 @@
       </p:sp>
       <p:sp>
         <p:nvSpPr>
-          <p:cNvPr id="37" name="Right Arrow 36"/>
+          <p:cNvPr id="36" name="Right Arrow 35"/>
           <p:cNvSpPr/>
           <p:nvPr/>
         </p:nvSpPr>
         <p:spPr>
           <a:xfrm>
-            <a:off x="13318836" y="5367528"/>
+            <a:off x="13318836" y="5047488"/>
             <a:ext cx="219456" cy="182880"/>
           </a:xfrm>
           <a:prstGeom prst="rightArrow">
@@ -5008,14 +4948,14 @@
       </p:sp>
       <p:sp>
         <p:nvSpPr>
-          <p:cNvPr id="38" name="Rectangle 37"/>
+          <p:cNvPr id="37" name="Rectangle 36"/>
           <p:cNvSpPr/>
           <p:nvPr/>
         </p:nvSpPr>
         <p:spPr>
           <a:xfrm>
-            <a:off x="13584012" y="5102352"/>
-            <a:ext cx="1716485" cy="713232"/>
+            <a:off x="13584012" y="4773168"/>
+            <a:ext cx="1716485" cy="731520"/>
           </a:xfrm>
           <a:prstGeom prst="rect">
             <a:avLst/>
@@ -5052,13 +4992,13 @@
       </p:sp>
       <p:sp>
         <p:nvSpPr>
-          <p:cNvPr id="39" name="TextBox 38"/>
+          <p:cNvPr id="38" name="TextBox 37"/>
           <p:cNvSpPr txBox="1"/>
           <p:nvPr/>
         </p:nvSpPr>
         <p:spPr>
           <a:xfrm>
-            <a:off x="13675452" y="5175504"/>
+            <a:off x="13675452" y="4846320"/>
             <a:ext cx="1533605" cy="237744"/>
           </a:xfrm>
           <a:prstGeom prst="rect">
@@ -5092,14 +5032,14 @@
       </p:sp>
       <p:sp>
         <p:nvSpPr>
-          <p:cNvPr id="40" name="TextBox 39"/>
+          <p:cNvPr id="39" name="TextBox 38"/>
           <p:cNvSpPr txBox="1"/>
           <p:nvPr/>
         </p:nvSpPr>
         <p:spPr>
           <a:xfrm>
-            <a:off x="13675452" y="5413248"/>
-            <a:ext cx="1533605" cy="329184"/>
+            <a:off x="13675452" y="5084064"/>
+            <a:ext cx="1533605" cy="347472"/>
           </a:xfrm>
           <a:prstGeom prst="rect">
             <a:avLst/>
@@ -5132,13 +5072,13 @@
       </p:sp>
       <p:sp>
         <p:nvSpPr>
-          <p:cNvPr id="41" name="Right Arrow 40"/>
+          <p:cNvPr id="40" name="Right Arrow 39"/>
           <p:cNvSpPr/>
           <p:nvPr/>
         </p:nvSpPr>
         <p:spPr>
           <a:xfrm>
-            <a:off x="15346218" y="5367528"/>
+            <a:off x="15346218" y="5047488"/>
             <a:ext cx="219456" cy="182880"/>
           </a:xfrm>
           <a:prstGeom prst="rightArrow">
@@ -5176,14 +5116,14 @@
       </p:sp>
       <p:sp>
         <p:nvSpPr>
-          <p:cNvPr id="42" name="Rectangle 41"/>
+          <p:cNvPr id="41" name="Rectangle 40"/>
           <p:cNvSpPr/>
           <p:nvPr/>
         </p:nvSpPr>
         <p:spPr>
           <a:xfrm>
-            <a:off x="15611394" y="5102352"/>
-            <a:ext cx="1716485" cy="713232"/>
+            <a:off x="15611394" y="4773168"/>
+            <a:ext cx="1716485" cy="731520"/>
           </a:xfrm>
           <a:prstGeom prst="rect">
             <a:avLst/>
@@ -5222,13 +5162,13 @@
       </p:sp>
       <p:sp>
         <p:nvSpPr>
-          <p:cNvPr id="43" name="TextBox 42"/>
+          <p:cNvPr id="42" name="TextBox 41"/>
           <p:cNvSpPr txBox="1"/>
           <p:nvPr/>
         </p:nvSpPr>
         <p:spPr>
           <a:xfrm>
-            <a:off x="15702834" y="5175504"/>
+            <a:off x="15702834" y="4846320"/>
             <a:ext cx="1533605" cy="237744"/>
           </a:xfrm>
           <a:prstGeom prst="rect">
@@ -5262,14 +5202,14 @@
       </p:sp>
       <p:sp>
         <p:nvSpPr>
-          <p:cNvPr id="44" name="TextBox 43"/>
+          <p:cNvPr id="43" name="TextBox 42"/>
           <p:cNvSpPr txBox="1"/>
           <p:nvPr/>
         </p:nvSpPr>
         <p:spPr>
           <a:xfrm>
-            <a:off x="15702834" y="5413248"/>
-            <a:ext cx="1533605" cy="329184"/>
+            <a:off x="15702834" y="5084064"/>
+            <a:ext cx="1533605" cy="347472"/>
           </a:xfrm>
           <a:prstGeom prst="rect">
             <a:avLst/>
@@ -5302,13 +5242,13 @@
       </p:sp>
       <p:sp>
         <p:nvSpPr>
-          <p:cNvPr id="45" name="TextBox 44"/>
+          <p:cNvPr id="44" name="TextBox 43"/>
           <p:cNvSpPr txBox="1"/>
           <p:nvPr/>
         </p:nvSpPr>
         <p:spPr>
           <a:xfrm>
-            <a:off x="11556630" y="6053328"/>
+            <a:off x="11556630" y="5724144"/>
             <a:ext cx="5771249" cy="219456"/>
           </a:xfrm>
           <a:prstGeom prst="rect">
@@ -5342,14 +5282,14 @@
       </p:sp>
       <p:sp>
         <p:nvSpPr>
-          <p:cNvPr id="46" name="Rectangle 45"/>
+          <p:cNvPr id="45" name="Rectangle 44"/>
           <p:cNvSpPr/>
           <p:nvPr/>
         </p:nvSpPr>
         <p:spPr>
           <a:xfrm>
-            <a:off x="11556630" y="6345936"/>
-            <a:ext cx="1716485" cy="713232"/>
+            <a:off x="11556630" y="6016752"/>
+            <a:ext cx="1716485" cy="731520"/>
           </a:xfrm>
           <a:prstGeom prst="rect">
             <a:avLst/>
@@ -5388,13 +5328,13 @@
       </p:sp>
       <p:sp>
         <p:nvSpPr>
-          <p:cNvPr id="47" name="TextBox 46"/>
+          <p:cNvPr id="46" name="TextBox 45"/>
           <p:cNvSpPr txBox="1"/>
           <p:nvPr/>
         </p:nvSpPr>
         <p:spPr>
           <a:xfrm>
-            <a:off x="11648070" y="6419088"/>
+            <a:off x="11648070" y="6089904"/>
             <a:ext cx="1533605" cy="237744"/>
           </a:xfrm>
           <a:prstGeom prst="rect">
@@ -5421,21 +5361,21 @@
                 <a:latin typeface="Arial"/>
                 <a:ea typeface="Arial"/>
               </a:rPr>
-              <a:t>셀 · SSD</a:t>
-            </a:r>
-          </a:p>
-        </p:txBody>
-      </p:sp>
-      <p:sp>
-        <p:nvSpPr>
-          <p:cNvPr id="48" name="TextBox 47"/>
+              <a:t>셀 · SSD · DWPD 0.4</a:t>
+            </a:r>
+          </a:p>
+        </p:txBody>
+      </p:sp>
+      <p:sp>
+        <p:nvSpPr>
+          <p:cNvPr id="47" name="TextBox 46"/>
           <p:cNvSpPr txBox="1"/>
           <p:nvPr/>
         </p:nvSpPr>
         <p:spPr>
           <a:xfrm>
-            <a:off x="11648070" y="6656832"/>
-            <a:ext cx="1533605" cy="329184"/>
+            <a:off x="11648070" y="6327648"/>
+            <a:ext cx="1533605" cy="347472"/>
           </a:xfrm>
           <a:prstGeom prst="rect">
             <a:avLst/>
@@ -5461,20 +5401,20 @@
                 <a:latin typeface="Arial"/>
                 <a:ea typeface="Arial"/>
               </a:rPr>
-              <a:t>P/E 100배 ↓, DWPD 0.4</a:t>
-            </a:r>
-          </a:p>
-        </p:txBody>
-      </p:sp>
-      <p:sp>
-        <p:nvSpPr>
-          <p:cNvPr id="49" name="Right Arrow 48"/>
+              <a:t>P/E 100배 ↓</a:t>
+            </a:r>
+          </a:p>
+        </p:txBody>
+      </p:sp>
+      <p:sp>
+        <p:nvSpPr>
+          <p:cNvPr id="48" name="Right Arrow 47"/>
           <p:cNvSpPr/>
           <p:nvPr/>
         </p:nvSpPr>
         <p:spPr>
           <a:xfrm>
-            <a:off x="13318836" y="6611112"/>
+            <a:off x="13318836" y="6291072"/>
             <a:ext cx="219456" cy="182880"/>
           </a:xfrm>
           <a:prstGeom prst="rightArrow">
@@ -5512,14 +5452,14 @@
       </p:sp>
       <p:sp>
         <p:nvSpPr>
-          <p:cNvPr id="50" name="Rectangle 49"/>
+          <p:cNvPr id="49" name="Rectangle 48"/>
           <p:cNvSpPr/>
           <p:nvPr/>
         </p:nvSpPr>
         <p:spPr>
           <a:xfrm>
-            <a:off x="13584012" y="6345936"/>
-            <a:ext cx="1716485" cy="713232"/>
+            <a:off x="13584012" y="6016752"/>
+            <a:ext cx="1716485" cy="731520"/>
           </a:xfrm>
           <a:prstGeom prst="rect">
             <a:avLst/>
@@ -5556,13 +5496,13 @@
       </p:sp>
       <p:sp>
         <p:nvSpPr>
-          <p:cNvPr id="51" name="TextBox 50"/>
+          <p:cNvPr id="50" name="TextBox 49"/>
           <p:cNvSpPr txBox="1"/>
           <p:nvPr/>
         </p:nvSpPr>
         <p:spPr>
           <a:xfrm>
-            <a:off x="13675452" y="6419088"/>
+            <a:off x="13675452" y="6089904"/>
             <a:ext cx="1533605" cy="237744"/>
           </a:xfrm>
           <a:prstGeom prst="rect">
@@ -5596,14 +5536,14 @@
       </p:sp>
       <p:sp>
         <p:nvSpPr>
-          <p:cNvPr id="52" name="TextBox 51"/>
+          <p:cNvPr id="51" name="TextBox 50"/>
           <p:cNvSpPr txBox="1"/>
           <p:nvPr/>
         </p:nvSpPr>
         <p:spPr>
           <a:xfrm>
-            <a:off x="13675452" y="6656832"/>
-            <a:ext cx="1533605" cy="329184"/>
+            <a:off x="13675452" y="6327648"/>
+            <a:ext cx="1533605" cy="347472"/>
           </a:xfrm>
           <a:prstGeom prst="rect">
             <a:avLst/>
@@ -5636,13 +5576,13 @@
       </p:sp>
       <p:sp>
         <p:nvSpPr>
-          <p:cNvPr id="53" name="Right Arrow 52"/>
+          <p:cNvPr id="52" name="Right Arrow 51"/>
           <p:cNvSpPr/>
           <p:nvPr/>
         </p:nvSpPr>
         <p:spPr>
           <a:xfrm>
-            <a:off x="15346218" y="6611112"/>
+            <a:off x="15346218" y="6291072"/>
             <a:ext cx="219456" cy="182880"/>
           </a:xfrm>
           <a:prstGeom prst="rightArrow">
@@ -5680,14 +5620,14 @@
       </p:sp>
       <p:sp>
         <p:nvSpPr>
-          <p:cNvPr id="54" name="Rectangle 53"/>
+          <p:cNvPr id="53" name="Rectangle 52"/>
           <p:cNvSpPr/>
           <p:nvPr/>
         </p:nvSpPr>
         <p:spPr>
           <a:xfrm>
-            <a:off x="15611394" y="6345936"/>
-            <a:ext cx="1716485" cy="713232"/>
+            <a:off x="15611394" y="6016752"/>
+            <a:ext cx="1716485" cy="731520"/>
           </a:xfrm>
           <a:prstGeom prst="rect">
             <a:avLst/>
@@ -5726,13 +5666,13 @@
       </p:sp>
       <p:sp>
         <p:nvSpPr>
-          <p:cNvPr id="55" name="TextBox 54"/>
+          <p:cNvPr id="54" name="TextBox 53"/>
           <p:cNvSpPr txBox="1"/>
           <p:nvPr/>
         </p:nvSpPr>
         <p:spPr>
           <a:xfrm>
-            <a:off x="15702834" y="6419088"/>
+            <a:off x="15702834" y="6089904"/>
             <a:ext cx="1533605" cy="237744"/>
           </a:xfrm>
           <a:prstGeom prst="rect">
@@ -5766,14 +5706,14 @@
       </p:sp>
       <p:sp>
         <p:nvSpPr>
-          <p:cNvPr id="56" name="TextBox 55"/>
+          <p:cNvPr id="55" name="TextBox 54"/>
           <p:cNvSpPr txBox="1"/>
           <p:nvPr/>
         </p:nvSpPr>
         <p:spPr>
           <a:xfrm>
-            <a:off x="15702834" y="6656832"/>
-            <a:ext cx="1533605" cy="329184"/>
+            <a:off x="15702834" y="6327648"/>
+            <a:ext cx="1533605" cy="347472"/>
           </a:xfrm>
           <a:prstGeom prst="rect">
             <a:avLst/>
@@ -5806,14 +5746,14 @@
       </p:sp>
       <p:sp>
         <p:nvSpPr>
-          <p:cNvPr id="57" name="TextBox 56"/>
+          <p:cNvPr id="56" name="TextBox 55"/>
           <p:cNvSpPr txBox="1"/>
           <p:nvPr/>
         </p:nvSpPr>
         <p:spPr>
           <a:xfrm>
-            <a:off x="11556630" y="7863840"/>
-            <a:ext cx="5771249" cy="475488"/>
+            <a:off x="11556630" y="6967728"/>
+            <a:ext cx="5771249" cy="219456"/>
           </a:xfrm>
           <a:prstGeom prst="rect">
             <a:avLst/>
@@ -5828,41 +5768,43 @@
           <a:p>
             <a:pPr algn="l">
               <a:lnSpc>
-                <a:spcPct val="102000"/>
+                <a:spcPct val="112000"/>
               </a:lnSpc>
             </a:pPr>
             <a:r>
-              <a:rPr sz="1050" b="0">
+              <a:rPr sz="1125" b="1">
                 <a:solidFill>
-                  <a:srgbClr val="555555"/>
+                  <a:srgbClr val="1428A0"/>
                 </a:solidFill>
                 <a:latin typeface="Arial"/>
                 <a:ea typeface="Arial"/>
               </a:rPr>
-              <a:t>같은 구조가 두 번 반복됐습니다. QLC의 호스트 협력은 선택이 아니라 산식의 결과이며, 2단계의 WAF 지렛대는 호스트·애플리케이션 계층에 있습니다</a:t>
-            </a:r>
-          </a:p>
-        </p:txBody>
-      </p:sp>
-      <p:sp>
-        <p:nvSpPr>
-          <p:cNvPr id="58" name="Rectangle 57"/>
+              <a:t>3단계  호스트 → 고객 시스템 공동 설계  (본 덱 2~5장)</a:t>
+            </a:r>
+          </a:p>
+        </p:txBody>
+      </p:sp>
+      <p:sp>
+        <p:nvSpPr>
+          <p:cNvPr id="57" name="Rectangle 56"/>
           <p:cNvSpPr/>
           <p:nvPr/>
         </p:nvSpPr>
         <p:spPr>
           <a:xfrm>
-            <a:off x="722376" y="8613648"/>
-            <a:ext cx="16843248" cy="731520"/>
+            <a:off x="11556630" y="7260336"/>
+            <a:ext cx="1716485" cy="731520"/>
           </a:xfrm>
           <a:prstGeom prst="rect">
             <a:avLst/>
           </a:prstGeom>
           <a:solidFill>
-            <a:srgbClr val="1428A0"/>
+            <a:srgbClr val="FFFFFF"/>
           </a:solidFill>
-          <a:ln>
-            <a:noFill/>
+          <a:ln w="9525">
+            <a:solidFill>
+              <a:srgbClr val="D9D9D9"/>
+            </a:solidFill>
           </a:ln>
           <a:effectLst/>
         </p:spPr>
@@ -5890,7 +5832,469 @@
       </p:sp>
       <p:sp>
         <p:nvSpPr>
+          <p:cNvPr id="58" name="TextBox 57"/>
+          <p:cNvSpPr txBox="1"/>
+          <p:nvPr/>
+        </p:nvSpPr>
+        <p:spPr>
+          <a:xfrm>
+            <a:off x="11648070" y="7333488"/>
+            <a:ext cx="1533605" cy="237744"/>
+          </a:xfrm>
+          <a:prstGeom prst="rect">
+            <a:avLst/>
+          </a:prstGeom>
+          <a:noFill/>
+        </p:spPr>
+        <p:txBody>
+          <a:bodyPr wrap="square" anchor="t" lIns="0" rIns="0" tIns="0" bIns="0">
+            <a:spAutoFit/>
+          </a:bodyPr>
+          <a:lstStyle/>
+          <a:p>
+            <a:pPr algn="l">
+              <a:lnSpc>
+                <a:spcPct val="112000"/>
+              </a:lnSpc>
+            </a:pPr>
+            <a:r>
+              <a:rPr sz="1050" b="0">
+                <a:solidFill>
+                  <a:srgbClr val="8A8A8A"/>
+                </a:solidFill>
+                <a:latin typeface="Arial"/>
+                <a:ea typeface="Arial"/>
+              </a:rPr>
+              <a:t>KV 캐시 관리자</a:t>
+            </a:r>
+          </a:p>
+        </p:txBody>
+      </p:sp>
+      <p:sp>
+        <p:nvSpPr>
           <p:cNvPr id="59" name="TextBox 58"/>
+          <p:cNvSpPr txBox="1"/>
+          <p:nvPr/>
+        </p:nvSpPr>
+        <p:spPr>
+          <a:xfrm>
+            <a:off x="11648070" y="7571232"/>
+            <a:ext cx="1533605" cy="347472"/>
+          </a:xfrm>
+          <a:prstGeom prst="rect">
+            <a:avLst/>
+          </a:prstGeom>
+          <a:noFill/>
+        </p:spPr>
+        <p:txBody>
+          <a:bodyPr wrap="square" anchor="ctr" lIns="0" rIns="0" tIns="0" bIns="0">
+            <a:spAutoFit/>
+          </a:bodyPr>
+          <a:lstStyle/>
+          <a:p>
+            <a:pPr algn="l">
+              <a:lnSpc>
+                <a:spcPct val="112000"/>
+              </a:lnSpc>
+            </a:pPr>
+            <a:r>
+              <a:rPr sz="1200" b="1">
+                <a:solidFill>
+                  <a:srgbClr val="1A1A1A"/>
+                </a:solidFill>
+                <a:latin typeface="Arial"/>
+                <a:ea typeface="Arial"/>
+              </a:rPr>
+              <a:t>배치 규격 미정의</a:t>
+            </a:r>
+          </a:p>
+        </p:txBody>
+      </p:sp>
+      <p:sp>
+        <p:nvSpPr>
+          <p:cNvPr id="60" name="Right Arrow 59"/>
+          <p:cNvSpPr/>
+          <p:nvPr/>
+        </p:nvSpPr>
+        <p:spPr>
+          <a:xfrm>
+            <a:off x="13318836" y="7534656"/>
+            <a:ext cx="219456" cy="182880"/>
+          </a:xfrm>
+          <a:prstGeom prst="rightArrow">
+            <a:avLst/>
+          </a:prstGeom>
+          <a:solidFill>
+            <a:srgbClr val="1428A0"/>
+          </a:solidFill>
+          <a:ln>
+            <a:noFill/>
+          </a:ln>
+          <a:effectLst/>
+        </p:spPr>
+        <p:style>
+          <a:lnRef idx="1">
+            <a:schemeClr val="accent1"/>
+          </a:lnRef>
+          <a:fillRef idx="3">
+            <a:schemeClr val="accent1"/>
+          </a:fillRef>
+          <a:effectRef idx="2">
+            <a:schemeClr val="accent1"/>
+          </a:effectRef>
+          <a:fontRef idx="minor">
+            <a:schemeClr val="lt1"/>
+          </a:fontRef>
+        </p:style>
+        <p:txBody>
+          <a:bodyPr rtlCol="0" anchor="ctr"/>
+          <a:lstStyle/>
+          <a:p>
+            <a:pPr algn="ctr"/>
+          </a:p>
+        </p:txBody>
+      </p:sp>
+      <p:sp>
+        <p:nvSpPr>
+          <p:cNvPr id="61" name="Rectangle 60"/>
+          <p:cNvSpPr/>
+          <p:nvPr/>
+        </p:nvSpPr>
+        <p:spPr>
+          <a:xfrm>
+            <a:off x="13584012" y="7260336"/>
+            <a:ext cx="1716485" cy="731520"/>
+          </a:xfrm>
+          <a:prstGeom prst="rect">
+            <a:avLst/>
+          </a:prstGeom>
+          <a:solidFill>
+            <a:srgbClr val="1428A0"/>
+          </a:solidFill>
+          <a:ln>
+            <a:noFill/>
+          </a:ln>
+          <a:effectLst/>
+        </p:spPr>
+        <p:style>
+          <a:lnRef idx="1">
+            <a:schemeClr val="accent1"/>
+          </a:lnRef>
+          <a:fillRef idx="3">
+            <a:schemeClr val="accent1"/>
+          </a:fillRef>
+          <a:effectRef idx="2">
+            <a:schemeClr val="accent1"/>
+          </a:effectRef>
+          <a:fontRef idx="minor">
+            <a:schemeClr val="lt1"/>
+          </a:fontRef>
+        </p:style>
+        <p:txBody>
+          <a:bodyPr rtlCol="0" anchor="ctr"/>
+          <a:lstStyle/>
+          <a:p>
+            <a:pPr algn="ctr"/>
+          </a:p>
+        </p:txBody>
+      </p:sp>
+      <p:sp>
+        <p:nvSpPr>
+          <p:cNvPr id="62" name="TextBox 61"/>
+          <p:cNvSpPr txBox="1"/>
+          <p:nvPr/>
+        </p:nvSpPr>
+        <p:spPr>
+          <a:xfrm>
+            <a:off x="13675452" y="7333488"/>
+            <a:ext cx="1533605" cy="237744"/>
+          </a:xfrm>
+          <a:prstGeom prst="rect">
+            <a:avLst/>
+          </a:prstGeom>
+          <a:noFill/>
+        </p:spPr>
+        <p:txBody>
+          <a:bodyPr wrap="square" anchor="t" lIns="0" rIns="0" tIns="0" bIns="0">
+            <a:spAutoFit/>
+          </a:bodyPr>
+          <a:lstStyle/>
+          <a:p>
+            <a:pPr algn="l">
+              <a:lnSpc>
+                <a:spcPct val="112000"/>
+              </a:lnSpc>
+            </a:pPr>
+            <a:r>
+              <a:rPr sz="1050" b="0">
+                <a:solidFill>
+                  <a:srgbClr val="FFFFFF"/>
+                </a:solidFill>
+                <a:latin typeface="Arial"/>
+                <a:ea typeface="Arial"/>
+              </a:rPr>
+              <a:t>삼성 · FDE · SCA</a:t>
+            </a:r>
+          </a:p>
+        </p:txBody>
+      </p:sp>
+      <p:sp>
+        <p:nvSpPr>
+          <p:cNvPr id="63" name="TextBox 62"/>
+          <p:cNvSpPr txBox="1"/>
+          <p:nvPr/>
+        </p:nvSpPr>
+        <p:spPr>
+          <a:xfrm>
+            <a:off x="13675452" y="7571232"/>
+            <a:ext cx="1533605" cy="347472"/>
+          </a:xfrm>
+          <a:prstGeom prst="rect">
+            <a:avLst/>
+          </a:prstGeom>
+          <a:noFill/>
+        </p:spPr>
+        <p:txBody>
+          <a:bodyPr wrap="square" anchor="ctr" lIns="0" rIns="0" tIns="0" bIns="0">
+            <a:spAutoFit/>
+          </a:bodyPr>
+          <a:lstStyle/>
+          <a:p>
+            <a:pPr algn="l">
+              <a:lnSpc>
+                <a:spcPct val="112000"/>
+              </a:lnSpc>
+            </a:pPr>
+            <a:r>
+              <a:rPr sz="1200" b="1">
+                <a:solidFill>
+                  <a:srgbClr val="FFFFFF"/>
+                </a:solidFill>
+                <a:latin typeface="Arial"/>
+                <a:ea typeface="Arial"/>
+              </a:rPr>
+              <a:t>규격 공동 정의</a:t>
+            </a:r>
+          </a:p>
+        </p:txBody>
+      </p:sp>
+      <p:sp>
+        <p:nvSpPr>
+          <p:cNvPr id="64" name="Right Arrow 63"/>
+          <p:cNvSpPr/>
+          <p:nvPr/>
+        </p:nvSpPr>
+        <p:spPr>
+          <a:xfrm>
+            <a:off x="15346218" y="7534656"/>
+            <a:ext cx="219456" cy="182880"/>
+          </a:xfrm>
+          <a:prstGeom prst="rightArrow">
+            <a:avLst/>
+          </a:prstGeom>
+          <a:solidFill>
+            <a:srgbClr val="1428A0"/>
+          </a:solidFill>
+          <a:ln>
+            <a:noFill/>
+          </a:ln>
+          <a:effectLst/>
+        </p:spPr>
+        <p:style>
+          <a:lnRef idx="1">
+            <a:schemeClr val="accent1"/>
+          </a:lnRef>
+          <a:fillRef idx="3">
+            <a:schemeClr val="accent1"/>
+          </a:fillRef>
+          <a:effectRef idx="2">
+            <a:schemeClr val="accent1"/>
+          </a:effectRef>
+          <a:fontRef idx="minor">
+            <a:schemeClr val="lt1"/>
+          </a:fontRef>
+        </p:style>
+        <p:txBody>
+          <a:bodyPr rtlCol="0" anchor="ctr"/>
+          <a:lstStyle/>
+          <a:p>
+            <a:pPr algn="ctr"/>
+          </a:p>
+        </p:txBody>
+      </p:sp>
+      <p:sp>
+        <p:nvSpPr>
+          <p:cNvPr id="65" name="Rectangle 64"/>
+          <p:cNvSpPr/>
+          <p:nvPr/>
+        </p:nvSpPr>
+        <p:spPr>
+          <a:xfrm>
+            <a:off x="15611394" y="7260336"/>
+            <a:ext cx="1716485" cy="731520"/>
+          </a:xfrm>
+          <a:prstGeom prst="rect">
+            <a:avLst/>
+          </a:prstGeom>
+          <a:solidFill>
+            <a:srgbClr val="F4F6FC"/>
+          </a:solidFill>
+          <a:ln w="12700">
+            <a:solidFill>
+              <a:srgbClr val="AAB8E8"/>
+            </a:solidFill>
+          </a:ln>
+          <a:effectLst/>
+        </p:spPr>
+        <p:style>
+          <a:lnRef idx="1">
+            <a:schemeClr val="accent1"/>
+          </a:lnRef>
+          <a:fillRef idx="3">
+            <a:schemeClr val="accent1"/>
+          </a:fillRef>
+          <a:effectRef idx="2">
+            <a:schemeClr val="accent1"/>
+          </a:effectRef>
+          <a:fontRef idx="minor">
+            <a:schemeClr val="lt1"/>
+          </a:fontRef>
+        </p:style>
+        <p:txBody>
+          <a:bodyPr rtlCol="0" anchor="ctr"/>
+          <a:lstStyle/>
+          <a:p>
+            <a:pPr algn="ctr"/>
+          </a:p>
+        </p:txBody>
+      </p:sp>
+      <p:sp>
+        <p:nvSpPr>
+          <p:cNvPr id="66" name="TextBox 65"/>
+          <p:cNvSpPr txBox="1"/>
+          <p:nvPr/>
+        </p:nvSpPr>
+        <p:spPr>
+          <a:xfrm>
+            <a:off x="15702834" y="7333488"/>
+            <a:ext cx="1533605" cy="237744"/>
+          </a:xfrm>
+          <a:prstGeom prst="rect">
+            <a:avLst/>
+          </a:prstGeom>
+          <a:noFill/>
+        </p:spPr>
+        <p:txBody>
+          <a:bodyPr wrap="square" anchor="t" lIns="0" rIns="0" tIns="0" bIns="0">
+            <a:spAutoFit/>
+          </a:bodyPr>
+          <a:lstStyle/>
+          <a:p>
+            <a:pPr algn="l">
+              <a:lnSpc>
+                <a:spcPct val="112000"/>
+              </a:lnSpc>
+            </a:pPr>
+            <a:r>
+              <a:rPr sz="1050" b="0">
+                <a:solidFill>
+                  <a:srgbClr val="8A8A8A"/>
+                </a:solidFill>
+                <a:latin typeface="Arial"/>
+                <a:ea typeface="Arial"/>
+              </a:rPr>
+              <a:t>고객</a:t>
+            </a:r>
+          </a:p>
+        </p:txBody>
+      </p:sp>
+      <p:sp>
+        <p:nvSpPr>
+          <p:cNvPr id="67" name="TextBox 66"/>
+          <p:cNvSpPr txBox="1"/>
+          <p:nvPr/>
+        </p:nvSpPr>
+        <p:spPr>
+          <a:xfrm>
+            <a:off x="15702834" y="7571232"/>
+            <a:ext cx="1533605" cy="347472"/>
+          </a:xfrm>
+          <a:prstGeom prst="rect">
+            <a:avLst/>
+          </a:prstGeom>
+          <a:noFill/>
+        </p:spPr>
+        <p:txBody>
+          <a:bodyPr wrap="square" anchor="ctr" lIns="0" rIns="0" tIns="0" bIns="0">
+            <a:spAutoFit/>
+          </a:bodyPr>
+          <a:lstStyle/>
+          <a:p>
+            <a:pPr algn="l">
+              <a:lnSpc>
+                <a:spcPct val="112000"/>
+              </a:lnSpc>
+            </a:pPr>
+            <a:r>
+              <a:rPr sz="1200" b="1">
+                <a:solidFill>
+                  <a:srgbClr val="1A1A1A"/>
+                </a:solidFill>
+                <a:latin typeface="Arial"/>
+                <a:ea typeface="Arial"/>
+              </a:rPr>
+              <a:t>DWPD · TCO 보증</a:t>
+            </a:r>
+          </a:p>
+        </p:txBody>
+      </p:sp>
+      <p:sp>
+        <p:nvSpPr>
+          <p:cNvPr id="68" name="Rectangle 67"/>
+          <p:cNvSpPr/>
+          <p:nvPr/>
+        </p:nvSpPr>
+        <p:spPr>
+          <a:xfrm>
+            <a:off x="722376" y="8613648"/>
+            <a:ext cx="16843248" cy="731520"/>
+          </a:xfrm>
+          <a:prstGeom prst="rect">
+            <a:avLst/>
+          </a:prstGeom>
+          <a:solidFill>
+            <a:srgbClr val="1428A0"/>
+          </a:solidFill>
+          <a:ln>
+            <a:noFill/>
+          </a:ln>
+          <a:effectLst/>
+        </p:spPr>
+        <p:style>
+          <a:lnRef idx="1">
+            <a:schemeClr val="accent1"/>
+          </a:lnRef>
+          <a:fillRef idx="3">
+            <a:schemeClr val="accent1"/>
+          </a:fillRef>
+          <a:effectRef idx="2">
+            <a:schemeClr val="accent1"/>
+          </a:effectRef>
+          <a:fontRef idx="minor">
+            <a:schemeClr val="lt1"/>
+          </a:fontRef>
+        </p:style>
+        <p:txBody>
+          <a:bodyPr rtlCol="0" anchor="ctr"/>
+          <a:lstStyle/>
+          <a:p>
+            <a:pPr algn="ctr"/>
+          </a:p>
+        </p:txBody>
+      </p:sp>
+      <p:sp>
+        <p:nvSpPr>
+          <p:cNvPr id="69" name="TextBox 68"/>
           <p:cNvSpPr txBox="1"/>
           <p:nvPr/>
         </p:nvSpPr>
@@ -5930,7 +6334,7 @@
       </p:sp>
       <p:sp>
         <p:nvSpPr>
-          <p:cNvPr id="60" name="TextBox 59"/>
+          <p:cNvPr id="70" name="TextBox 69"/>
           <p:cNvSpPr txBox="1"/>
           <p:nvPr/>
         </p:nvSpPr>
@@ -5956,14 +6360,14 @@
               </a:lnSpc>
             </a:pPr>
             <a:r>
-              <a:rPr sz="1800" b="1">
+              <a:rPr sz="1700" b="1">
                 <a:solidFill>
                   <a:srgbClr val="FFFFFF"/>
                 </a:solidFill>
                 <a:latin typeface="Arial"/>
                 <a:ea typeface="Arial"/>
               </a:rPr>
-              <a:t>요구(UBER·DWPD)는 고정되고 단품 지표(RBER·P/E)는 악화되며, 그 폭은 상위 계층의 변수(ECC·WAF)가 메워 왔습니다.</a:t>
+              <a:t>요구(UBER·DWPD)는 고정, 단품 지표(RBER·P/E)는 악화, 격차는 상위 계층의 변수(ECC·WAF)가 보상해 왔습니다.</a:t>
             </a:r>
           </a:p>
           <a:p>
@@ -5973,21 +6377,21 @@
               </a:lnSpc>
             </a:pPr>
             <a:r>
-              <a:rPr sz="1800" b="1">
+              <a:rPr sz="1700" b="1">
                 <a:solidFill>
                   <a:srgbClr val="FFFFFF"/>
                 </a:solidFill>
                 <a:latin typeface="Arial"/>
                 <a:ea typeface="Arial"/>
               </a:rPr>
-              <a:t>QLC의 호스트 협력은 선택이 아니라 산식의 결과입니다</a:t>
-            </a:r>
-          </a:p>
-        </p:txBody>
-      </p:sp>
-      <p:sp>
-        <p:nvSpPr>
-          <p:cNvPr id="61" name="TextBox 60"/>
+              <a:t>QLC의 호스트 협력은 선택이 아니라 산식의 귀결입니다</a:t>
+            </a:r>
+          </a:p>
+        </p:txBody>
+      </p:sp>
+      <p:sp>
+        <p:nvSpPr>
+          <p:cNvPr id="71" name="TextBox 70"/>
           <p:cNvSpPr txBox="1"/>
           <p:nvPr/>
         </p:nvSpPr>
@@ -6027,7 +6431,7 @@
       </p:sp>
       <p:sp>
         <p:nvSpPr>
-          <p:cNvPr id="62" name="TextBox 61"/>
+          <p:cNvPr id="72" name="TextBox 71"/>
           <p:cNvSpPr txBox="1"/>
           <p:nvPr/>
         </p:nvSpPr>

--- a/outputs/presentation/memory-solution-ladder.pptx
+++ b/outputs/presentation/memory-solution-ladder.pptx
@@ -502,7 +502,7 @@
           <a:lstStyle/>
           <a:p>
             <a:r>
-              <a:t>1장은 QLC의 내구성 격차를 어느 계층이 해소하는가를 네 지표로 답합니다. 왼쪽 차트는 인과 순서입니다. ① 셀의 한계: 비트/셀을 늘릴수록 셀이 견디는 P/E 사이클이 SLC 30K~100K에서 QLC 100~1K로 100배 감소했습니다. ② 컨트롤러의 보상: 같은 기간 RBER은 SLC 10의 -9~-7승에서 QLC 10의 -3~-2승으로 약 백만 배 상승했지만, 고객의 UBER 요구(JESD218: 클라이언트 10의 -15승, 엔터프라이즈 10의 -16승)는 고정이었습니다. 그 격차를 컨트롤러가 ECC로 보상했습니다. 1비트/512B에서 BCH 60비트/KB, LDPC 120비트/KB로 약 60배입니다. 셀은 보존·사이클링·리드 디스터브로 시간에 따라 변하는 산포를 단독으로 보정하지 못하므로, 이것이 NAND에서 SSD로의 1단계 이관입니다. ③ 결과: ECC는 BER을 보상하지만 P/E를 늘리지는 못합니다. 정격 DWPD는 X25-E SLC 17(2008, 2PB 보증 환산), S3700 eMLC 10(2012), P4510 TLC 0.7(2018), P5316 QLC 0.41(2021, 22,930TBW 환산), 최신 QLC 0.075~0.6으로 하락했는데, 추론 캐시 계층의 요구는 TLC 수준 1~3, ScaleFlux가 제시한 유효 요구는 7~10입니다. 10~40배 격차입니다. ④ 남은 변수: DWPD = P/E × (1+OP) ÷ (WAF × 365 × 년)에서 P/E는 셀, OP는 디바이스, 년과 요구 DWPD는 고객이 결정합니다. P/E가 100배 감소했으므로 남은 보상 변수는 WAF뿐이고, WAF는 랜덤 쓰기 대표값 3, CacheLib 배치 표준 미적용 3.22에서 적용 시 1.03이 됐습니다. 68% 감소, 유효 DWPD 3.1배입니다. WAF를 1로 낮추는 것은 컨트롤러가 아니라 호스트가 데이터 수명에 따라 배치를 결정할 때만 가능합니다. 오른쪽 위는 산식과 항별 결정 주체, 아래는 이관 구조의 반복입니다. 1단계는 요구 UBER 고정, RBER 악화, ECC로 보상. 2단계는 요구 DWPD 고정, P/E 악화, WAF로 보상. 3단계는 본 덱의 제안입니다. 호스트 계층의 배치 규격은 KV 캐시 관리자 코드에 아직 미정의이고, 삼성이 FDE 상주와 전략적 협약으로 고객과 규격을 공동 정의해 DWPD·TCO를 보증합니다. 결론: QLC의 호스트 협력은 선택이 아니라 산식의 귀결입니다. 그 규격이 언제 정의되는지가 2장입니다. RBER 대표값과 환산 DWPD의 등급은 보고서 부록 A F28~F35에 있습니다.</a:t>
+              <a:t>1장은 QLC의 내구성 격차를 어느 계층이 해소하는가를 네 지표로 답합니다. 왼쪽 차트는 인과 순서입니다. ① 셀의 한계: 비트/셀을 늘릴수록 셀이 견디는 P/E 사이클이 SLC 30K~100K에서 QLC 100~1K로 100배 감소했습니다. ② 컨트롤러의 보상: 같은 기간 RBER은 SLC 10의 -9~-7승에서 QLC 10의 -3~-2승으로 약 백만 배 상승했지만, 고객의 UBER 요구(JESD218: 클라이언트 10의 -15승, 엔터프라이즈 10의 -16승)는 고정이었습니다. 그 격차를 컨트롤러가 ECC로 보상했습니다. 1비트/512B에서 BCH 60비트/KB, LDPC 120비트/KB로 약 60배입니다. 셀은 보존·사이클링·리드 디스터브로 시간에 따라 변하는 산포를 단독으로 보정하지 못하므로, 이것이 NAND에서 SSD로의 1단계 이관이며 완결된 이관입니다. ③ 결과: ECC는 BER을 보상하지만 P/E를 늘리지는 못합니다. 정격 DWPD는 X25-E SLC 17(2008), S3700 eMLC 10(2012), P4510 TLC 0.7(2018), P5316 QLC 0.41(2021), 최신 QLC 0.075~0.6으로 하락했는데, 추론 캐시 계층의 요구는 TLC 수준 1~3, ScaleFlux가 제시한 유효 요구는 7~10입니다. 10~40배 격차입니다. ④ WAF: 2단계는 SSD 진영이 디바이스와 드라이버 안에서 워크로드에 적응하려 한 시도입니다. Multi-stream(2014)·AutoStream(2017)·FTL 핫/콜드 추정·NVMe IO 결정성(NVM Sets·Predictable Latency Mode, 2019)이 여기에 속합니다. 테일 지연 등 QoS와 성능은 개선했으나, 데이터의 수명은 호스트와 애플리케이션만 아는 정보라 디바이스가 완전히 감지할 수 없고, 실 워크로드의 WAF는 3 수준에 머물렀습니다(랜덤 쓰기 3.00, CacheLib 배치 표준 미적용 3.22). 3단계는 호스트 시스템 공동 설계입니다. 호스트가 데이터 수명을 지정(배치 표준)하고 캐시 관리자·애플리케이션 정책까지 함께 설계하면 WAF는 1.03이 됩니다. 68% 감소, 유효 DWPD 3.1배입니다. 오른쪽 위는 산식과 항별 결정 주체입니다. DWPD = P/E × (1+OP) ÷ (WAF × 365 × 년)에서 P/E는 셀, OP는 디바이스, 년과 요구 DWPD는 고객이 결정합니다. P/E가 100배 감소했으므로 남은 보상 변수는 WAF뿐입니다. 오른쪽 아래는 이관의 3단계입니다. 1단계 ECC는 UBER 요구를 충족해 완결됐고, 2단계 SSD 단독 최적화는 QoS·성능을 개선했으나 WAF를 낮추지 못해 DWPD 요구를 충족하지 못했으며, 3단계 호스트 시스템 공동 설계가 WAF를 1로 낮춰 DWPD 요구를 충족합니다. 본 덱 2~5장이 3단계입니다. 결론: QLC로 요구 DWPD를 충족하는 경로는 호스트 시스템 공동 설계뿐이며, 이는 산식의 귀결입니다. 그 규격이 언제 정의되는지가 2장입니다. 근거 등급은 보고서 부록 A F28~F40에 있습니다.</a:t>
             </a:r>
           </a:p>
         </p:txBody>
@@ -3663,7 +3663,7 @@
                 <a:latin typeface="Arial"/>
                 <a:ea typeface="Arial"/>
               </a:rPr>
-              <a:t>RBER 상승은 컨트롤러 ECC가 보상했고, P/E 감소의 보상 변수 WAF는 호스트 계층에 있습니다</a:t>
+              <a:t>ECC가 RBER을 보상했듯 P/E 감소는 WAF로 보상해야 하며, 이는 호스트 공동 설계로만 가능합니다</a:t>
             </a:r>
           </a:p>
         </p:txBody>
@@ -3703,7 +3703,7 @@
                 <a:latin typeface="Arial"/>
                 <a:ea typeface="Arial"/>
               </a:rPr>
-              <a:t>QLC의 내구성 격차를 어느 계층이 해소하는가: P/E · BER · DWPD · WAF 네 지표의 세대별 변화로 확인합니다.</a:t>
+              <a:t>QLC의 내구성 격차를 어느 계층이 해소하는가: SSD 단독 최적화는 QoS·성능은 개선했으나 WAF는 낮추지 못했습니다.</a:t>
             </a:r>
           </a:p>
         </p:txBody>
@@ -4731,7 +4731,7 @@
                 <a:latin typeface="Arial"/>
                 <a:ea typeface="Arial"/>
               </a:rPr>
-              <a:t>이관 구조의 반복 — 요구 고정 · 단품 지표 악화 · 상위 계층 보상</a:t>
+              <a:t>이관의 3단계 — 요구 고정 · 단품 지표 악화 · 보상 계층의 상승</a:t>
             </a:r>
           </a:p>
         </p:txBody>
@@ -4744,8 +4744,8 @@
         </p:nvSpPr>
         <p:spPr>
           <a:xfrm>
-            <a:off x="11556630" y="4480560"/>
-            <a:ext cx="5771249" cy="219456"/>
+            <a:off x="11556630" y="4462272"/>
+            <a:ext cx="3393809" cy="219456"/>
           </a:xfrm>
           <a:prstGeom prst="rect">
             <a:avLst/>
@@ -4778,14 +4778,54 @@
       </p:sp>
       <p:sp>
         <p:nvSpPr>
-          <p:cNvPr id="33" name="Rectangle 32"/>
+          <p:cNvPr id="33" name="TextBox 32"/>
+          <p:cNvSpPr txBox="1"/>
+          <p:nvPr/>
+        </p:nvSpPr>
+        <p:spPr>
+          <a:xfrm>
+            <a:off x="14950439" y="4462272"/>
+            <a:ext cx="2377440" cy="219456"/>
+          </a:xfrm>
+          <a:prstGeom prst="rect">
+            <a:avLst/>
+          </a:prstGeom>
+          <a:noFill/>
+        </p:spPr>
+        <p:txBody>
+          <a:bodyPr wrap="square" anchor="t" lIns="0" rIns="0" tIns="0" bIns="0">
+            <a:spAutoFit/>
+          </a:bodyPr>
+          <a:lstStyle/>
+          <a:p>
+            <a:pPr algn="r">
+              <a:lnSpc>
+                <a:spcPct val="112000"/>
+              </a:lnSpc>
+            </a:pPr>
+            <a:r>
+              <a:rPr sz="1050" b="1">
+                <a:solidFill>
+                  <a:srgbClr val="1428A0"/>
+                </a:solidFill>
+                <a:latin typeface="Arial"/>
+                <a:ea typeface="Arial"/>
+              </a:rPr>
+              <a:t>UBER 요구 충족</a:t>
+            </a:r>
+          </a:p>
+        </p:txBody>
+      </p:sp>
+      <p:sp>
+        <p:nvSpPr>
+          <p:cNvPr id="34" name="Rectangle 33"/>
           <p:cNvSpPr/>
           <p:nvPr/>
         </p:nvSpPr>
         <p:spPr>
           <a:xfrm>
-            <a:off x="11556630" y="4773168"/>
-            <a:ext cx="1716485" cy="731520"/>
+            <a:off x="11556630" y="4736592"/>
+            <a:ext cx="1716485" cy="786384"/>
           </a:xfrm>
           <a:prstGeom prst="rect">
             <a:avLst/>
@@ -4824,14 +4864,14 @@
       </p:sp>
       <p:sp>
         <p:nvSpPr>
-          <p:cNvPr id="34" name="TextBox 33"/>
+          <p:cNvPr id="35" name="TextBox 34"/>
           <p:cNvSpPr txBox="1"/>
           <p:nvPr/>
         </p:nvSpPr>
         <p:spPr>
           <a:xfrm>
-            <a:off x="11648070" y="4846320"/>
-            <a:ext cx="1533605" cy="237744"/>
+            <a:off x="11648070" y="4791455"/>
+            <a:ext cx="1533605" cy="201168"/>
           </a:xfrm>
           <a:prstGeom prst="rect">
             <a:avLst/>
@@ -4850,7 +4890,7 @@
               </a:lnSpc>
             </a:pPr>
             <a:r>
-              <a:rPr sz="1050" b="0">
+              <a:rPr sz="975" b="0">
                 <a:solidFill>
                   <a:srgbClr val="8A8A8A"/>
                 </a:solidFill>
@@ -4864,14 +4904,14 @@
       </p:sp>
       <p:sp>
         <p:nvSpPr>
-          <p:cNvPr id="35" name="TextBox 34"/>
+          <p:cNvPr id="36" name="TextBox 35"/>
           <p:cNvSpPr txBox="1"/>
           <p:nvPr/>
         </p:nvSpPr>
         <p:spPr>
           <a:xfrm>
-            <a:off x="11648070" y="5084064"/>
-            <a:ext cx="1533605" cy="347472"/>
+            <a:off x="11648070" y="4983479"/>
+            <a:ext cx="1533605" cy="237744"/>
           </a:xfrm>
           <a:prstGeom prst="rect">
             <a:avLst/>
@@ -4879,7 +4919,7 @@
           <a:noFill/>
         </p:spPr>
         <p:txBody>
-          <a:bodyPr wrap="square" anchor="ctr" lIns="0" rIns="0" tIns="0" bIns="0">
+          <a:bodyPr wrap="square" anchor="t" lIns="0" rIns="0" tIns="0" bIns="0">
             <a:spAutoFit/>
           </a:bodyPr>
           <a:lstStyle/>
@@ -4904,13 +4944,53 @@
       </p:sp>
       <p:sp>
         <p:nvSpPr>
-          <p:cNvPr id="36" name="Right Arrow 35"/>
+          <p:cNvPr id="37" name="TextBox 36"/>
+          <p:cNvSpPr txBox="1"/>
+          <p:nvPr/>
+        </p:nvSpPr>
+        <p:spPr>
+          <a:xfrm>
+            <a:off x="11648070" y="5221224"/>
+            <a:ext cx="1533605" cy="274320"/>
+          </a:xfrm>
+          <a:prstGeom prst="rect">
+            <a:avLst/>
+          </a:prstGeom>
+          <a:noFill/>
+        </p:spPr>
+        <p:txBody>
+          <a:bodyPr wrap="square" anchor="t" lIns="0" rIns="0" tIns="0" bIns="0">
+            <a:spAutoFit/>
+          </a:bodyPr>
+          <a:lstStyle/>
+          <a:p>
+            <a:pPr algn="l">
+              <a:lnSpc>
+                <a:spcPct val="100000"/>
+              </a:lnSpc>
+            </a:pPr>
+            <a:r>
+              <a:rPr sz="875" b="0">
+                <a:solidFill>
+                  <a:srgbClr val="555555"/>
+                </a:solidFill>
+                <a:latin typeface="Arial"/>
+                <a:ea typeface="Arial"/>
+              </a:rPr>
+              <a:t>산포가 시간에 따라 변화</a:t>
+            </a:r>
+          </a:p>
+        </p:txBody>
+      </p:sp>
+      <p:sp>
+        <p:nvSpPr>
+          <p:cNvPr id="38" name="Right Arrow 37"/>
           <p:cNvSpPr/>
           <p:nvPr/>
         </p:nvSpPr>
         <p:spPr>
           <a:xfrm>
-            <a:off x="13318836" y="5047488"/>
+            <a:off x="13318836" y="5038344"/>
             <a:ext cx="219456" cy="182880"/>
           </a:xfrm>
           <a:prstGeom prst="rightArrow">
@@ -4948,14 +5028,14 @@
       </p:sp>
       <p:sp>
         <p:nvSpPr>
-          <p:cNvPr id="37" name="Rectangle 36"/>
+          <p:cNvPr id="39" name="Rectangle 38"/>
           <p:cNvSpPr/>
           <p:nvPr/>
         </p:nvSpPr>
         <p:spPr>
           <a:xfrm>
-            <a:off x="13584012" y="4773168"/>
-            <a:ext cx="1716485" cy="731520"/>
+            <a:off x="13584012" y="4736592"/>
+            <a:ext cx="1716485" cy="786384"/>
           </a:xfrm>
           <a:prstGeom prst="rect">
             <a:avLst/>
@@ -4992,14 +5072,14 @@
       </p:sp>
       <p:sp>
         <p:nvSpPr>
-          <p:cNvPr id="38" name="TextBox 37"/>
+          <p:cNvPr id="40" name="TextBox 39"/>
           <p:cNvSpPr txBox="1"/>
           <p:nvPr/>
         </p:nvSpPr>
         <p:spPr>
           <a:xfrm>
-            <a:off x="13675452" y="4846320"/>
-            <a:ext cx="1533605" cy="237744"/>
+            <a:off x="13675452" y="4791455"/>
+            <a:ext cx="1533605" cy="201168"/>
           </a:xfrm>
           <a:prstGeom prst="rect">
             <a:avLst/>
@@ -5018,7 +5098,7 @@
               </a:lnSpc>
             </a:pPr>
             <a:r>
-              <a:rPr sz="1050" b="0">
+              <a:rPr sz="975" b="0">
                 <a:solidFill>
                   <a:srgbClr val="FFFFFF"/>
                 </a:solidFill>
@@ -5032,14 +5112,14 @@
       </p:sp>
       <p:sp>
         <p:nvSpPr>
-          <p:cNvPr id="39" name="TextBox 38"/>
+          <p:cNvPr id="41" name="TextBox 40"/>
           <p:cNvSpPr txBox="1"/>
           <p:nvPr/>
         </p:nvSpPr>
         <p:spPr>
           <a:xfrm>
-            <a:off x="13675452" y="5084064"/>
-            <a:ext cx="1533605" cy="347472"/>
+            <a:off x="13675452" y="4983479"/>
+            <a:ext cx="1533605" cy="237744"/>
           </a:xfrm>
           <a:prstGeom prst="rect">
             <a:avLst/>
@@ -5047,7 +5127,7 @@
           <a:noFill/>
         </p:spPr>
         <p:txBody>
-          <a:bodyPr wrap="square" anchor="ctr" lIns="0" rIns="0" tIns="0" bIns="0">
+          <a:bodyPr wrap="square" anchor="t" lIns="0" rIns="0" tIns="0" bIns="0">
             <a:spAutoFit/>
           </a:bodyPr>
           <a:lstStyle/>
@@ -5072,13 +5152,53 @@
       </p:sp>
       <p:sp>
         <p:nvSpPr>
-          <p:cNvPr id="40" name="Right Arrow 39"/>
+          <p:cNvPr id="42" name="TextBox 41"/>
+          <p:cNvSpPr txBox="1"/>
+          <p:nvPr/>
+        </p:nvSpPr>
+        <p:spPr>
+          <a:xfrm>
+            <a:off x="13675452" y="5221224"/>
+            <a:ext cx="1533605" cy="274320"/>
+          </a:xfrm>
+          <a:prstGeom prst="rect">
+            <a:avLst/>
+          </a:prstGeom>
+          <a:noFill/>
+        </p:spPr>
+        <p:txBody>
+          <a:bodyPr wrap="square" anchor="t" lIns="0" rIns="0" tIns="0" bIns="0">
+            <a:spAutoFit/>
+          </a:bodyPr>
+          <a:lstStyle/>
+          <a:p>
+            <a:pPr algn="l">
+              <a:lnSpc>
+                <a:spcPct val="100000"/>
+              </a:lnSpc>
+            </a:pPr>
+            <a:r>
+              <a:rPr sz="875" b="0">
+                <a:solidFill>
+                  <a:srgbClr val="FFFFFF"/>
+                </a:solidFill>
+                <a:latin typeface="Arial"/>
+                <a:ea typeface="Arial"/>
+              </a:rPr>
+              <a:t>1bit/512B → LDPC 120bit/KB</a:t>
+            </a:r>
+          </a:p>
+        </p:txBody>
+      </p:sp>
+      <p:sp>
+        <p:nvSpPr>
+          <p:cNvPr id="43" name="Right Arrow 42"/>
           <p:cNvSpPr/>
           <p:nvPr/>
         </p:nvSpPr>
         <p:spPr>
           <a:xfrm>
-            <a:off x="15346218" y="5047488"/>
+            <a:off x="15346218" y="5038344"/>
             <a:ext cx="219456" cy="182880"/>
           </a:xfrm>
           <a:prstGeom prst="rightArrow">
@@ -5116,14 +5236,14 @@
       </p:sp>
       <p:sp>
         <p:nvSpPr>
-          <p:cNvPr id="41" name="Rectangle 40"/>
+          <p:cNvPr id="44" name="Rectangle 43"/>
           <p:cNvSpPr/>
           <p:nvPr/>
         </p:nvSpPr>
         <p:spPr>
           <a:xfrm>
-            <a:off x="15611394" y="4773168"/>
-            <a:ext cx="1716485" cy="731520"/>
+            <a:off x="15611394" y="4736592"/>
+            <a:ext cx="1716485" cy="786384"/>
           </a:xfrm>
           <a:prstGeom prst="rect">
             <a:avLst/>
@@ -5162,14 +5282,14 @@
       </p:sp>
       <p:sp>
         <p:nvSpPr>
-          <p:cNvPr id="42" name="TextBox 41"/>
+          <p:cNvPr id="45" name="TextBox 44"/>
           <p:cNvSpPr txBox="1"/>
           <p:nvPr/>
         </p:nvSpPr>
         <p:spPr>
           <a:xfrm>
-            <a:off x="15702834" y="4846320"/>
-            <a:ext cx="1533605" cy="237744"/>
+            <a:off x="15702834" y="4791455"/>
+            <a:ext cx="1533605" cy="201168"/>
           </a:xfrm>
           <a:prstGeom prst="rect">
             <a:avLst/>
@@ -5188,7 +5308,7 @@
               </a:lnSpc>
             </a:pPr>
             <a:r>
-              <a:rPr sz="1050" b="0">
+              <a:rPr sz="975" b="0">
                 <a:solidFill>
                   <a:srgbClr val="8A8A8A"/>
                 </a:solidFill>
@@ -5202,14 +5322,14 @@
       </p:sp>
       <p:sp>
         <p:nvSpPr>
-          <p:cNvPr id="43" name="TextBox 42"/>
+          <p:cNvPr id="46" name="TextBox 45"/>
           <p:cNvSpPr txBox="1"/>
           <p:nvPr/>
         </p:nvSpPr>
         <p:spPr>
           <a:xfrm>
-            <a:off x="15702834" y="5084064"/>
-            <a:ext cx="1533605" cy="347472"/>
+            <a:off x="15702834" y="4983479"/>
+            <a:ext cx="1533605" cy="237744"/>
           </a:xfrm>
           <a:prstGeom prst="rect">
             <a:avLst/>
@@ -5217,7 +5337,7 @@
           <a:noFill/>
         </p:spPr>
         <p:txBody>
-          <a:bodyPr wrap="square" anchor="ctr" lIns="0" rIns="0" tIns="0" bIns="0">
+          <a:bodyPr wrap="square" anchor="t" lIns="0" rIns="0" tIns="0" bIns="0">
             <a:spAutoFit/>
           </a:bodyPr>
           <a:lstStyle/>
@@ -5235,21 +5355,61 @@
                 <a:latin typeface="Arial"/>
                 <a:ea typeface="Arial"/>
               </a:rPr>
-              <a:t>UBER 요구 유지</a:t>
-            </a:r>
-          </a:p>
-        </p:txBody>
-      </p:sp>
-      <p:sp>
-        <p:nvSpPr>
-          <p:cNvPr id="44" name="TextBox 43"/>
+              <a:t>UBER 요구 충족</a:t>
+            </a:r>
+          </a:p>
+        </p:txBody>
+      </p:sp>
+      <p:sp>
+        <p:nvSpPr>
+          <p:cNvPr id="47" name="TextBox 46"/>
           <p:cNvSpPr txBox="1"/>
           <p:nvPr/>
         </p:nvSpPr>
         <p:spPr>
           <a:xfrm>
-            <a:off x="11556630" y="5724144"/>
-            <a:ext cx="5771249" cy="219456"/>
+            <a:off x="15702834" y="5221224"/>
+            <a:ext cx="1533605" cy="274320"/>
+          </a:xfrm>
+          <a:prstGeom prst="rect">
+            <a:avLst/>
+          </a:prstGeom>
+          <a:noFill/>
+        </p:spPr>
+        <p:txBody>
+          <a:bodyPr wrap="square" anchor="t" lIns="0" rIns="0" tIns="0" bIns="0">
+            <a:spAutoFit/>
+          </a:bodyPr>
+          <a:lstStyle/>
+          <a:p>
+            <a:pPr algn="l">
+              <a:lnSpc>
+                <a:spcPct val="100000"/>
+              </a:lnSpc>
+            </a:pPr>
+            <a:r>
+              <a:rPr sz="875" b="0">
+                <a:solidFill>
+                  <a:srgbClr val="555555"/>
+                </a:solidFill>
+                <a:latin typeface="Arial"/>
+                <a:ea typeface="Arial"/>
+              </a:rPr>
+              <a:t>JESD218 유지</a:t>
+            </a:r>
+          </a:p>
+        </p:txBody>
+      </p:sp>
+      <p:sp>
+        <p:nvSpPr>
+          <p:cNvPr id="48" name="TextBox 47"/>
+          <p:cNvSpPr txBox="1"/>
+          <p:nvPr/>
+        </p:nvSpPr>
+        <p:spPr>
+          <a:xfrm>
+            <a:off x="11556630" y="5705856"/>
+            <a:ext cx="3393809" cy="219456"/>
           </a:xfrm>
           <a:prstGeom prst="rect">
             <a:avLst/>
@@ -5275,21 +5435,61 @@
                 <a:latin typeface="Arial"/>
                 <a:ea typeface="Arial"/>
               </a:rPr>
-              <a:t>2단계  SSD → 호스트  (2022~)</a:t>
-            </a:r>
-          </a:p>
-        </p:txBody>
-      </p:sp>
-      <p:sp>
-        <p:nvSpPr>
-          <p:cNvPr id="45" name="Rectangle 44"/>
+              <a:t>2단계  SSD 단독 워크로드 최적화  (2014~2019)</a:t>
+            </a:r>
+          </a:p>
+        </p:txBody>
+      </p:sp>
+      <p:sp>
+        <p:nvSpPr>
+          <p:cNvPr id="49" name="TextBox 48"/>
+          <p:cNvSpPr txBox="1"/>
+          <p:nvPr/>
+        </p:nvSpPr>
+        <p:spPr>
+          <a:xfrm>
+            <a:off x="14950439" y="5705856"/>
+            <a:ext cx="2377440" cy="219456"/>
+          </a:xfrm>
+          <a:prstGeom prst="rect">
+            <a:avLst/>
+          </a:prstGeom>
+          <a:noFill/>
+        </p:spPr>
+        <p:txBody>
+          <a:bodyPr wrap="square" anchor="t" lIns="0" rIns="0" tIns="0" bIns="0">
+            <a:spAutoFit/>
+          </a:bodyPr>
+          <a:lstStyle/>
+          <a:p>
+            <a:pPr algn="r">
+              <a:lnSpc>
+                <a:spcPct val="112000"/>
+              </a:lnSpc>
+            </a:pPr>
+            <a:r>
+              <a:rPr sz="1050" b="1">
+                <a:solidFill>
+                  <a:srgbClr val="8A8A8A"/>
+                </a:solidFill>
+                <a:latin typeface="Arial"/>
+                <a:ea typeface="Arial"/>
+              </a:rPr>
+              <a:t>DWPD 요구 미충족 · 부분 성공</a:t>
+            </a:r>
+          </a:p>
+        </p:txBody>
+      </p:sp>
+      <p:sp>
+        <p:nvSpPr>
+          <p:cNvPr id="50" name="Rectangle 49"/>
           <p:cNvSpPr/>
           <p:nvPr/>
         </p:nvSpPr>
         <p:spPr>
           <a:xfrm>
-            <a:off x="11556630" y="6016752"/>
-            <a:ext cx="1716485" cy="731520"/>
+            <a:off x="11556630" y="5980176"/>
+            <a:ext cx="1716485" cy="786384"/>
           </a:xfrm>
           <a:prstGeom prst="rect">
             <a:avLst/>
@@ -5328,14 +5528,14 @@
       </p:sp>
       <p:sp>
         <p:nvSpPr>
-          <p:cNvPr id="46" name="TextBox 45"/>
+          <p:cNvPr id="51" name="TextBox 50"/>
           <p:cNvSpPr txBox="1"/>
           <p:nvPr/>
         </p:nvSpPr>
         <p:spPr>
           <a:xfrm>
-            <a:off x="11648070" y="6089904"/>
-            <a:ext cx="1533605" cy="237744"/>
+            <a:off x="11648070" y="6035040"/>
+            <a:ext cx="1533605" cy="201168"/>
           </a:xfrm>
           <a:prstGeom prst="rect">
             <a:avLst/>
@@ -5354,28 +5554,28 @@
               </a:lnSpc>
             </a:pPr>
             <a:r>
-              <a:rPr sz="1050" b="0">
+              <a:rPr sz="975" b="0">
                 <a:solidFill>
                   <a:srgbClr val="8A8A8A"/>
                 </a:solidFill>
                 <a:latin typeface="Arial"/>
                 <a:ea typeface="Arial"/>
               </a:rPr>
-              <a:t>셀 · SSD · DWPD 0.4</a:t>
-            </a:r>
-          </a:p>
-        </p:txBody>
-      </p:sp>
-      <p:sp>
-        <p:nvSpPr>
-          <p:cNvPr id="47" name="TextBox 46"/>
+              <a:t>셀 · SSD</a:t>
+            </a:r>
+          </a:p>
+        </p:txBody>
+      </p:sp>
+      <p:sp>
+        <p:nvSpPr>
+          <p:cNvPr id="52" name="TextBox 51"/>
           <p:cNvSpPr txBox="1"/>
           <p:nvPr/>
         </p:nvSpPr>
         <p:spPr>
           <a:xfrm>
-            <a:off x="11648070" y="6327648"/>
-            <a:ext cx="1533605" cy="347472"/>
+            <a:off x="11648070" y="6227064"/>
+            <a:ext cx="1533605" cy="237744"/>
           </a:xfrm>
           <a:prstGeom prst="rect">
             <a:avLst/>
@@ -5383,7 +5583,7 @@
           <a:noFill/>
         </p:spPr>
         <p:txBody>
-          <a:bodyPr wrap="square" anchor="ctr" lIns="0" rIns="0" tIns="0" bIns="0">
+          <a:bodyPr wrap="square" anchor="t" lIns="0" rIns="0" tIns="0" bIns="0">
             <a:spAutoFit/>
           </a:bodyPr>
           <a:lstStyle/>
@@ -5408,13 +5608,53 @@
       </p:sp>
       <p:sp>
         <p:nvSpPr>
-          <p:cNvPr id="48" name="Right Arrow 47"/>
+          <p:cNvPr id="53" name="TextBox 52"/>
+          <p:cNvSpPr txBox="1"/>
+          <p:nvPr/>
+        </p:nvSpPr>
+        <p:spPr>
+          <a:xfrm>
+            <a:off x="11648070" y="6464808"/>
+            <a:ext cx="1533605" cy="274320"/>
+          </a:xfrm>
+          <a:prstGeom prst="rect">
+            <a:avLst/>
+          </a:prstGeom>
+          <a:noFill/>
+        </p:spPr>
+        <p:txBody>
+          <a:bodyPr wrap="square" anchor="t" lIns="0" rIns="0" tIns="0" bIns="0">
+            <a:spAutoFit/>
+          </a:bodyPr>
+          <a:lstStyle/>
+          <a:p>
+            <a:pPr algn="l">
+              <a:lnSpc>
+                <a:spcPct val="100000"/>
+              </a:lnSpc>
+            </a:pPr>
+            <a:r>
+              <a:rPr sz="875" b="0">
+                <a:solidFill>
+                  <a:srgbClr val="555555"/>
+                </a:solidFill>
+                <a:latin typeface="Arial"/>
+                <a:ea typeface="Arial"/>
+              </a:rPr>
+              <a:t>정격 DWPD 0.4</a:t>
+            </a:r>
+          </a:p>
+        </p:txBody>
+      </p:sp>
+      <p:sp>
+        <p:nvSpPr>
+          <p:cNvPr id="54" name="Right Arrow 53"/>
           <p:cNvSpPr/>
           <p:nvPr/>
         </p:nvSpPr>
         <p:spPr>
           <a:xfrm>
-            <a:off x="13318836" y="6291072"/>
+            <a:off x="13318836" y="6281928"/>
             <a:ext cx="219456" cy="182880"/>
           </a:xfrm>
           <a:prstGeom prst="rightArrow">
@@ -5452,20 +5692,20 @@
       </p:sp>
       <p:sp>
         <p:nvSpPr>
-          <p:cNvPr id="49" name="Rectangle 48"/>
+          <p:cNvPr id="55" name="Rectangle 54"/>
           <p:cNvSpPr/>
           <p:nvPr/>
         </p:nvSpPr>
         <p:spPr>
           <a:xfrm>
-            <a:off x="13584012" y="6016752"/>
-            <a:ext cx="1716485" cy="731520"/>
+            <a:off x="13584012" y="5980176"/>
+            <a:ext cx="1716485" cy="786384"/>
           </a:xfrm>
           <a:prstGeom prst="rect">
             <a:avLst/>
           </a:prstGeom>
           <a:solidFill>
-            <a:srgbClr val="1428A0"/>
+            <a:srgbClr val="AAB8E8"/>
           </a:solidFill>
           <a:ln>
             <a:noFill/>
@@ -5496,14 +5736,14 @@
       </p:sp>
       <p:sp>
         <p:nvSpPr>
-          <p:cNvPr id="50" name="TextBox 49"/>
+          <p:cNvPr id="56" name="TextBox 55"/>
           <p:cNvSpPr txBox="1"/>
           <p:nvPr/>
         </p:nvSpPr>
         <p:spPr>
           <a:xfrm>
-            <a:off x="13675452" y="6089904"/>
-            <a:ext cx="1533605" cy="237744"/>
+            <a:off x="13675452" y="6035040"/>
+            <a:ext cx="1533605" cy="201168"/>
           </a:xfrm>
           <a:prstGeom prst="rect">
             <a:avLst/>
@@ -5522,28 +5762,28 @@
               </a:lnSpc>
             </a:pPr>
             <a:r>
-              <a:rPr sz="1050" b="0">
-                <a:solidFill>
-                  <a:srgbClr val="FFFFFF"/>
+              <a:rPr sz="975" b="0">
+                <a:solidFill>
+                  <a:srgbClr val="1A1A1A"/>
                 </a:solidFill>
                 <a:latin typeface="Arial"/>
                 <a:ea typeface="Arial"/>
               </a:rPr>
-              <a:t>호스트 · 앱</a:t>
-            </a:r>
-          </a:p>
-        </p:txBody>
-      </p:sp>
-      <p:sp>
-        <p:nvSpPr>
-          <p:cNvPr id="51" name="TextBox 50"/>
+              <a:t>SSD · 드라이버</a:t>
+            </a:r>
+          </a:p>
+        </p:txBody>
+      </p:sp>
+      <p:sp>
+        <p:nvSpPr>
+          <p:cNvPr id="57" name="TextBox 56"/>
           <p:cNvSpPr txBox="1"/>
           <p:nvPr/>
         </p:nvSpPr>
         <p:spPr>
           <a:xfrm>
-            <a:off x="13675452" y="6327648"/>
-            <a:ext cx="1533605" cy="347472"/>
+            <a:off x="13675452" y="6227064"/>
+            <a:ext cx="1533605" cy="237744"/>
           </a:xfrm>
           <a:prstGeom prst="rect">
             <a:avLst/>
@@ -5551,7 +5791,7 @@
           <a:noFill/>
         </p:spPr>
         <p:txBody>
-          <a:bodyPr wrap="square" anchor="ctr" lIns="0" rIns="0" tIns="0" bIns="0">
+          <a:bodyPr wrap="square" anchor="t" lIns="0" rIns="0" tIns="0" bIns="0">
             <a:spAutoFit/>
           </a:bodyPr>
           <a:lstStyle/>
@@ -5564,32 +5804,72 @@
             <a:r>
               <a:rPr sz="1200" b="1">
                 <a:solidFill>
-                  <a:srgbClr val="FFFFFF"/>
+                  <a:srgbClr val="1A1A1A"/>
                 </a:solidFill>
                 <a:latin typeface="Arial"/>
                 <a:ea typeface="Arial"/>
               </a:rPr>
-              <a:t>WAF 3.2 → 1.0</a:t>
-            </a:r>
-          </a:p>
-        </p:txBody>
-      </p:sp>
-      <p:sp>
-        <p:nvSpPr>
-          <p:cNvPr id="52" name="Right Arrow 51"/>
+              <a:t>QoS · 성능 개선</a:t>
+            </a:r>
+          </a:p>
+        </p:txBody>
+      </p:sp>
+      <p:sp>
+        <p:nvSpPr>
+          <p:cNvPr id="58" name="TextBox 57"/>
+          <p:cNvSpPr txBox="1"/>
+          <p:nvPr/>
+        </p:nvSpPr>
+        <p:spPr>
+          <a:xfrm>
+            <a:off x="13675452" y="6464808"/>
+            <a:ext cx="1533605" cy="274320"/>
+          </a:xfrm>
+          <a:prstGeom prst="rect">
+            <a:avLst/>
+          </a:prstGeom>
+          <a:noFill/>
+        </p:spPr>
+        <p:txBody>
+          <a:bodyPr wrap="square" anchor="t" lIns="0" rIns="0" tIns="0" bIns="0">
+            <a:spAutoFit/>
+          </a:bodyPr>
+          <a:lstStyle/>
+          <a:p>
+            <a:pPr algn="l">
+              <a:lnSpc>
+                <a:spcPct val="100000"/>
+              </a:lnSpc>
+            </a:pPr>
+            <a:r>
+              <a:rPr sz="875" b="0">
+                <a:solidFill>
+                  <a:srgbClr val="555555"/>
+                </a:solidFill>
+                <a:latin typeface="Arial"/>
+                <a:ea typeface="Arial"/>
+              </a:rPr>
+              <a:t>핫/콜드 추정 · 스트림 · IO 결정성 → WAF ≈ 3 유지</a:t>
+            </a:r>
+          </a:p>
+        </p:txBody>
+      </p:sp>
+      <p:sp>
+        <p:nvSpPr>
+          <p:cNvPr id="59" name="Right Arrow 58"/>
           <p:cNvSpPr/>
           <p:nvPr/>
         </p:nvSpPr>
         <p:spPr>
           <a:xfrm>
-            <a:off x="15346218" y="6291072"/>
+            <a:off x="15346218" y="6281928"/>
             <a:ext cx="219456" cy="182880"/>
           </a:xfrm>
           <a:prstGeom prst="rightArrow">
             <a:avLst/>
           </a:prstGeom>
           <a:solidFill>
-            <a:srgbClr val="1428A0"/>
+            <a:srgbClr val="AAB8E8"/>
           </a:solidFill>
           <a:ln>
             <a:noFill/>
@@ -5620,24 +5900,24 @@
       </p:sp>
       <p:sp>
         <p:nvSpPr>
-          <p:cNvPr id="53" name="Rectangle 52"/>
+          <p:cNvPr id="60" name="Rectangle 59"/>
           <p:cNvSpPr/>
           <p:nvPr/>
         </p:nvSpPr>
         <p:spPr>
           <a:xfrm>
-            <a:off x="15611394" y="6016752"/>
-            <a:ext cx="1716485" cy="731520"/>
+            <a:off x="15611394" y="5980176"/>
+            <a:ext cx="1716485" cy="786384"/>
           </a:xfrm>
           <a:prstGeom prst="rect">
             <a:avLst/>
           </a:prstGeom>
           <a:solidFill>
-            <a:srgbClr val="F4F6FC"/>
+            <a:srgbClr val="FFFFFF"/>
           </a:solidFill>
           <a:ln w="12700">
             <a:solidFill>
-              <a:srgbClr val="AAB8E8"/>
+              <a:srgbClr val="8A8A8A"/>
             </a:solidFill>
           </a:ln>
           <a:effectLst/>
@@ -5666,14 +5946,14 @@
       </p:sp>
       <p:sp>
         <p:nvSpPr>
-          <p:cNvPr id="54" name="TextBox 53"/>
+          <p:cNvPr id="61" name="TextBox 60"/>
           <p:cNvSpPr txBox="1"/>
           <p:nvPr/>
         </p:nvSpPr>
         <p:spPr>
           <a:xfrm>
-            <a:off x="15702834" y="6089904"/>
-            <a:ext cx="1533605" cy="237744"/>
+            <a:off x="15702834" y="6035040"/>
+            <a:ext cx="1533605" cy="201168"/>
           </a:xfrm>
           <a:prstGeom prst="rect">
             <a:avLst/>
@@ -5692,7 +5972,7 @@
               </a:lnSpc>
             </a:pPr>
             <a:r>
-              <a:rPr sz="1050" b="0">
+              <a:rPr sz="975" b="0">
                 <a:solidFill>
                   <a:srgbClr val="8A8A8A"/>
                 </a:solidFill>
@@ -5706,14 +5986,14 @@
       </p:sp>
       <p:sp>
         <p:nvSpPr>
-          <p:cNvPr id="55" name="TextBox 54"/>
+          <p:cNvPr id="62" name="TextBox 61"/>
           <p:cNvSpPr txBox="1"/>
           <p:nvPr/>
         </p:nvSpPr>
         <p:spPr>
           <a:xfrm>
-            <a:off x="15702834" y="6327648"/>
-            <a:ext cx="1533605" cy="347472"/>
+            <a:off x="15702834" y="6227064"/>
+            <a:ext cx="1533605" cy="237744"/>
           </a:xfrm>
           <a:prstGeom prst="rect">
             <a:avLst/>
@@ -5721,7 +6001,7 @@
           <a:noFill/>
         </p:spPr>
         <p:txBody>
-          <a:bodyPr wrap="square" anchor="ctr" lIns="0" rIns="0" tIns="0" bIns="0">
+          <a:bodyPr wrap="square" anchor="t" lIns="0" rIns="0" tIns="0" bIns="0">
             <a:spAutoFit/>
           </a:bodyPr>
           <a:lstStyle/>
@@ -5734,26 +6014,66 @@
             <a:r>
               <a:rPr sz="1200" b="1">
                 <a:solidFill>
-                  <a:srgbClr val="1A1A1A"/>
+                  <a:srgbClr val="555555"/>
                 </a:solidFill>
                 <a:latin typeface="Arial"/>
                 <a:ea typeface="Arial"/>
               </a:rPr>
-              <a:t>DWPD 요구 유지</a:t>
-            </a:r>
-          </a:p>
-        </p:txBody>
-      </p:sp>
-      <p:sp>
-        <p:nvSpPr>
-          <p:cNvPr id="56" name="TextBox 55"/>
+              <a:t>DWPD 요구 미충족</a:t>
+            </a:r>
+          </a:p>
+        </p:txBody>
+      </p:sp>
+      <p:sp>
+        <p:nvSpPr>
+          <p:cNvPr id="63" name="TextBox 62"/>
           <p:cNvSpPr txBox="1"/>
           <p:nvPr/>
         </p:nvSpPr>
         <p:spPr>
           <a:xfrm>
-            <a:off x="11556630" y="6967728"/>
-            <a:ext cx="5771249" cy="219456"/>
+            <a:off x="15702834" y="6464808"/>
+            <a:ext cx="1533605" cy="274320"/>
+          </a:xfrm>
+          <a:prstGeom prst="rect">
+            <a:avLst/>
+          </a:prstGeom>
+          <a:noFill/>
+        </p:spPr>
+        <p:txBody>
+          <a:bodyPr wrap="square" anchor="t" lIns="0" rIns="0" tIns="0" bIns="0">
+            <a:spAutoFit/>
+          </a:bodyPr>
+          <a:lstStyle/>
+          <a:p>
+            <a:pPr algn="l">
+              <a:lnSpc>
+                <a:spcPct val="100000"/>
+              </a:lnSpc>
+            </a:pPr>
+            <a:r>
+              <a:rPr sz="875" b="0">
+                <a:solidFill>
+                  <a:srgbClr val="8A8A8A"/>
+                </a:solidFill>
+                <a:latin typeface="Arial"/>
+                <a:ea typeface="Arial"/>
+              </a:rPr>
+              <a:t>격차 10~40배</a:t>
+            </a:r>
+          </a:p>
+        </p:txBody>
+      </p:sp>
+      <p:sp>
+        <p:nvSpPr>
+          <p:cNvPr id="64" name="TextBox 63"/>
+          <p:cNvSpPr txBox="1"/>
+          <p:nvPr/>
+        </p:nvSpPr>
+        <p:spPr>
+          <a:xfrm>
+            <a:off x="11556630" y="6949440"/>
+            <a:ext cx="3393809" cy="219456"/>
           </a:xfrm>
           <a:prstGeom prst="rect">
             <a:avLst/>
@@ -5779,21 +6099,61 @@
                 <a:latin typeface="Arial"/>
                 <a:ea typeface="Arial"/>
               </a:rPr>
-              <a:t>3단계  호스트 → 고객 시스템 공동 설계  (본 덱 2~5장)</a:t>
-            </a:r>
-          </a:p>
-        </p:txBody>
-      </p:sp>
-      <p:sp>
-        <p:nvSpPr>
-          <p:cNvPr id="57" name="Rectangle 56"/>
+              <a:t>3단계  호스트 시스템 공동 설계  (2022~, 본 덱)</a:t>
+            </a:r>
+          </a:p>
+        </p:txBody>
+      </p:sp>
+      <p:sp>
+        <p:nvSpPr>
+          <p:cNvPr id="65" name="TextBox 64"/>
+          <p:cNvSpPr txBox="1"/>
+          <p:nvPr/>
+        </p:nvSpPr>
+        <p:spPr>
+          <a:xfrm>
+            <a:off x="14950439" y="6949440"/>
+            <a:ext cx="2377440" cy="219456"/>
+          </a:xfrm>
+          <a:prstGeom prst="rect">
+            <a:avLst/>
+          </a:prstGeom>
+          <a:noFill/>
+        </p:spPr>
+        <p:txBody>
+          <a:bodyPr wrap="square" anchor="t" lIns="0" rIns="0" tIns="0" bIns="0">
+            <a:spAutoFit/>
+          </a:bodyPr>
+          <a:lstStyle/>
+          <a:p>
+            <a:pPr algn="r">
+              <a:lnSpc>
+                <a:spcPct val="112000"/>
+              </a:lnSpc>
+            </a:pPr>
+            <a:r>
+              <a:rPr sz="1050" b="1">
+                <a:solidFill>
+                  <a:srgbClr val="1428A0"/>
+                </a:solidFill>
+                <a:latin typeface="Arial"/>
+                <a:ea typeface="Arial"/>
+              </a:rPr>
+              <a:t>DWPD 요구 충족 · 유일한 경로</a:t>
+            </a:r>
+          </a:p>
+        </p:txBody>
+      </p:sp>
+      <p:sp>
+        <p:nvSpPr>
+          <p:cNvPr id="66" name="Rectangle 65"/>
           <p:cNvSpPr/>
           <p:nvPr/>
         </p:nvSpPr>
         <p:spPr>
           <a:xfrm>
-            <a:off x="11556630" y="7260336"/>
-            <a:ext cx="1716485" cy="731520"/>
+            <a:off x="11556630" y="7223760"/>
+            <a:ext cx="1716485" cy="786384"/>
           </a:xfrm>
           <a:prstGeom prst="rect">
             <a:avLst/>
@@ -5832,14 +6192,14 @@
       </p:sp>
       <p:sp>
         <p:nvSpPr>
-          <p:cNvPr id="58" name="TextBox 57"/>
+          <p:cNvPr id="67" name="TextBox 66"/>
           <p:cNvSpPr txBox="1"/>
           <p:nvPr/>
         </p:nvSpPr>
         <p:spPr>
           <a:xfrm>
-            <a:off x="11648070" y="7333488"/>
-            <a:ext cx="1533605" cy="237744"/>
+            <a:off x="11648070" y="7278624"/>
+            <a:ext cx="1533605" cy="201168"/>
           </a:xfrm>
           <a:prstGeom prst="rect">
             <a:avLst/>
@@ -5858,28 +6218,28 @@
               </a:lnSpc>
             </a:pPr>
             <a:r>
-              <a:rPr sz="1050" b="0">
+              <a:rPr sz="975" b="0">
                 <a:solidFill>
                   <a:srgbClr val="8A8A8A"/>
                 </a:solidFill>
                 <a:latin typeface="Arial"/>
                 <a:ea typeface="Arial"/>
               </a:rPr>
-              <a:t>KV 캐시 관리자</a:t>
-            </a:r>
-          </a:p>
-        </p:txBody>
-      </p:sp>
-      <p:sp>
-        <p:nvSpPr>
-          <p:cNvPr id="59" name="TextBox 58"/>
+              <a:t>호스트 · 앱</a:t>
+            </a:r>
+          </a:p>
+        </p:txBody>
+      </p:sp>
+      <p:sp>
+        <p:nvSpPr>
+          <p:cNvPr id="68" name="TextBox 67"/>
           <p:cNvSpPr txBox="1"/>
           <p:nvPr/>
         </p:nvSpPr>
         <p:spPr>
           <a:xfrm>
-            <a:off x="11648070" y="7571232"/>
-            <a:ext cx="1533605" cy="347472"/>
+            <a:off x="11648070" y="7470648"/>
+            <a:ext cx="1533605" cy="237744"/>
           </a:xfrm>
           <a:prstGeom prst="rect">
             <a:avLst/>
@@ -5887,7 +6247,7 @@
           <a:noFill/>
         </p:spPr>
         <p:txBody>
-          <a:bodyPr wrap="square" anchor="ctr" lIns="0" rIns="0" tIns="0" bIns="0">
+          <a:bodyPr wrap="square" anchor="t" lIns="0" rIns="0" tIns="0" bIns="0">
             <a:spAutoFit/>
           </a:bodyPr>
           <a:lstStyle/>
@@ -5905,20 +6265,60 @@
                 <a:latin typeface="Arial"/>
                 <a:ea typeface="Arial"/>
               </a:rPr>
-              <a:t>배치 규격 미정의</a:t>
-            </a:r>
-          </a:p>
-        </p:txBody>
-      </p:sp>
-      <p:sp>
-        <p:nvSpPr>
-          <p:cNvPr id="60" name="Right Arrow 59"/>
+              <a:t>데이터 수명 지정</a:t>
+            </a:r>
+          </a:p>
+        </p:txBody>
+      </p:sp>
+      <p:sp>
+        <p:nvSpPr>
+          <p:cNvPr id="69" name="TextBox 68"/>
+          <p:cNvSpPr txBox="1"/>
+          <p:nvPr/>
+        </p:nvSpPr>
+        <p:spPr>
+          <a:xfrm>
+            <a:off x="11648070" y="7708392"/>
+            <a:ext cx="1533605" cy="274320"/>
+          </a:xfrm>
+          <a:prstGeom prst="rect">
+            <a:avLst/>
+          </a:prstGeom>
+          <a:noFill/>
+        </p:spPr>
+        <p:txBody>
+          <a:bodyPr wrap="square" anchor="t" lIns="0" rIns="0" tIns="0" bIns="0">
+            <a:spAutoFit/>
+          </a:bodyPr>
+          <a:lstStyle/>
+          <a:p>
+            <a:pPr algn="l">
+              <a:lnSpc>
+                <a:spcPct val="100000"/>
+              </a:lnSpc>
+            </a:pPr>
+            <a:r>
+              <a:rPr sz="875" b="0">
+                <a:solidFill>
+                  <a:srgbClr val="555555"/>
+                </a:solidFill>
+                <a:latin typeface="Arial"/>
+                <a:ea typeface="Arial"/>
+              </a:rPr>
+              <a:t>배치 표준 · 캐시 관리자 정책</a:t>
+            </a:r>
+          </a:p>
+        </p:txBody>
+      </p:sp>
+      <p:sp>
+        <p:nvSpPr>
+          <p:cNvPr id="70" name="Right Arrow 69"/>
           <p:cNvSpPr/>
           <p:nvPr/>
         </p:nvSpPr>
         <p:spPr>
           <a:xfrm>
-            <a:off x="13318836" y="7534656"/>
+            <a:off x="13318836" y="7525512"/>
             <a:ext cx="219456" cy="182880"/>
           </a:xfrm>
           <a:prstGeom prst="rightArrow">
@@ -5956,14 +6356,14 @@
       </p:sp>
       <p:sp>
         <p:nvSpPr>
-          <p:cNvPr id="61" name="Rectangle 60"/>
+          <p:cNvPr id="71" name="Rectangle 70"/>
           <p:cNvSpPr/>
           <p:nvPr/>
         </p:nvSpPr>
         <p:spPr>
           <a:xfrm>
-            <a:off x="13584012" y="7260336"/>
-            <a:ext cx="1716485" cy="731520"/>
+            <a:off x="13584012" y="7223760"/>
+            <a:ext cx="1716485" cy="786384"/>
           </a:xfrm>
           <a:prstGeom prst="rect">
             <a:avLst/>
@@ -6000,14 +6400,14 @@
       </p:sp>
       <p:sp>
         <p:nvSpPr>
-          <p:cNvPr id="62" name="TextBox 61"/>
+          <p:cNvPr id="72" name="TextBox 71"/>
           <p:cNvSpPr txBox="1"/>
           <p:nvPr/>
         </p:nvSpPr>
         <p:spPr>
           <a:xfrm>
-            <a:off x="13675452" y="7333488"/>
-            <a:ext cx="1533605" cy="237744"/>
+            <a:off x="13675452" y="7278624"/>
+            <a:ext cx="1533605" cy="201168"/>
           </a:xfrm>
           <a:prstGeom prst="rect">
             <a:avLst/>
@@ -6026,28 +6426,28 @@
               </a:lnSpc>
             </a:pPr>
             <a:r>
-              <a:rPr sz="1050" b="0">
+              <a:rPr sz="975" b="0">
                 <a:solidFill>
                   <a:srgbClr val="FFFFFF"/>
                 </a:solidFill>
                 <a:latin typeface="Arial"/>
                 <a:ea typeface="Arial"/>
               </a:rPr>
-              <a:t>삼성 · FDE · SCA</a:t>
-            </a:r>
-          </a:p>
-        </p:txBody>
-      </p:sp>
-      <p:sp>
-        <p:nvSpPr>
-          <p:cNvPr id="63" name="TextBox 62"/>
+              <a:t>삼성 · 고객 공동 설계</a:t>
+            </a:r>
+          </a:p>
+        </p:txBody>
+      </p:sp>
+      <p:sp>
+        <p:nvSpPr>
+          <p:cNvPr id="73" name="TextBox 72"/>
           <p:cNvSpPr txBox="1"/>
           <p:nvPr/>
         </p:nvSpPr>
         <p:spPr>
           <a:xfrm>
-            <a:off x="13675452" y="7571232"/>
-            <a:ext cx="1533605" cy="347472"/>
+            <a:off x="13675452" y="7470648"/>
+            <a:ext cx="1533605" cy="237744"/>
           </a:xfrm>
           <a:prstGeom prst="rect">
             <a:avLst/>
@@ -6055,7 +6455,7 @@
           <a:noFill/>
         </p:spPr>
         <p:txBody>
-          <a:bodyPr wrap="square" anchor="ctr" lIns="0" rIns="0" tIns="0" bIns="0">
+          <a:bodyPr wrap="square" anchor="t" lIns="0" rIns="0" tIns="0" bIns="0">
             <a:spAutoFit/>
           </a:bodyPr>
           <a:lstStyle/>
@@ -6073,20 +6473,60 @@
                 <a:latin typeface="Arial"/>
                 <a:ea typeface="Arial"/>
               </a:rPr>
-              <a:t>규격 공동 정의</a:t>
-            </a:r>
-          </a:p>
-        </p:txBody>
-      </p:sp>
-      <p:sp>
-        <p:nvSpPr>
-          <p:cNvPr id="64" name="Right Arrow 63"/>
+              <a:t>WAF 3.2 → 1.0</a:t>
+            </a:r>
+          </a:p>
+        </p:txBody>
+      </p:sp>
+      <p:sp>
+        <p:nvSpPr>
+          <p:cNvPr id="74" name="TextBox 73"/>
+          <p:cNvSpPr txBox="1"/>
+          <p:nvPr/>
+        </p:nvSpPr>
+        <p:spPr>
+          <a:xfrm>
+            <a:off x="13675452" y="7708392"/>
+            <a:ext cx="1533605" cy="274320"/>
+          </a:xfrm>
+          <a:prstGeom prst="rect">
+            <a:avLst/>
+          </a:prstGeom>
+          <a:noFill/>
+        </p:spPr>
+        <p:txBody>
+          <a:bodyPr wrap="square" anchor="t" lIns="0" rIns="0" tIns="0" bIns="0">
+            <a:spAutoFit/>
+          </a:bodyPr>
+          <a:lstStyle/>
+          <a:p>
+            <a:pPr algn="l">
+              <a:lnSpc>
+                <a:spcPct val="100000"/>
+              </a:lnSpc>
+            </a:pPr>
+            <a:r>
+              <a:rPr sz="875" b="0">
+                <a:solidFill>
+                  <a:srgbClr val="FFFFFF"/>
+                </a:solidFill>
+                <a:latin typeface="Arial"/>
+                <a:ea typeface="Arial"/>
+              </a:rPr>
+              <a:t>FDE · SCA · 유효 DWPD ×3.1</a:t>
+            </a:r>
+          </a:p>
+        </p:txBody>
+      </p:sp>
+      <p:sp>
+        <p:nvSpPr>
+          <p:cNvPr id="75" name="Right Arrow 74"/>
           <p:cNvSpPr/>
           <p:nvPr/>
         </p:nvSpPr>
         <p:spPr>
           <a:xfrm>
-            <a:off x="15346218" y="7534656"/>
+            <a:off x="15346218" y="7525512"/>
             <a:ext cx="219456" cy="182880"/>
           </a:xfrm>
           <a:prstGeom prst="rightArrow">
@@ -6124,14 +6564,14 @@
       </p:sp>
       <p:sp>
         <p:nvSpPr>
-          <p:cNvPr id="65" name="Rectangle 64"/>
+          <p:cNvPr id="76" name="Rectangle 75"/>
           <p:cNvSpPr/>
           <p:nvPr/>
         </p:nvSpPr>
         <p:spPr>
           <a:xfrm>
-            <a:off x="15611394" y="7260336"/>
-            <a:ext cx="1716485" cy="731520"/>
+            <a:off x="15611394" y="7223760"/>
+            <a:ext cx="1716485" cy="786384"/>
           </a:xfrm>
           <a:prstGeom prst="rect">
             <a:avLst/>
@@ -6170,14 +6610,14 @@
       </p:sp>
       <p:sp>
         <p:nvSpPr>
-          <p:cNvPr id="66" name="TextBox 65"/>
+          <p:cNvPr id="77" name="TextBox 76"/>
           <p:cNvSpPr txBox="1"/>
           <p:nvPr/>
         </p:nvSpPr>
         <p:spPr>
           <a:xfrm>
-            <a:off x="15702834" y="7333488"/>
-            <a:ext cx="1533605" cy="237744"/>
+            <a:off x="15702834" y="7278624"/>
+            <a:ext cx="1533605" cy="201168"/>
           </a:xfrm>
           <a:prstGeom prst="rect">
             <a:avLst/>
@@ -6196,7 +6636,7 @@
               </a:lnSpc>
             </a:pPr>
             <a:r>
-              <a:rPr sz="1050" b="0">
+              <a:rPr sz="975" b="0">
                 <a:solidFill>
                   <a:srgbClr val="8A8A8A"/>
                 </a:solidFill>
@@ -6210,14 +6650,14 @@
       </p:sp>
       <p:sp>
         <p:nvSpPr>
-          <p:cNvPr id="67" name="TextBox 66"/>
+          <p:cNvPr id="78" name="TextBox 77"/>
           <p:cNvSpPr txBox="1"/>
           <p:nvPr/>
         </p:nvSpPr>
         <p:spPr>
           <a:xfrm>
-            <a:off x="15702834" y="7571232"/>
-            <a:ext cx="1533605" cy="347472"/>
+            <a:off x="15702834" y="7470648"/>
+            <a:ext cx="1533605" cy="237744"/>
           </a:xfrm>
           <a:prstGeom prst="rect">
             <a:avLst/>
@@ -6225,7 +6665,7 @@
           <a:noFill/>
         </p:spPr>
         <p:txBody>
-          <a:bodyPr wrap="square" anchor="ctr" lIns="0" rIns="0" tIns="0" bIns="0">
+          <a:bodyPr wrap="square" anchor="t" lIns="0" rIns="0" tIns="0" bIns="0">
             <a:spAutoFit/>
           </a:bodyPr>
           <a:lstStyle/>
@@ -6243,14 +6683,54 @@
                 <a:latin typeface="Arial"/>
                 <a:ea typeface="Arial"/>
               </a:rPr>
-              <a:t>DWPD · TCO 보증</a:t>
-            </a:r>
-          </a:p>
-        </p:txBody>
-      </p:sp>
-      <p:sp>
-        <p:nvSpPr>
-          <p:cNvPr id="68" name="Rectangle 67"/>
+              <a:t>DWPD 요구 충족</a:t>
+            </a:r>
+          </a:p>
+        </p:txBody>
+      </p:sp>
+      <p:sp>
+        <p:nvSpPr>
+          <p:cNvPr id="79" name="TextBox 78"/>
+          <p:cNvSpPr txBox="1"/>
+          <p:nvPr/>
+        </p:nvSpPr>
+        <p:spPr>
+          <a:xfrm>
+            <a:off x="15702834" y="7708392"/>
+            <a:ext cx="1533605" cy="274320"/>
+          </a:xfrm>
+          <a:prstGeom prst="rect">
+            <a:avLst/>
+          </a:prstGeom>
+          <a:noFill/>
+        </p:spPr>
+        <p:txBody>
+          <a:bodyPr wrap="square" anchor="t" lIns="0" rIns="0" tIns="0" bIns="0">
+            <a:spAutoFit/>
+          </a:bodyPr>
+          <a:lstStyle/>
+          <a:p>
+            <a:pPr algn="l">
+              <a:lnSpc>
+                <a:spcPct val="100000"/>
+              </a:lnSpc>
+            </a:pPr>
+            <a:r>
+              <a:rPr sz="875" b="0">
+                <a:solidFill>
+                  <a:srgbClr val="555555"/>
+                </a:solidFill>
+                <a:latin typeface="Arial"/>
+                <a:ea typeface="Arial"/>
+              </a:rPr>
+              <a:t>QLC로 정격 내 수명 보증</a:t>
+            </a:r>
+          </a:p>
+        </p:txBody>
+      </p:sp>
+      <p:sp>
+        <p:nvSpPr>
+          <p:cNvPr id="80" name="Rectangle 79"/>
           <p:cNvSpPr/>
           <p:nvPr/>
         </p:nvSpPr>
@@ -6294,7 +6774,7 @@
       </p:sp>
       <p:sp>
         <p:nvSpPr>
-          <p:cNvPr id="69" name="TextBox 68"/>
+          <p:cNvPr id="81" name="TextBox 80"/>
           <p:cNvSpPr txBox="1"/>
           <p:nvPr/>
         </p:nvSpPr>
@@ -6334,7 +6814,7 @@
       </p:sp>
       <p:sp>
         <p:nvSpPr>
-          <p:cNvPr id="70" name="TextBox 69"/>
+          <p:cNvPr id="82" name="TextBox 81"/>
           <p:cNvSpPr txBox="1"/>
           <p:nvPr/>
         </p:nvSpPr>
@@ -6384,14 +6864,14 @@
                 <a:latin typeface="Arial"/>
                 <a:ea typeface="Arial"/>
               </a:rPr>
-              <a:t>QLC의 호스트 협력은 선택이 아니라 산식의 귀결입니다</a:t>
-            </a:r>
-          </a:p>
-        </p:txBody>
-      </p:sp>
-      <p:sp>
-        <p:nvSpPr>
-          <p:cNvPr id="71" name="TextBox 70"/>
+              <a:t>QLC로 요구 DWPD를 충족하는 경로는 호스트 시스템 공동 설계뿐이며, 이는 산식의 귀결입니다</a:t>
+            </a:r>
+          </a:p>
+        </p:txBody>
+      </p:sp>
+      <p:sp>
+        <p:nvSpPr>
+          <p:cNvPr id="83" name="TextBox 82"/>
           <p:cNvSpPr txBox="1"/>
           <p:nvPr/>
         </p:nvSpPr>
@@ -6424,14 +6904,14 @@
                 <a:latin typeface="Arial"/>
                 <a:ea typeface="Arial"/>
               </a:rPr>
-              <a:t>출처: JESD218(UBER·보존), ATP·Kioxia(DWPD 산식·WAF 3), Intel X25-E·S3700·P4510 및 Solidigm P5316 사양(정격 DWPD), Mielke·Cai(RBER), WD ECC/DSP 백서(LDPC 120bit/KB), CacheLib FDP(WAF) · RBER 대표값·환산 DWPD 등급은 보고서 부록 A F28~F35</a:t>
-            </a:r>
-          </a:p>
-        </p:txBody>
-      </p:sp>
-      <p:sp>
-        <p:nvSpPr>
-          <p:cNvPr id="72" name="TextBox 71"/>
+              <a:t>출처: JESD218(UBER·보존), ATP·Kioxia(DWPD 산식·WAF 3), Intel X25-E·S3700·P4510 및 Solidigm P5316 사양(정격 DWPD), Mielke·Cai(RBER), WD ECC/DSP 백서(LDPC 120bit/KB), CacheLib FDP(WAF), HotStorage'14·SYSTOR'17·NVMe 1.4(SSD 단독 최적화) · 등급은 보고서 부록 A F28~F40</a:t>
+            </a:r>
+          </a:p>
+        </p:txBody>
+      </p:sp>
+      <p:sp>
+        <p:nvSpPr>
+          <p:cNvPr id="84" name="TextBox 83"/>
           <p:cNvSpPr txBox="1"/>
           <p:nvPr/>
         </p:nvSpPr>

--- a/outputs/presentation/memory-solution-ladder.pptx
+++ b/outputs/presentation/memory-solution-ladder.pptx
@@ -502,7 +502,7 @@
           <a:lstStyle/>
           <a:p>
             <a:r>
-              <a:t>1장은 QLC의 내구성 격차를 어느 계층이 해소하는가를 네 지표로 답합니다. 왼쪽 차트는 인과 순서입니다. ① 셀의 한계: 비트/셀을 늘릴수록 셀이 견디는 P/E 사이클이 SLC 30K~100K에서 QLC 100~1K로 100배 감소했습니다. ② 컨트롤러의 보상: 같은 기간 RBER은 SLC 10의 -9~-7승에서 QLC 10의 -3~-2승으로 약 백만 배 상승했지만, 고객의 UBER 요구(JESD218: 클라이언트 10의 -15승, 엔터프라이즈 10의 -16승)는 고정이었습니다. 그 격차를 컨트롤러가 ECC로 보상했습니다. 1비트/512B에서 BCH 60비트/KB, LDPC 120비트/KB로 약 60배입니다. 셀은 보존·사이클링·리드 디스터브로 시간에 따라 변하는 산포를 단독으로 보정하지 못하므로, 이것이 NAND에서 SSD로의 1단계 이관이며 완결된 이관입니다. ③ 결과: ECC는 BER을 보상하지만 P/E를 늘리지는 못합니다. 정격 DWPD는 X25-E SLC 17(2008), S3700 eMLC 10(2012), P4510 TLC 0.7(2018), P5316 QLC 0.41(2021), 최신 QLC 0.075~0.6으로 하락했는데, 추론 캐시 계층의 요구는 TLC 수준 1~3, ScaleFlux가 제시한 유효 요구는 7~10입니다. 10~40배 격차입니다. ④ WAF: 2단계는 SSD 진영이 디바이스와 드라이버 안에서 워크로드에 적응하려 한 시도입니다. Multi-stream(2014)·AutoStream(2017)·FTL 핫/콜드 추정·NVMe IO 결정성(NVM Sets·Predictable Latency Mode, 2019)이 여기에 속합니다. 테일 지연 등 QoS와 성능은 개선했으나, 데이터의 수명은 호스트와 애플리케이션만 아는 정보라 디바이스가 완전히 감지할 수 없고, 실 워크로드의 WAF는 3 수준에 머물렀습니다(랜덤 쓰기 3.00, CacheLib 배치 표준 미적용 3.22). 3단계는 호스트 시스템 공동 설계입니다. 호스트가 데이터 수명을 지정(배치 표준)하고 캐시 관리자·애플리케이션 정책까지 함께 설계하면 WAF는 1.03이 됩니다. 68% 감소, 유효 DWPD 3.1배입니다. 오른쪽 위는 산식과 항별 결정 주체입니다. DWPD = P/E × (1+OP) ÷ (WAF × 365 × 년)에서 P/E는 셀, OP는 디바이스, 년과 요구 DWPD는 고객이 결정합니다. P/E가 100배 감소했으므로 남은 보상 변수는 WAF뿐입니다. 오른쪽 아래는 이관의 3단계입니다. 1단계 ECC는 UBER 요구를 충족해 완결됐고, 2단계 SSD 단독 최적화는 QoS·성능을 개선했으나 WAF를 낮추지 못해 DWPD 요구를 충족하지 못했으며, 3단계 호스트 시스템 공동 설계가 WAF를 1로 낮춰 DWPD 요구를 충족합니다. 본 덱 2~5장이 3단계입니다. 결론: QLC로 요구 DWPD를 충족하는 경로는 호스트 시스템 공동 설계뿐이며, 이는 산식의 귀결입니다. 그 규격이 언제 정의되는지가 2장입니다. 근거 등급은 보고서 부록 A F28~F40에 있습니다.</a:t>
+              <a:t>1장은 QLC의 내구성 격차를 어느 계층이 해소하는가를 네 지표로 답합니다. 왼쪽 차트는 인과 순서입니다. ① 셀의 한계: 비트/셀을 늘릴수록 셀이 견디는 P/E 사이클이 SLC 30K~100K에서 QLC 100~1K로 100배 감소했습니다. ② 컨트롤러의 보상: 같은 기간 RBER은 SLC 10의 -9~-7승에서 QLC 10의 -3~-2승으로 약 백만 배 상승했지만, 고객의 UBER 요구(JESD218: 클라이언트 10의 -15승, 엔터프라이즈 10의 -16승)는 고정이었습니다. 그 격차를 컨트롤러가 ECC로 보상했습니다. 1비트/512B에서 BCH 60비트/KB, LDPC 120비트/KB로 약 60배입니다. 셀은 보존·사이클링·리드 디스터브로 시간에 따라 변하는 산포를 단독으로 보정하지 못하므로, 이것이 NAND에서 SSD로의 1단계 이관이며 완결된 이관입니다. ③ 결과: ECC는 BER을 보상하지만 P/E를 늘리지는 못합니다. 정격 DWPD는 X25-E SLC 17(2008), S3700 eMLC 10(2012), P4510 TLC 0.7(2018), P5316 QLC 0.41(2021), 최신 QLC 0.075~0.6으로 하락했는데, 추론 캐시 계층의 요구는 TLC 수준 1~3, ScaleFlux가 제시한 유효 요구는 7~10입니다. 10~40배 격차입니다. ④ WAF: 2단계는 SSD 진영이 디바이스와 드라이버 안에서 워크로드에 적응하려 한 시도입니다. Multi-stream(2014)·AutoStream(2017)·FTL 핫/콜드 추정·NVMe IO 결정성(NVM Sets·Predictable Latency Mode, 2019)이 여기에 속합니다. 테일 지연 등 QoS와 성능은 개선했으나, 데이터의 수명은 호스트와 애플리케이션만 아는 정보라 디바이스가 완전히 감지할 수 없고, 실 워크로드의 WAF는 3 수준에 머물렀습니다(랜덤 쓰기 3.00, CacheLib 배치 표준 미적용 3.22). 3단계는 호스트 시스템 공동 설계입니다. 호스트가 데이터 수명을 지정(배치 표준)하고 캐시 관리자·애플리케이션 정책까지 함께 설계하면 WAF는 1.03이 됩니다. 68% 감소, 유효 DWPD 3.1배입니다. 오른쪽 위는 산식과 항별 결정 주체입니다. DWPD = P/E × (1+OP) ÷ (WAF × 365 × 년)에서 P/E는 셀, OP는 디바이스, 년과 요구 DWPD는 고객이 결정합니다. P/E가 100배 감소했으므로 남은 보상 변수는 WAF뿐입니다. 오른쪽 아래는 이관의 3단계입니다. 1단계 ECC는 UBER 요구를 충족해 완결됐고, 2단계 SSD 단독 최적화는 QoS·성능을 개선했으나 WAF를 낮추지 못해 DWPD 요구를 충족하지 못했으며, 3단계 호스트 시스템 공동 설계가 WAF를 1로 낮춰 DWPD 요구를 충족합니다. 본 덱 2~5장이 3단계입니다. 결론: QLC로 요구 DWPD를 충족하는 경로는 호스트 시스템 공동 설계뿐이며, 이는 산식의 귀결입니다. 그 규격이 언제 정의되는지가 2장입니다. 하단 스트립은 병렬 축입니다. 내구성 축과 별개로 신뢰성 축에서도 같은 구조가 진행 중입니다. 요구는 JESD218 기능 고장률 FFR 3% 이하로 고정인데, SSD당 NAND 다이 수는 S3700 800GB 128개(2012)에서 Kioxia LC9 245TB 1,024개(2025, 2Tb 다이 32단 스택 32패키지)로 8배 늘었습니다. 보호가 없으면 SSD 고장률은 다이 수에 비례하므로, 칩 면적이 커질수록 수율이 떨어지는 것과 같은 원리로 다이 고장률을 8배 낮추거나 다이 고장을 허용해야 합니다. 다이 고장률 개선이 기술적 한계에 닿자 해법은 SSD 계층으로 이관됐습니다. 다이 RAID(Micron RAIN, 슈퍼페이지 XOR 패리티 다이), 여분 다이, 다이 은퇴와 감량 운영(삼성 Fail-in-Place PM1733: 다이 고장 시 데이터 재배치 후 4~8GB 감량 운영)입니다. 이 해법들은 패리티와 예비 용량 오버헤드를 키우므로 다이 수가 계속 늘면 SSD 단독으로는 부족해질 수 있고, 상위 계층은 이미 준비 중입니다. OCP SMART의 XOR 복구 카운트로 호스트가 다이 복구를 관측하고, Microsoft Hyrax처럼 플랫폼이 감량 운영을 수용하며, 드라이브 간 소거 부호가 SSD 고장을 흡수합니다. 근거 등급은 보고서 부록 A F28~F47에 있습니다.</a:t>
             </a:r>
           </a:p>
         </p:txBody>
@@ -3769,7 +3769,7 @@
         <p:spPr>
           <a:xfrm>
             <a:off x="722376" y="2560320"/>
-            <a:ext cx="10285615" cy="5852160"/>
+            <a:ext cx="8678487" cy="4937760"/>
           </a:xfrm>
           <a:prstGeom prst="rect">
             <a:avLst/>
@@ -3784,8 +3784,8 @@
         </p:nvSpPr>
         <p:spPr>
           <a:xfrm>
-            <a:off x="11318886" y="2560320"/>
-            <a:ext cx="6246737" cy="1243584"/>
+            <a:off x="9711759" y="2560320"/>
+            <a:ext cx="7853864" cy="1243584"/>
           </a:xfrm>
           <a:prstGeom prst="rect">
             <a:avLst/>
@@ -3830,8 +3830,8 @@
         </p:nvSpPr>
         <p:spPr>
           <a:xfrm>
-            <a:off x="11556630" y="2670048"/>
-            <a:ext cx="5771249" cy="256032"/>
+            <a:off x="9949503" y="2670048"/>
+            <a:ext cx="7378376" cy="256032"/>
           </a:xfrm>
           <a:prstGeom prst="rect">
             <a:avLst/>
@@ -3870,7 +3870,7 @@
         </p:nvSpPr>
         <p:spPr>
           <a:xfrm>
-            <a:off x="11415591" y="3054096"/>
+            <a:off x="10612027" y="3054096"/>
             <a:ext cx="932688" cy="420624"/>
           </a:xfrm>
           <a:prstGeom prst="rect">
@@ -3916,7 +3916,7 @@
         </p:nvSpPr>
         <p:spPr>
           <a:xfrm>
-            <a:off x="11415591" y="3054096"/>
+            <a:off x="10612027" y="3054096"/>
             <a:ext cx="932688" cy="420624"/>
           </a:xfrm>
           <a:prstGeom prst="rect">
@@ -3956,7 +3956,7 @@
         </p:nvSpPr>
         <p:spPr>
           <a:xfrm>
-            <a:off x="11324151" y="3511296"/>
+            <a:off x="10520587" y="3511296"/>
             <a:ext cx="1115568" cy="201168"/>
           </a:xfrm>
           <a:prstGeom prst="rect">
@@ -3996,7 +3996,7 @@
         </p:nvSpPr>
         <p:spPr>
           <a:xfrm>
-            <a:off x="12403143" y="3054096"/>
+            <a:off x="11599579" y="3054096"/>
             <a:ext cx="237744" cy="420624"/>
           </a:xfrm>
           <a:prstGeom prst="rect">
@@ -4036,7 +4036,7 @@
         </p:nvSpPr>
         <p:spPr>
           <a:xfrm>
-            <a:off x="12695751" y="3054096"/>
+            <a:off x="11892187" y="3054096"/>
             <a:ext cx="932688" cy="420624"/>
           </a:xfrm>
           <a:prstGeom prst="rect">
@@ -4082,7 +4082,7 @@
         </p:nvSpPr>
         <p:spPr>
           <a:xfrm>
-            <a:off x="12695751" y="3054096"/>
+            <a:off x="11892187" y="3054096"/>
             <a:ext cx="932688" cy="420624"/>
           </a:xfrm>
           <a:prstGeom prst="rect">
@@ -4122,7 +4122,7 @@
         </p:nvSpPr>
         <p:spPr>
           <a:xfrm>
-            <a:off x="12604311" y="3511296"/>
+            <a:off x="11800747" y="3511296"/>
             <a:ext cx="1115568" cy="201168"/>
           </a:xfrm>
           <a:prstGeom prst="rect">
@@ -4162,7 +4162,7 @@
         </p:nvSpPr>
         <p:spPr>
           <a:xfrm>
-            <a:off x="13683303" y="3054096"/>
+            <a:off x="12879739" y="3054096"/>
             <a:ext cx="237744" cy="420624"/>
           </a:xfrm>
           <a:prstGeom prst="rect">
@@ -4202,7 +4202,7 @@
         </p:nvSpPr>
         <p:spPr>
           <a:xfrm>
-            <a:off x="13975911" y="3054096"/>
+            <a:off x="13172347" y="3054096"/>
             <a:ext cx="932688" cy="420624"/>
           </a:xfrm>
           <a:prstGeom prst="rect">
@@ -4248,7 +4248,7 @@
         </p:nvSpPr>
         <p:spPr>
           <a:xfrm>
-            <a:off x="13975911" y="3054096"/>
+            <a:off x="13172347" y="3054096"/>
             <a:ext cx="932688" cy="420624"/>
           </a:xfrm>
           <a:prstGeom prst="rect">
@@ -4288,7 +4288,7 @@
         </p:nvSpPr>
         <p:spPr>
           <a:xfrm>
-            <a:off x="13884471" y="3511296"/>
+            <a:off x="13080907" y="3511296"/>
             <a:ext cx="1115568" cy="201168"/>
           </a:xfrm>
           <a:prstGeom prst="rect">
@@ -4328,7 +4328,7 @@
         </p:nvSpPr>
         <p:spPr>
           <a:xfrm>
-            <a:off x="14963463" y="3054096"/>
+            <a:off x="14159899" y="3054096"/>
             <a:ext cx="237744" cy="420624"/>
           </a:xfrm>
           <a:prstGeom prst="rect">
@@ -4368,7 +4368,7 @@
         </p:nvSpPr>
         <p:spPr>
           <a:xfrm>
-            <a:off x="15256071" y="3054096"/>
+            <a:off x="14452507" y="3054096"/>
             <a:ext cx="932688" cy="420624"/>
           </a:xfrm>
           <a:prstGeom prst="rect">
@@ -4412,7 +4412,7 @@
         </p:nvSpPr>
         <p:spPr>
           <a:xfrm>
-            <a:off x="15256071" y="3054096"/>
+            <a:off x="14452507" y="3054096"/>
             <a:ext cx="932688" cy="420624"/>
           </a:xfrm>
           <a:prstGeom prst="rect">
@@ -4452,7 +4452,7 @@
         </p:nvSpPr>
         <p:spPr>
           <a:xfrm>
-            <a:off x="15164631" y="3511296"/>
+            <a:off x="14361067" y="3511296"/>
             <a:ext cx="1115568" cy="201168"/>
           </a:xfrm>
           <a:prstGeom prst="rect">
@@ -4492,7 +4492,7 @@
         </p:nvSpPr>
         <p:spPr>
           <a:xfrm>
-            <a:off x="16243623" y="3054096"/>
+            <a:off x="15440059" y="3054096"/>
             <a:ext cx="237744" cy="420624"/>
           </a:xfrm>
           <a:prstGeom prst="rect">
@@ -4532,7 +4532,7 @@
         </p:nvSpPr>
         <p:spPr>
           <a:xfrm>
-            <a:off x="16536231" y="3054096"/>
+            <a:off x="15732667" y="3054096"/>
             <a:ext cx="932688" cy="420624"/>
           </a:xfrm>
           <a:prstGeom prst="rect">
@@ -4578,7 +4578,7 @@
         </p:nvSpPr>
         <p:spPr>
           <a:xfrm>
-            <a:off x="16536231" y="3054096"/>
+            <a:off x="15732667" y="3054096"/>
             <a:ext cx="932688" cy="420624"/>
           </a:xfrm>
           <a:prstGeom prst="rect">
@@ -4618,7 +4618,7 @@
         </p:nvSpPr>
         <p:spPr>
           <a:xfrm>
-            <a:off x="16444791" y="3511296"/>
+            <a:off x="15641227" y="3511296"/>
             <a:ext cx="1115568" cy="201168"/>
           </a:xfrm>
           <a:prstGeom prst="rect">
@@ -4658,8 +4658,8 @@
         </p:nvSpPr>
         <p:spPr>
           <a:xfrm>
-            <a:off x="11318886" y="3968496"/>
-            <a:ext cx="6246737" cy="4462272"/>
+            <a:off x="9711759" y="3968496"/>
+            <a:ext cx="7853864" cy="3529583"/>
           </a:xfrm>
           <a:prstGeom prst="rect">
             <a:avLst/>
@@ -4704,8 +4704,8 @@
         </p:nvSpPr>
         <p:spPr>
           <a:xfrm>
-            <a:off x="11556630" y="4078224"/>
-            <a:ext cx="5771249" cy="256032"/>
+            <a:off x="9949503" y="4078224"/>
+            <a:ext cx="7378376" cy="256032"/>
           </a:xfrm>
           <a:prstGeom prst="rect">
             <a:avLst/>
@@ -4744,8 +4744,8 @@
         </p:nvSpPr>
         <p:spPr>
           <a:xfrm>
-            <a:off x="11556630" y="4462272"/>
-            <a:ext cx="3393809" cy="219456"/>
+            <a:off x="9949503" y="4425696"/>
+            <a:ext cx="5000936" cy="219456"/>
           </a:xfrm>
           <a:prstGeom prst="rect">
             <a:avLst/>
@@ -4784,7 +4784,7 @@
         </p:nvSpPr>
         <p:spPr>
           <a:xfrm>
-            <a:off x="14950439" y="4462272"/>
+            <a:off x="14950439" y="4425696"/>
             <a:ext cx="2377440" cy="219456"/>
           </a:xfrm>
           <a:prstGeom prst="rect">
@@ -4824,8 +4824,8 @@
         </p:nvSpPr>
         <p:spPr>
           <a:xfrm>
-            <a:off x="11556630" y="4736592"/>
-            <a:ext cx="1716485" cy="786384"/>
+            <a:off x="9949503" y="4700016"/>
+            <a:ext cx="2252194" cy="676656"/>
           </a:xfrm>
           <a:prstGeom prst="rect">
             <a:avLst/>
@@ -4870,8 +4870,8 @@
         </p:nvSpPr>
         <p:spPr>
           <a:xfrm>
-            <a:off x="11648070" y="4791455"/>
-            <a:ext cx="1533605" cy="201168"/>
+            <a:off x="10040943" y="4754879"/>
+            <a:ext cx="2069314" cy="201168"/>
           </a:xfrm>
           <a:prstGeom prst="rect">
             <a:avLst/>
@@ -4910,8 +4910,8 @@
         </p:nvSpPr>
         <p:spPr>
           <a:xfrm>
-            <a:off x="11648070" y="4983479"/>
-            <a:ext cx="1533605" cy="237744"/>
+            <a:off x="10040943" y="4946904"/>
+            <a:ext cx="2069314" cy="237744"/>
           </a:xfrm>
           <a:prstGeom prst="rect">
             <a:avLst/>
@@ -4950,8 +4950,8 @@
         </p:nvSpPr>
         <p:spPr>
           <a:xfrm>
-            <a:off x="11648070" y="5221224"/>
-            <a:ext cx="1533605" cy="274320"/>
+            <a:off x="10040943" y="5157216"/>
+            <a:ext cx="2069314" cy="201168"/>
           </a:xfrm>
           <a:prstGeom prst="rect">
             <a:avLst/>
@@ -4990,7 +4990,7 @@
         </p:nvSpPr>
         <p:spPr>
           <a:xfrm>
-            <a:off x="13318836" y="5038344"/>
+            <a:off x="12247418" y="4946904"/>
             <a:ext cx="219456" cy="182880"/>
           </a:xfrm>
           <a:prstGeom prst="rightArrow">
@@ -5034,8 +5034,8 @@
         </p:nvSpPr>
         <p:spPr>
           <a:xfrm>
-            <a:off x="13584012" y="4736592"/>
-            <a:ext cx="1716485" cy="786384"/>
+            <a:off x="12512594" y="4700016"/>
+            <a:ext cx="2252194" cy="676656"/>
           </a:xfrm>
           <a:prstGeom prst="rect">
             <a:avLst/>
@@ -5078,8 +5078,8 @@
         </p:nvSpPr>
         <p:spPr>
           <a:xfrm>
-            <a:off x="13675452" y="4791455"/>
-            <a:ext cx="1533605" cy="201168"/>
+            <a:off x="12604034" y="4754879"/>
+            <a:ext cx="2069314" cy="201168"/>
           </a:xfrm>
           <a:prstGeom prst="rect">
             <a:avLst/>
@@ -5118,8 +5118,8 @@
         </p:nvSpPr>
         <p:spPr>
           <a:xfrm>
-            <a:off x="13675452" y="4983479"/>
-            <a:ext cx="1533605" cy="237744"/>
+            <a:off x="12604034" y="4946904"/>
+            <a:ext cx="2069314" cy="237744"/>
           </a:xfrm>
           <a:prstGeom prst="rect">
             <a:avLst/>
@@ -5158,8 +5158,8 @@
         </p:nvSpPr>
         <p:spPr>
           <a:xfrm>
-            <a:off x="13675452" y="5221224"/>
-            <a:ext cx="1533605" cy="274320"/>
+            <a:off x="12604034" y="5157216"/>
+            <a:ext cx="2069314" cy="201168"/>
           </a:xfrm>
           <a:prstGeom prst="rect">
             <a:avLst/>
@@ -5198,7 +5198,7 @@
         </p:nvSpPr>
         <p:spPr>
           <a:xfrm>
-            <a:off x="15346218" y="5038344"/>
+            <a:off x="14810509" y="4946904"/>
             <a:ext cx="219456" cy="182880"/>
           </a:xfrm>
           <a:prstGeom prst="rightArrow">
@@ -5242,8 +5242,8 @@
         </p:nvSpPr>
         <p:spPr>
           <a:xfrm>
-            <a:off x="15611394" y="4736592"/>
-            <a:ext cx="1716485" cy="786384"/>
+            <a:off x="15075685" y="4700016"/>
+            <a:ext cx="2252194" cy="676656"/>
           </a:xfrm>
           <a:prstGeom prst="rect">
             <a:avLst/>
@@ -5288,8 +5288,8 @@
         </p:nvSpPr>
         <p:spPr>
           <a:xfrm>
-            <a:off x="15702834" y="4791455"/>
-            <a:ext cx="1533605" cy="201168"/>
+            <a:off x="15167125" y="4754879"/>
+            <a:ext cx="2069314" cy="201168"/>
           </a:xfrm>
           <a:prstGeom prst="rect">
             <a:avLst/>
@@ -5328,8 +5328,8 @@
         </p:nvSpPr>
         <p:spPr>
           <a:xfrm>
-            <a:off x="15702834" y="4983479"/>
-            <a:ext cx="1533605" cy="237744"/>
+            <a:off x="15167125" y="4946904"/>
+            <a:ext cx="2069314" cy="237744"/>
           </a:xfrm>
           <a:prstGeom prst="rect">
             <a:avLst/>
@@ -5368,8 +5368,8 @@
         </p:nvSpPr>
         <p:spPr>
           <a:xfrm>
-            <a:off x="15702834" y="5221224"/>
-            <a:ext cx="1533605" cy="274320"/>
+            <a:off x="15167125" y="5157216"/>
+            <a:ext cx="2069314" cy="201168"/>
           </a:xfrm>
           <a:prstGeom prst="rect">
             <a:avLst/>
@@ -5408,8 +5408,8 @@
         </p:nvSpPr>
         <p:spPr>
           <a:xfrm>
-            <a:off x="11556630" y="5705856"/>
-            <a:ext cx="3393809" cy="219456"/>
+            <a:off x="9949503" y="5495544"/>
+            <a:ext cx="5000936" cy="219456"/>
           </a:xfrm>
           <a:prstGeom prst="rect">
             <a:avLst/>
@@ -5448,7 +5448,7 @@
         </p:nvSpPr>
         <p:spPr>
           <a:xfrm>
-            <a:off x="14950439" y="5705856"/>
+            <a:off x="14950439" y="5495544"/>
             <a:ext cx="2377440" cy="219456"/>
           </a:xfrm>
           <a:prstGeom prst="rect">
@@ -5488,8 +5488,8 @@
         </p:nvSpPr>
         <p:spPr>
           <a:xfrm>
-            <a:off x="11556630" y="5980176"/>
-            <a:ext cx="1716485" cy="786384"/>
+            <a:off x="9949503" y="5769864"/>
+            <a:ext cx="2252194" cy="676656"/>
           </a:xfrm>
           <a:prstGeom prst="rect">
             <a:avLst/>
@@ -5534,8 +5534,8 @@
         </p:nvSpPr>
         <p:spPr>
           <a:xfrm>
-            <a:off x="11648070" y="6035040"/>
-            <a:ext cx="1533605" cy="201168"/>
+            <a:off x="10040943" y="5824727"/>
+            <a:ext cx="2069314" cy="201168"/>
           </a:xfrm>
           <a:prstGeom prst="rect">
             <a:avLst/>
@@ -5574,8 +5574,8 @@
         </p:nvSpPr>
         <p:spPr>
           <a:xfrm>
-            <a:off x="11648070" y="6227064"/>
-            <a:ext cx="1533605" cy="237744"/>
+            <a:off x="10040943" y="6016752"/>
+            <a:ext cx="2069314" cy="237744"/>
           </a:xfrm>
           <a:prstGeom prst="rect">
             <a:avLst/>
@@ -5614,8 +5614,8 @@
         </p:nvSpPr>
         <p:spPr>
           <a:xfrm>
-            <a:off x="11648070" y="6464808"/>
-            <a:ext cx="1533605" cy="274320"/>
+            <a:off x="10040943" y="6227064"/>
+            <a:ext cx="2069314" cy="201168"/>
           </a:xfrm>
           <a:prstGeom prst="rect">
             <a:avLst/>
@@ -5654,7 +5654,7 @@
         </p:nvSpPr>
         <p:spPr>
           <a:xfrm>
-            <a:off x="13318836" y="6281928"/>
+            <a:off x="12247418" y="6016752"/>
             <a:ext cx="219456" cy="182880"/>
           </a:xfrm>
           <a:prstGeom prst="rightArrow">
@@ -5698,8 +5698,8 @@
         </p:nvSpPr>
         <p:spPr>
           <a:xfrm>
-            <a:off x="13584012" y="5980176"/>
-            <a:ext cx="1716485" cy="786384"/>
+            <a:off x="12512594" y="5769864"/>
+            <a:ext cx="2252194" cy="676656"/>
           </a:xfrm>
           <a:prstGeom prst="rect">
             <a:avLst/>
@@ -5742,8 +5742,8 @@
         </p:nvSpPr>
         <p:spPr>
           <a:xfrm>
-            <a:off x="13675452" y="6035040"/>
-            <a:ext cx="1533605" cy="201168"/>
+            <a:off x="12604034" y="5824727"/>
+            <a:ext cx="2069314" cy="201168"/>
           </a:xfrm>
           <a:prstGeom prst="rect">
             <a:avLst/>
@@ -5782,8 +5782,8 @@
         </p:nvSpPr>
         <p:spPr>
           <a:xfrm>
-            <a:off x="13675452" y="6227064"/>
-            <a:ext cx="1533605" cy="237744"/>
+            <a:off x="12604034" y="6016752"/>
+            <a:ext cx="2069314" cy="237744"/>
           </a:xfrm>
           <a:prstGeom prst="rect">
             <a:avLst/>
@@ -5822,8 +5822,8 @@
         </p:nvSpPr>
         <p:spPr>
           <a:xfrm>
-            <a:off x="13675452" y="6464808"/>
-            <a:ext cx="1533605" cy="274320"/>
+            <a:off x="12604034" y="6227064"/>
+            <a:ext cx="2069314" cy="201168"/>
           </a:xfrm>
           <a:prstGeom prst="rect">
             <a:avLst/>
@@ -5849,7 +5849,7 @@
                 <a:latin typeface="Arial"/>
                 <a:ea typeface="Arial"/>
               </a:rPr>
-              <a:t>핫/콜드 추정 · 스트림 · IO 결정성 → WAF ≈ 3 유지</a:t>
+              <a:t>추정 배치 · 스트림 · IOD → WAF ≈ 3</a:t>
             </a:r>
           </a:p>
         </p:txBody>
@@ -5862,7 +5862,7 @@
         </p:nvSpPr>
         <p:spPr>
           <a:xfrm>
-            <a:off x="15346218" y="6281928"/>
+            <a:off x="14810509" y="6016752"/>
             <a:ext cx="219456" cy="182880"/>
           </a:xfrm>
           <a:prstGeom prst="rightArrow">
@@ -5906,8 +5906,8 @@
         </p:nvSpPr>
         <p:spPr>
           <a:xfrm>
-            <a:off x="15611394" y="5980176"/>
-            <a:ext cx="1716485" cy="786384"/>
+            <a:off x="15075685" y="5769864"/>
+            <a:ext cx="2252194" cy="676656"/>
           </a:xfrm>
           <a:prstGeom prst="rect">
             <a:avLst/>
@@ -5952,8 +5952,8 @@
         </p:nvSpPr>
         <p:spPr>
           <a:xfrm>
-            <a:off x="15702834" y="6035040"/>
-            <a:ext cx="1533605" cy="201168"/>
+            <a:off x="15167125" y="5824727"/>
+            <a:ext cx="2069314" cy="201168"/>
           </a:xfrm>
           <a:prstGeom prst="rect">
             <a:avLst/>
@@ -5992,8 +5992,8 @@
         </p:nvSpPr>
         <p:spPr>
           <a:xfrm>
-            <a:off x="15702834" y="6227064"/>
-            <a:ext cx="1533605" cy="237744"/>
+            <a:off x="15167125" y="6016752"/>
+            <a:ext cx="2069314" cy="237744"/>
           </a:xfrm>
           <a:prstGeom prst="rect">
             <a:avLst/>
@@ -6032,8 +6032,8 @@
         </p:nvSpPr>
         <p:spPr>
           <a:xfrm>
-            <a:off x="15702834" y="6464808"/>
-            <a:ext cx="1533605" cy="274320"/>
+            <a:off x="15167125" y="6227064"/>
+            <a:ext cx="2069314" cy="201168"/>
           </a:xfrm>
           <a:prstGeom prst="rect">
             <a:avLst/>
@@ -6072,8 +6072,8 @@
         </p:nvSpPr>
         <p:spPr>
           <a:xfrm>
-            <a:off x="11556630" y="6949440"/>
-            <a:ext cx="3393809" cy="219456"/>
+            <a:off x="9949503" y="6565392"/>
+            <a:ext cx="5000936" cy="219456"/>
           </a:xfrm>
           <a:prstGeom prst="rect">
             <a:avLst/>
@@ -6112,7 +6112,7 @@
         </p:nvSpPr>
         <p:spPr>
           <a:xfrm>
-            <a:off x="14950439" y="6949440"/>
+            <a:off x="14950439" y="6565392"/>
             <a:ext cx="2377440" cy="219456"/>
           </a:xfrm>
           <a:prstGeom prst="rect">
@@ -6152,8 +6152,8 @@
         </p:nvSpPr>
         <p:spPr>
           <a:xfrm>
-            <a:off x="11556630" y="7223760"/>
-            <a:ext cx="1716485" cy="786384"/>
+            <a:off x="9949503" y="6839712"/>
+            <a:ext cx="2252194" cy="676656"/>
           </a:xfrm>
           <a:prstGeom prst="rect">
             <a:avLst/>
@@ -6198,8 +6198,8 @@
         </p:nvSpPr>
         <p:spPr>
           <a:xfrm>
-            <a:off x="11648070" y="7278624"/>
-            <a:ext cx="1533605" cy="201168"/>
+            <a:off x="10040943" y="6894575"/>
+            <a:ext cx="2069314" cy="201168"/>
           </a:xfrm>
           <a:prstGeom prst="rect">
             <a:avLst/>
@@ -6238,8 +6238,8 @@
         </p:nvSpPr>
         <p:spPr>
           <a:xfrm>
-            <a:off x="11648070" y="7470648"/>
-            <a:ext cx="1533605" cy="237744"/>
+            <a:off x="10040943" y="7086600"/>
+            <a:ext cx="2069314" cy="237744"/>
           </a:xfrm>
           <a:prstGeom prst="rect">
             <a:avLst/>
@@ -6278,8 +6278,8 @@
         </p:nvSpPr>
         <p:spPr>
           <a:xfrm>
-            <a:off x="11648070" y="7708392"/>
-            <a:ext cx="1533605" cy="274320"/>
+            <a:off x="10040943" y="7296912"/>
+            <a:ext cx="2069314" cy="201168"/>
           </a:xfrm>
           <a:prstGeom prst="rect">
             <a:avLst/>
@@ -6318,7 +6318,7 @@
         </p:nvSpPr>
         <p:spPr>
           <a:xfrm>
-            <a:off x="13318836" y="7525512"/>
+            <a:off x="12247418" y="7086600"/>
             <a:ext cx="219456" cy="182880"/>
           </a:xfrm>
           <a:prstGeom prst="rightArrow">
@@ -6362,8 +6362,8 @@
         </p:nvSpPr>
         <p:spPr>
           <a:xfrm>
-            <a:off x="13584012" y="7223760"/>
-            <a:ext cx="1716485" cy="786384"/>
+            <a:off x="12512594" y="6839712"/>
+            <a:ext cx="2252194" cy="676656"/>
           </a:xfrm>
           <a:prstGeom prst="rect">
             <a:avLst/>
@@ -6406,8 +6406,8 @@
         </p:nvSpPr>
         <p:spPr>
           <a:xfrm>
-            <a:off x="13675452" y="7278624"/>
-            <a:ext cx="1533605" cy="201168"/>
+            <a:off x="12604034" y="6894575"/>
+            <a:ext cx="2069314" cy="201168"/>
           </a:xfrm>
           <a:prstGeom prst="rect">
             <a:avLst/>
@@ -6446,8 +6446,8 @@
         </p:nvSpPr>
         <p:spPr>
           <a:xfrm>
-            <a:off x="13675452" y="7470648"/>
-            <a:ext cx="1533605" cy="237744"/>
+            <a:off x="12604034" y="7086600"/>
+            <a:ext cx="2069314" cy="237744"/>
           </a:xfrm>
           <a:prstGeom prst="rect">
             <a:avLst/>
@@ -6486,8 +6486,8 @@
         </p:nvSpPr>
         <p:spPr>
           <a:xfrm>
-            <a:off x="13675452" y="7708392"/>
-            <a:ext cx="1533605" cy="274320"/>
+            <a:off x="12604034" y="7296912"/>
+            <a:ext cx="2069314" cy="201168"/>
           </a:xfrm>
           <a:prstGeom prst="rect">
             <a:avLst/>
@@ -6526,7 +6526,7 @@
         </p:nvSpPr>
         <p:spPr>
           <a:xfrm>
-            <a:off x="15346218" y="7525512"/>
+            <a:off x="14810509" y="7086600"/>
             <a:ext cx="219456" cy="182880"/>
           </a:xfrm>
           <a:prstGeom prst="rightArrow">
@@ -6570,8 +6570,8 @@
         </p:nvSpPr>
         <p:spPr>
           <a:xfrm>
-            <a:off x="15611394" y="7223760"/>
-            <a:ext cx="1716485" cy="786384"/>
+            <a:off x="15075685" y="6839712"/>
+            <a:ext cx="2252194" cy="676656"/>
           </a:xfrm>
           <a:prstGeom prst="rect">
             <a:avLst/>
@@ -6616,8 +6616,8 @@
         </p:nvSpPr>
         <p:spPr>
           <a:xfrm>
-            <a:off x="15702834" y="7278624"/>
-            <a:ext cx="1533605" cy="201168"/>
+            <a:off x="15167125" y="6894575"/>
+            <a:ext cx="2069314" cy="201168"/>
           </a:xfrm>
           <a:prstGeom prst="rect">
             <a:avLst/>
@@ -6656,8 +6656,8 @@
         </p:nvSpPr>
         <p:spPr>
           <a:xfrm>
-            <a:off x="15702834" y="7470648"/>
-            <a:ext cx="1533605" cy="237744"/>
+            <a:off x="15167125" y="7086600"/>
+            <a:ext cx="2069314" cy="237744"/>
           </a:xfrm>
           <a:prstGeom prst="rect">
             <a:avLst/>
@@ -6696,8 +6696,8 @@
         </p:nvSpPr>
         <p:spPr>
           <a:xfrm>
-            <a:off x="15702834" y="7708392"/>
-            <a:ext cx="1533605" cy="274320"/>
+            <a:off x="15167125" y="7296912"/>
+            <a:ext cx="2069314" cy="201168"/>
           </a:xfrm>
           <a:prstGeom prst="rect">
             <a:avLst/>
@@ -6736,8 +6736,571 @@
         </p:nvSpPr>
         <p:spPr>
           <a:xfrm>
-            <a:off x="722376" y="8613648"/>
-            <a:ext cx="16843248" cy="731520"/>
+            <a:off x="722376" y="7644383"/>
+            <a:ext cx="16843248" cy="859536"/>
+          </a:xfrm>
+          <a:prstGeom prst="rect">
+            <a:avLst/>
+          </a:prstGeom>
+          <a:solidFill>
+            <a:srgbClr val="FFFFFF"/>
+          </a:solidFill>
+          <a:ln w="9525">
+            <a:solidFill>
+              <a:srgbClr val="D9D9D9"/>
+            </a:solidFill>
+          </a:ln>
+          <a:effectLst/>
+        </p:spPr>
+        <p:style>
+          <a:lnRef idx="1">
+            <a:schemeClr val="accent1"/>
+          </a:lnRef>
+          <a:fillRef idx="3">
+            <a:schemeClr val="accent1"/>
+          </a:fillRef>
+          <a:effectRef idx="2">
+            <a:schemeClr val="accent1"/>
+          </a:effectRef>
+          <a:fontRef idx="minor">
+            <a:schemeClr val="lt1"/>
+          </a:fontRef>
+        </p:style>
+        <p:txBody>
+          <a:bodyPr rtlCol="0" anchor="ctr"/>
+          <a:lstStyle/>
+          <a:p>
+            <a:pPr algn="ctr"/>
+          </a:p>
+        </p:txBody>
+      </p:sp>
+      <p:sp>
+        <p:nvSpPr>
+          <p:cNvPr id="81" name="Rectangle 80"/>
+          <p:cNvSpPr/>
+          <p:nvPr/>
+        </p:nvSpPr>
+        <p:spPr>
+          <a:xfrm>
+            <a:off x="722376" y="7644383"/>
+            <a:ext cx="54864" cy="859536"/>
+          </a:xfrm>
+          <a:prstGeom prst="rect">
+            <a:avLst/>
+          </a:prstGeom>
+          <a:solidFill>
+            <a:srgbClr val="3C5AC8"/>
+          </a:solidFill>
+          <a:ln>
+            <a:noFill/>
+          </a:ln>
+          <a:effectLst/>
+        </p:spPr>
+        <p:style>
+          <a:lnRef idx="1">
+            <a:schemeClr val="accent1"/>
+          </a:lnRef>
+          <a:fillRef idx="3">
+            <a:schemeClr val="accent1"/>
+          </a:fillRef>
+          <a:effectRef idx="2">
+            <a:schemeClr val="accent1"/>
+          </a:effectRef>
+          <a:fontRef idx="minor">
+            <a:schemeClr val="lt1"/>
+          </a:fontRef>
+        </p:style>
+        <p:txBody>
+          <a:bodyPr rtlCol="0" anchor="ctr"/>
+          <a:lstStyle/>
+          <a:p>
+            <a:pPr algn="ctr"/>
+          </a:p>
+        </p:txBody>
+      </p:sp>
+      <p:sp>
+        <p:nvSpPr>
+          <p:cNvPr id="82" name="TextBox 81"/>
+          <p:cNvSpPr txBox="1"/>
+          <p:nvPr/>
+        </p:nvSpPr>
+        <p:spPr>
+          <a:xfrm>
+            <a:off x="941832" y="7735823"/>
+            <a:ext cx="1828800" cy="219456"/>
+          </a:xfrm>
+          <a:prstGeom prst="rect">
+            <a:avLst/>
+          </a:prstGeom>
+          <a:noFill/>
+        </p:spPr>
+        <p:txBody>
+          <a:bodyPr wrap="square" anchor="t" lIns="0" rIns="0" tIns="0" bIns="0">
+            <a:spAutoFit/>
+          </a:bodyPr>
+          <a:lstStyle/>
+          <a:p>
+            <a:pPr algn="l">
+              <a:lnSpc>
+                <a:spcPct val="112000"/>
+              </a:lnSpc>
+            </a:pPr>
+            <a:r>
+              <a:rPr sz="1125" b="1">
+                <a:solidFill>
+                  <a:srgbClr val="1428A0"/>
+                </a:solidFill>
+                <a:latin typeface="Arial"/>
+                <a:ea typeface="Arial"/>
+              </a:rPr>
+              <a:t>병렬 축 · 다이 고장률</a:t>
+            </a:r>
+          </a:p>
+        </p:txBody>
+      </p:sp>
+      <p:sp>
+        <p:nvSpPr>
+          <p:cNvPr id="83" name="TextBox 82"/>
+          <p:cNvSpPr txBox="1"/>
+          <p:nvPr/>
+        </p:nvSpPr>
+        <p:spPr>
+          <a:xfrm>
+            <a:off x="941832" y="7973567"/>
+            <a:ext cx="1828800" cy="365760"/>
+          </a:xfrm>
+          <a:prstGeom prst="rect">
+            <a:avLst/>
+          </a:prstGeom>
+          <a:noFill/>
+        </p:spPr>
+        <p:txBody>
+          <a:bodyPr wrap="square" anchor="t" lIns="0" rIns="0" tIns="0" bIns="0">
+            <a:spAutoFit/>
+          </a:bodyPr>
+          <a:lstStyle/>
+          <a:p>
+            <a:pPr algn="l">
+              <a:lnSpc>
+                <a:spcPct val="100000"/>
+              </a:lnSpc>
+            </a:pPr>
+            <a:r>
+              <a:rPr sz="975" b="1">
+                <a:solidFill>
+                  <a:srgbClr val="1A1A1A"/>
+                </a:solidFill>
+                <a:latin typeface="Arial"/>
+                <a:ea typeface="Arial"/>
+              </a:rPr>
+              <a:t>요구 FFR ≤ 3% 고정</a:t>
+            </a:r>
+          </a:p>
+          <a:p>
+            <a:pPr algn="l">
+              <a:lnSpc>
+                <a:spcPct val="100000"/>
+              </a:lnSpc>
+            </a:pPr>
+            <a:r>
+              <a:rPr sz="900" b="0">
+                <a:solidFill>
+                  <a:srgbClr val="555555"/>
+                </a:solidFill>
+                <a:latin typeface="Arial"/>
+                <a:ea typeface="Arial"/>
+              </a:rPr>
+              <a:t>JESD218 · 다이 수는 8배 ↑</a:t>
+            </a:r>
+          </a:p>
+        </p:txBody>
+      </p:sp>
+      <p:sp>
+        <p:nvSpPr>
+          <p:cNvPr id="84" name="TextBox 83"/>
+          <p:cNvSpPr txBox="1"/>
+          <p:nvPr/>
+        </p:nvSpPr>
+        <p:spPr>
+          <a:xfrm>
+            <a:off x="2871216" y="7717536"/>
+            <a:ext cx="2880360" cy="182880"/>
+          </a:xfrm>
+          <a:prstGeom prst="rect">
+            <a:avLst/>
+          </a:prstGeom>
+          <a:noFill/>
+        </p:spPr>
+        <p:txBody>
+          <a:bodyPr wrap="square" anchor="t" lIns="0" rIns="0" tIns="0" bIns="0">
+            <a:spAutoFit/>
+          </a:bodyPr>
+          <a:lstStyle/>
+          <a:p>
+            <a:pPr algn="l">
+              <a:lnSpc>
+                <a:spcPct val="112000"/>
+              </a:lnSpc>
+            </a:pPr>
+            <a:r>
+              <a:rPr sz="875" b="0">
+                <a:solidFill>
+                  <a:srgbClr val="8A8A8A"/>
+                </a:solidFill>
+                <a:latin typeface="Arial"/>
+                <a:ea typeface="Arial"/>
+              </a:rPr>
+              <a:t>SSD당 NAND 다이 수 (용량 ÷ 다이 밀도 환산)</a:t>
+            </a:r>
+          </a:p>
+        </p:txBody>
+      </p:sp>
+      <p:sp>
+        <p:nvSpPr>
+          <p:cNvPr id="85" name="Rectangle 84"/>
+          <p:cNvSpPr/>
+          <p:nvPr/>
+        </p:nvSpPr>
+        <p:spPr>
+          <a:xfrm>
+            <a:off x="2871216" y="8129016"/>
+            <a:ext cx="310896" cy="45720"/>
+          </a:xfrm>
+          <a:prstGeom prst="rect">
+            <a:avLst/>
+          </a:prstGeom>
+          <a:solidFill>
+            <a:srgbClr val="AAB8E8"/>
+          </a:solidFill>
+          <a:ln>
+            <a:noFill/>
+          </a:ln>
+          <a:effectLst/>
+        </p:spPr>
+        <p:style>
+          <a:lnRef idx="1">
+            <a:schemeClr val="accent1"/>
+          </a:lnRef>
+          <a:fillRef idx="3">
+            <a:schemeClr val="accent1"/>
+          </a:fillRef>
+          <a:effectRef idx="2">
+            <a:schemeClr val="accent1"/>
+          </a:effectRef>
+          <a:fontRef idx="minor">
+            <a:schemeClr val="lt1"/>
+          </a:fontRef>
+        </p:style>
+        <p:txBody>
+          <a:bodyPr rtlCol="0" anchor="ctr"/>
+          <a:lstStyle/>
+          <a:p>
+            <a:pPr algn="ctr"/>
+          </a:p>
+        </p:txBody>
+      </p:sp>
+      <p:sp>
+        <p:nvSpPr>
+          <p:cNvPr id="86" name="TextBox 85"/>
+          <p:cNvSpPr txBox="1"/>
+          <p:nvPr/>
+        </p:nvSpPr>
+        <p:spPr>
+          <a:xfrm>
+            <a:off x="2688336" y="8193024"/>
+            <a:ext cx="676656" cy="164592"/>
+          </a:xfrm>
+          <a:prstGeom prst="rect">
+            <a:avLst/>
+          </a:prstGeom>
+          <a:noFill/>
+        </p:spPr>
+        <p:txBody>
+          <a:bodyPr wrap="square" anchor="t" lIns="0" rIns="0" tIns="0" bIns="0">
+            <a:spAutoFit/>
+          </a:bodyPr>
+          <a:lstStyle/>
+          <a:p>
+            <a:pPr algn="ctr">
+              <a:lnSpc>
+                <a:spcPct val="112000"/>
+              </a:lnSpc>
+            </a:pPr>
+            <a:r>
+              <a:rPr sz="825" b="0">
+                <a:solidFill>
+                  <a:srgbClr val="555555"/>
+                </a:solidFill>
+                <a:latin typeface="Arial"/>
+                <a:ea typeface="Arial"/>
+              </a:rPr>
+              <a:t>'12  128</a:t>
+            </a:r>
+          </a:p>
+        </p:txBody>
+      </p:sp>
+      <p:sp>
+        <p:nvSpPr>
+          <p:cNvPr id="87" name="Rectangle 86"/>
+          <p:cNvSpPr/>
+          <p:nvPr/>
+        </p:nvSpPr>
+        <p:spPr>
+          <a:xfrm>
+            <a:off x="3513582" y="8129016"/>
+            <a:ext cx="310896" cy="45720"/>
+          </a:xfrm>
+          <a:prstGeom prst="rect">
+            <a:avLst/>
+          </a:prstGeom>
+          <a:solidFill>
+            <a:srgbClr val="AAB8E8"/>
+          </a:solidFill>
+          <a:ln>
+            <a:noFill/>
+          </a:ln>
+          <a:effectLst/>
+        </p:spPr>
+        <p:style>
+          <a:lnRef idx="1">
+            <a:schemeClr val="accent1"/>
+          </a:lnRef>
+          <a:fillRef idx="3">
+            <a:schemeClr val="accent1"/>
+          </a:fillRef>
+          <a:effectRef idx="2">
+            <a:schemeClr val="accent1"/>
+          </a:effectRef>
+          <a:fontRef idx="minor">
+            <a:schemeClr val="lt1"/>
+          </a:fontRef>
+        </p:style>
+        <p:txBody>
+          <a:bodyPr rtlCol="0" anchor="ctr"/>
+          <a:lstStyle/>
+          <a:p>
+            <a:pPr algn="ctr"/>
+          </a:p>
+        </p:txBody>
+      </p:sp>
+      <p:sp>
+        <p:nvSpPr>
+          <p:cNvPr id="88" name="TextBox 87"/>
+          <p:cNvSpPr txBox="1"/>
+          <p:nvPr/>
+        </p:nvSpPr>
+        <p:spPr>
+          <a:xfrm>
+            <a:off x="3330702" y="8193024"/>
+            <a:ext cx="676656" cy="164592"/>
+          </a:xfrm>
+          <a:prstGeom prst="rect">
+            <a:avLst/>
+          </a:prstGeom>
+          <a:noFill/>
+        </p:spPr>
+        <p:txBody>
+          <a:bodyPr wrap="square" anchor="t" lIns="0" rIns="0" tIns="0" bIns="0">
+            <a:spAutoFit/>
+          </a:bodyPr>
+          <a:lstStyle/>
+          <a:p>
+            <a:pPr algn="ctr">
+              <a:lnSpc>
+                <a:spcPct val="112000"/>
+              </a:lnSpc>
+            </a:pPr>
+            <a:r>
+              <a:rPr sz="825" b="0">
+                <a:solidFill>
+                  <a:srgbClr val="555555"/>
+                </a:solidFill>
+                <a:latin typeface="Arial"/>
+                <a:ea typeface="Arial"/>
+              </a:rPr>
+              <a:t>'18  144</a:t>
+            </a:r>
+          </a:p>
+        </p:txBody>
+      </p:sp>
+      <p:sp>
+        <p:nvSpPr>
+          <p:cNvPr id="89" name="Rectangle 88"/>
+          <p:cNvSpPr/>
+          <p:nvPr/>
+        </p:nvSpPr>
+        <p:spPr>
+          <a:xfrm>
+            <a:off x="4155948" y="8110728"/>
+            <a:ext cx="310896" cy="64008"/>
+          </a:xfrm>
+          <a:prstGeom prst="rect">
+            <a:avLst/>
+          </a:prstGeom>
+          <a:solidFill>
+            <a:srgbClr val="AAB8E8"/>
+          </a:solidFill>
+          <a:ln>
+            <a:noFill/>
+          </a:ln>
+          <a:effectLst/>
+        </p:spPr>
+        <p:style>
+          <a:lnRef idx="1">
+            <a:schemeClr val="accent1"/>
+          </a:lnRef>
+          <a:fillRef idx="3">
+            <a:schemeClr val="accent1"/>
+          </a:fillRef>
+          <a:effectRef idx="2">
+            <a:schemeClr val="accent1"/>
+          </a:effectRef>
+          <a:fontRef idx="minor">
+            <a:schemeClr val="lt1"/>
+          </a:fontRef>
+        </p:style>
+        <p:txBody>
+          <a:bodyPr rtlCol="0" anchor="ctr"/>
+          <a:lstStyle/>
+          <a:p>
+            <a:pPr algn="ctr"/>
+          </a:p>
+        </p:txBody>
+      </p:sp>
+      <p:sp>
+        <p:nvSpPr>
+          <p:cNvPr id="90" name="TextBox 89"/>
+          <p:cNvSpPr txBox="1"/>
+          <p:nvPr/>
+        </p:nvSpPr>
+        <p:spPr>
+          <a:xfrm>
+            <a:off x="3973068" y="8193024"/>
+            <a:ext cx="676656" cy="164592"/>
+          </a:xfrm>
+          <a:prstGeom prst="rect">
+            <a:avLst/>
+          </a:prstGeom>
+          <a:noFill/>
+        </p:spPr>
+        <p:txBody>
+          <a:bodyPr wrap="square" anchor="t" lIns="0" rIns="0" tIns="0" bIns="0">
+            <a:spAutoFit/>
+          </a:bodyPr>
+          <a:lstStyle/>
+          <a:p>
+            <a:pPr algn="ctr">
+              <a:lnSpc>
+                <a:spcPct val="112000"/>
+              </a:lnSpc>
+            </a:pPr>
+            <a:r>
+              <a:rPr sz="825" b="0">
+                <a:solidFill>
+                  <a:srgbClr val="555555"/>
+                </a:solidFill>
+                <a:latin typeface="Arial"/>
+                <a:ea typeface="Arial"/>
+              </a:rPr>
+              <a:t>'21  256</a:t>
+            </a:r>
+          </a:p>
+        </p:txBody>
+      </p:sp>
+      <p:sp>
+        <p:nvSpPr>
+          <p:cNvPr id="91" name="Rectangle 90"/>
+          <p:cNvSpPr/>
+          <p:nvPr/>
+        </p:nvSpPr>
+        <p:spPr>
+          <a:xfrm>
+            <a:off x="4798314" y="8046720"/>
+            <a:ext cx="310896" cy="128016"/>
+          </a:xfrm>
+          <a:prstGeom prst="rect">
+            <a:avLst/>
+          </a:prstGeom>
+          <a:solidFill>
+            <a:srgbClr val="AAB8E8"/>
+          </a:solidFill>
+          <a:ln>
+            <a:noFill/>
+          </a:ln>
+          <a:effectLst/>
+        </p:spPr>
+        <p:style>
+          <a:lnRef idx="1">
+            <a:schemeClr val="accent1"/>
+          </a:lnRef>
+          <a:fillRef idx="3">
+            <a:schemeClr val="accent1"/>
+          </a:fillRef>
+          <a:effectRef idx="2">
+            <a:schemeClr val="accent1"/>
+          </a:effectRef>
+          <a:fontRef idx="minor">
+            <a:schemeClr val="lt1"/>
+          </a:fontRef>
+        </p:style>
+        <p:txBody>
+          <a:bodyPr rtlCol="0" anchor="ctr"/>
+          <a:lstStyle/>
+          <a:p>
+            <a:pPr algn="ctr"/>
+          </a:p>
+        </p:txBody>
+      </p:sp>
+      <p:sp>
+        <p:nvSpPr>
+          <p:cNvPr id="92" name="TextBox 91"/>
+          <p:cNvSpPr txBox="1"/>
+          <p:nvPr/>
+        </p:nvSpPr>
+        <p:spPr>
+          <a:xfrm>
+            <a:off x="4615434" y="8193024"/>
+            <a:ext cx="676656" cy="164592"/>
+          </a:xfrm>
+          <a:prstGeom prst="rect">
+            <a:avLst/>
+          </a:prstGeom>
+          <a:noFill/>
+        </p:spPr>
+        <p:txBody>
+          <a:bodyPr wrap="square" anchor="t" lIns="0" rIns="0" tIns="0" bIns="0">
+            <a:spAutoFit/>
+          </a:bodyPr>
+          <a:lstStyle/>
+          <a:p>
+            <a:pPr algn="ctr">
+              <a:lnSpc>
+                <a:spcPct val="112000"/>
+              </a:lnSpc>
+            </a:pPr>
+            <a:r>
+              <a:rPr sz="825" b="0">
+                <a:solidFill>
+                  <a:srgbClr val="555555"/>
+                </a:solidFill>
+                <a:latin typeface="Arial"/>
+                <a:ea typeface="Arial"/>
+              </a:rPr>
+              <a:t>'23  512</a:t>
+            </a:r>
+          </a:p>
+        </p:txBody>
+      </p:sp>
+      <p:sp>
+        <p:nvSpPr>
+          <p:cNvPr id="93" name="Rectangle 92"/>
+          <p:cNvSpPr/>
+          <p:nvPr/>
+        </p:nvSpPr>
+        <p:spPr>
+          <a:xfrm>
+            <a:off x="5440679" y="7918704"/>
+            <a:ext cx="310896" cy="256032"/>
           </a:xfrm>
           <a:prstGeom prst="rect">
             <a:avLst/>
@@ -6774,14 +7337,14 @@
       </p:sp>
       <p:sp>
         <p:nvSpPr>
-          <p:cNvPr id="81" name="TextBox 80"/>
+          <p:cNvPr id="94" name="TextBox 93"/>
           <p:cNvSpPr txBox="1"/>
           <p:nvPr/>
         </p:nvSpPr>
         <p:spPr>
           <a:xfrm>
-            <a:off x="1133856" y="8613648"/>
-            <a:ext cx="1463040" cy="731520"/>
+            <a:off x="5257799" y="8193024"/>
+            <a:ext cx="676656" cy="164592"/>
           </a:xfrm>
           <a:prstGeom prst="rect">
             <a:avLst/>
@@ -6789,7 +7352,93 @@
           <a:noFill/>
         </p:spPr>
         <p:txBody>
-          <a:bodyPr wrap="square" anchor="ctr" lIns="0" rIns="0" tIns="0" bIns="0">
+          <a:bodyPr wrap="square" anchor="t" lIns="0" rIns="0" tIns="0" bIns="0">
+            <a:spAutoFit/>
+          </a:bodyPr>
+          <a:lstStyle/>
+          <a:p>
+            <a:pPr algn="ctr">
+              <a:lnSpc>
+                <a:spcPct val="112000"/>
+              </a:lnSpc>
+            </a:pPr>
+            <a:r>
+              <a:rPr sz="825" b="1">
+                <a:solidFill>
+                  <a:srgbClr val="1A1A1A"/>
+                </a:solidFill>
+                <a:latin typeface="Arial"/>
+                <a:ea typeface="Arial"/>
+              </a:rPr>
+              <a:t>'25  1,024</a:t>
+            </a:r>
+          </a:p>
+        </p:txBody>
+      </p:sp>
+      <p:sp>
+        <p:nvSpPr>
+          <p:cNvPr id="95" name="Rectangle 94"/>
+          <p:cNvSpPr/>
+          <p:nvPr/>
+        </p:nvSpPr>
+        <p:spPr>
+          <a:xfrm>
+            <a:off x="6025896" y="7708392"/>
+            <a:ext cx="3535680" cy="731520"/>
+          </a:xfrm>
+          <a:prstGeom prst="rect">
+            <a:avLst/>
+          </a:prstGeom>
+          <a:solidFill>
+            <a:srgbClr val="FFFFFF"/>
+          </a:solidFill>
+          <a:ln w="9525">
+            <a:solidFill>
+              <a:srgbClr val="D9D9D9"/>
+            </a:solidFill>
+          </a:ln>
+          <a:effectLst/>
+        </p:spPr>
+        <p:style>
+          <a:lnRef idx="1">
+            <a:schemeClr val="accent1"/>
+          </a:lnRef>
+          <a:fillRef idx="3">
+            <a:schemeClr val="accent1"/>
+          </a:fillRef>
+          <a:effectRef idx="2">
+            <a:schemeClr val="accent1"/>
+          </a:effectRef>
+          <a:fontRef idx="minor">
+            <a:schemeClr val="lt1"/>
+          </a:fontRef>
+        </p:style>
+        <p:txBody>
+          <a:bodyPr rtlCol="0" anchor="ctr"/>
+          <a:lstStyle/>
+          <a:p>
+            <a:pPr algn="ctr"/>
+          </a:p>
+        </p:txBody>
+      </p:sp>
+      <p:sp>
+        <p:nvSpPr>
+          <p:cNvPr id="96" name="TextBox 95"/>
+          <p:cNvSpPr txBox="1"/>
+          <p:nvPr/>
+        </p:nvSpPr>
+        <p:spPr>
+          <a:xfrm>
+            <a:off x="6135624" y="7744967"/>
+            <a:ext cx="3316224" cy="164592"/>
+          </a:xfrm>
+          <a:prstGeom prst="rect">
+            <a:avLst/>
+          </a:prstGeom>
+          <a:noFill/>
+        </p:spPr>
+        <p:txBody>
+          <a:bodyPr wrap="square" anchor="t" lIns="0" rIns="0" tIns="0" bIns="0">
             <a:spAutoFit/>
           </a:bodyPr>
           <a:lstStyle/>
@@ -6800,6 +7449,589 @@
               </a:lnSpc>
             </a:pPr>
             <a:r>
+              <a:rPr sz="875" b="0">
+                <a:solidFill>
+                  <a:srgbClr val="8A8A8A"/>
+                </a:solidFill>
+                <a:latin typeface="Arial"/>
+                <a:ea typeface="Arial"/>
+              </a:rPr>
+              <a:t>다이 (단품)</a:t>
+            </a:r>
+          </a:p>
+        </p:txBody>
+      </p:sp>
+      <p:sp>
+        <p:nvSpPr>
+          <p:cNvPr id="97" name="TextBox 96"/>
+          <p:cNvSpPr txBox="1"/>
+          <p:nvPr/>
+        </p:nvSpPr>
+        <p:spPr>
+          <a:xfrm>
+            <a:off x="6135624" y="7900416"/>
+            <a:ext cx="3316224" cy="201168"/>
+          </a:xfrm>
+          <a:prstGeom prst="rect">
+            <a:avLst/>
+          </a:prstGeom>
+          <a:noFill/>
+        </p:spPr>
+        <p:txBody>
+          <a:bodyPr wrap="square" anchor="t" lIns="0" rIns="0" tIns="0" bIns="0">
+            <a:spAutoFit/>
+          </a:bodyPr>
+          <a:lstStyle/>
+          <a:p>
+            <a:pPr algn="l">
+              <a:lnSpc>
+                <a:spcPct val="112000"/>
+              </a:lnSpc>
+            </a:pPr>
+            <a:r>
+              <a:rPr sz="1125" b="1">
+                <a:solidFill>
+                  <a:srgbClr val="1A1A1A"/>
+                </a:solidFill>
+                <a:latin typeface="Arial"/>
+                <a:ea typeface="Arial"/>
+              </a:rPr>
+              <a:t>다이 수 8배 ↑ → 다이 고장률 8배 ↓ 필요</a:t>
+            </a:r>
+          </a:p>
+        </p:txBody>
+      </p:sp>
+      <p:sp>
+        <p:nvSpPr>
+          <p:cNvPr id="98" name="TextBox 97"/>
+          <p:cNvSpPr txBox="1"/>
+          <p:nvPr/>
+        </p:nvSpPr>
+        <p:spPr>
+          <a:xfrm>
+            <a:off x="6135624" y="8101583"/>
+            <a:ext cx="3316224" cy="320040"/>
+          </a:xfrm>
+          <a:prstGeom prst="rect">
+            <a:avLst/>
+          </a:prstGeom>
+          <a:noFill/>
+        </p:spPr>
+        <p:txBody>
+          <a:bodyPr wrap="square" anchor="t" lIns="0" rIns="0" tIns="0" bIns="0">
+            <a:spAutoFit/>
+          </a:bodyPr>
+          <a:lstStyle/>
+          <a:p>
+            <a:pPr algn="l">
+              <a:lnSpc>
+                <a:spcPct val="100000"/>
+              </a:lnSpc>
+            </a:pPr>
+            <a:r>
+              <a:rPr sz="825" b="0">
+                <a:solidFill>
+                  <a:srgbClr val="555555"/>
+                </a:solidFill>
+                <a:latin typeface="Arial"/>
+                <a:ea typeface="Arial"/>
+              </a:rPr>
+              <a:t>SSD 고장률 ≈ N × 다이 고장률 · 칩 면적↔수율과 같은 원리 · 다이 고장률 개선은 기술적 한계</a:t>
+            </a:r>
+          </a:p>
+        </p:txBody>
+      </p:sp>
+      <p:sp>
+        <p:nvSpPr>
+          <p:cNvPr id="99" name="Right Arrow 98"/>
+          <p:cNvSpPr/>
+          <p:nvPr/>
+        </p:nvSpPr>
+        <p:spPr>
+          <a:xfrm>
+            <a:off x="9634728" y="7982712"/>
+            <a:ext cx="219456" cy="182880"/>
+          </a:xfrm>
+          <a:prstGeom prst="rightArrow">
+            <a:avLst/>
+          </a:prstGeom>
+          <a:solidFill>
+            <a:srgbClr val="1428A0"/>
+          </a:solidFill>
+          <a:ln>
+            <a:noFill/>
+          </a:ln>
+          <a:effectLst/>
+        </p:spPr>
+        <p:style>
+          <a:lnRef idx="1">
+            <a:schemeClr val="accent1"/>
+          </a:lnRef>
+          <a:fillRef idx="3">
+            <a:schemeClr val="accent1"/>
+          </a:fillRef>
+          <a:effectRef idx="2">
+            <a:schemeClr val="accent1"/>
+          </a:effectRef>
+          <a:fontRef idx="minor">
+            <a:schemeClr val="lt1"/>
+          </a:fontRef>
+        </p:style>
+        <p:txBody>
+          <a:bodyPr rtlCol="0" anchor="ctr"/>
+          <a:lstStyle/>
+          <a:p>
+            <a:pPr algn="ctr"/>
+          </a:p>
+        </p:txBody>
+      </p:sp>
+      <p:sp>
+        <p:nvSpPr>
+          <p:cNvPr id="100" name="Rectangle 99"/>
+          <p:cNvSpPr/>
+          <p:nvPr/>
+        </p:nvSpPr>
+        <p:spPr>
+          <a:xfrm>
+            <a:off x="9927336" y="7708392"/>
+            <a:ext cx="3535680" cy="731520"/>
+          </a:xfrm>
+          <a:prstGeom prst="rect">
+            <a:avLst/>
+          </a:prstGeom>
+          <a:solidFill>
+            <a:srgbClr val="AAB8E8"/>
+          </a:solidFill>
+          <a:ln>
+            <a:noFill/>
+          </a:ln>
+          <a:effectLst/>
+        </p:spPr>
+        <p:style>
+          <a:lnRef idx="1">
+            <a:schemeClr val="accent1"/>
+          </a:lnRef>
+          <a:fillRef idx="3">
+            <a:schemeClr val="accent1"/>
+          </a:fillRef>
+          <a:effectRef idx="2">
+            <a:schemeClr val="accent1"/>
+          </a:effectRef>
+          <a:fontRef idx="minor">
+            <a:schemeClr val="lt1"/>
+          </a:fontRef>
+        </p:style>
+        <p:txBody>
+          <a:bodyPr rtlCol="0" anchor="ctr"/>
+          <a:lstStyle/>
+          <a:p>
+            <a:pPr algn="ctr"/>
+          </a:p>
+        </p:txBody>
+      </p:sp>
+      <p:sp>
+        <p:nvSpPr>
+          <p:cNvPr id="101" name="TextBox 100"/>
+          <p:cNvSpPr txBox="1"/>
+          <p:nvPr/>
+        </p:nvSpPr>
+        <p:spPr>
+          <a:xfrm>
+            <a:off x="10037064" y="7744967"/>
+            <a:ext cx="3316224" cy="164592"/>
+          </a:xfrm>
+          <a:prstGeom prst="rect">
+            <a:avLst/>
+          </a:prstGeom>
+          <a:noFill/>
+        </p:spPr>
+        <p:txBody>
+          <a:bodyPr wrap="square" anchor="t" lIns="0" rIns="0" tIns="0" bIns="0">
+            <a:spAutoFit/>
+          </a:bodyPr>
+          <a:lstStyle/>
+          <a:p>
+            <a:pPr algn="l">
+              <a:lnSpc>
+                <a:spcPct val="112000"/>
+              </a:lnSpc>
+            </a:pPr>
+            <a:r>
+              <a:rPr sz="875" b="0">
+                <a:solidFill>
+                  <a:srgbClr val="1A1A1A"/>
+                </a:solidFill>
+                <a:latin typeface="Arial"/>
+                <a:ea typeface="Arial"/>
+              </a:rPr>
+              <a:t>SSD 내부 (현재 해법)</a:t>
+            </a:r>
+          </a:p>
+        </p:txBody>
+      </p:sp>
+      <p:sp>
+        <p:nvSpPr>
+          <p:cNvPr id="102" name="TextBox 101"/>
+          <p:cNvSpPr txBox="1"/>
+          <p:nvPr/>
+        </p:nvSpPr>
+        <p:spPr>
+          <a:xfrm>
+            <a:off x="10037064" y="7900416"/>
+            <a:ext cx="3316224" cy="201168"/>
+          </a:xfrm>
+          <a:prstGeom prst="rect">
+            <a:avLst/>
+          </a:prstGeom>
+          <a:noFill/>
+        </p:spPr>
+        <p:txBody>
+          <a:bodyPr wrap="square" anchor="t" lIns="0" rIns="0" tIns="0" bIns="0">
+            <a:spAutoFit/>
+          </a:bodyPr>
+          <a:lstStyle/>
+          <a:p>
+            <a:pPr algn="l">
+              <a:lnSpc>
+                <a:spcPct val="112000"/>
+              </a:lnSpc>
+            </a:pPr>
+            <a:r>
+              <a:rPr sz="1125" b="1">
+                <a:solidFill>
+                  <a:srgbClr val="1A1A1A"/>
+                </a:solidFill>
+                <a:latin typeface="Arial"/>
+                <a:ea typeface="Arial"/>
+              </a:rPr>
+              <a:t>다이 RAID · 여분 다이 · 다이 은퇴</a:t>
+            </a:r>
+          </a:p>
+        </p:txBody>
+      </p:sp>
+      <p:sp>
+        <p:nvSpPr>
+          <p:cNvPr id="103" name="TextBox 102"/>
+          <p:cNvSpPr txBox="1"/>
+          <p:nvPr/>
+        </p:nvSpPr>
+        <p:spPr>
+          <a:xfrm>
+            <a:off x="10037064" y="8101583"/>
+            <a:ext cx="3316224" cy="320040"/>
+          </a:xfrm>
+          <a:prstGeom prst="rect">
+            <a:avLst/>
+          </a:prstGeom>
+          <a:noFill/>
+        </p:spPr>
+        <p:txBody>
+          <a:bodyPr wrap="square" anchor="t" lIns="0" rIns="0" tIns="0" bIns="0">
+            <a:spAutoFit/>
+          </a:bodyPr>
+          <a:lstStyle/>
+          <a:p>
+            <a:pPr algn="l">
+              <a:lnSpc>
+                <a:spcPct val="100000"/>
+              </a:lnSpc>
+            </a:pPr>
+            <a:r>
+              <a:rPr sz="825" b="0">
+                <a:solidFill>
+                  <a:srgbClr val="555555"/>
+                </a:solidFill>
+                <a:latin typeface="Arial"/>
+                <a:ea typeface="Arial"/>
+              </a:rPr>
+              <a:t>Micron RAIN(XOR 패리티 다이) · 삼성 Fail-in-Place(PM1733, 감량 운영) · 패리티·예비 용량 오버헤드 ↑</a:t>
+            </a:r>
+          </a:p>
+        </p:txBody>
+      </p:sp>
+      <p:sp>
+        <p:nvSpPr>
+          <p:cNvPr id="104" name="Right Arrow 103"/>
+          <p:cNvSpPr/>
+          <p:nvPr/>
+        </p:nvSpPr>
+        <p:spPr>
+          <a:xfrm>
+            <a:off x="13536168" y="7982712"/>
+            <a:ext cx="219456" cy="182880"/>
+          </a:xfrm>
+          <a:prstGeom prst="rightArrow">
+            <a:avLst/>
+          </a:prstGeom>
+          <a:solidFill>
+            <a:srgbClr val="AAB8E8"/>
+          </a:solidFill>
+          <a:ln>
+            <a:noFill/>
+          </a:ln>
+          <a:effectLst/>
+        </p:spPr>
+        <p:style>
+          <a:lnRef idx="1">
+            <a:schemeClr val="accent1"/>
+          </a:lnRef>
+          <a:fillRef idx="3">
+            <a:schemeClr val="accent1"/>
+          </a:fillRef>
+          <a:effectRef idx="2">
+            <a:schemeClr val="accent1"/>
+          </a:effectRef>
+          <a:fontRef idx="minor">
+            <a:schemeClr val="lt1"/>
+          </a:fontRef>
+        </p:style>
+        <p:txBody>
+          <a:bodyPr rtlCol="0" anchor="ctr"/>
+          <a:lstStyle/>
+          <a:p>
+            <a:pPr algn="ctr"/>
+          </a:p>
+        </p:txBody>
+      </p:sp>
+      <p:sp>
+        <p:nvSpPr>
+          <p:cNvPr id="105" name="Rectangle 104"/>
+          <p:cNvSpPr/>
+          <p:nvPr/>
+        </p:nvSpPr>
+        <p:spPr>
+          <a:xfrm>
+            <a:off x="13828776" y="7708392"/>
+            <a:ext cx="3535680" cy="731520"/>
+          </a:xfrm>
+          <a:prstGeom prst="rect">
+            <a:avLst/>
+          </a:prstGeom>
+          <a:solidFill>
+            <a:srgbClr val="F4F6FC"/>
+          </a:solidFill>
+          <a:ln w="12700">
+            <a:solidFill>
+              <a:srgbClr val="1428A0"/>
+            </a:solidFill>
+            <a:prstDash val="dash"/>
+          </a:ln>
+          <a:effectLst/>
+        </p:spPr>
+        <p:style>
+          <a:lnRef idx="1">
+            <a:schemeClr val="accent1"/>
+          </a:lnRef>
+          <a:fillRef idx="3">
+            <a:schemeClr val="accent1"/>
+          </a:fillRef>
+          <a:effectRef idx="2">
+            <a:schemeClr val="accent1"/>
+          </a:effectRef>
+          <a:fontRef idx="minor">
+            <a:schemeClr val="lt1"/>
+          </a:fontRef>
+        </p:style>
+        <p:txBody>
+          <a:bodyPr rtlCol="0" anchor="ctr"/>
+          <a:lstStyle/>
+          <a:p>
+            <a:pPr algn="ctr"/>
+          </a:p>
+        </p:txBody>
+      </p:sp>
+      <p:sp>
+        <p:nvSpPr>
+          <p:cNvPr id="106" name="TextBox 105"/>
+          <p:cNvSpPr txBox="1"/>
+          <p:nvPr/>
+        </p:nvSpPr>
+        <p:spPr>
+          <a:xfrm>
+            <a:off x="13938504" y="7744967"/>
+            <a:ext cx="3316224" cy="164592"/>
+          </a:xfrm>
+          <a:prstGeom prst="rect">
+            <a:avLst/>
+          </a:prstGeom>
+          <a:noFill/>
+        </p:spPr>
+        <p:txBody>
+          <a:bodyPr wrap="square" anchor="t" lIns="0" rIns="0" tIns="0" bIns="0">
+            <a:spAutoFit/>
+          </a:bodyPr>
+          <a:lstStyle/>
+          <a:p>
+            <a:pPr algn="l">
+              <a:lnSpc>
+                <a:spcPct val="112000"/>
+              </a:lnSpc>
+            </a:pPr>
+            <a:r>
+              <a:rPr sz="875" b="0">
+                <a:solidFill>
+                  <a:srgbClr val="1428A0"/>
+                </a:solidFill>
+                <a:latin typeface="Arial"/>
+                <a:ea typeface="Arial"/>
+              </a:rPr>
+              <a:t>상위 계층 (SSD 단독 한계 시)</a:t>
+            </a:r>
+          </a:p>
+        </p:txBody>
+      </p:sp>
+      <p:sp>
+        <p:nvSpPr>
+          <p:cNvPr id="107" name="TextBox 106"/>
+          <p:cNvSpPr txBox="1"/>
+          <p:nvPr/>
+        </p:nvSpPr>
+        <p:spPr>
+          <a:xfrm>
+            <a:off x="13938504" y="7900416"/>
+            <a:ext cx="3316224" cy="201168"/>
+          </a:xfrm>
+          <a:prstGeom prst="rect">
+            <a:avLst/>
+          </a:prstGeom>
+          <a:noFill/>
+        </p:spPr>
+        <p:txBody>
+          <a:bodyPr wrap="square" anchor="t" lIns="0" rIns="0" tIns="0" bIns="0">
+            <a:spAutoFit/>
+          </a:bodyPr>
+          <a:lstStyle/>
+          <a:p>
+            <a:pPr algn="l">
+              <a:lnSpc>
+                <a:spcPct val="112000"/>
+              </a:lnSpc>
+            </a:pPr>
+            <a:r>
+              <a:rPr sz="1125" b="1">
+                <a:solidFill>
+                  <a:srgbClr val="1A1A1A"/>
+                </a:solidFill>
+                <a:latin typeface="Arial"/>
+                <a:ea typeface="Arial"/>
+              </a:rPr>
+              <a:t>감량 운영 수용 · 호스트 소거 부호</a:t>
+            </a:r>
+          </a:p>
+        </p:txBody>
+      </p:sp>
+      <p:sp>
+        <p:nvSpPr>
+          <p:cNvPr id="108" name="TextBox 107"/>
+          <p:cNvSpPr txBox="1"/>
+          <p:nvPr/>
+        </p:nvSpPr>
+        <p:spPr>
+          <a:xfrm>
+            <a:off x="13938504" y="8101583"/>
+            <a:ext cx="3316224" cy="320040"/>
+          </a:xfrm>
+          <a:prstGeom prst="rect">
+            <a:avLst/>
+          </a:prstGeom>
+          <a:noFill/>
+        </p:spPr>
+        <p:txBody>
+          <a:bodyPr wrap="square" anchor="t" lIns="0" rIns="0" tIns="0" bIns="0">
+            <a:spAutoFit/>
+          </a:bodyPr>
+          <a:lstStyle/>
+          <a:p>
+            <a:pPr algn="l">
+              <a:lnSpc>
+                <a:spcPct val="100000"/>
+              </a:lnSpc>
+            </a:pPr>
+            <a:r>
+              <a:rPr sz="825" b="0">
+                <a:solidFill>
+                  <a:srgbClr val="555555"/>
+                </a:solidFill>
+                <a:latin typeface="Arial"/>
+                <a:ea typeface="Arial"/>
+              </a:rPr>
+              <a:t>OCP SMART XOR 복구 카운트(호스트 관측) · 플랫폼 fail-in-place(MS Hyrax) · 드라이브 간 소거 부호</a:t>
+            </a:r>
+          </a:p>
+        </p:txBody>
+      </p:sp>
+      <p:sp>
+        <p:nvSpPr>
+          <p:cNvPr id="109" name="Rectangle 108"/>
+          <p:cNvSpPr/>
+          <p:nvPr/>
+        </p:nvSpPr>
+        <p:spPr>
+          <a:xfrm>
+            <a:off x="722376" y="8613648"/>
+            <a:ext cx="16843248" cy="731520"/>
+          </a:xfrm>
+          <a:prstGeom prst="rect">
+            <a:avLst/>
+          </a:prstGeom>
+          <a:solidFill>
+            <a:srgbClr val="1428A0"/>
+          </a:solidFill>
+          <a:ln>
+            <a:noFill/>
+          </a:ln>
+          <a:effectLst/>
+        </p:spPr>
+        <p:style>
+          <a:lnRef idx="1">
+            <a:schemeClr val="accent1"/>
+          </a:lnRef>
+          <a:fillRef idx="3">
+            <a:schemeClr val="accent1"/>
+          </a:fillRef>
+          <a:effectRef idx="2">
+            <a:schemeClr val="accent1"/>
+          </a:effectRef>
+          <a:fontRef idx="minor">
+            <a:schemeClr val="lt1"/>
+          </a:fontRef>
+        </p:style>
+        <p:txBody>
+          <a:bodyPr rtlCol="0" anchor="ctr"/>
+          <a:lstStyle/>
+          <a:p>
+            <a:pPr algn="ctr"/>
+          </a:p>
+        </p:txBody>
+      </p:sp>
+      <p:sp>
+        <p:nvSpPr>
+          <p:cNvPr id="110" name="TextBox 109"/>
+          <p:cNvSpPr txBox="1"/>
+          <p:nvPr/>
+        </p:nvSpPr>
+        <p:spPr>
+          <a:xfrm>
+            <a:off x="1133856" y="8613648"/>
+            <a:ext cx="1463040" cy="731520"/>
+          </a:xfrm>
+          <a:prstGeom prst="rect">
+            <a:avLst/>
+          </a:prstGeom>
+          <a:noFill/>
+        </p:spPr>
+        <p:txBody>
+          <a:bodyPr wrap="square" anchor="ctr" lIns="0" rIns="0" tIns="0" bIns="0">
+            <a:spAutoFit/>
+          </a:bodyPr>
+          <a:lstStyle/>
+          <a:p>
+            <a:pPr algn="l">
+              <a:lnSpc>
+                <a:spcPct val="112000"/>
+              </a:lnSpc>
+            </a:pPr>
+            <a:r>
               <a:rPr sz="1800" b="0">
                 <a:solidFill>
                   <a:srgbClr val="FFFFFF"/>
@@ -6814,7 +8046,7 @@
       </p:sp>
       <p:sp>
         <p:nvSpPr>
-          <p:cNvPr id="82" name="TextBox 81"/>
+          <p:cNvPr id="111" name="TextBox 110"/>
           <p:cNvSpPr txBox="1"/>
           <p:nvPr/>
         </p:nvSpPr>
@@ -6840,14 +8072,14 @@
               </a:lnSpc>
             </a:pPr>
             <a:r>
-              <a:rPr sz="1700" b="1">
+              <a:rPr sz="1650" b="1">
                 <a:solidFill>
                   <a:srgbClr val="FFFFFF"/>
                 </a:solidFill>
                 <a:latin typeface="Arial"/>
                 <a:ea typeface="Arial"/>
               </a:rPr>
-              <a:t>요구(UBER·DWPD)는 고정, 단품 지표(RBER·P/E)는 악화, 격차는 상위 계층의 변수(ECC·WAF)가 보상해 왔습니다.</a:t>
+              <a:t>요구(UBER·DWPD·FFR)는 고정, 단품 지표(RBER·P/E·다이 수)는 악화, 격차는 상위 계층이 보상해 왔습니다.</a:t>
             </a:r>
           </a:p>
           <a:p>
@@ -6857,7 +8089,7 @@
               </a:lnSpc>
             </a:pPr>
             <a:r>
-              <a:rPr sz="1700" b="1">
+              <a:rPr sz="1650" b="1">
                 <a:solidFill>
                   <a:srgbClr val="FFFFFF"/>
                 </a:solidFill>
@@ -6871,7 +8103,7 @@
       </p:sp>
       <p:sp>
         <p:nvSpPr>
-          <p:cNvPr id="83" name="TextBox 82"/>
+          <p:cNvPr id="112" name="TextBox 111"/>
           <p:cNvSpPr txBox="1"/>
           <p:nvPr/>
         </p:nvSpPr>
@@ -6904,14 +8136,14 @@
                 <a:latin typeface="Arial"/>
                 <a:ea typeface="Arial"/>
               </a:rPr>
-              <a:t>출처: JESD218(UBER·보존), ATP·Kioxia(DWPD 산식·WAF 3), Intel X25-E·S3700·P4510 및 Solidigm P5316 사양(정격 DWPD), Mielke·Cai(RBER), WD ECC/DSP 백서(LDPC 120bit/KB), CacheLib FDP(WAF), HotStorage'14·SYSTOR'17·NVMe 1.4(SSD 단독 최적화) · 등급은 보고서 부록 A F28~F40</a:t>
-            </a:r>
-          </a:p>
-        </p:txBody>
-      </p:sp>
-      <p:sp>
-        <p:nvSpPr>
-          <p:cNvPr id="84" name="TextBox 83"/>
+              <a:t>출처: JESD218(UBER·FFR), ATP·Kioxia(DWPD 산식), Intel·Solidigm 사양(정격 DWPD·다이 수), Mielke·Cai(RBER·다이 패리티), WD(LDPC), CacheLib FDP(WAF), HotStorage'14·SYSTOR'17·NVMe 1.4, Kioxia LC9·삼성 FIP·OCP SMART·MS Hyrax · 등급은 보고서 부록 A F28~F47</a:t>
+            </a:r>
+          </a:p>
+        </p:txBody>
+      </p:sp>
+      <p:sp>
+        <p:nvSpPr>
+          <p:cNvPr id="113" name="TextBox 112"/>
           <p:cNvSpPr txBox="1"/>
           <p:nvPr/>
         </p:nvSpPr>

--- a/outputs/presentation/memory-solution-ladder.pptx
+++ b/outputs/presentation/memory-solution-ladder.pptx
@@ -502,7 +502,7 @@
           <a:lstStyle/>
           <a:p>
             <a:r>
-              <a:t>1장은 QLC의 내구성 격차를 어느 계층이 해소하는가를 네 지표로 답합니다. 왼쪽 차트는 인과 순서입니다. ① 셀의 한계: 비트/셀을 늘릴수록 셀이 견디는 P/E 사이클이 SLC 30K~100K에서 QLC 100~1K로 100배 감소했습니다. ② 컨트롤러의 보상: 같은 기간 RBER은 SLC 10의 -9~-7승에서 QLC 10의 -3~-2승으로 약 백만 배 상승했지만, 고객의 UBER 요구(JESD218: 클라이언트 10의 -15승, 엔터프라이즈 10의 -16승)는 고정이었습니다. 그 격차를 컨트롤러가 ECC로 보상했습니다. 1비트/512B에서 BCH 60비트/KB, LDPC 120비트/KB로 약 60배입니다. 셀은 보존·사이클링·리드 디스터브로 시간에 따라 변하는 산포를 단독으로 보정하지 못하므로, 이것이 NAND에서 SSD로의 1단계 이관이며 완결된 이관입니다. ③ 결과: ECC는 BER을 보상하지만 P/E를 늘리지는 못합니다. 정격 DWPD는 X25-E SLC 17(2008), S3700 eMLC 10(2012), P4510 TLC 0.7(2018), P5316 QLC 0.41(2021), 최신 QLC 0.075~0.6으로 하락했는데, 추론 캐시 계층의 요구는 TLC 수준 1~3, ScaleFlux가 제시한 유효 요구는 7~10입니다. 10~40배 격차입니다. ④ WAF: 2단계는 SSD 진영이 디바이스와 드라이버 안에서 워크로드에 적응하려 한 시도입니다. Multi-stream(2014)·AutoStream(2017)·FTL 핫/콜드 추정·NVMe IO 결정성(NVM Sets·Predictable Latency Mode, 2019)이 여기에 속합니다. 테일 지연 등 QoS와 성능은 개선했으나, 데이터의 수명은 호스트와 애플리케이션만 아는 정보라 디바이스가 완전히 감지할 수 없고, 실 워크로드의 WAF는 3 수준에 머물렀습니다(랜덤 쓰기 3.00, CacheLib 배치 표준 미적용 3.22). 3단계는 호스트 시스템 공동 설계입니다. 호스트가 데이터 수명을 지정(배치 표준)하고 캐시 관리자·애플리케이션 정책까지 함께 설계하면 WAF는 1.03이 됩니다. 68% 감소, 유효 DWPD 3.1배입니다. 오른쪽 위는 산식과 항별 결정 주체입니다. DWPD = P/E × (1+OP) ÷ (WAF × 365 × 년)에서 P/E는 셀, OP는 디바이스, 년과 요구 DWPD는 고객이 결정합니다. P/E가 100배 감소했으므로 남은 보상 변수는 WAF뿐입니다. 오른쪽 아래는 이관의 3단계입니다. 1단계 ECC는 UBER 요구를 충족해 완결됐고, 2단계 SSD 단독 최적화는 QoS·성능을 개선했으나 WAF를 낮추지 못해 DWPD 요구를 충족하지 못했으며, 3단계 호스트 시스템 공동 설계가 WAF를 1로 낮춰 DWPD 요구를 충족합니다. 본 덱 2~5장이 3단계입니다. 결론: QLC로 요구 DWPD를 충족하는 경로는 호스트 시스템 공동 설계뿐이며, 이는 산식의 귀결입니다. 그 규격이 언제 정의되는지가 2장입니다. 하단 스트립은 병렬 축입니다. 내구성 축과 별개로 신뢰성 축에서도 같은 구조가 진행 중입니다. 요구는 JESD218 기능 고장률 FFR 3% 이하로 고정인데, SSD당 NAND 다이 수는 S3700 800GB 128개(2012)에서 Kioxia LC9 245TB 1,024개(2025, 2Tb 다이 32단 스택 32패키지)로 8배 늘었습니다. 보호가 없으면 SSD 고장률은 다이 수에 비례하므로, 칩 면적이 커질수록 수율이 떨어지는 것과 같은 원리로 다이 고장률을 8배 낮추거나 다이 고장을 허용해야 합니다. 다이 고장률 개선이 기술적 한계에 닿자 해법은 SSD 계층으로 이관됐습니다. 다이 RAID(Micron RAIN, 슈퍼페이지 XOR 패리티 다이), 여분 다이, 다이 은퇴와 감량 운영(삼성 Fail-in-Place PM1733: 다이 고장 시 데이터 재배치 후 4~8GB 감량 운영)입니다. 이 해법들은 패리티와 예비 용량 오버헤드를 키우므로 다이 수가 계속 늘면 SSD 단독으로는 부족해질 수 있고, 상위 계층은 이미 준비 중입니다. OCP SMART의 XOR 복구 카운트로 호스트가 다이 복구를 관측하고, Microsoft Hyrax처럼 플랫폼이 감량 운영을 수용하며, 드라이브 간 소거 부호가 SSD 고장을 흡수합니다. 근거 등급은 보고서 부록 A F28~F47에 있습니다.</a:t>
+              <a:t>1장은 이관 매트릭스입니다. 열은 이관 단계이고 행은 두 축입니다. 요구는 고객이 정하고 고정입니다. 단품 지표는 셀과 다이의 지표이며 세대마다 악화됩니다. 보상은 먼저 SSD 계층에서, 다음은 호스트·시스템 계층에서 이뤄집니다. 두 행 사이의 산식 DWPD = P/E × (1+OP) ÷ WAF ÷ 365 × 년은 각 항의 결정 주체가 열과 대응함을 보입니다. P/E는 셀, OP는 SSD, WAF는 호스트·앱, 년과 요구 DWPD는 고객입니다. 내구성 행. 요구: 추론 캐시 계층은 DWPD 1~3(현재 TLC 수준, ScaleFlux 제시 유효 요구 7~10), UBER는 JESD218 기준 10의 -15승·-16승으로 고정입니다. 단품: 비트/셀을 늘릴수록 P/E 사이클은 SLC 30K~100K에서 QLC 100~1K로 100배 감소했고, RBER은 약 백만 배 상승했습니다. 보존·사이클링·리드 디스터브로 시간에 따라 변하는 산포는 셀 단독으로 보정할 수 없습니다. SSD 계층: 1단계 컨트롤러 ECC는 1비트/512B에서 LDPC 120비트/KB로 60배 강화돼 UBER 요구를 충족했습니다. 완결된 이관입니다. 2단계 SSD 단독 워크로드 최적화(2014~2019: Multi-stream·AutoStream·FTL 핫/콜드 추정·NVMe IO 결정성)는 QoS와 성능은 개선했으나 데이터 수명을 SSD가 감지할 수 없어 실 워크로드 WAF는 3 수준에 머물렀고, 정격 DWPD는 17에서 0.4로 내려와 요구 1~3과 10~40배 격차가 생겼습니다. 부분 성공입니다. 호스트·시스템 계층: 3단계 호스트 시스템 공동 설계는 호스트가 데이터 수명을 지정(배치 표준)하고 캐시 관리자·애플리케이션 정책까지 함께 설계해 WAF를 3.22에서 1.03으로 낮췄습니다. 68% 감소, 유효 DWPD 3.1배이며 DWPD 요구를 충족합니다. QLC로 요구 DWPD를 충족하는 유일한 경로이고 본 덱 2~5장이 이 단계입니다. 신뢰성 행. 요구: JESD218 기능 고장률 FFR 3% 이하로 고정입니다. 보호가 없으면 SSD 고장률은 다이 수 N에 비례하므로 칩 면적이 커질수록 수율이 떨어지는 것과 같은 구조입니다. 단품: SSD당 NAND 다이 수는 S3700 800GB 128개(2012)에서 Kioxia LC9 245TB 1,024개(2025, 2Tb 다이 32단 스택 32패키지)로 8배 늘었고, 같은 FFR을 지키려면 다이 고장률을 8배 낮추거나 다이 고장을 허용해야 합니다. 다이 고장률 개선은 기술적 한계에 닿았습니다. SSD 계층(현재 해법): 다이 RAID(Micron RAIN, 슈퍼페이지 XOR 패리티 다이), 여분 다이, 다이 은퇴와 감량 운영(삼성 Fail-in-Place PM1733: 고장 다이를 제외하고 4~8GB 감량 운영)입니다. 패리티와 예비 용량 오버헤드가 다이 수와 함께 증가합니다. 상위 계층(SSD 단독 한계 시): OCP SMART의 XOR 복구 카운트로 호스트가 다이 복구를 관측하고, Microsoft Hyrax처럼 플랫폼이 감량 운영을 수용하며, 드라이브 간 소거 부호가 SSD 고장을 흡수합니다. 결론: 두 축 모두 요구는 고정이고 단품은 악화되며 보상은 상위 계층으로 이관됩니다. QLC로 요구 DWPD를 충족하는 경로는 호스트 시스템 공동 설계뿐이며 이는 산식의 귀결입니다. 그 규격이 언제 정의되는지가 2장입니다. 근거 등급은 보고서 부록 A F28~F47에 있습니다.</a:t>
             </a:r>
           </a:p>
         </p:txBody>
@@ -3623,7 +3623,7 @@
                 <a:latin typeface="Arial"/>
                 <a:ea typeface="Arial"/>
               </a:rPr>
-              <a:t>메모리 해법 사다리 · P/E · BER · DWPD · WAF</a:t>
+              <a:t>메모리 해법 사다리 · 이관 매트릭스</a:t>
             </a:r>
           </a:p>
         </p:txBody>
@@ -3663,7 +3663,7 @@
                 <a:latin typeface="Arial"/>
                 <a:ea typeface="Arial"/>
               </a:rPr>
-              <a:t>ECC가 RBER을 보상했듯 P/E 감소는 WAF로 보상해야 하며, 이는 호스트 공동 설계로만 가능합니다</a:t>
+              <a:t>요구는 고정, 단품은 악화, 보상은 상위 계층으로: QLC의 DWPD는 호스트 공동 설계로만 충족됩니다</a:t>
             </a:r>
           </a:p>
         </p:txBody>
@@ -3703,7 +3703,7 @@
                 <a:latin typeface="Arial"/>
                 <a:ea typeface="Arial"/>
               </a:rPr>
-              <a:t>QLC의 내구성 격차를 어느 계층이 해소하는가: SSD 단독 최적화는 QoS·성능은 개선했으나 WAF는 낮추지 못했습니다.</a:t>
+              <a:t>내구성 축과 신뢰성 축 모두 같은 구조입니다. SSD 단독 최적화는 QoS·성능은 개선했으나 WAF는 낮추지 못했습니다.</a:t>
             </a:r>
           </a:p>
         </p:txBody>
@@ -3752,40 +3752,142 @@
           </a:p>
         </p:txBody>
       </p:sp>
-      <p:pic>
-        <p:nvPicPr>
-          <p:cNvPr id="8" name="Picture 7" descr="solution_metrics_chart.png"/>
-          <p:cNvPicPr>
-            <a:picLocks noChangeAspect="1"/>
-          </p:cNvPicPr>
-          <p:nvPr/>
-        </p:nvPicPr>
-        <p:blipFill>
-          <a:blip r:embed="rId2"/>
-          <a:stretch>
-            <a:fillRect/>
-          </a:stretch>
-        </p:blipFill>
-        <p:spPr>
-          <a:xfrm>
-            <a:off x="722376" y="2560320"/>
-            <a:ext cx="8678487" cy="4937760"/>
-          </a:xfrm>
-          <a:prstGeom prst="rect">
-            <a:avLst/>
-          </a:prstGeom>
-        </p:spPr>
-      </p:pic>
-      <p:sp>
-        <p:nvSpPr>
-          <p:cNvPr id="9" name="Rectangle 8"/>
+      <p:sp>
+        <p:nvSpPr>
+          <p:cNvPr id="8" name="Rectangle 7"/>
           <p:cNvSpPr/>
           <p:nvPr/>
         </p:nvSpPr>
         <p:spPr>
           <a:xfrm>
-            <a:off x="9711759" y="2560320"/>
-            <a:ext cx="7853864" cy="1243584"/>
+            <a:off x="2039112" y="2560320"/>
+            <a:ext cx="3675888" cy="512064"/>
+          </a:xfrm>
+          <a:prstGeom prst="rect">
+            <a:avLst/>
+          </a:prstGeom>
+          <a:solidFill>
+            <a:srgbClr val="F4F6FC"/>
+          </a:solidFill>
+          <a:ln w="9525">
+            <a:solidFill>
+              <a:srgbClr val="D9D9D9"/>
+            </a:solidFill>
+          </a:ln>
+          <a:effectLst/>
+        </p:spPr>
+        <p:style>
+          <a:lnRef idx="1">
+            <a:schemeClr val="accent1"/>
+          </a:lnRef>
+          <a:fillRef idx="3">
+            <a:schemeClr val="accent1"/>
+          </a:fillRef>
+          <a:effectRef idx="2">
+            <a:schemeClr val="accent1"/>
+          </a:effectRef>
+          <a:fontRef idx="minor">
+            <a:schemeClr val="lt1"/>
+          </a:fontRef>
+        </p:style>
+        <p:txBody>
+          <a:bodyPr rtlCol="0" anchor="ctr"/>
+          <a:lstStyle/>
+          <a:p>
+            <a:pPr algn="ctr"/>
+          </a:p>
+        </p:txBody>
+      </p:sp>
+      <p:sp>
+        <p:nvSpPr>
+          <p:cNvPr id="9" name="TextBox 8"/>
+          <p:cNvSpPr txBox="1"/>
+          <p:nvPr/>
+        </p:nvSpPr>
+        <p:spPr>
+          <a:xfrm>
+            <a:off x="2167128" y="2615184"/>
+            <a:ext cx="3419856" cy="237744"/>
+          </a:xfrm>
+          <a:prstGeom prst="rect">
+            <a:avLst/>
+          </a:prstGeom>
+          <a:noFill/>
+        </p:spPr>
+        <p:txBody>
+          <a:bodyPr wrap="square" anchor="t" lIns="0" rIns="0" tIns="0" bIns="0">
+            <a:spAutoFit/>
+          </a:bodyPr>
+          <a:lstStyle/>
+          <a:p>
+            <a:pPr algn="l">
+              <a:lnSpc>
+                <a:spcPct val="112000"/>
+              </a:lnSpc>
+            </a:pPr>
+            <a:r>
+              <a:rPr sz="1350" b="1">
+                <a:solidFill>
+                  <a:srgbClr val="1428A0"/>
+                </a:solidFill>
+                <a:latin typeface="Arial"/>
+                <a:ea typeface="Arial"/>
+              </a:rPr>
+              <a:t>요구</a:t>
+            </a:r>
+          </a:p>
+        </p:txBody>
+      </p:sp>
+      <p:sp>
+        <p:nvSpPr>
+          <p:cNvPr id="10" name="TextBox 9"/>
+          <p:cNvSpPr txBox="1"/>
+          <p:nvPr/>
+        </p:nvSpPr>
+        <p:spPr>
+          <a:xfrm>
+            <a:off x="2167128" y="2843784"/>
+            <a:ext cx="3419856" cy="201168"/>
+          </a:xfrm>
+          <a:prstGeom prst="rect">
+            <a:avLst/>
+          </a:prstGeom>
+          <a:noFill/>
+        </p:spPr>
+        <p:txBody>
+          <a:bodyPr wrap="square" anchor="t" lIns="0" rIns="0" tIns="0" bIns="0">
+            <a:spAutoFit/>
+          </a:bodyPr>
+          <a:lstStyle/>
+          <a:p>
+            <a:pPr algn="l">
+              <a:lnSpc>
+                <a:spcPct val="112000"/>
+              </a:lnSpc>
+            </a:pPr>
+            <a:r>
+              <a:rPr sz="975" b="0">
+                <a:solidFill>
+                  <a:srgbClr val="555555"/>
+                </a:solidFill>
+                <a:latin typeface="Arial"/>
+                <a:ea typeface="Arial"/>
+              </a:rPr>
+              <a:t>고객이 정한다 · 고정</a:t>
+            </a:r>
+          </a:p>
+        </p:txBody>
+      </p:sp>
+      <p:sp>
+        <p:nvSpPr>
+          <p:cNvPr id="11" name="Rectangle 10"/>
+          <p:cNvSpPr/>
+          <p:nvPr/>
+        </p:nvSpPr>
+        <p:spPr>
+          <a:xfrm>
+            <a:off x="5989320" y="2560320"/>
+            <a:ext cx="3675888" cy="512064"/>
           </a:xfrm>
           <a:prstGeom prst="rect">
             <a:avLst/>
@@ -3824,14 +3926,14 @@
       </p:sp>
       <p:sp>
         <p:nvSpPr>
-          <p:cNvPr id="10" name="TextBox 9"/>
+          <p:cNvPr id="12" name="TextBox 11"/>
           <p:cNvSpPr txBox="1"/>
           <p:nvPr/>
         </p:nvSpPr>
         <p:spPr>
           <a:xfrm>
-            <a:off x="9949503" y="2670048"/>
-            <a:ext cx="7378376" cy="256032"/>
+            <a:off x="6117336" y="2615184"/>
+            <a:ext cx="3419856" cy="237744"/>
           </a:xfrm>
           <a:prstGeom prst="rect">
             <a:avLst/>
@@ -3850,28 +3952,1707 @@
               </a:lnSpc>
             </a:pPr>
             <a:r>
-              <a:rPr sz="1500" b="1">
+              <a:rPr sz="1350" b="1">
                 <a:solidFill>
                   <a:srgbClr val="1428A0"/>
                 </a:solidFill>
                 <a:latin typeface="Arial"/>
                 <a:ea typeface="Arial"/>
               </a:rPr>
-              <a:t>DWPD 산식 — 항별 결정 주체</a:t>
-            </a:r>
-          </a:p>
-        </p:txBody>
-      </p:sp>
-      <p:sp>
-        <p:nvSpPr>
-          <p:cNvPr id="11" name="Rectangle 10"/>
+              <a:t>단품 지표</a:t>
+            </a:r>
+          </a:p>
+        </p:txBody>
+      </p:sp>
+      <p:sp>
+        <p:nvSpPr>
+          <p:cNvPr id="13" name="TextBox 12"/>
+          <p:cNvSpPr txBox="1"/>
+          <p:nvPr/>
+        </p:nvSpPr>
+        <p:spPr>
+          <a:xfrm>
+            <a:off x="6117336" y="2843784"/>
+            <a:ext cx="3419856" cy="201168"/>
+          </a:xfrm>
+          <a:prstGeom prst="rect">
+            <a:avLst/>
+          </a:prstGeom>
+          <a:noFill/>
+        </p:spPr>
+        <p:txBody>
+          <a:bodyPr wrap="square" anchor="t" lIns="0" rIns="0" tIns="0" bIns="0">
+            <a:spAutoFit/>
+          </a:bodyPr>
+          <a:lstStyle/>
+          <a:p>
+            <a:pPr algn="l">
+              <a:lnSpc>
+                <a:spcPct val="112000"/>
+              </a:lnSpc>
+            </a:pPr>
+            <a:r>
+              <a:rPr sz="975" b="0">
+                <a:solidFill>
+                  <a:srgbClr val="555555"/>
+                </a:solidFill>
+                <a:latin typeface="Arial"/>
+                <a:ea typeface="Arial"/>
+              </a:rPr>
+              <a:t>셀 · 다이 · 세대마다 악화</a:t>
+            </a:r>
+          </a:p>
+        </p:txBody>
+      </p:sp>
+      <p:sp>
+        <p:nvSpPr>
+          <p:cNvPr id="14" name="Right Arrow 13"/>
           <p:cNvSpPr/>
           <p:nvPr/>
         </p:nvSpPr>
         <p:spPr>
           <a:xfrm>
-            <a:off x="10612027" y="3054096"/>
-            <a:ext cx="932688" cy="420624"/>
+            <a:off x="9692640" y="2715768"/>
+            <a:ext cx="219456" cy="201168"/>
+          </a:xfrm>
+          <a:prstGeom prst="rightArrow">
+            <a:avLst/>
+          </a:prstGeom>
+          <a:solidFill>
+            <a:srgbClr val="AAB8E8"/>
+          </a:solidFill>
+          <a:ln>
+            <a:noFill/>
+          </a:ln>
+          <a:effectLst/>
+        </p:spPr>
+        <p:style>
+          <a:lnRef idx="1">
+            <a:schemeClr val="accent1"/>
+          </a:lnRef>
+          <a:fillRef idx="3">
+            <a:schemeClr val="accent1"/>
+          </a:fillRef>
+          <a:effectRef idx="2">
+            <a:schemeClr val="accent1"/>
+          </a:effectRef>
+          <a:fontRef idx="minor">
+            <a:schemeClr val="lt1"/>
+          </a:fontRef>
+        </p:style>
+        <p:txBody>
+          <a:bodyPr rtlCol="0" anchor="ctr"/>
+          <a:lstStyle/>
+          <a:p>
+            <a:pPr algn="ctr"/>
+          </a:p>
+        </p:txBody>
+      </p:sp>
+      <p:sp>
+        <p:nvSpPr>
+          <p:cNvPr id="15" name="Rectangle 14"/>
+          <p:cNvSpPr/>
+          <p:nvPr/>
+        </p:nvSpPr>
+        <p:spPr>
+          <a:xfrm>
+            <a:off x="9939528" y="2560320"/>
+            <a:ext cx="3675888" cy="512064"/>
+          </a:xfrm>
+          <a:prstGeom prst="rect">
+            <a:avLst/>
+          </a:prstGeom>
+          <a:solidFill>
+            <a:srgbClr val="FFFFFF"/>
+          </a:solidFill>
+          <a:ln w="9525">
+            <a:solidFill>
+              <a:srgbClr val="D9D9D9"/>
+            </a:solidFill>
+          </a:ln>
+          <a:effectLst/>
+        </p:spPr>
+        <p:style>
+          <a:lnRef idx="1">
+            <a:schemeClr val="accent1"/>
+          </a:lnRef>
+          <a:fillRef idx="3">
+            <a:schemeClr val="accent1"/>
+          </a:fillRef>
+          <a:effectRef idx="2">
+            <a:schemeClr val="accent1"/>
+          </a:effectRef>
+          <a:fontRef idx="minor">
+            <a:schemeClr val="lt1"/>
+          </a:fontRef>
+        </p:style>
+        <p:txBody>
+          <a:bodyPr rtlCol="0" anchor="ctr"/>
+          <a:lstStyle/>
+          <a:p>
+            <a:pPr algn="ctr"/>
+          </a:p>
+        </p:txBody>
+      </p:sp>
+      <p:sp>
+        <p:nvSpPr>
+          <p:cNvPr id="16" name="TextBox 15"/>
+          <p:cNvSpPr txBox="1"/>
+          <p:nvPr/>
+        </p:nvSpPr>
+        <p:spPr>
+          <a:xfrm>
+            <a:off x="10067544" y="2615184"/>
+            <a:ext cx="3419856" cy="237744"/>
+          </a:xfrm>
+          <a:prstGeom prst="rect">
+            <a:avLst/>
+          </a:prstGeom>
+          <a:noFill/>
+        </p:spPr>
+        <p:txBody>
+          <a:bodyPr wrap="square" anchor="t" lIns="0" rIns="0" tIns="0" bIns="0">
+            <a:spAutoFit/>
+          </a:bodyPr>
+          <a:lstStyle/>
+          <a:p>
+            <a:pPr algn="l">
+              <a:lnSpc>
+                <a:spcPct val="112000"/>
+              </a:lnSpc>
+            </a:pPr>
+            <a:r>
+              <a:rPr sz="1350" b="1">
+                <a:solidFill>
+                  <a:srgbClr val="1428A0"/>
+                </a:solidFill>
+                <a:latin typeface="Arial"/>
+                <a:ea typeface="Arial"/>
+              </a:rPr>
+              <a:t>SSD 계층의 보상</a:t>
+            </a:r>
+          </a:p>
+        </p:txBody>
+      </p:sp>
+      <p:sp>
+        <p:nvSpPr>
+          <p:cNvPr id="17" name="TextBox 16"/>
+          <p:cNvSpPr txBox="1"/>
+          <p:nvPr/>
+        </p:nvSpPr>
+        <p:spPr>
+          <a:xfrm>
+            <a:off x="10067544" y="2843784"/>
+            <a:ext cx="3419856" cy="201168"/>
+          </a:xfrm>
+          <a:prstGeom prst="rect">
+            <a:avLst/>
+          </a:prstGeom>
+          <a:noFill/>
+        </p:spPr>
+        <p:txBody>
+          <a:bodyPr wrap="square" anchor="t" lIns="0" rIns="0" tIns="0" bIns="0">
+            <a:spAutoFit/>
+          </a:bodyPr>
+          <a:lstStyle/>
+          <a:p>
+            <a:pPr algn="l">
+              <a:lnSpc>
+                <a:spcPct val="112000"/>
+              </a:lnSpc>
+            </a:pPr>
+            <a:r>
+              <a:rPr sz="975" b="0">
+                <a:solidFill>
+                  <a:srgbClr val="555555"/>
+                </a:solidFill>
+                <a:latin typeface="Arial"/>
+                <a:ea typeface="Arial"/>
+              </a:rPr>
+              <a:t>1단계 ECC(완결) · 2단계 단독 최적화(부분 성공)</a:t>
+            </a:r>
+          </a:p>
+        </p:txBody>
+      </p:sp>
+      <p:sp>
+        <p:nvSpPr>
+          <p:cNvPr id="18" name="Right Arrow 17"/>
+          <p:cNvSpPr/>
+          <p:nvPr/>
+        </p:nvSpPr>
+        <p:spPr>
+          <a:xfrm>
+            <a:off x="13642848" y="2715768"/>
+            <a:ext cx="219456" cy="201168"/>
+          </a:xfrm>
+          <a:prstGeom prst="rightArrow">
+            <a:avLst/>
+          </a:prstGeom>
+          <a:solidFill>
+            <a:srgbClr val="1428A0"/>
+          </a:solidFill>
+          <a:ln>
+            <a:noFill/>
+          </a:ln>
+          <a:effectLst/>
+        </p:spPr>
+        <p:style>
+          <a:lnRef idx="1">
+            <a:schemeClr val="accent1"/>
+          </a:lnRef>
+          <a:fillRef idx="3">
+            <a:schemeClr val="accent1"/>
+          </a:fillRef>
+          <a:effectRef idx="2">
+            <a:schemeClr val="accent1"/>
+          </a:effectRef>
+          <a:fontRef idx="minor">
+            <a:schemeClr val="lt1"/>
+          </a:fontRef>
+        </p:style>
+        <p:txBody>
+          <a:bodyPr rtlCol="0" anchor="ctr"/>
+          <a:lstStyle/>
+          <a:p>
+            <a:pPr algn="ctr"/>
+          </a:p>
+        </p:txBody>
+      </p:sp>
+      <p:sp>
+        <p:nvSpPr>
+          <p:cNvPr id="19" name="Rectangle 18"/>
+          <p:cNvSpPr/>
+          <p:nvPr/>
+        </p:nvSpPr>
+        <p:spPr>
+          <a:xfrm>
+            <a:off x="13889736" y="2560320"/>
+            <a:ext cx="3675888" cy="512064"/>
+          </a:xfrm>
+          <a:prstGeom prst="rect">
+            <a:avLst/>
+          </a:prstGeom>
+          <a:solidFill>
+            <a:srgbClr val="1428A0"/>
+          </a:solidFill>
+          <a:ln>
+            <a:noFill/>
+          </a:ln>
+          <a:effectLst/>
+        </p:spPr>
+        <p:style>
+          <a:lnRef idx="1">
+            <a:schemeClr val="accent1"/>
+          </a:lnRef>
+          <a:fillRef idx="3">
+            <a:schemeClr val="accent1"/>
+          </a:fillRef>
+          <a:effectRef idx="2">
+            <a:schemeClr val="accent1"/>
+          </a:effectRef>
+          <a:fontRef idx="minor">
+            <a:schemeClr val="lt1"/>
+          </a:fontRef>
+        </p:style>
+        <p:txBody>
+          <a:bodyPr rtlCol="0" anchor="ctr"/>
+          <a:lstStyle/>
+          <a:p>
+            <a:pPr algn="ctr"/>
+          </a:p>
+        </p:txBody>
+      </p:sp>
+      <p:sp>
+        <p:nvSpPr>
+          <p:cNvPr id="20" name="TextBox 19"/>
+          <p:cNvSpPr txBox="1"/>
+          <p:nvPr/>
+        </p:nvSpPr>
+        <p:spPr>
+          <a:xfrm>
+            <a:off x="14017752" y="2615184"/>
+            <a:ext cx="3419856" cy="237744"/>
+          </a:xfrm>
+          <a:prstGeom prst="rect">
+            <a:avLst/>
+          </a:prstGeom>
+          <a:noFill/>
+        </p:spPr>
+        <p:txBody>
+          <a:bodyPr wrap="square" anchor="t" lIns="0" rIns="0" tIns="0" bIns="0">
+            <a:spAutoFit/>
+          </a:bodyPr>
+          <a:lstStyle/>
+          <a:p>
+            <a:pPr algn="l">
+              <a:lnSpc>
+                <a:spcPct val="112000"/>
+              </a:lnSpc>
+            </a:pPr>
+            <a:r>
+              <a:rPr sz="1350" b="1">
+                <a:solidFill>
+                  <a:srgbClr val="FFFFFF"/>
+                </a:solidFill>
+                <a:latin typeface="Arial"/>
+                <a:ea typeface="Arial"/>
+              </a:rPr>
+              <a:t>호스트 · 시스템 계층의 보상</a:t>
+            </a:r>
+          </a:p>
+        </p:txBody>
+      </p:sp>
+      <p:sp>
+        <p:nvSpPr>
+          <p:cNvPr id="21" name="TextBox 20"/>
+          <p:cNvSpPr txBox="1"/>
+          <p:nvPr/>
+        </p:nvSpPr>
+        <p:spPr>
+          <a:xfrm>
+            <a:off x="14017752" y="2843784"/>
+            <a:ext cx="3419856" cy="201168"/>
+          </a:xfrm>
+          <a:prstGeom prst="rect">
+            <a:avLst/>
+          </a:prstGeom>
+          <a:noFill/>
+        </p:spPr>
+        <p:txBody>
+          <a:bodyPr wrap="square" anchor="t" lIns="0" rIns="0" tIns="0" bIns="0">
+            <a:spAutoFit/>
+          </a:bodyPr>
+          <a:lstStyle/>
+          <a:p>
+            <a:pPr algn="l">
+              <a:lnSpc>
+                <a:spcPct val="112000"/>
+              </a:lnSpc>
+            </a:pPr>
+            <a:r>
+              <a:rPr sz="975" b="0">
+                <a:solidFill>
+                  <a:srgbClr val="FFFFFF"/>
+                </a:solidFill>
+                <a:latin typeface="Arial"/>
+                <a:ea typeface="Arial"/>
+              </a:rPr>
+              <a:t>3단계 공동 설계 (2022~, 본 덱 2~5장)</a:t>
+            </a:r>
+          </a:p>
+        </p:txBody>
+      </p:sp>
+      <p:sp>
+        <p:nvSpPr>
+          <p:cNvPr id="22" name="TextBox 21"/>
+          <p:cNvSpPr txBox="1"/>
+          <p:nvPr/>
+        </p:nvSpPr>
+        <p:spPr>
+          <a:xfrm>
+            <a:off x="722376" y="2560320"/>
+            <a:ext cx="1188720" cy="512064"/>
+          </a:xfrm>
+          <a:prstGeom prst="rect">
+            <a:avLst/>
+          </a:prstGeom>
+          <a:noFill/>
+        </p:spPr>
+        <p:txBody>
+          <a:bodyPr wrap="square" anchor="ctr" lIns="0" rIns="0" tIns="0" bIns="0">
+            <a:spAutoFit/>
+          </a:bodyPr>
+          <a:lstStyle/>
+          <a:p>
+            <a:pPr algn="l">
+              <a:lnSpc>
+                <a:spcPct val="112000"/>
+              </a:lnSpc>
+            </a:pPr>
+            <a:r>
+              <a:rPr sz="1050" b="1">
+                <a:solidFill>
+                  <a:srgbClr val="8A8A8A"/>
+                </a:solidFill>
+                <a:latin typeface="Arial"/>
+                <a:ea typeface="Arial"/>
+              </a:rPr>
+              <a:t>이관 단계 →</a:t>
+            </a:r>
+          </a:p>
+        </p:txBody>
+      </p:sp>
+      <p:sp>
+        <p:nvSpPr>
+          <p:cNvPr id="23" name="Rectangle 22"/>
+          <p:cNvSpPr/>
+          <p:nvPr/>
+        </p:nvSpPr>
+        <p:spPr>
+          <a:xfrm>
+            <a:off x="2039112" y="3145536"/>
+            <a:ext cx="15526512" cy="493776"/>
+          </a:xfrm>
+          <a:prstGeom prst="rect">
+            <a:avLst/>
+          </a:prstGeom>
+          <a:solidFill>
+            <a:srgbClr val="FFFFFF"/>
+          </a:solidFill>
+          <a:ln w="9525">
+            <a:solidFill>
+              <a:srgbClr val="D9D9D9"/>
+            </a:solidFill>
+          </a:ln>
+          <a:effectLst/>
+        </p:spPr>
+        <p:style>
+          <a:lnRef idx="1">
+            <a:schemeClr val="accent1"/>
+          </a:lnRef>
+          <a:fillRef idx="3">
+            <a:schemeClr val="accent1"/>
+          </a:fillRef>
+          <a:effectRef idx="2">
+            <a:schemeClr val="accent1"/>
+          </a:effectRef>
+          <a:fontRef idx="minor">
+            <a:schemeClr val="lt1"/>
+          </a:fontRef>
+        </p:style>
+        <p:txBody>
+          <a:bodyPr rtlCol="0" anchor="ctr"/>
+          <a:lstStyle/>
+          <a:p>
+            <a:pPr algn="ctr"/>
+          </a:p>
+        </p:txBody>
+      </p:sp>
+      <p:sp>
+        <p:nvSpPr>
+          <p:cNvPr id="24" name="TextBox 23"/>
+          <p:cNvSpPr txBox="1"/>
+          <p:nvPr/>
+        </p:nvSpPr>
+        <p:spPr>
+          <a:xfrm>
+            <a:off x="722376" y="3145536"/>
+            <a:ext cx="1188720" cy="493776"/>
+          </a:xfrm>
+          <a:prstGeom prst="rect">
+            <a:avLst/>
+          </a:prstGeom>
+          <a:noFill/>
+        </p:spPr>
+        <p:txBody>
+          <a:bodyPr wrap="square" anchor="ctr" lIns="0" rIns="0" tIns="0" bIns="0">
+            <a:spAutoFit/>
+          </a:bodyPr>
+          <a:lstStyle/>
+          <a:p>
+            <a:pPr algn="l">
+              <a:lnSpc>
+                <a:spcPct val="100000"/>
+              </a:lnSpc>
+            </a:pPr>
+            <a:r>
+              <a:rPr sz="1050" b="1">
+                <a:solidFill>
+                  <a:srgbClr val="1428A0"/>
+                </a:solidFill>
+                <a:latin typeface="Arial"/>
+                <a:ea typeface="Arial"/>
+              </a:rPr>
+              <a:t>DWPD 산식</a:t>
+            </a:r>
+          </a:p>
+          <a:p>
+            <a:pPr algn="l">
+              <a:lnSpc>
+                <a:spcPct val="100000"/>
+              </a:lnSpc>
+            </a:pPr>
+            <a:r>
+              <a:rPr sz="900" b="0">
+                <a:solidFill>
+                  <a:srgbClr val="8A8A8A"/>
+                </a:solidFill>
+                <a:latin typeface="Arial"/>
+                <a:ea typeface="Arial"/>
+              </a:rPr>
+              <a:t>항별 결정 주체</a:t>
+            </a:r>
+          </a:p>
+        </p:txBody>
+      </p:sp>
+      <p:sp>
+        <p:nvSpPr>
+          <p:cNvPr id="25" name="Rectangle 24"/>
+          <p:cNvSpPr/>
+          <p:nvPr/>
+        </p:nvSpPr>
+        <p:spPr>
+          <a:xfrm>
+            <a:off x="6483096" y="3209544"/>
+            <a:ext cx="1005840" cy="274320"/>
+          </a:xfrm>
+          <a:prstGeom prst="rect">
+            <a:avLst/>
+          </a:prstGeom>
+          <a:solidFill>
+            <a:srgbClr val="F4F6FC"/>
+          </a:solidFill>
+          <a:ln w="9525">
+            <a:solidFill>
+              <a:srgbClr val="AAB8E8"/>
+            </a:solidFill>
+          </a:ln>
+          <a:effectLst/>
+        </p:spPr>
+        <p:style>
+          <a:lnRef idx="1">
+            <a:schemeClr val="accent1"/>
+          </a:lnRef>
+          <a:fillRef idx="3">
+            <a:schemeClr val="accent1"/>
+          </a:fillRef>
+          <a:effectRef idx="2">
+            <a:schemeClr val="accent1"/>
+          </a:effectRef>
+          <a:fontRef idx="minor">
+            <a:schemeClr val="lt1"/>
+          </a:fontRef>
+        </p:style>
+        <p:txBody>
+          <a:bodyPr rtlCol="0" anchor="ctr"/>
+          <a:lstStyle/>
+          <a:p>
+            <a:pPr algn="ctr"/>
+          </a:p>
+        </p:txBody>
+      </p:sp>
+      <p:sp>
+        <p:nvSpPr>
+          <p:cNvPr id="26" name="TextBox 25"/>
+          <p:cNvSpPr txBox="1"/>
+          <p:nvPr/>
+        </p:nvSpPr>
+        <p:spPr>
+          <a:xfrm>
+            <a:off x="6483096" y="3209544"/>
+            <a:ext cx="1005840" cy="274320"/>
+          </a:xfrm>
+          <a:prstGeom prst="rect">
+            <a:avLst/>
+          </a:prstGeom>
+          <a:noFill/>
+        </p:spPr>
+        <p:txBody>
+          <a:bodyPr wrap="square" anchor="ctr" lIns="0" rIns="0" tIns="0" bIns="0">
+            <a:spAutoFit/>
+          </a:bodyPr>
+          <a:lstStyle/>
+          <a:p>
+            <a:pPr algn="ctr">
+              <a:lnSpc>
+                <a:spcPct val="112000"/>
+              </a:lnSpc>
+            </a:pPr>
+            <a:r>
+              <a:rPr sz="1125" b="1">
+                <a:solidFill>
+                  <a:srgbClr val="1A1A1A"/>
+                </a:solidFill>
+                <a:latin typeface="Arial"/>
+                <a:ea typeface="Arial"/>
+              </a:rPr>
+              <a:t>DWPD</a:t>
+            </a:r>
+          </a:p>
+        </p:txBody>
+      </p:sp>
+      <p:sp>
+        <p:nvSpPr>
+          <p:cNvPr id="27" name="TextBox 26"/>
+          <p:cNvSpPr txBox="1"/>
+          <p:nvPr/>
+        </p:nvSpPr>
+        <p:spPr>
+          <a:xfrm>
+            <a:off x="6391656" y="3493007"/>
+            <a:ext cx="1188720" cy="164592"/>
+          </a:xfrm>
+          <a:prstGeom prst="rect">
+            <a:avLst/>
+          </a:prstGeom>
+          <a:noFill/>
+        </p:spPr>
+        <p:txBody>
+          <a:bodyPr wrap="square" anchor="t" lIns="0" rIns="0" tIns="0" bIns="0">
+            <a:spAutoFit/>
+          </a:bodyPr>
+          <a:lstStyle/>
+          <a:p>
+            <a:pPr algn="ctr">
+              <a:lnSpc>
+                <a:spcPct val="112000"/>
+              </a:lnSpc>
+            </a:pPr>
+            <a:r>
+              <a:rPr sz="850" b="0">
+                <a:solidFill>
+                  <a:srgbClr val="8A8A8A"/>
+                </a:solidFill>
+                <a:latin typeface="Arial"/>
+                <a:ea typeface="Arial"/>
+              </a:rPr>
+              <a:t>요구</a:t>
+            </a:r>
+          </a:p>
+        </p:txBody>
+      </p:sp>
+      <p:sp>
+        <p:nvSpPr>
+          <p:cNvPr id="28" name="TextBox 27"/>
+          <p:cNvSpPr txBox="1"/>
+          <p:nvPr/>
+        </p:nvSpPr>
+        <p:spPr>
+          <a:xfrm>
+            <a:off x="7562088" y="3209544"/>
+            <a:ext cx="256032" cy="274320"/>
+          </a:xfrm>
+          <a:prstGeom prst="rect">
+            <a:avLst/>
+          </a:prstGeom>
+          <a:noFill/>
+        </p:spPr>
+        <p:txBody>
+          <a:bodyPr wrap="square" anchor="ctr" lIns="0" rIns="0" tIns="0" bIns="0">
+            <a:spAutoFit/>
+          </a:bodyPr>
+          <a:lstStyle/>
+          <a:p>
+            <a:pPr algn="ctr">
+              <a:lnSpc>
+                <a:spcPct val="112000"/>
+              </a:lnSpc>
+            </a:pPr>
+            <a:r>
+              <a:rPr sz="1300" b="0">
+                <a:solidFill>
+                  <a:srgbClr val="555555"/>
+                </a:solidFill>
+                <a:latin typeface="Arial"/>
+                <a:ea typeface="Arial"/>
+              </a:rPr>
+              <a:t>=</a:t>
+            </a:r>
+          </a:p>
+        </p:txBody>
+      </p:sp>
+      <p:sp>
+        <p:nvSpPr>
+          <p:cNvPr id="29" name="Rectangle 28"/>
+          <p:cNvSpPr/>
+          <p:nvPr/>
+        </p:nvSpPr>
+        <p:spPr>
+          <a:xfrm>
+            <a:off x="7891271" y="3209544"/>
+            <a:ext cx="1005840" cy="274320"/>
+          </a:xfrm>
+          <a:prstGeom prst="rect">
+            <a:avLst/>
+          </a:prstGeom>
+          <a:solidFill>
+            <a:srgbClr val="FFFFFF"/>
+          </a:solidFill>
+          <a:ln w="9525">
+            <a:solidFill>
+              <a:srgbClr val="D9D9D9"/>
+            </a:solidFill>
+          </a:ln>
+          <a:effectLst/>
+        </p:spPr>
+        <p:style>
+          <a:lnRef idx="1">
+            <a:schemeClr val="accent1"/>
+          </a:lnRef>
+          <a:fillRef idx="3">
+            <a:schemeClr val="accent1"/>
+          </a:fillRef>
+          <a:effectRef idx="2">
+            <a:schemeClr val="accent1"/>
+          </a:effectRef>
+          <a:fontRef idx="minor">
+            <a:schemeClr val="lt1"/>
+          </a:fontRef>
+        </p:style>
+        <p:txBody>
+          <a:bodyPr rtlCol="0" anchor="ctr"/>
+          <a:lstStyle/>
+          <a:p>
+            <a:pPr algn="ctr"/>
+          </a:p>
+        </p:txBody>
+      </p:sp>
+      <p:sp>
+        <p:nvSpPr>
+          <p:cNvPr id="30" name="TextBox 29"/>
+          <p:cNvSpPr txBox="1"/>
+          <p:nvPr/>
+        </p:nvSpPr>
+        <p:spPr>
+          <a:xfrm>
+            <a:off x="7891271" y="3209544"/>
+            <a:ext cx="1005840" cy="274320"/>
+          </a:xfrm>
+          <a:prstGeom prst="rect">
+            <a:avLst/>
+          </a:prstGeom>
+          <a:noFill/>
+        </p:spPr>
+        <p:txBody>
+          <a:bodyPr wrap="square" anchor="ctr" lIns="0" rIns="0" tIns="0" bIns="0">
+            <a:spAutoFit/>
+          </a:bodyPr>
+          <a:lstStyle/>
+          <a:p>
+            <a:pPr algn="ctr">
+              <a:lnSpc>
+                <a:spcPct val="112000"/>
+              </a:lnSpc>
+            </a:pPr>
+            <a:r>
+              <a:rPr sz="1125" b="1">
+                <a:solidFill>
+                  <a:srgbClr val="1A1A1A"/>
+                </a:solidFill>
+                <a:latin typeface="Arial"/>
+                <a:ea typeface="Arial"/>
+              </a:rPr>
+              <a:t>P/E</a:t>
+            </a:r>
+          </a:p>
+        </p:txBody>
+      </p:sp>
+      <p:sp>
+        <p:nvSpPr>
+          <p:cNvPr id="31" name="TextBox 30"/>
+          <p:cNvSpPr txBox="1"/>
+          <p:nvPr/>
+        </p:nvSpPr>
+        <p:spPr>
+          <a:xfrm>
+            <a:off x="7799831" y="3493007"/>
+            <a:ext cx="1188720" cy="164592"/>
+          </a:xfrm>
+          <a:prstGeom prst="rect">
+            <a:avLst/>
+          </a:prstGeom>
+          <a:noFill/>
+        </p:spPr>
+        <p:txBody>
+          <a:bodyPr wrap="square" anchor="t" lIns="0" rIns="0" tIns="0" bIns="0">
+            <a:spAutoFit/>
+          </a:bodyPr>
+          <a:lstStyle/>
+          <a:p>
+            <a:pPr algn="ctr">
+              <a:lnSpc>
+                <a:spcPct val="112000"/>
+              </a:lnSpc>
+            </a:pPr>
+            <a:r>
+              <a:rPr sz="850" b="0">
+                <a:solidFill>
+                  <a:srgbClr val="8A8A8A"/>
+                </a:solidFill>
+                <a:latin typeface="Arial"/>
+                <a:ea typeface="Arial"/>
+              </a:rPr>
+              <a:t>단품(셀)</a:t>
+            </a:r>
+          </a:p>
+        </p:txBody>
+      </p:sp>
+      <p:sp>
+        <p:nvSpPr>
+          <p:cNvPr id="32" name="TextBox 31"/>
+          <p:cNvSpPr txBox="1"/>
+          <p:nvPr/>
+        </p:nvSpPr>
+        <p:spPr>
+          <a:xfrm>
+            <a:off x="8970263" y="3209544"/>
+            <a:ext cx="256032" cy="274320"/>
+          </a:xfrm>
+          <a:prstGeom prst="rect">
+            <a:avLst/>
+          </a:prstGeom>
+          <a:noFill/>
+        </p:spPr>
+        <p:txBody>
+          <a:bodyPr wrap="square" anchor="ctr" lIns="0" rIns="0" tIns="0" bIns="0">
+            <a:spAutoFit/>
+          </a:bodyPr>
+          <a:lstStyle/>
+          <a:p>
+            <a:pPr algn="ctr">
+              <a:lnSpc>
+                <a:spcPct val="112000"/>
+              </a:lnSpc>
+            </a:pPr>
+            <a:r>
+              <a:rPr sz="1300" b="0">
+                <a:solidFill>
+                  <a:srgbClr val="555555"/>
+                </a:solidFill>
+                <a:latin typeface="Arial"/>
+                <a:ea typeface="Arial"/>
+              </a:rPr>
+              <a:t>×</a:t>
+            </a:r>
+          </a:p>
+        </p:txBody>
+      </p:sp>
+      <p:sp>
+        <p:nvSpPr>
+          <p:cNvPr id="33" name="Rectangle 32"/>
+          <p:cNvSpPr/>
+          <p:nvPr/>
+        </p:nvSpPr>
+        <p:spPr>
+          <a:xfrm>
+            <a:off x="9299447" y="3209544"/>
+            <a:ext cx="1005840" cy="274320"/>
+          </a:xfrm>
+          <a:prstGeom prst="rect">
+            <a:avLst/>
+          </a:prstGeom>
+          <a:solidFill>
+            <a:srgbClr val="FFFFFF"/>
+          </a:solidFill>
+          <a:ln w="9525">
+            <a:solidFill>
+              <a:srgbClr val="D9D9D9"/>
+            </a:solidFill>
+          </a:ln>
+          <a:effectLst/>
+        </p:spPr>
+        <p:style>
+          <a:lnRef idx="1">
+            <a:schemeClr val="accent1"/>
+          </a:lnRef>
+          <a:fillRef idx="3">
+            <a:schemeClr val="accent1"/>
+          </a:fillRef>
+          <a:effectRef idx="2">
+            <a:schemeClr val="accent1"/>
+          </a:effectRef>
+          <a:fontRef idx="minor">
+            <a:schemeClr val="lt1"/>
+          </a:fontRef>
+        </p:style>
+        <p:txBody>
+          <a:bodyPr rtlCol="0" anchor="ctr"/>
+          <a:lstStyle/>
+          <a:p>
+            <a:pPr algn="ctr"/>
+          </a:p>
+        </p:txBody>
+      </p:sp>
+      <p:sp>
+        <p:nvSpPr>
+          <p:cNvPr id="34" name="TextBox 33"/>
+          <p:cNvSpPr txBox="1"/>
+          <p:nvPr/>
+        </p:nvSpPr>
+        <p:spPr>
+          <a:xfrm>
+            <a:off x="9299447" y="3209544"/>
+            <a:ext cx="1005840" cy="274320"/>
+          </a:xfrm>
+          <a:prstGeom prst="rect">
+            <a:avLst/>
+          </a:prstGeom>
+          <a:noFill/>
+        </p:spPr>
+        <p:txBody>
+          <a:bodyPr wrap="square" anchor="ctr" lIns="0" rIns="0" tIns="0" bIns="0">
+            <a:spAutoFit/>
+          </a:bodyPr>
+          <a:lstStyle/>
+          <a:p>
+            <a:pPr algn="ctr">
+              <a:lnSpc>
+                <a:spcPct val="112000"/>
+              </a:lnSpc>
+            </a:pPr>
+            <a:r>
+              <a:rPr sz="1125" b="1">
+                <a:solidFill>
+                  <a:srgbClr val="1A1A1A"/>
+                </a:solidFill>
+                <a:latin typeface="Arial"/>
+                <a:ea typeface="Arial"/>
+              </a:rPr>
+              <a:t>1 + OP</a:t>
+            </a:r>
+          </a:p>
+        </p:txBody>
+      </p:sp>
+      <p:sp>
+        <p:nvSpPr>
+          <p:cNvPr id="35" name="TextBox 34"/>
+          <p:cNvSpPr txBox="1"/>
+          <p:nvPr/>
+        </p:nvSpPr>
+        <p:spPr>
+          <a:xfrm>
+            <a:off x="9208007" y="3493007"/>
+            <a:ext cx="1188720" cy="164592"/>
+          </a:xfrm>
+          <a:prstGeom prst="rect">
+            <a:avLst/>
+          </a:prstGeom>
+          <a:noFill/>
+        </p:spPr>
+        <p:txBody>
+          <a:bodyPr wrap="square" anchor="t" lIns="0" rIns="0" tIns="0" bIns="0">
+            <a:spAutoFit/>
+          </a:bodyPr>
+          <a:lstStyle/>
+          <a:p>
+            <a:pPr algn="ctr">
+              <a:lnSpc>
+                <a:spcPct val="112000"/>
+              </a:lnSpc>
+            </a:pPr>
+            <a:r>
+              <a:rPr sz="850" b="0">
+                <a:solidFill>
+                  <a:srgbClr val="8A8A8A"/>
+                </a:solidFill>
+                <a:latin typeface="Arial"/>
+                <a:ea typeface="Arial"/>
+              </a:rPr>
+              <a:t>SSD</a:t>
+            </a:r>
+          </a:p>
+        </p:txBody>
+      </p:sp>
+      <p:sp>
+        <p:nvSpPr>
+          <p:cNvPr id="36" name="TextBox 35"/>
+          <p:cNvSpPr txBox="1"/>
+          <p:nvPr/>
+        </p:nvSpPr>
+        <p:spPr>
+          <a:xfrm>
+            <a:off x="10378439" y="3209544"/>
+            <a:ext cx="256032" cy="274320"/>
+          </a:xfrm>
+          <a:prstGeom prst="rect">
+            <a:avLst/>
+          </a:prstGeom>
+          <a:noFill/>
+        </p:spPr>
+        <p:txBody>
+          <a:bodyPr wrap="square" anchor="ctr" lIns="0" rIns="0" tIns="0" bIns="0">
+            <a:spAutoFit/>
+          </a:bodyPr>
+          <a:lstStyle/>
+          <a:p>
+            <a:pPr algn="ctr">
+              <a:lnSpc>
+                <a:spcPct val="112000"/>
+              </a:lnSpc>
+            </a:pPr>
+            <a:r>
+              <a:rPr sz="1300" b="0">
+                <a:solidFill>
+                  <a:srgbClr val="555555"/>
+                </a:solidFill>
+                <a:latin typeface="Arial"/>
+                <a:ea typeface="Arial"/>
+              </a:rPr>
+              <a:t>÷</a:t>
+            </a:r>
+          </a:p>
+        </p:txBody>
+      </p:sp>
+      <p:sp>
+        <p:nvSpPr>
+          <p:cNvPr id="37" name="Rectangle 36"/>
+          <p:cNvSpPr/>
+          <p:nvPr/>
+        </p:nvSpPr>
+        <p:spPr>
+          <a:xfrm>
+            <a:off x="10707623" y="3209544"/>
+            <a:ext cx="1005840" cy="274320"/>
+          </a:xfrm>
+          <a:prstGeom prst="rect">
+            <a:avLst/>
+          </a:prstGeom>
+          <a:solidFill>
+            <a:srgbClr val="1428A0"/>
+          </a:solidFill>
+          <a:ln>
+            <a:noFill/>
+          </a:ln>
+          <a:effectLst/>
+        </p:spPr>
+        <p:style>
+          <a:lnRef idx="1">
+            <a:schemeClr val="accent1"/>
+          </a:lnRef>
+          <a:fillRef idx="3">
+            <a:schemeClr val="accent1"/>
+          </a:fillRef>
+          <a:effectRef idx="2">
+            <a:schemeClr val="accent1"/>
+          </a:effectRef>
+          <a:fontRef idx="minor">
+            <a:schemeClr val="lt1"/>
+          </a:fontRef>
+        </p:style>
+        <p:txBody>
+          <a:bodyPr rtlCol="0" anchor="ctr"/>
+          <a:lstStyle/>
+          <a:p>
+            <a:pPr algn="ctr"/>
+          </a:p>
+        </p:txBody>
+      </p:sp>
+      <p:sp>
+        <p:nvSpPr>
+          <p:cNvPr id="38" name="TextBox 37"/>
+          <p:cNvSpPr txBox="1"/>
+          <p:nvPr/>
+        </p:nvSpPr>
+        <p:spPr>
+          <a:xfrm>
+            <a:off x="10707623" y="3209544"/>
+            <a:ext cx="1005840" cy="274320"/>
+          </a:xfrm>
+          <a:prstGeom prst="rect">
+            <a:avLst/>
+          </a:prstGeom>
+          <a:noFill/>
+        </p:spPr>
+        <p:txBody>
+          <a:bodyPr wrap="square" anchor="ctr" lIns="0" rIns="0" tIns="0" bIns="0">
+            <a:spAutoFit/>
+          </a:bodyPr>
+          <a:lstStyle/>
+          <a:p>
+            <a:pPr algn="ctr">
+              <a:lnSpc>
+                <a:spcPct val="112000"/>
+              </a:lnSpc>
+            </a:pPr>
+            <a:r>
+              <a:rPr sz="1125" b="1">
+                <a:solidFill>
+                  <a:srgbClr val="FFFFFF"/>
+                </a:solidFill>
+                <a:latin typeface="Arial"/>
+                <a:ea typeface="Arial"/>
+              </a:rPr>
+              <a:t>WAF</a:t>
+            </a:r>
+          </a:p>
+        </p:txBody>
+      </p:sp>
+      <p:sp>
+        <p:nvSpPr>
+          <p:cNvPr id="39" name="TextBox 38"/>
+          <p:cNvSpPr txBox="1"/>
+          <p:nvPr/>
+        </p:nvSpPr>
+        <p:spPr>
+          <a:xfrm>
+            <a:off x="10616183" y="3493007"/>
+            <a:ext cx="1188720" cy="164592"/>
+          </a:xfrm>
+          <a:prstGeom prst="rect">
+            <a:avLst/>
+          </a:prstGeom>
+          <a:noFill/>
+        </p:spPr>
+        <p:txBody>
+          <a:bodyPr wrap="square" anchor="t" lIns="0" rIns="0" tIns="0" bIns="0">
+            <a:spAutoFit/>
+          </a:bodyPr>
+          <a:lstStyle/>
+          <a:p>
+            <a:pPr algn="ctr">
+              <a:lnSpc>
+                <a:spcPct val="112000"/>
+              </a:lnSpc>
+            </a:pPr>
+            <a:r>
+              <a:rPr sz="850" b="1">
+                <a:solidFill>
+                  <a:srgbClr val="1428A0"/>
+                </a:solidFill>
+                <a:latin typeface="Arial"/>
+                <a:ea typeface="Arial"/>
+              </a:rPr>
+              <a:t>호스트 · 앱</a:t>
+            </a:r>
+          </a:p>
+        </p:txBody>
+      </p:sp>
+      <p:sp>
+        <p:nvSpPr>
+          <p:cNvPr id="40" name="TextBox 39"/>
+          <p:cNvSpPr txBox="1"/>
+          <p:nvPr/>
+        </p:nvSpPr>
+        <p:spPr>
+          <a:xfrm>
+            <a:off x="11786615" y="3209544"/>
+            <a:ext cx="256032" cy="274320"/>
+          </a:xfrm>
+          <a:prstGeom prst="rect">
+            <a:avLst/>
+          </a:prstGeom>
+          <a:noFill/>
+        </p:spPr>
+        <p:txBody>
+          <a:bodyPr wrap="square" anchor="ctr" lIns="0" rIns="0" tIns="0" bIns="0">
+            <a:spAutoFit/>
+          </a:bodyPr>
+          <a:lstStyle/>
+          <a:p>
+            <a:pPr algn="ctr">
+              <a:lnSpc>
+                <a:spcPct val="112000"/>
+              </a:lnSpc>
+            </a:pPr>
+            <a:r>
+              <a:rPr sz="1300" b="0">
+                <a:solidFill>
+                  <a:srgbClr val="555555"/>
+                </a:solidFill>
+                <a:latin typeface="Arial"/>
+                <a:ea typeface="Arial"/>
+              </a:rPr>
+              <a:t>÷</a:t>
+            </a:r>
+          </a:p>
+        </p:txBody>
+      </p:sp>
+      <p:sp>
+        <p:nvSpPr>
+          <p:cNvPr id="41" name="Rectangle 40"/>
+          <p:cNvSpPr/>
+          <p:nvPr/>
+        </p:nvSpPr>
+        <p:spPr>
+          <a:xfrm>
+            <a:off x="12115799" y="3209544"/>
+            <a:ext cx="1005840" cy="274320"/>
+          </a:xfrm>
+          <a:prstGeom prst="rect">
+            <a:avLst/>
+          </a:prstGeom>
+          <a:solidFill>
+            <a:srgbClr val="F4F6FC"/>
+          </a:solidFill>
+          <a:ln w="9525">
+            <a:solidFill>
+              <a:srgbClr val="AAB8E8"/>
+            </a:solidFill>
+          </a:ln>
+          <a:effectLst/>
+        </p:spPr>
+        <p:style>
+          <a:lnRef idx="1">
+            <a:schemeClr val="accent1"/>
+          </a:lnRef>
+          <a:fillRef idx="3">
+            <a:schemeClr val="accent1"/>
+          </a:fillRef>
+          <a:effectRef idx="2">
+            <a:schemeClr val="accent1"/>
+          </a:effectRef>
+          <a:fontRef idx="minor">
+            <a:schemeClr val="lt1"/>
+          </a:fontRef>
+        </p:style>
+        <p:txBody>
+          <a:bodyPr rtlCol="0" anchor="ctr"/>
+          <a:lstStyle/>
+          <a:p>
+            <a:pPr algn="ctr"/>
+          </a:p>
+        </p:txBody>
+      </p:sp>
+      <p:sp>
+        <p:nvSpPr>
+          <p:cNvPr id="42" name="TextBox 41"/>
+          <p:cNvSpPr txBox="1"/>
+          <p:nvPr/>
+        </p:nvSpPr>
+        <p:spPr>
+          <a:xfrm>
+            <a:off x="12115799" y="3209544"/>
+            <a:ext cx="1005840" cy="274320"/>
+          </a:xfrm>
+          <a:prstGeom prst="rect">
+            <a:avLst/>
+          </a:prstGeom>
+          <a:noFill/>
+        </p:spPr>
+        <p:txBody>
+          <a:bodyPr wrap="square" anchor="ctr" lIns="0" rIns="0" tIns="0" bIns="0">
+            <a:spAutoFit/>
+          </a:bodyPr>
+          <a:lstStyle/>
+          <a:p>
+            <a:pPr algn="ctr">
+              <a:lnSpc>
+                <a:spcPct val="112000"/>
+              </a:lnSpc>
+            </a:pPr>
+            <a:r>
+              <a:rPr sz="1125" b="1">
+                <a:solidFill>
+                  <a:srgbClr val="1A1A1A"/>
+                </a:solidFill>
+                <a:latin typeface="Arial"/>
+                <a:ea typeface="Arial"/>
+              </a:rPr>
+              <a:t>365 × 년</a:t>
+            </a:r>
+          </a:p>
+        </p:txBody>
+      </p:sp>
+      <p:sp>
+        <p:nvSpPr>
+          <p:cNvPr id="43" name="TextBox 42"/>
+          <p:cNvSpPr txBox="1"/>
+          <p:nvPr/>
+        </p:nvSpPr>
+        <p:spPr>
+          <a:xfrm>
+            <a:off x="12024359" y="3493007"/>
+            <a:ext cx="1188720" cy="164592"/>
+          </a:xfrm>
+          <a:prstGeom prst="rect">
+            <a:avLst/>
+          </a:prstGeom>
+          <a:noFill/>
+        </p:spPr>
+        <p:txBody>
+          <a:bodyPr wrap="square" anchor="t" lIns="0" rIns="0" tIns="0" bIns="0">
+            <a:spAutoFit/>
+          </a:bodyPr>
+          <a:lstStyle/>
+          <a:p>
+            <a:pPr algn="ctr">
+              <a:lnSpc>
+                <a:spcPct val="112000"/>
+              </a:lnSpc>
+            </a:pPr>
+            <a:r>
+              <a:rPr sz="850" b="0">
+                <a:solidFill>
+                  <a:srgbClr val="8A8A8A"/>
+                </a:solidFill>
+                <a:latin typeface="Arial"/>
+                <a:ea typeface="Arial"/>
+              </a:rPr>
+              <a:t>요구</a:t>
+            </a:r>
+          </a:p>
+        </p:txBody>
+      </p:sp>
+      <p:sp>
+        <p:nvSpPr>
+          <p:cNvPr id="44" name="Rectangle 43"/>
+          <p:cNvSpPr/>
+          <p:nvPr/>
+        </p:nvSpPr>
+        <p:spPr>
+          <a:xfrm>
+            <a:off x="722376" y="3730752"/>
+            <a:ext cx="1188720" cy="2505456"/>
+          </a:xfrm>
+          <a:prstGeom prst="rect">
+            <a:avLst/>
+          </a:prstGeom>
+          <a:solidFill>
+            <a:srgbClr val="F4F6FC"/>
+          </a:solidFill>
+          <a:ln>
+            <a:noFill/>
+          </a:ln>
+          <a:effectLst/>
+        </p:spPr>
+        <p:style>
+          <a:lnRef idx="1">
+            <a:schemeClr val="accent1"/>
+          </a:lnRef>
+          <a:fillRef idx="3">
+            <a:schemeClr val="accent1"/>
+          </a:fillRef>
+          <a:effectRef idx="2">
+            <a:schemeClr val="accent1"/>
+          </a:effectRef>
+          <a:fontRef idx="minor">
+            <a:schemeClr val="lt1"/>
+          </a:fontRef>
+        </p:style>
+        <p:txBody>
+          <a:bodyPr rtlCol="0" anchor="ctr"/>
+          <a:lstStyle/>
+          <a:p>
+            <a:pPr algn="ctr"/>
+          </a:p>
+        </p:txBody>
+      </p:sp>
+      <p:sp>
+        <p:nvSpPr>
+          <p:cNvPr id="45" name="Rectangle 44"/>
+          <p:cNvSpPr/>
+          <p:nvPr/>
+        </p:nvSpPr>
+        <p:spPr>
+          <a:xfrm>
+            <a:off x="722376" y="3730752"/>
+            <a:ext cx="54864" cy="2505456"/>
+          </a:xfrm>
+          <a:prstGeom prst="rect">
+            <a:avLst/>
+          </a:prstGeom>
+          <a:solidFill>
+            <a:srgbClr val="1428A0"/>
+          </a:solidFill>
+          <a:ln>
+            <a:noFill/>
+          </a:ln>
+          <a:effectLst/>
+        </p:spPr>
+        <p:style>
+          <a:lnRef idx="1">
+            <a:schemeClr val="accent1"/>
+          </a:lnRef>
+          <a:fillRef idx="3">
+            <a:schemeClr val="accent1"/>
+          </a:fillRef>
+          <a:effectRef idx="2">
+            <a:schemeClr val="accent1"/>
+          </a:effectRef>
+          <a:fontRef idx="minor">
+            <a:schemeClr val="lt1"/>
+          </a:fontRef>
+        </p:style>
+        <p:txBody>
+          <a:bodyPr rtlCol="0" anchor="ctr"/>
+          <a:lstStyle/>
+          <a:p>
+            <a:pPr algn="ctr"/>
+          </a:p>
+        </p:txBody>
+      </p:sp>
+      <p:sp>
+        <p:nvSpPr>
+          <p:cNvPr id="46" name="TextBox 45"/>
+          <p:cNvSpPr txBox="1"/>
+          <p:nvPr/>
+        </p:nvSpPr>
+        <p:spPr>
+          <a:xfrm>
+            <a:off x="886968" y="3877056"/>
+            <a:ext cx="950976" cy="274320"/>
+          </a:xfrm>
+          <a:prstGeom prst="rect">
+            <a:avLst/>
+          </a:prstGeom>
+          <a:noFill/>
+        </p:spPr>
+        <p:txBody>
+          <a:bodyPr wrap="square" anchor="t" lIns="0" rIns="0" tIns="0" bIns="0">
+            <a:spAutoFit/>
+          </a:bodyPr>
+          <a:lstStyle/>
+          <a:p>
+            <a:pPr algn="l">
+              <a:lnSpc>
+                <a:spcPct val="112000"/>
+              </a:lnSpc>
+            </a:pPr>
+            <a:r>
+              <a:rPr sz="1275" b="1">
+                <a:solidFill>
+                  <a:srgbClr val="1428A0"/>
+                </a:solidFill>
+                <a:latin typeface="Arial"/>
+                <a:ea typeface="Arial"/>
+              </a:rPr>
+              <a:t>내구성 축</a:t>
+            </a:r>
+          </a:p>
+        </p:txBody>
+      </p:sp>
+      <p:sp>
+        <p:nvSpPr>
+          <p:cNvPr id="47" name="TextBox 46"/>
+          <p:cNvSpPr txBox="1"/>
+          <p:nvPr/>
+        </p:nvSpPr>
+        <p:spPr>
+          <a:xfrm>
+            <a:off x="886968" y="4187952"/>
+            <a:ext cx="950976" cy="548640"/>
+          </a:xfrm>
+          <a:prstGeom prst="rect">
+            <a:avLst/>
+          </a:prstGeom>
+          <a:noFill/>
+        </p:spPr>
+        <p:txBody>
+          <a:bodyPr wrap="square" anchor="t" lIns="0" rIns="0" tIns="0" bIns="0">
+            <a:spAutoFit/>
+          </a:bodyPr>
+          <a:lstStyle/>
+          <a:p>
+            <a:pPr algn="l">
+              <a:lnSpc>
+                <a:spcPct val="100000"/>
+              </a:lnSpc>
+            </a:pPr>
+            <a:r>
+              <a:rPr sz="975" b="0">
+                <a:solidFill>
+                  <a:srgbClr val="555555"/>
+                </a:solidFill>
+                <a:latin typeface="Arial"/>
+                <a:ea typeface="Arial"/>
+              </a:rPr>
+              <a:t>P/E · BER</a:t>
+            </a:r>
+          </a:p>
+          <a:p>
+            <a:pPr algn="l">
+              <a:lnSpc>
+                <a:spcPct val="100000"/>
+              </a:lnSpc>
+            </a:pPr>
+            <a:r>
+              <a:rPr sz="975" b="0">
+                <a:solidFill>
+                  <a:srgbClr val="555555"/>
+                </a:solidFill>
+                <a:latin typeface="Arial"/>
+                <a:ea typeface="Arial"/>
+              </a:rPr>
+              <a:t>DWPD · WAF</a:t>
+            </a:r>
+          </a:p>
+        </p:txBody>
+      </p:sp>
+      <p:sp>
+        <p:nvSpPr>
+          <p:cNvPr id="48" name="Rectangle 47"/>
+          <p:cNvSpPr/>
+          <p:nvPr/>
+        </p:nvSpPr>
+        <p:spPr>
+          <a:xfrm>
+            <a:off x="722376" y="6345936"/>
+            <a:ext cx="1188720" cy="2139696"/>
+          </a:xfrm>
+          <a:prstGeom prst="rect">
+            <a:avLst/>
+          </a:prstGeom>
+          <a:solidFill>
+            <a:srgbClr val="F4F6FC"/>
+          </a:solidFill>
+          <a:ln>
+            <a:noFill/>
+          </a:ln>
+          <a:effectLst/>
+        </p:spPr>
+        <p:style>
+          <a:lnRef idx="1">
+            <a:schemeClr val="accent1"/>
+          </a:lnRef>
+          <a:fillRef idx="3">
+            <a:schemeClr val="accent1"/>
+          </a:fillRef>
+          <a:effectRef idx="2">
+            <a:schemeClr val="accent1"/>
+          </a:effectRef>
+          <a:fontRef idx="minor">
+            <a:schemeClr val="lt1"/>
+          </a:fontRef>
+        </p:style>
+        <p:txBody>
+          <a:bodyPr rtlCol="0" anchor="ctr"/>
+          <a:lstStyle/>
+          <a:p>
+            <a:pPr algn="ctr"/>
+          </a:p>
+        </p:txBody>
+      </p:sp>
+      <p:sp>
+        <p:nvSpPr>
+          <p:cNvPr id="49" name="Rectangle 48"/>
+          <p:cNvSpPr/>
+          <p:nvPr/>
+        </p:nvSpPr>
+        <p:spPr>
+          <a:xfrm>
+            <a:off x="722376" y="6345936"/>
+            <a:ext cx="54864" cy="2139696"/>
+          </a:xfrm>
+          <a:prstGeom prst="rect">
+            <a:avLst/>
+          </a:prstGeom>
+          <a:solidFill>
+            <a:srgbClr val="1428A0"/>
+          </a:solidFill>
+          <a:ln>
+            <a:noFill/>
+          </a:ln>
+          <a:effectLst/>
+        </p:spPr>
+        <p:style>
+          <a:lnRef idx="1">
+            <a:schemeClr val="accent1"/>
+          </a:lnRef>
+          <a:fillRef idx="3">
+            <a:schemeClr val="accent1"/>
+          </a:fillRef>
+          <a:effectRef idx="2">
+            <a:schemeClr val="accent1"/>
+          </a:effectRef>
+          <a:fontRef idx="minor">
+            <a:schemeClr val="lt1"/>
+          </a:fontRef>
+        </p:style>
+        <p:txBody>
+          <a:bodyPr rtlCol="0" anchor="ctr"/>
+          <a:lstStyle/>
+          <a:p>
+            <a:pPr algn="ctr"/>
+          </a:p>
+        </p:txBody>
+      </p:sp>
+      <p:sp>
+        <p:nvSpPr>
+          <p:cNvPr id="50" name="TextBox 49"/>
+          <p:cNvSpPr txBox="1"/>
+          <p:nvPr/>
+        </p:nvSpPr>
+        <p:spPr>
+          <a:xfrm>
+            <a:off x="886968" y="6492240"/>
+            <a:ext cx="950976" cy="274320"/>
+          </a:xfrm>
+          <a:prstGeom prst="rect">
+            <a:avLst/>
+          </a:prstGeom>
+          <a:noFill/>
+        </p:spPr>
+        <p:txBody>
+          <a:bodyPr wrap="square" anchor="t" lIns="0" rIns="0" tIns="0" bIns="0">
+            <a:spAutoFit/>
+          </a:bodyPr>
+          <a:lstStyle/>
+          <a:p>
+            <a:pPr algn="l">
+              <a:lnSpc>
+                <a:spcPct val="112000"/>
+              </a:lnSpc>
+            </a:pPr>
+            <a:r>
+              <a:rPr sz="1275" b="1">
+                <a:solidFill>
+                  <a:srgbClr val="1428A0"/>
+                </a:solidFill>
+                <a:latin typeface="Arial"/>
+                <a:ea typeface="Arial"/>
+              </a:rPr>
+              <a:t>신뢰성 축</a:t>
+            </a:r>
+          </a:p>
+        </p:txBody>
+      </p:sp>
+      <p:sp>
+        <p:nvSpPr>
+          <p:cNvPr id="51" name="TextBox 50"/>
+          <p:cNvSpPr txBox="1"/>
+          <p:nvPr/>
+        </p:nvSpPr>
+        <p:spPr>
+          <a:xfrm>
+            <a:off x="886968" y="6803136"/>
+            <a:ext cx="950976" cy="548640"/>
+          </a:xfrm>
+          <a:prstGeom prst="rect">
+            <a:avLst/>
+          </a:prstGeom>
+          <a:noFill/>
+        </p:spPr>
+        <p:txBody>
+          <a:bodyPr wrap="square" anchor="t" lIns="0" rIns="0" tIns="0" bIns="0">
+            <a:spAutoFit/>
+          </a:bodyPr>
+          <a:lstStyle/>
+          <a:p>
+            <a:pPr algn="l">
+              <a:lnSpc>
+                <a:spcPct val="100000"/>
+              </a:lnSpc>
+            </a:pPr>
+            <a:r>
+              <a:rPr sz="975" b="0">
+                <a:solidFill>
+                  <a:srgbClr val="555555"/>
+                </a:solidFill>
+                <a:latin typeface="Arial"/>
+                <a:ea typeface="Arial"/>
+              </a:rPr>
+              <a:t>다이 수</a:t>
+            </a:r>
+          </a:p>
+          <a:p>
+            <a:pPr algn="l">
+              <a:lnSpc>
+                <a:spcPct val="100000"/>
+              </a:lnSpc>
+            </a:pPr>
+            <a:r>
+              <a:rPr sz="975" b="0">
+                <a:solidFill>
+                  <a:srgbClr val="555555"/>
+                </a:solidFill>
+                <a:latin typeface="Arial"/>
+                <a:ea typeface="Arial"/>
+              </a:rPr>
+              <a:t>다이 고장률</a:t>
+            </a:r>
+          </a:p>
+        </p:txBody>
+      </p:sp>
+      <p:sp>
+        <p:nvSpPr>
+          <p:cNvPr id="52" name="Rectangle 51"/>
+          <p:cNvSpPr/>
+          <p:nvPr/>
+        </p:nvSpPr>
+        <p:spPr>
+          <a:xfrm>
+            <a:off x="2039112" y="3730752"/>
+            <a:ext cx="3675888" cy="2505456"/>
           </a:xfrm>
           <a:prstGeom prst="rect">
             <a:avLst/>
@@ -3910,14 +5691,14 @@
       </p:sp>
       <p:sp>
         <p:nvSpPr>
-          <p:cNvPr id="12" name="TextBox 11"/>
+          <p:cNvPr id="53" name="TextBox 52"/>
           <p:cNvSpPr txBox="1"/>
           <p:nvPr/>
         </p:nvSpPr>
         <p:spPr>
           <a:xfrm>
-            <a:off x="10612027" y="3054096"/>
-            <a:ext cx="932688" cy="420624"/>
+            <a:off x="2167128" y="3858768"/>
+            <a:ext cx="3419856" cy="182880"/>
           </a:xfrm>
           <a:prstGeom prst="rect">
             <a:avLst/>
@@ -3925,39 +5706,39 @@
           <a:noFill/>
         </p:spPr>
         <p:txBody>
-          <a:bodyPr wrap="square" anchor="ctr" lIns="0" rIns="0" tIns="0" bIns="0">
+          <a:bodyPr wrap="square" anchor="t" lIns="0" rIns="0" tIns="0" bIns="0">
             <a:spAutoFit/>
           </a:bodyPr>
           <a:lstStyle/>
           <a:p>
-            <a:pPr algn="ctr">
+            <a:pPr algn="l">
               <a:lnSpc>
                 <a:spcPct val="112000"/>
               </a:lnSpc>
             </a:pPr>
             <a:r>
-              <a:rPr sz="1350" b="1">
-                <a:solidFill>
-                  <a:srgbClr val="1A1A1A"/>
+              <a:rPr sz="975" b="0">
+                <a:solidFill>
+                  <a:srgbClr val="8A8A8A"/>
                 </a:solidFill>
                 <a:latin typeface="Arial"/>
                 <a:ea typeface="Arial"/>
               </a:rPr>
-              <a:t>DWPD</a:t>
-            </a:r>
-          </a:p>
-        </p:txBody>
-      </p:sp>
-      <p:sp>
-        <p:nvSpPr>
-          <p:cNvPr id="13" name="TextBox 12"/>
+              <a:t>추론 캐시 계층 요구</a:t>
+            </a:r>
+          </a:p>
+        </p:txBody>
+      </p:sp>
+      <p:sp>
+        <p:nvSpPr>
+          <p:cNvPr id="54" name="TextBox 53"/>
           <p:cNvSpPr txBox="1"/>
           <p:nvPr/>
         </p:nvSpPr>
         <p:spPr>
           <a:xfrm>
-            <a:off x="10520587" y="3511296"/>
-            <a:ext cx="1115568" cy="201168"/>
+            <a:off x="2167128" y="4059936"/>
+            <a:ext cx="3419856" cy="457200"/>
           </a:xfrm>
           <a:prstGeom prst="rect">
             <a:avLst/>
@@ -3965,39 +5746,39 @@
           <a:noFill/>
         </p:spPr>
         <p:txBody>
-          <a:bodyPr wrap="square" anchor="t" lIns="0" rIns="0" tIns="0" bIns="0">
+          <a:bodyPr wrap="square" anchor="ctr" lIns="0" rIns="0" tIns="0" bIns="0">
             <a:spAutoFit/>
           </a:bodyPr>
           <a:lstStyle/>
           <a:p>
-            <a:pPr algn="ctr">
+            <a:pPr algn="l">
               <a:lnSpc>
                 <a:spcPct val="112000"/>
               </a:lnSpc>
             </a:pPr>
             <a:r>
-              <a:rPr sz="975" b="0">
-                <a:solidFill>
-                  <a:srgbClr val="8A8A8A"/>
+              <a:rPr sz="2600" b="1">
+                <a:solidFill>
+                  <a:srgbClr val="1428A0"/>
                 </a:solidFill>
                 <a:latin typeface="Arial"/>
                 <a:ea typeface="Arial"/>
               </a:rPr>
-              <a:t>고객 요구</a:t>
-            </a:r>
-          </a:p>
-        </p:txBody>
-      </p:sp>
-      <p:sp>
-        <p:nvSpPr>
-          <p:cNvPr id="14" name="TextBox 13"/>
+              <a:t>DWPD 1~3</a:t>
+            </a:r>
+          </a:p>
+        </p:txBody>
+      </p:sp>
+      <p:sp>
+        <p:nvSpPr>
+          <p:cNvPr id="55" name="TextBox 54"/>
           <p:cNvSpPr txBox="1"/>
           <p:nvPr/>
         </p:nvSpPr>
         <p:spPr>
           <a:xfrm>
-            <a:off x="11599579" y="3054096"/>
-            <a:ext cx="237744" cy="420624"/>
+            <a:off x="2167128" y="4535424"/>
+            <a:ext cx="3419856" cy="365760"/>
           </a:xfrm>
           <a:prstGeom prst="rect">
             <a:avLst/>
@@ -4005,39 +5786,233 @@
           <a:noFill/>
         </p:spPr>
         <p:txBody>
-          <a:bodyPr wrap="square" anchor="ctr" lIns="0" rIns="0" tIns="0" bIns="0">
+          <a:bodyPr wrap="square" anchor="t" lIns="0" rIns="0" tIns="0" bIns="0">
             <a:spAutoFit/>
           </a:bodyPr>
           <a:lstStyle/>
           <a:p>
-            <a:pPr algn="ctr">
+            <a:pPr algn="l">
+              <a:lnSpc>
+                <a:spcPct val="100000"/>
+              </a:lnSpc>
+            </a:pPr>
+            <a:r>
+              <a:rPr sz="900" b="0">
+                <a:solidFill>
+                  <a:srgbClr val="555555"/>
+                </a:solidFill>
+                <a:latin typeface="Arial"/>
+                <a:ea typeface="Arial"/>
+              </a:rPr>
+              <a:t>현재 TLC 수준 · ScaleFlux 제시 유효 요구 7~10</a:t>
+            </a:r>
+          </a:p>
+        </p:txBody>
+      </p:sp>
+      <p:sp>
+        <p:nvSpPr>
+          <p:cNvPr id="56" name="Rectangle 55"/>
+          <p:cNvSpPr/>
+          <p:nvPr/>
+        </p:nvSpPr>
+        <p:spPr>
+          <a:xfrm>
+            <a:off x="2167128" y="4974336"/>
+            <a:ext cx="3419856" cy="10972"/>
+          </a:xfrm>
+          <a:prstGeom prst="rect">
+            <a:avLst/>
+          </a:prstGeom>
+          <a:solidFill>
+            <a:srgbClr val="AAB8E8"/>
+          </a:solidFill>
+          <a:ln>
+            <a:noFill/>
+          </a:ln>
+          <a:effectLst/>
+        </p:spPr>
+        <p:style>
+          <a:lnRef idx="1">
+            <a:schemeClr val="accent1"/>
+          </a:lnRef>
+          <a:fillRef idx="3">
+            <a:schemeClr val="accent1"/>
+          </a:fillRef>
+          <a:effectRef idx="2">
+            <a:schemeClr val="accent1"/>
+          </a:effectRef>
+          <a:fontRef idx="minor">
+            <a:schemeClr val="lt1"/>
+          </a:fontRef>
+        </p:style>
+        <p:txBody>
+          <a:bodyPr rtlCol="0" anchor="ctr"/>
+          <a:lstStyle/>
+          <a:p>
+            <a:pPr algn="ctr"/>
+          </a:p>
+        </p:txBody>
+      </p:sp>
+      <p:sp>
+        <p:nvSpPr>
+          <p:cNvPr id="57" name="TextBox 56"/>
+          <p:cNvSpPr txBox="1"/>
+          <p:nvPr/>
+        </p:nvSpPr>
+        <p:spPr>
+          <a:xfrm>
+            <a:off x="2167128" y="5065776"/>
+            <a:ext cx="3419856" cy="182880"/>
+          </a:xfrm>
+          <a:prstGeom prst="rect">
+            <a:avLst/>
+          </a:prstGeom>
+          <a:noFill/>
+        </p:spPr>
+        <p:txBody>
+          <a:bodyPr wrap="square" anchor="t" lIns="0" rIns="0" tIns="0" bIns="0">
+            <a:spAutoFit/>
+          </a:bodyPr>
+          <a:lstStyle/>
+          <a:p>
+            <a:pPr algn="l">
               <a:lnSpc>
                 <a:spcPct val="112000"/>
               </a:lnSpc>
             </a:pPr>
             <a:r>
-              <a:rPr sz="1500" b="0">
-                <a:solidFill>
-                  <a:srgbClr val="555555"/>
+              <a:rPr sz="975" b="0">
+                <a:solidFill>
+                  <a:srgbClr val="8A8A8A"/>
                 </a:solidFill>
                 <a:latin typeface="Arial"/>
                 <a:ea typeface="Arial"/>
               </a:rPr>
-              <a:t>=</a:t>
-            </a:r>
-          </a:p>
-        </p:txBody>
-      </p:sp>
-      <p:sp>
-        <p:nvSpPr>
-          <p:cNvPr id="15" name="Rectangle 14"/>
+              <a:t>신뢰성 요구 · JESD218</a:t>
+            </a:r>
+          </a:p>
+        </p:txBody>
+      </p:sp>
+      <p:sp>
+        <p:nvSpPr>
+          <p:cNvPr id="58" name="TextBox 57"/>
+          <p:cNvSpPr txBox="1"/>
+          <p:nvPr/>
+        </p:nvSpPr>
+        <p:spPr>
+          <a:xfrm>
+            <a:off x="2167128" y="5266944"/>
+            <a:ext cx="3419856" cy="457200"/>
+          </a:xfrm>
+          <a:prstGeom prst="rect">
+            <a:avLst/>
+          </a:prstGeom>
+          <a:noFill/>
+        </p:spPr>
+        <p:txBody>
+          <a:bodyPr wrap="square" anchor="ctr" lIns="0" rIns="0" tIns="0" bIns="0">
+            <a:spAutoFit/>
+          </a:bodyPr>
+          <a:lstStyle/>
+          <a:p>
+            <a:pPr algn="l">
+              <a:lnSpc>
+                <a:spcPct val="112000"/>
+              </a:lnSpc>
+            </a:pPr>
+            <a:r>
+              <a:rPr sz="2200" b="1">
+                <a:solidFill>
+                  <a:srgbClr val="1428A0"/>
+                </a:solidFill>
+                <a:latin typeface="Arial"/>
+                <a:ea typeface="Arial"/>
+              </a:rPr>
+              <a:t>UBER 10</a:t>
+            </a:r>
+            <a:r>
+              <a:rPr sz="1300" b="1" baseline="30000">
+                <a:solidFill>
+                  <a:srgbClr val="1428A0"/>
+                </a:solidFill>
+                <a:latin typeface="Arial"/>
+                <a:ea typeface="Arial"/>
+              </a:rPr>
+              <a:t>-15</a:t>
+            </a:r>
+            <a:r>
+              <a:rPr sz="2200" b="1">
+                <a:solidFill>
+                  <a:srgbClr val="1428A0"/>
+                </a:solidFill>
+                <a:latin typeface="Arial"/>
+                <a:ea typeface="Arial"/>
+              </a:rPr>
+              <a:t> · 10</a:t>
+            </a:r>
+            <a:r>
+              <a:rPr sz="1300" b="1" baseline="30000">
+                <a:solidFill>
+                  <a:srgbClr val="1428A0"/>
+                </a:solidFill>
+                <a:latin typeface="Arial"/>
+                <a:ea typeface="Arial"/>
+              </a:rPr>
+              <a:t>-16</a:t>
+            </a:r>
+          </a:p>
+        </p:txBody>
+      </p:sp>
+      <p:sp>
+        <p:nvSpPr>
+          <p:cNvPr id="59" name="TextBox 58"/>
+          <p:cNvSpPr txBox="1"/>
+          <p:nvPr/>
+        </p:nvSpPr>
+        <p:spPr>
+          <a:xfrm>
+            <a:off x="2167128" y="5742432"/>
+            <a:ext cx="3419856" cy="365760"/>
+          </a:xfrm>
+          <a:prstGeom prst="rect">
+            <a:avLst/>
+          </a:prstGeom>
+          <a:noFill/>
+        </p:spPr>
+        <p:txBody>
+          <a:bodyPr wrap="square" anchor="t" lIns="0" rIns="0" tIns="0" bIns="0">
+            <a:spAutoFit/>
+          </a:bodyPr>
+          <a:lstStyle/>
+          <a:p>
+            <a:pPr algn="l">
+              <a:lnSpc>
+                <a:spcPct val="100000"/>
+              </a:lnSpc>
+            </a:pPr>
+            <a:r>
+              <a:rPr sz="900" b="0">
+                <a:solidFill>
+                  <a:srgbClr val="555555"/>
+                </a:solidFill>
+                <a:latin typeface="Arial"/>
+                <a:ea typeface="Arial"/>
+              </a:rPr>
+              <a:t>클라이언트 · 엔터프라이즈 · 보존 1년@30°C / 3개월@40°C</a:t>
+            </a:r>
+          </a:p>
+        </p:txBody>
+      </p:sp>
+      <p:sp>
+        <p:nvSpPr>
+          <p:cNvPr id="60" name="Rectangle 59"/>
           <p:cNvSpPr/>
           <p:nvPr/>
         </p:nvSpPr>
         <p:spPr>
           <a:xfrm>
-            <a:off x="11892187" y="3054096"/>
-            <a:ext cx="932688" cy="420624"/>
+            <a:off x="5989320" y="3730752"/>
+            <a:ext cx="3675888" cy="2505456"/>
           </a:xfrm>
           <a:prstGeom prst="rect">
             <a:avLst/>
@@ -4074,16 +6049,40 @@
           </a:p>
         </p:txBody>
       </p:sp>
-      <p:sp>
-        <p:nvSpPr>
-          <p:cNvPr id="16" name="TextBox 15"/>
+      <p:pic>
+        <p:nvPicPr>
+          <p:cNvPr id="61" name="Picture 60" descr="ladder_cell_component.png"/>
+          <p:cNvPicPr>
+            <a:picLocks noChangeAspect="1"/>
+          </p:cNvPicPr>
+          <p:nvPr/>
+        </p:nvPicPr>
+        <p:blipFill>
+          <a:blip r:embed="rId2"/>
+          <a:stretch>
+            <a:fillRect/>
+          </a:stretch>
+        </p:blipFill>
+        <p:spPr>
+          <a:xfrm>
+            <a:off x="6080760" y="3822191"/>
+            <a:ext cx="3493008" cy="1941961"/>
+          </a:xfrm>
+          <a:prstGeom prst="rect">
+            <a:avLst/>
+          </a:prstGeom>
+        </p:spPr>
+      </p:pic>
+      <p:sp>
+        <p:nvSpPr>
+          <p:cNvPr id="62" name="TextBox 61"/>
           <p:cNvSpPr txBox="1"/>
           <p:nvPr/>
         </p:nvSpPr>
         <p:spPr>
           <a:xfrm>
-            <a:off x="11892187" y="3054096"/>
-            <a:ext cx="932688" cy="420624"/>
+            <a:off x="6117336" y="5852160"/>
+            <a:ext cx="3419856" cy="329184"/>
           </a:xfrm>
           <a:prstGeom prst="rect">
             <a:avLst/>
@@ -4091,119 +6090,39 @@
           <a:noFill/>
         </p:spPr>
         <p:txBody>
-          <a:bodyPr wrap="square" anchor="ctr" lIns="0" rIns="0" tIns="0" bIns="0">
+          <a:bodyPr wrap="square" anchor="t" lIns="0" rIns="0" tIns="0" bIns="0">
             <a:spAutoFit/>
           </a:bodyPr>
           <a:lstStyle/>
           <a:p>
-            <a:pPr algn="ctr">
+            <a:pPr algn="l">
               <a:lnSpc>
-                <a:spcPct val="112000"/>
+                <a:spcPct val="100000"/>
               </a:lnSpc>
             </a:pPr>
             <a:r>
-              <a:rPr sz="1350" b="1">
-                <a:solidFill>
-                  <a:srgbClr val="1A1A1A"/>
+              <a:rPr sz="850" b="0">
+                <a:solidFill>
+                  <a:srgbClr val="555555"/>
                 </a:solidFill>
                 <a:latin typeface="Arial"/>
                 <a:ea typeface="Arial"/>
               </a:rPr>
-              <a:t>P/E</a:t>
-            </a:r>
-          </a:p>
-        </p:txBody>
-      </p:sp>
-      <p:sp>
-        <p:nvSpPr>
-          <p:cNvPr id="17" name="TextBox 16"/>
-          <p:cNvSpPr txBox="1"/>
-          <p:nvPr/>
-        </p:nvSpPr>
-        <p:spPr>
-          <a:xfrm>
-            <a:off x="11800747" y="3511296"/>
-            <a:ext cx="1115568" cy="201168"/>
-          </a:xfrm>
-          <a:prstGeom prst="rect">
-            <a:avLst/>
-          </a:prstGeom>
-          <a:noFill/>
-        </p:spPr>
-        <p:txBody>
-          <a:bodyPr wrap="square" anchor="t" lIns="0" rIns="0" tIns="0" bIns="0">
-            <a:spAutoFit/>
-          </a:bodyPr>
-          <a:lstStyle/>
-          <a:p>
-            <a:pPr algn="ctr">
-              <a:lnSpc>
-                <a:spcPct val="112000"/>
-              </a:lnSpc>
-            </a:pPr>
-            <a:r>
-              <a:rPr sz="975" b="0">
-                <a:solidFill>
-                  <a:srgbClr val="8A8A8A"/>
-                </a:solidFill>
-                <a:latin typeface="Arial"/>
-                <a:ea typeface="Arial"/>
-              </a:rPr>
-              <a:t>셀 · 다이</a:t>
-            </a:r>
-          </a:p>
-        </p:txBody>
-      </p:sp>
-      <p:sp>
-        <p:nvSpPr>
-          <p:cNvPr id="18" name="TextBox 17"/>
-          <p:cNvSpPr txBox="1"/>
-          <p:nvPr/>
-        </p:nvSpPr>
-        <p:spPr>
-          <a:xfrm>
-            <a:off x="12879739" y="3054096"/>
-            <a:ext cx="237744" cy="420624"/>
-          </a:xfrm>
-          <a:prstGeom prst="rect">
-            <a:avLst/>
-          </a:prstGeom>
-          <a:noFill/>
-        </p:spPr>
-        <p:txBody>
-          <a:bodyPr wrap="square" anchor="ctr" lIns="0" rIns="0" tIns="0" bIns="0">
-            <a:spAutoFit/>
-          </a:bodyPr>
-          <a:lstStyle/>
-          <a:p>
-            <a:pPr algn="ctr">
-              <a:lnSpc>
-                <a:spcPct val="112000"/>
-              </a:lnSpc>
-            </a:pPr>
-            <a:r>
-              <a:rPr sz="1500" b="0">
-                <a:solidFill>
-                  <a:srgbClr val="555555"/>
-                </a:solidFill>
-                <a:latin typeface="Arial"/>
-                <a:ea typeface="Arial"/>
-              </a:rPr>
-              <a:t>×</a:t>
-            </a:r>
-          </a:p>
-        </p:txBody>
-      </p:sp>
-      <p:sp>
-        <p:nvSpPr>
-          <p:cNvPr id="19" name="Rectangle 18"/>
+              <a:t>비트/셀 ↑ → 산포 마진 ↓ · 보존·사이클링·리드 디스터브로 시간에 따라 변하는 산포는 셀 단독으로 보정 불가</a:t>
+            </a:r>
+          </a:p>
+        </p:txBody>
+      </p:sp>
+      <p:sp>
+        <p:nvSpPr>
+          <p:cNvPr id="63" name="Rectangle 62"/>
           <p:cNvSpPr/>
           <p:nvPr/>
         </p:nvSpPr>
         <p:spPr>
           <a:xfrm>
-            <a:off x="13172347" y="3054096"/>
-            <a:ext cx="932688" cy="420624"/>
+            <a:off x="9939528" y="3730752"/>
+            <a:ext cx="3675888" cy="2505456"/>
           </a:xfrm>
           <a:prstGeom prst="rect">
             <a:avLst/>
@@ -4242,134 +6161,60 @@
       </p:sp>
       <p:sp>
         <p:nvSpPr>
-          <p:cNvPr id="20" name="TextBox 19"/>
-          <p:cNvSpPr txBox="1"/>
-          <p:nvPr/>
-        </p:nvSpPr>
-        <p:spPr>
-          <a:xfrm>
-            <a:off x="13172347" y="3054096"/>
-            <a:ext cx="932688" cy="420624"/>
-          </a:xfrm>
-          <a:prstGeom prst="rect">
-            <a:avLst/>
-          </a:prstGeom>
-          <a:noFill/>
-        </p:spPr>
-        <p:txBody>
-          <a:bodyPr wrap="square" anchor="ctr" lIns="0" rIns="0" tIns="0" bIns="0">
-            <a:spAutoFit/>
-          </a:bodyPr>
-          <a:lstStyle/>
-          <a:p>
-            <a:pPr algn="ctr">
-              <a:lnSpc>
-                <a:spcPct val="112000"/>
-              </a:lnSpc>
-            </a:pPr>
-            <a:r>
-              <a:rPr sz="1350" b="1">
-                <a:solidFill>
-                  <a:srgbClr val="1A1A1A"/>
-                </a:solidFill>
-                <a:latin typeface="Arial"/>
-                <a:ea typeface="Arial"/>
-              </a:rPr>
-              <a:t>1 + OP</a:t>
-            </a:r>
-          </a:p>
-        </p:txBody>
-      </p:sp>
-      <p:sp>
-        <p:nvSpPr>
-          <p:cNvPr id="21" name="TextBox 20"/>
-          <p:cNvSpPr txBox="1"/>
-          <p:nvPr/>
-        </p:nvSpPr>
-        <p:spPr>
-          <a:xfrm>
-            <a:off x="13080907" y="3511296"/>
-            <a:ext cx="1115568" cy="201168"/>
-          </a:xfrm>
-          <a:prstGeom prst="rect">
-            <a:avLst/>
-          </a:prstGeom>
-          <a:noFill/>
-        </p:spPr>
-        <p:txBody>
-          <a:bodyPr wrap="square" anchor="t" lIns="0" rIns="0" tIns="0" bIns="0">
-            <a:spAutoFit/>
-          </a:bodyPr>
-          <a:lstStyle/>
-          <a:p>
-            <a:pPr algn="ctr">
-              <a:lnSpc>
-                <a:spcPct val="112000"/>
-              </a:lnSpc>
-            </a:pPr>
-            <a:r>
-              <a:rPr sz="975" b="0">
-                <a:solidFill>
-                  <a:srgbClr val="8A8A8A"/>
-                </a:solidFill>
-                <a:latin typeface="Arial"/>
-                <a:ea typeface="Arial"/>
-              </a:rPr>
-              <a:t>디바이스</a:t>
-            </a:r>
-          </a:p>
-        </p:txBody>
-      </p:sp>
-      <p:sp>
-        <p:nvSpPr>
-          <p:cNvPr id="22" name="TextBox 21"/>
-          <p:cNvSpPr txBox="1"/>
-          <p:nvPr/>
-        </p:nvSpPr>
-        <p:spPr>
-          <a:xfrm>
-            <a:off x="14159899" y="3054096"/>
-            <a:ext cx="237744" cy="420624"/>
-          </a:xfrm>
-          <a:prstGeom prst="rect">
-            <a:avLst/>
-          </a:prstGeom>
-          <a:noFill/>
-        </p:spPr>
-        <p:txBody>
-          <a:bodyPr wrap="square" anchor="ctr" lIns="0" rIns="0" tIns="0" bIns="0">
-            <a:spAutoFit/>
-          </a:bodyPr>
-          <a:lstStyle/>
-          <a:p>
-            <a:pPr algn="ctr">
-              <a:lnSpc>
-                <a:spcPct val="112000"/>
-              </a:lnSpc>
-            </a:pPr>
-            <a:r>
-              <a:rPr sz="1500" b="0">
-                <a:solidFill>
-                  <a:srgbClr val="555555"/>
-                </a:solidFill>
-                <a:latin typeface="Arial"/>
-                <a:ea typeface="Arial"/>
-              </a:rPr>
-              <a:t>÷</a:t>
-            </a:r>
-          </a:p>
-        </p:txBody>
-      </p:sp>
-      <p:sp>
-        <p:nvSpPr>
-          <p:cNvPr id="23" name="Rectangle 22"/>
+          <p:cNvPr id="64" name="Rectangle 63"/>
           <p:cNvSpPr/>
           <p:nvPr/>
         </p:nvSpPr>
         <p:spPr>
           <a:xfrm>
-            <a:off x="14452507" y="3054096"/>
-            <a:ext cx="932688" cy="420624"/>
+            <a:off x="10030968" y="3822191"/>
+            <a:ext cx="3493008" cy="658368"/>
+          </a:xfrm>
+          <a:prstGeom prst="rect">
+            <a:avLst/>
+          </a:prstGeom>
+          <a:solidFill>
+            <a:srgbClr val="FFFFFF"/>
+          </a:solidFill>
+          <a:ln w="12700">
+            <a:solidFill>
+              <a:srgbClr val="1428A0"/>
+            </a:solidFill>
+          </a:ln>
+          <a:effectLst/>
+        </p:spPr>
+        <p:style>
+          <a:lnRef idx="1">
+            <a:schemeClr val="accent1"/>
+          </a:lnRef>
+          <a:fillRef idx="3">
+            <a:schemeClr val="accent1"/>
+          </a:fillRef>
+          <a:effectRef idx="2">
+            <a:schemeClr val="accent1"/>
+          </a:effectRef>
+          <a:fontRef idx="minor">
+            <a:schemeClr val="lt1"/>
+          </a:fontRef>
+        </p:style>
+        <p:txBody>
+          <a:bodyPr rtlCol="0" anchor="ctr"/>
+          <a:lstStyle/>
+          <a:p>
+            <a:pPr algn="ctr"/>
+          </a:p>
+        </p:txBody>
+      </p:sp>
+      <p:sp>
+        <p:nvSpPr>
+          <p:cNvPr id="65" name="Rectangle 64"/>
+          <p:cNvSpPr/>
+          <p:nvPr/>
+        </p:nvSpPr>
+        <p:spPr>
+          <a:xfrm>
+            <a:off x="10030968" y="3822191"/>
+            <a:ext cx="54864" cy="658368"/>
           </a:xfrm>
           <a:prstGeom prst="rect">
             <a:avLst/>
@@ -4406,14 +6251,14 @@
       </p:sp>
       <p:sp>
         <p:nvSpPr>
-          <p:cNvPr id="24" name="TextBox 23"/>
+          <p:cNvPr id="66" name="TextBox 65"/>
           <p:cNvSpPr txBox="1"/>
           <p:nvPr/>
         </p:nvSpPr>
         <p:spPr>
           <a:xfrm>
-            <a:off x="14452507" y="3054096"/>
-            <a:ext cx="932688" cy="420624"/>
+            <a:off x="10177272" y="3877055"/>
+            <a:ext cx="2011680" cy="182880"/>
           </a:xfrm>
           <a:prstGeom prst="rect">
             <a:avLst/>
@@ -4421,39 +6266,39 @@
           <a:noFill/>
         </p:spPr>
         <p:txBody>
-          <a:bodyPr wrap="square" anchor="ctr" lIns="0" rIns="0" tIns="0" bIns="0">
+          <a:bodyPr wrap="square" anchor="t" lIns="0" rIns="0" tIns="0" bIns="0">
             <a:spAutoFit/>
           </a:bodyPr>
           <a:lstStyle/>
           <a:p>
-            <a:pPr algn="ctr">
+            <a:pPr algn="l">
               <a:lnSpc>
                 <a:spcPct val="112000"/>
               </a:lnSpc>
             </a:pPr>
             <a:r>
-              <a:rPr sz="1350" b="1">
-                <a:solidFill>
-                  <a:srgbClr val="FFFFFF"/>
+              <a:rPr sz="975" b="0">
+                <a:solidFill>
+                  <a:srgbClr val="8A8A8A"/>
                 </a:solidFill>
                 <a:latin typeface="Arial"/>
                 <a:ea typeface="Arial"/>
               </a:rPr>
-              <a:t>WAF</a:t>
-            </a:r>
-          </a:p>
-        </p:txBody>
-      </p:sp>
-      <p:sp>
-        <p:nvSpPr>
-          <p:cNvPr id="25" name="TextBox 24"/>
+              <a:t>1단계 · 컨트롤러 ECC (1991~)</a:t>
+            </a:r>
+          </a:p>
+        </p:txBody>
+      </p:sp>
+      <p:sp>
+        <p:nvSpPr>
+          <p:cNvPr id="67" name="TextBox 66"/>
           <p:cNvSpPr txBox="1"/>
           <p:nvPr/>
         </p:nvSpPr>
         <p:spPr>
           <a:xfrm>
-            <a:off x="14361067" y="3511296"/>
-            <a:ext cx="1115568" cy="201168"/>
+            <a:off x="12152376" y="3877055"/>
+            <a:ext cx="1280160" cy="201168"/>
           </a:xfrm>
           <a:prstGeom prst="rect">
             <a:avLst/>
@@ -4466,7 +6311,7 @@
           </a:bodyPr>
           <a:lstStyle/>
           <a:p>
-            <a:pPr algn="ctr">
+            <a:pPr algn="r">
               <a:lnSpc>
                 <a:spcPct val="112000"/>
               </a:lnSpc>
@@ -4479,21 +6324,21 @@
                 <a:latin typeface="Arial"/>
                 <a:ea typeface="Arial"/>
               </a:rPr>
-              <a:t>호스트 · 앱</a:t>
-            </a:r>
-          </a:p>
-        </p:txBody>
-      </p:sp>
-      <p:sp>
-        <p:nvSpPr>
-          <p:cNvPr id="26" name="TextBox 25"/>
+              <a:t>UBER 요구 충족</a:t>
+            </a:r>
+          </a:p>
+        </p:txBody>
+      </p:sp>
+      <p:sp>
+        <p:nvSpPr>
+          <p:cNvPr id="68" name="TextBox 67"/>
           <p:cNvSpPr txBox="1"/>
           <p:nvPr/>
         </p:nvSpPr>
         <p:spPr>
           <a:xfrm>
-            <a:off x="15440059" y="3054096"/>
-            <a:ext cx="237744" cy="420624"/>
+            <a:off x="10177272" y="4069079"/>
+            <a:ext cx="3255264" cy="237744"/>
           </a:xfrm>
           <a:prstGeom prst="rect">
             <a:avLst/>
@@ -4501,39 +6346,577 @@
           <a:noFill/>
         </p:spPr>
         <p:txBody>
-          <a:bodyPr wrap="square" anchor="ctr" lIns="0" rIns="0" tIns="0" bIns="0">
+          <a:bodyPr wrap="square" anchor="t" lIns="0" rIns="0" tIns="0" bIns="0">
             <a:spAutoFit/>
           </a:bodyPr>
           <a:lstStyle/>
           <a:p>
-            <a:pPr algn="ctr">
+            <a:pPr algn="l">
               <a:lnSpc>
                 <a:spcPct val="112000"/>
               </a:lnSpc>
             </a:pPr>
             <a:r>
-              <a:rPr sz="1500" b="0">
-                <a:solidFill>
-                  <a:srgbClr val="555555"/>
+              <a:rPr sz="1125" b="1">
+                <a:solidFill>
+                  <a:srgbClr val="1A1A1A"/>
                 </a:solidFill>
                 <a:latin typeface="Arial"/>
                 <a:ea typeface="Arial"/>
               </a:rPr>
-              <a:t>÷</a:t>
-            </a:r>
-          </a:p>
-        </p:txBody>
-      </p:sp>
-      <p:sp>
-        <p:nvSpPr>
-          <p:cNvPr id="27" name="Rectangle 26"/>
+              <a:t>ECC 1 bit/512B → LDPC 120 bit/KB · 60배 ↑</a:t>
+            </a:r>
+          </a:p>
+        </p:txBody>
+      </p:sp>
+      <p:sp>
+        <p:nvSpPr>
+          <p:cNvPr id="69" name="TextBox 68"/>
+          <p:cNvSpPr txBox="1"/>
+          <p:nvPr/>
+        </p:nvSpPr>
+        <p:spPr>
+          <a:xfrm>
+            <a:off x="10177272" y="4297679"/>
+            <a:ext cx="3255264" cy="201168"/>
+          </a:xfrm>
+          <a:prstGeom prst="rect">
+            <a:avLst/>
+          </a:prstGeom>
+          <a:noFill/>
+        </p:spPr>
+        <p:txBody>
+          <a:bodyPr wrap="square" anchor="t" lIns="0" rIns="0" tIns="0" bIns="0">
+            <a:spAutoFit/>
+          </a:bodyPr>
+          <a:lstStyle/>
+          <a:p>
+            <a:pPr algn="l">
+              <a:lnSpc>
+                <a:spcPct val="112000"/>
+              </a:lnSpc>
+            </a:pPr>
+            <a:r>
+              <a:rPr sz="850" b="0">
+                <a:solidFill>
+                  <a:srgbClr val="555555"/>
+                </a:solidFill>
+                <a:latin typeface="Arial"/>
+                <a:ea typeface="Arial"/>
+              </a:rPr>
+              <a:t>RBER 백만 배 상승분을 컨트롤러가 흡수 · 완결된 이관</a:t>
+            </a:r>
+          </a:p>
+        </p:txBody>
+      </p:sp>
+      <p:sp>
+        <p:nvSpPr>
+          <p:cNvPr id="70" name="Rectangle 69"/>
           <p:cNvSpPr/>
           <p:nvPr/>
         </p:nvSpPr>
         <p:spPr>
           <a:xfrm>
-            <a:off x="15732667" y="3054096"/>
-            <a:ext cx="932688" cy="420624"/>
+            <a:off x="10030968" y="4571999"/>
+            <a:ext cx="3493008" cy="1572768"/>
+          </a:xfrm>
+          <a:prstGeom prst="rect">
+            <a:avLst/>
+          </a:prstGeom>
+          <a:solidFill>
+            <a:srgbClr val="AAB8E8"/>
+          </a:solidFill>
+          <a:ln>
+            <a:noFill/>
+          </a:ln>
+          <a:effectLst/>
+        </p:spPr>
+        <p:style>
+          <a:lnRef idx="1">
+            <a:schemeClr val="accent1"/>
+          </a:lnRef>
+          <a:fillRef idx="3">
+            <a:schemeClr val="accent1"/>
+          </a:fillRef>
+          <a:effectRef idx="2">
+            <a:schemeClr val="accent1"/>
+          </a:effectRef>
+          <a:fontRef idx="minor">
+            <a:schemeClr val="lt1"/>
+          </a:fontRef>
+        </p:style>
+        <p:txBody>
+          <a:bodyPr rtlCol="0" anchor="ctr"/>
+          <a:lstStyle/>
+          <a:p>
+            <a:pPr algn="ctr"/>
+          </a:p>
+        </p:txBody>
+      </p:sp>
+      <p:sp>
+        <p:nvSpPr>
+          <p:cNvPr id="71" name="TextBox 70"/>
+          <p:cNvSpPr txBox="1"/>
+          <p:nvPr/>
+        </p:nvSpPr>
+        <p:spPr>
+          <a:xfrm>
+            <a:off x="10177272" y="4626863"/>
+            <a:ext cx="2194560" cy="182880"/>
+          </a:xfrm>
+          <a:prstGeom prst="rect">
+            <a:avLst/>
+          </a:prstGeom>
+          <a:noFill/>
+        </p:spPr>
+        <p:txBody>
+          <a:bodyPr wrap="square" anchor="t" lIns="0" rIns="0" tIns="0" bIns="0">
+            <a:spAutoFit/>
+          </a:bodyPr>
+          <a:lstStyle/>
+          <a:p>
+            <a:pPr algn="l">
+              <a:lnSpc>
+                <a:spcPct val="112000"/>
+              </a:lnSpc>
+            </a:pPr>
+            <a:r>
+              <a:rPr sz="975" b="0">
+                <a:solidFill>
+                  <a:srgbClr val="1A1A1A"/>
+                </a:solidFill>
+                <a:latin typeface="Arial"/>
+                <a:ea typeface="Arial"/>
+              </a:rPr>
+              <a:t>2단계 · SSD 단독 최적화</a:t>
+            </a:r>
+          </a:p>
+        </p:txBody>
+      </p:sp>
+      <p:sp>
+        <p:nvSpPr>
+          <p:cNvPr id="72" name="TextBox 71"/>
+          <p:cNvSpPr txBox="1"/>
+          <p:nvPr/>
+        </p:nvSpPr>
+        <p:spPr>
+          <a:xfrm>
+            <a:off x="12152376" y="4626863"/>
+            <a:ext cx="1280160" cy="201168"/>
+          </a:xfrm>
+          <a:prstGeom prst="rect">
+            <a:avLst/>
+          </a:prstGeom>
+          <a:noFill/>
+        </p:spPr>
+        <p:txBody>
+          <a:bodyPr wrap="square" anchor="t" lIns="0" rIns="0" tIns="0" bIns="0">
+            <a:spAutoFit/>
+          </a:bodyPr>
+          <a:lstStyle/>
+          <a:p>
+            <a:pPr algn="r">
+              <a:lnSpc>
+                <a:spcPct val="112000"/>
+              </a:lnSpc>
+            </a:pPr>
+            <a:r>
+              <a:rPr sz="975" b="1">
+                <a:solidFill>
+                  <a:srgbClr val="8A8A8A"/>
+                </a:solidFill>
+                <a:latin typeface="Arial"/>
+                <a:ea typeface="Arial"/>
+              </a:rPr>
+              <a:t>DWPD 요구 미충족</a:t>
+            </a:r>
+          </a:p>
+        </p:txBody>
+      </p:sp>
+      <p:sp>
+        <p:nvSpPr>
+          <p:cNvPr id="73" name="TextBox 72"/>
+          <p:cNvSpPr txBox="1"/>
+          <p:nvPr/>
+        </p:nvSpPr>
+        <p:spPr>
+          <a:xfrm>
+            <a:off x="10177272" y="4818888"/>
+            <a:ext cx="3255264" cy="237744"/>
+          </a:xfrm>
+          <a:prstGeom prst="rect">
+            <a:avLst/>
+          </a:prstGeom>
+          <a:noFill/>
+        </p:spPr>
+        <p:txBody>
+          <a:bodyPr wrap="square" anchor="t" lIns="0" rIns="0" tIns="0" bIns="0">
+            <a:spAutoFit/>
+          </a:bodyPr>
+          <a:lstStyle/>
+          <a:p>
+            <a:pPr algn="l">
+              <a:lnSpc>
+                <a:spcPct val="112000"/>
+              </a:lnSpc>
+            </a:pPr>
+            <a:r>
+              <a:rPr sz="1125" b="1">
+                <a:solidFill>
+                  <a:srgbClr val="1A1A1A"/>
+                </a:solidFill>
+                <a:latin typeface="Arial"/>
+                <a:ea typeface="Arial"/>
+              </a:rPr>
+              <a:t>QoS · 성능 개선, WAF ≈ 3 · 부분 성공</a:t>
+            </a:r>
+          </a:p>
+        </p:txBody>
+      </p:sp>
+      <p:sp>
+        <p:nvSpPr>
+          <p:cNvPr id="74" name="TextBox 73"/>
+          <p:cNvSpPr txBox="1"/>
+          <p:nvPr/>
+        </p:nvSpPr>
+        <p:spPr>
+          <a:xfrm>
+            <a:off x="10177272" y="5047488"/>
+            <a:ext cx="3255264" cy="201168"/>
+          </a:xfrm>
+          <a:prstGeom prst="rect">
+            <a:avLst/>
+          </a:prstGeom>
+          <a:noFill/>
+        </p:spPr>
+        <p:txBody>
+          <a:bodyPr wrap="square" anchor="t" lIns="0" rIns="0" tIns="0" bIns="0">
+            <a:spAutoFit/>
+          </a:bodyPr>
+          <a:lstStyle/>
+          <a:p>
+            <a:pPr algn="l">
+              <a:lnSpc>
+                <a:spcPct val="112000"/>
+              </a:lnSpc>
+            </a:pPr>
+            <a:r>
+              <a:rPr sz="850" b="0">
+                <a:solidFill>
+                  <a:srgbClr val="555555"/>
+                </a:solidFill>
+                <a:latin typeface="Arial"/>
+                <a:ea typeface="Arial"/>
+              </a:rPr>
+              <a:t>'14~'19 추정 배치·스트림·IOD · SSD는 데이터 수명 감지 불가</a:t>
+            </a:r>
+          </a:p>
+        </p:txBody>
+      </p:sp>
+      <p:pic>
+        <p:nvPicPr>
+          <p:cNvPr id="75" name="Picture 74" descr="ladder_cell_dwpd.png"/>
+          <p:cNvPicPr>
+            <a:picLocks noChangeAspect="1"/>
+          </p:cNvPicPr>
+          <p:nvPr/>
+        </p:nvPicPr>
+        <p:blipFill>
+          <a:blip r:embed="rId3"/>
+          <a:stretch>
+            <a:fillRect/>
+          </a:stretch>
+        </p:blipFill>
+        <p:spPr>
+          <a:xfrm>
+            <a:off x="10291572" y="5248655"/>
+            <a:ext cx="2971800" cy="878983"/>
+          </a:xfrm>
+          <a:prstGeom prst="rect">
+            <a:avLst/>
+          </a:prstGeom>
+        </p:spPr>
+      </p:pic>
+      <p:sp>
+        <p:nvSpPr>
+          <p:cNvPr id="76" name="Rectangle 75"/>
+          <p:cNvSpPr/>
+          <p:nvPr/>
+        </p:nvSpPr>
+        <p:spPr>
+          <a:xfrm>
+            <a:off x="13889736" y="3730752"/>
+            <a:ext cx="3675888" cy="2505456"/>
+          </a:xfrm>
+          <a:prstGeom prst="rect">
+            <a:avLst/>
+          </a:prstGeom>
+          <a:solidFill>
+            <a:srgbClr val="FFFFFF"/>
+          </a:solidFill>
+          <a:ln w="19050">
+            <a:solidFill>
+              <a:srgbClr val="1428A0"/>
+            </a:solidFill>
+          </a:ln>
+          <a:effectLst/>
+        </p:spPr>
+        <p:style>
+          <a:lnRef idx="1">
+            <a:schemeClr val="accent1"/>
+          </a:lnRef>
+          <a:fillRef idx="3">
+            <a:schemeClr val="accent1"/>
+          </a:fillRef>
+          <a:effectRef idx="2">
+            <a:schemeClr val="accent1"/>
+          </a:effectRef>
+          <a:fontRef idx="minor">
+            <a:schemeClr val="lt1"/>
+          </a:fontRef>
+        </p:style>
+        <p:txBody>
+          <a:bodyPr rtlCol="0" anchor="ctr"/>
+          <a:lstStyle/>
+          <a:p>
+            <a:pPr algn="ctr"/>
+          </a:p>
+        </p:txBody>
+      </p:sp>
+      <p:sp>
+        <p:nvSpPr>
+          <p:cNvPr id="77" name="TextBox 76"/>
+          <p:cNvSpPr txBox="1"/>
+          <p:nvPr/>
+        </p:nvSpPr>
+        <p:spPr>
+          <a:xfrm>
+            <a:off x="14017752" y="3840480"/>
+            <a:ext cx="2377440" cy="182880"/>
+          </a:xfrm>
+          <a:prstGeom prst="rect">
+            <a:avLst/>
+          </a:prstGeom>
+          <a:noFill/>
+        </p:spPr>
+        <p:txBody>
+          <a:bodyPr wrap="square" anchor="t" lIns="0" rIns="0" tIns="0" bIns="0">
+            <a:spAutoFit/>
+          </a:bodyPr>
+          <a:lstStyle/>
+          <a:p>
+            <a:pPr algn="l">
+              <a:lnSpc>
+                <a:spcPct val="112000"/>
+              </a:lnSpc>
+            </a:pPr>
+            <a:r>
+              <a:rPr sz="975" b="0">
+                <a:solidFill>
+                  <a:srgbClr val="8A8A8A"/>
+                </a:solidFill>
+                <a:latin typeface="Arial"/>
+                <a:ea typeface="Arial"/>
+              </a:rPr>
+              <a:t>3단계 · 호스트 시스템 공동 설계 (2022~)</a:t>
+            </a:r>
+          </a:p>
+        </p:txBody>
+      </p:sp>
+      <p:sp>
+        <p:nvSpPr>
+          <p:cNvPr id="78" name="TextBox 77"/>
+          <p:cNvSpPr txBox="1"/>
+          <p:nvPr/>
+        </p:nvSpPr>
+        <p:spPr>
+          <a:xfrm>
+            <a:off x="16157448" y="3840480"/>
+            <a:ext cx="1280160" cy="201168"/>
+          </a:xfrm>
+          <a:prstGeom prst="rect">
+            <a:avLst/>
+          </a:prstGeom>
+          <a:noFill/>
+        </p:spPr>
+        <p:txBody>
+          <a:bodyPr wrap="square" anchor="t" lIns="0" rIns="0" tIns="0" bIns="0">
+            <a:spAutoFit/>
+          </a:bodyPr>
+          <a:lstStyle/>
+          <a:p>
+            <a:pPr algn="r">
+              <a:lnSpc>
+                <a:spcPct val="112000"/>
+              </a:lnSpc>
+            </a:pPr>
+            <a:r>
+              <a:rPr sz="975" b="1">
+                <a:solidFill>
+                  <a:srgbClr val="1428A0"/>
+                </a:solidFill>
+                <a:latin typeface="Arial"/>
+                <a:ea typeface="Arial"/>
+              </a:rPr>
+              <a:t>DWPD 요구 충족</a:t>
+            </a:r>
+          </a:p>
+        </p:txBody>
+      </p:sp>
+      <p:sp>
+        <p:nvSpPr>
+          <p:cNvPr id="79" name="TextBox 78"/>
+          <p:cNvSpPr txBox="1"/>
+          <p:nvPr/>
+        </p:nvSpPr>
+        <p:spPr>
+          <a:xfrm>
+            <a:off x="14017752" y="4041648"/>
+            <a:ext cx="3419856" cy="237744"/>
+          </a:xfrm>
+          <a:prstGeom prst="rect">
+            <a:avLst/>
+          </a:prstGeom>
+          <a:noFill/>
+        </p:spPr>
+        <p:txBody>
+          <a:bodyPr wrap="square" anchor="t" lIns="0" rIns="0" tIns="0" bIns="0">
+            <a:spAutoFit/>
+          </a:bodyPr>
+          <a:lstStyle/>
+          <a:p>
+            <a:pPr algn="l">
+              <a:lnSpc>
+                <a:spcPct val="112000"/>
+              </a:lnSpc>
+            </a:pPr>
+            <a:r>
+              <a:rPr sz="1125" b="1">
+                <a:solidFill>
+                  <a:srgbClr val="1428A0"/>
+                </a:solidFill>
+                <a:latin typeface="Arial"/>
+                <a:ea typeface="Arial"/>
+              </a:rPr>
+              <a:t>호스트가 데이터 수명을 지정 → WAF 3.2 → 1.0</a:t>
+            </a:r>
+          </a:p>
+        </p:txBody>
+      </p:sp>
+      <p:sp>
+        <p:nvSpPr>
+          <p:cNvPr id="80" name="TextBox 79"/>
+          <p:cNvSpPr txBox="1"/>
+          <p:nvPr/>
+        </p:nvSpPr>
+        <p:spPr>
+          <a:xfrm>
+            <a:off x="14017752" y="4279392"/>
+            <a:ext cx="3419856" cy="201168"/>
+          </a:xfrm>
+          <a:prstGeom prst="rect">
+            <a:avLst/>
+          </a:prstGeom>
+          <a:noFill/>
+        </p:spPr>
+        <p:txBody>
+          <a:bodyPr wrap="square" anchor="t" lIns="0" rIns="0" tIns="0" bIns="0">
+            <a:spAutoFit/>
+          </a:bodyPr>
+          <a:lstStyle/>
+          <a:p>
+            <a:pPr algn="l">
+              <a:lnSpc>
+                <a:spcPct val="112000"/>
+              </a:lnSpc>
+            </a:pPr>
+            <a:r>
+              <a:rPr sz="850" b="0">
+                <a:solidFill>
+                  <a:srgbClr val="555555"/>
+                </a:solidFill>
+                <a:latin typeface="Arial"/>
+                <a:ea typeface="Arial"/>
+              </a:rPr>
+              <a:t>배치 표준 · 캐시 관리자 정책 · FDE·SCA 공동 설계 = 본 덱 2~5장</a:t>
+            </a:r>
+          </a:p>
+        </p:txBody>
+      </p:sp>
+      <p:pic>
+        <p:nvPicPr>
+          <p:cNvPr id="81" name="Picture 80" descr="ladder_cell_waf.png"/>
+          <p:cNvPicPr>
+            <a:picLocks noChangeAspect="1"/>
+          </p:cNvPicPr>
+          <p:nvPr/>
+        </p:nvPicPr>
+        <p:blipFill>
+          <a:blip r:embed="rId4"/>
+          <a:stretch>
+            <a:fillRect/>
+          </a:stretch>
+        </p:blipFill>
+        <p:spPr>
+          <a:xfrm>
+            <a:off x="14090904" y="4535424"/>
+            <a:ext cx="3273552" cy="1198766"/>
+          </a:xfrm>
+          <a:prstGeom prst="rect">
+            <a:avLst/>
+          </a:prstGeom>
+        </p:spPr>
+      </p:pic>
+      <p:sp>
+        <p:nvSpPr>
+          <p:cNvPr id="82" name="TextBox 81"/>
+          <p:cNvSpPr txBox="1"/>
+          <p:nvPr/>
+        </p:nvSpPr>
+        <p:spPr>
+          <a:xfrm>
+            <a:off x="14017752" y="5870448"/>
+            <a:ext cx="3419856" cy="310896"/>
+          </a:xfrm>
+          <a:prstGeom prst="rect">
+            <a:avLst/>
+          </a:prstGeom>
+          <a:noFill/>
+        </p:spPr>
+        <p:txBody>
+          <a:bodyPr wrap="square" anchor="ctr" lIns="0" rIns="0" tIns="0" bIns="0">
+            <a:spAutoFit/>
+          </a:bodyPr>
+          <a:lstStyle/>
+          <a:p>
+            <a:pPr algn="l">
+              <a:lnSpc>
+                <a:spcPct val="112000"/>
+              </a:lnSpc>
+            </a:pPr>
+            <a:r>
+              <a:rPr sz="975" b="1">
+                <a:solidFill>
+                  <a:srgbClr val="1428A0"/>
+                </a:solidFill>
+                <a:latin typeface="Arial"/>
+                <a:ea typeface="Arial"/>
+              </a:rPr>
+              <a:t>QLC로 요구 DWPD를 충족하는 유일한 경로 · 산식의 귀결</a:t>
+            </a:r>
+          </a:p>
+        </p:txBody>
+      </p:sp>
+      <p:sp>
+        <p:nvSpPr>
+          <p:cNvPr id="83" name="Rectangle 82"/>
+          <p:cNvSpPr/>
+          <p:nvPr/>
+        </p:nvSpPr>
+        <p:spPr>
+          <a:xfrm>
+            <a:off x="2039112" y="6345936"/>
+            <a:ext cx="3675888" cy="2139696"/>
           </a:xfrm>
           <a:prstGeom prst="rect">
             <a:avLst/>
@@ -4572,14 +6955,14 @@
       </p:sp>
       <p:sp>
         <p:nvSpPr>
-          <p:cNvPr id="28" name="TextBox 27"/>
+          <p:cNvPr id="84" name="TextBox 83"/>
           <p:cNvSpPr txBox="1"/>
           <p:nvPr/>
         </p:nvSpPr>
         <p:spPr>
           <a:xfrm>
-            <a:off x="15732667" y="3054096"/>
-            <a:ext cx="932688" cy="420624"/>
+            <a:off x="2167128" y="6473952"/>
+            <a:ext cx="3419856" cy="182880"/>
           </a:xfrm>
           <a:prstGeom prst="rect">
             <a:avLst/>
@@ -4587,39 +6970,39 @@
           <a:noFill/>
         </p:spPr>
         <p:txBody>
-          <a:bodyPr wrap="square" anchor="ctr" lIns="0" rIns="0" tIns="0" bIns="0">
+          <a:bodyPr wrap="square" anchor="t" lIns="0" rIns="0" tIns="0" bIns="0">
             <a:spAutoFit/>
           </a:bodyPr>
           <a:lstStyle/>
           <a:p>
-            <a:pPr algn="ctr">
+            <a:pPr algn="l">
               <a:lnSpc>
                 <a:spcPct val="112000"/>
               </a:lnSpc>
             </a:pPr>
             <a:r>
-              <a:rPr sz="1350" b="1">
-                <a:solidFill>
-                  <a:srgbClr val="1A1A1A"/>
+              <a:rPr sz="975" b="0">
+                <a:solidFill>
+                  <a:srgbClr val="8A8A8A"/>
                 </a:solidFill>
                 <a:latin typeface="Arial"/>
                 <a:ea typeface="Arial"/>
               </a:rPr>
-              <a:t>365 × 년</a:t>
-            </a:r>
-          </a:p>
-        </p:txBody>
-      </p:sp>
-      <p:sp>
-        <p:nvSpPr>
-          <p:cNvPr id="29" name="TextBox 28"/>
+              <a:t>기능 고장률 요구 · JESD218</a:t>
+            </a:r>
+          </a:p>
+        </p:txBody>
+      </p:sp>
+      <p:sp>
+        <p:nvSpPr>
+          <p:cNvPr id="85" name="TextBox 84"/>
           <p:cNvSpPr txBox="1"/>
           <p:nvPr/>
         </p:nvSpPr>
         <p:spPr>
           <a:xfrm>
-            <a:off x="15641227" y="3511296"/>
-            <a:ext cx="1115568" cy="201168"/>
+            <a:off x="2167128" y="6711696"/>
+            <a:ext cx="3419856" cy="548640"/>
           </a:xfrm>
           <a:prstGeom prst="rect">
             <a:avLst/>
@@ -4627,39 +7010,113 @@
           <a:noFill/>
         </p:spPr>
         <p:txBody>
-          <a:bodyPr wrap="square" anchor="t" lIns="0" rIns="0" tIns="0" bIns="0">
+          <a:bodyPr wrap="square" anchor="ctr" lIns="0" rIns="0" tIns="0" bIns="0">
             <a:spAutoFit/>
           </a:bodyPr>
           <a:lstStyle/>
           <a:p>
-            <a:pPr algn="ctr">
+            <a:pPr algn="l">
               <a:lnSpc>
                 <a:spcPct val="112000"/>
               </a:lnSpc>
             </a:pPr>
             <a:r>
-              <a:rPr sz="975" b="0">
-                <a:solidFill>
-                  <a:srgbClr val="8A8A8A"/>
+              <a:rPr sz="3000" b="1">
+                <a:solidFill>
+                  <a:srgbClr val="1428A0"/>
                 </a:solidFill>
                 <a:latin typeface="Arial"/>
                 <a:ea typeface="Arial"/>
               </a:rPr>
-              <a:t>고객 요구</a:t>
-            </a:r>
-          </a:p>
-        </p:txBody>
-      </p:sp>
-      <p:sp>
-        <p:nvSpPr>
-          <p:cNvPr id="30" name="Rectangle 29"/>
+              <a:t>FFR ≤ 3%</a:t>
+            </a:r>
+          </a:p>
+        </p:txBody>
+      </p:sp>
+      <p:sp>
+        <p:nvSpPr>
+          <p:cNvPr id="86" name="TextBox 85"/>
+          <p:cNvSpPr txBox="1"/>
+          <p:nvPr/>
+        </p:nvSpPr>
+        <p:spPr>
+          <a:xfrm>
+            <a:off x="2167128" y="7333488"/>
+            <a:ext cx="3419856" cy="822960"/>
+          </a:xfrm>
+          <a:prstGeom prst="rect">
+            <a:avLst/>
+          </a:prstGeom>
+          <a:noFill/>
+        </p:spPr>
+        <p:txBody>
+          <a:bodyPr wrap="square" anchor="t" lIns="0" rIns="0" tIns="0" bIns="0">
+            <a:spAutoFit/>
+          </a:bodyPr>
+          <a:lstStyle/>
+          <a:p>
+            <a:pPr algn="l">
+              <a:lnSpc>
+                <a:spcPct val="106000"/>
+              </a:lnSpc>
+            </a:pPr>
+            <a:r>
+              <a:rPr sz="975" b="0">
+                <a:solidFill>
+                  <a:srgbClr val="555555"/>
+                </a:solidFill>
+                <a:latin typeface="Arial"/>
+                <a:ea typeface="Arial"/>
+              </a:rPr>
+              <a:t>클라이언트 · 엔터프라이즈 공통 · 고정</a:t>
+            </a:r>
+          </a:p>
+          <a:p>
+            <a:pPr algn="l">
+              <a:lnSpc>
+                <a:spcPct val="106000"/>
+              </a:lnSpc>
+            </a:pPr>
+            <a:r>
+              <a:rPr sz="975" b="1">
+                <a:solidFill>
+                  <a:srgbClr val="1A1A1A"/>
+                </a:solidFill>
+                <a:latin typeface="Arial"/>
+                <a:ea typeface="Arial"/>
+              </a:rPr>
+              <a:t>보호 없는 SSD 고장률 ≈ N × 다이 고장률</a:t>
+            </a:r>
+          </a:p>
+          <a:p>
+            <a:pPr algn="l">
+              <a:lnSpc>
+                <a:spcPct val="106000"/>
+              </a:lnSpc>
+            </a:pPr>
+            <a:r>
+              <a:rPr sz="900" b="0">
+                <a:solidFill>
+                  <a:srgbClr val="555555"/>
+                </a:solidFill>
+                <a:latin typeface="Arial"/>
+                <a:ea typeface="Arial"/>
+              </a:rPr>
+              <a:t>칩 면적이 클수록 수율이 떨어지는 것과 같은 구조</a:t>
+            </a:r>
+          </a:p>
+        </p:txBody>
+      </p:sp>
+      <p:sp>
+        <p:nvSpPr>
+          <p:cNvPr id="87" name="Rectangle 86"/>
           <p:cNvSpPr/>
           <p:nvPr/>
         </p:nvSpPr>
         <p:spPr>
           <a:xfrm>
-            <a:off x="9711759" y="3968496"/>
-            <a:ext cx="7853864" cy="3529583"/>
+            <a:off x="5989320" y="6345936"/>
+            <a:ext cx="3675888" cy="2139696"/>
           </a:xfrm>
           <a:prstGeom prst="rect">
             <a:avLst/>
@@ -4696,16 +7153,124 @@
           </a:p>
         </p:txBody>
       </p:sp>
-      <p:sp>
-        <p:nvSpPr>
-          <p:cNvPr id="31" name="TextBox 30"/>
+      <p:pic>
+        <p:nvPicPr>
+          <p:cNvPr id="88" name="Picture 87" descr="ladder_cell_dies.png"/>
+          <p:cNvPicPr>
+            <a:picLocks noChangeAspect="1"/>
+          </p:cNvPicPr>
+          <p:nvPr/>
+        </p:nvPicPr>
+        <p:blipFill>
+          <a:blip r:embed="rId5"/>
+          <a:stretch>
+            <a:fillRect/>
+          </a:stretch>
+        </p:blipFill>
+        <p:spPr>
+          <a:xfrm>
+            <a:off x="6080760" y="6437376"/>
+            <a:ext cx="3493008" cy="1433352"/>
+          </a:xfrm>
+          <a:prstGeom prst="rect">
+            <a:avLst/>
+          </a:prstGeom>
+        </p:spPr>
+      </p:pic>
+      <p:sp>
+        <p:nvSpPr>
+          <p:cNvPr id="89" name="TextBox 88"/>
           <p:cNvSpPr txBox="1"/>
           <p:nvPr/>
         </p:nvSpPr>
         <p:spPr>
           <a:xfrm>
-            <a:off x="9949503" y="4078224"/>
-            <a:ext cx="7378376" cy="256032"/>
+            <a:off x="6117336" y="8010144"/>
+            <a:ext cx="3419856" cy="420624"/>
+          </a:xfrm>
+          <a:prstGeom prst="rect">
+            <a:avLst/>
+          </a:prstGeom>
+          <a:noFill/>
+        </p:spPr>
+        <p:txBody>
+          <a:bodyPr wrap="square" anchor="t" lIns="0" rIns="0" tIns="0" bIns="0">
+            <a:spAutoFit/>
+          </a:bodyPr>
+          <a:lstStyle/>
+          <a:p>
+            <a:pPr algn="l">
+              <a:lnSpc>
+                <a:spcPct val="100000"/>
+              </a:lnSpc>
+            </a:pPr>
+            <a:r>
+              <a:rPr sz="850" b="0">
+                <a:solidFill>
+                  <a:srgbClr val="555555"/>
+                </a:solidFill>
+                <a:latin typeface="Arial"/>
+                <a:ea typeface="Arial"/>
+              </a:rPr>
+              <a:t>다이 수 8배 ↑ → 같은 FFR을 지키려면 다이 고장률 8배 ↓ 또는 다이 고장 허용 필요 · 다이 고장률 개선은 기술적 한계</a:t>
+            </a:r>
+          </a:p>
+        </p:txBody>
+      </p:sp>
+      <p:sp>
+        <p:nvSpPr>
+          <p:cNvPr id="90" name="Rectangle 89"/>
+          <p:cNvSpPr/>
+          <p:nvPr/>
+        </p:nvSpPr>
+        <p:spPr>
+          <a:xfrm>
+            <a:off x="9939528" y="6345936"/>
+            <a:ext cx="3675888" cy="2139696"/>
+          </a:xfrm>
+          <a:prstGeom prst="rect">
+            <a:avLst/>
+          </a:prstGeom>
+          <a:solidFill>
+            <a:srgbClr val="AAB8E8"/>
+          </a:solidFill>
+          <a:ln>
+            <a:noFill/>
+          </a:ln>
+          <a:effectLst/>
+        </p:spPr>
+        <p:style>
+          <a:lnRef idx="1">
+            <a:schemeClr val="accent1"/>
+          </a:lnRef>
+          <a:fillRef idx="3">
+            <a:schemeClr val="accent1"/>
+          </a:fillRef>
+          <a:effectRef idx="2">
+            <a:schemeClr val="accent1"/>
+          </a:effectRef>
+          <a:fontRef idx="minor">
+            <a:schemeClr val="lt1"/>
+          </a:fontRef>
+        </p:style>
+        <p:txBody>
+          <a:bodyPr rtlCol="0" anchor="ctr"/>
+          <a:lstStyle/>
+          <a:p>
+            <a:pPr algn="ctr"/>
+          </a:p>
+        </p:txBody>
+      </p:sp>
+      <p:sp>
+        <p:nvSpPr>
+          <p:cNvPr id="91" name="TextBox 90"/>
+          <p:cNvSpPr txBox="1"/>
+          <p:nvPr/>
+        </p:nvSpPr>
+        <p:spPr>
+          <a:xfrm>
+            <a:off x="10067544" y="6455664"/>
+            <a:ext cx="2377440" cy="182880"/>
           </a:xfrm>
           <a:prstGeom prst="rect">
             <a:avLst/>
@@ -4724,28 +7289,68 @@
               </a:lnSpc>
             </a:pPr>
             <a:r>
-              <a:rPr sz="1500" b="1">
-                <a:solidFill>
-                  <a:srgbClr val="1428A0"/>
+              <a:rPr sz="975" b="0">
+                <a:solidFill>
+                  <a:srgbClr val="1A1A1A"/>
                 </a:solidFill>
                 <a:latin typeface="Arial"/>
                 <a:ea typeface="Arial"/>
               </a:rPr>
-              <a:t>이관의 3단계 — 요구 고정 · 단품 지표 악화 · 보상 계층의 상승</a:t>
-            </a:r>
-          </a:p>
-        </p:txBody>
-      </p:sp>
-      <p:sp>
-        <p:nvSpPr>
-          <p:cNvPr id="32" name="TextBox 31"/>
+              <a:t>현재 해법 · SSD 내부</a:t>
+            </a:r>
+          </a:p>
+        </p:txBody>
+      </p:sp>
+      <p:sp>
+        <p:nvSpPr>
+          <p:cNvPr id="92" name="TextBox 91"/>
           <p:cNvSpPr txBox="1"/>
           <p:nvPr/>
         </p:nvSpPr>
         <p:spPr>
           <a:xfrm>
-            <a:off x="9949503" y="4425696"/>
-            <a:ext cx="5000936" cy="219456"/>
+            <a:off x="12207240" y="6455664"/>
+            <a:ext cx="1280160" cy="201168"/>
+          </a:xfrm>
+          <a:prstGeom prst="rect">
+            <a:avLst/>
+          </a:prstGeom>
+          <a:noFill/>
+        </p:spPr>
+        <p:txBody>
+          <a:bodyPr wrap="square" anchor="t" lIns="0" rIns="0" tIns="0" bIns="0">
+            <a:spAutoFit/>
+          </a:bodyPr>
+          <a:lstStyle/>
+          <a:p>
+            <a:pPr algn="r">
+              <a:lnSpc>
+                <a:spcPct val="112000"/>
+              </a:lnSpc>
+            </a:pPr>
+            <a:r>
+              <a:rPr sz="975" b="1">
+                <a:solidFill>
+                  <a:srgbClr val="8A8A8A"/>
+                </a:solidFill>
+                <a:latin typeface="Arial"/>
+                <a:ea typeface="Arial"/>
+              </a:rPr>
+              <a:t>오버헤드 ↑</a:t>
+            </a:r>
+          </a:p>
+        </p:txBody>
+      </p:sp>
+      <p:sp>
+        <p:nvSpPr>
+          <p:cNvPr id="93" name="TextBox 92"/>
+          <p:cNvSpPr txBox="1"/>
+          <p:nvPr/>
+        </p:nvSpPr>
+        <p:spPr>
+          <a:xfrm>
+            <a:off x="10067544" y="6675120"/>
+            <a:ext cx="3419856" cy="237744"/>
           </a:xfrm>
           <a:prstGeom prst="rect">
             <a:avLst/>
@@ -4764,236 +7369,30 @@
               </a:lnSpc>
             </a:pPr>
             <a:r>
-              <a:rPr sz="1125" b="1">
+              <a:rPr sz="1275" b="1">
                 <a:solidFill>
                   <a:srgbClr val="1A1A1A"/>
                 </a:solidFill>
                 <a:latin typeface="Arial"/>
                 <a:ea typeface="Arial"/>
               </a:rPr>
-              <a:t>1단계  NAND → SSD  (1991~)</a:t>
-            </a:r>
-          </a:p>
-        </p:txBody>
-      </p:sp>
-      <p:sp>
-        <p:nvSpPr>
-          <p:cNvPr id="33" name="TextBox 32"/>
-          <p:cNvSpPr txBox="1"/>
-          <p:nvPr/>
-        </p:nvSpPr>
-        <p:spPr>
-          <a:xfrm>
-            <a:off x="14950439" y="4425696"/>
-            <a:ext cx="2377440" cy="219456"/>
-          </a:xfrm>
-          <a:prstGeom prst="rect">
-            <a:avLst/>
-          </a:prstGeom>
-          <a:noFill/>
-        </p:spPr>
-        <p:txBody>
-          <a:bodyPr wrap="square" anchor="t" lIns="0" rIns="0" tIns="0" bIns="0">
-            <a:spAutoFit/>
-          </a:bodyPr>
-          <a:lstStyle/>
-          <a:p>
-            <a:pPr algn="r">
-              <a:lnSpc>
-                <a:spcPct val="112000"/>
-              </a:lnSpc>
-            </a:pPr>
-            <a:r>
-              <a:rPr sz="1050" b="1">
-                <a:solidFill>
-                  <a:srgbClr val="1428A0"/>
-                </a:solidFill>
-                <a:latin typeface="Arial"/>
-                <a:ea typeface="Arial"/>
-              </a:rPr>
-              <a:t>UBER 요구 충족</a:t>
-            </a:r>
-          </a:p>
-        </p:txBody>
-      </p:sp>
-      <p:sp>
-        <p:nvSpPr>
-          <p:cNvPr id="34" name="Rectangle 33"/>
+              <a:t>다이 RAID · 여분 다이 · 다이 은퇴</a:t>
+            </a:r>
+          </a:p>
+        </p:txBody>
+      </p:sp>
+      <p:sp>
+        <p:nvSpPr>
+          <p:cNvPr id="94" name="Rectangle 93"/>
           <p:cNvSpPr/>
           <p:nvPr/>
         </p:nvSpPr>
         <p:spPr>
           <a:xfrm>
-            <a:off x="9949503" y="4700016"/>
-            <a:ext cx="2252194" cy="676656"/>
-          </a:xfrm>
-          <a:prstGeom prst="rect">
-            <a:avLst/>
-          </a:prstGeom>
-          <a:solidFill>
-            <a:srgbClr val="FFFFFF"/>
-          </a:solidFill>
-          <a:ln w="9525">
-            <a:solidFill>
-              <a:srgbClr val="D9D9D9"/>
-            </a:solidFill>
-          </a:ln>
-          <a:effectLst/>
-        </p:spPr>
-        <p:style>
-          <a:lnRef idx="1">
-            <a:schemeClr val="accent1"/>
-          </a:lnRef>
-          <a:fillRef idx="3">
-            <a:schemeClr val="accent1"/>
-          </a:fillRef>
-          <a:effectRef idx="2">
-            <a:schemeClr val="accent1"/>
-          </a:effectRef>
-          <a:fontRef idx="minor">
-            <a:schemeClr val="lt1"/>
-          </a:fontRef>
-        </p:style>
-        <p:txBody>
-          <a:bodyPr rtlCol="0" anchor="ctr"/>
-          <a:lstStyle/>
-          <a:p>
-            <a:pPr algn="ctr"/>
-          </a:p>
-        </p:txBody>
-      </p:sp>
-      <p:sp>
-        <p:nvSpPr>
-          <p:cNvPr id="35" name="TextBox 34"/>
-          <p:cNvSpPr txBox="1"/>
-          <p:nvPr/>
-        </p:nvSpPr>
-        <p:spPr>
-          <a:xfrm>
-            <a:off x="10040943" y="4754879"/>
-            <a:ext cx="2069314" cy="201168"/>
-          </a:xfrm>
-          <a:prstGeom prst="rect">
-            <a:avLst/>
-          </a:prstGeom>
-          <a:noFill/>
-        </p:spPr>
-        <p:txBody>
-          <a:bodyPr wrap="square" anchor="t" lIns="0" rIns="0" tIns="0" bIns="0">
-            <a:spAutoFit/>
-          </a:bodyPr>
-          <a:lstStyle/>
-          <a:p>
-            <a:pPr algn="l">
-              <a:lnSpc>
-                <a:spcPct val="112000"/>
-              </a:lnSpc>
-            </a:pPr>
-            <a:r>
-              <a:rPr sz="975" b="0">
-                <a:solidFill>
-                  <a:srgbClr val="8A8A8A"/>
-                </a:solidFill>
-                <a:latin typeface="Arial"/>
-                <a:ea typeface="Arial"/>
-              </a:rPr>
-              <a:t>셀</a:t>
-            </a:r>
-          </a:p>
-        </p:txBody>
-      </p:sp>
-      <p:sp>
-        <p:nvSpPr>
-          <p:cNvPr id="36" name="TextBox 35"/>
-          <p:cNvSpPr txBox="1"/>
-          <p:nvPr/>
-        </p:nvSpPr>
-        <p:spPr>
-          <a:xfrm>
-            <a:off x="10040943" y="4946904"/>
-            <a:ext cx="2069314" cy="237744"/>
-          </a:xfrm>
-          <a:prstGeom prst="rect">
-            <a:avLst/>
-          </a:prstGeom>
-          <a:noFill/>
-        </p:spPr>
-        <p:txBody>
-          <a:bodyPr wrap="square" anchor="t" lIns="0" rIns="0" tIns="0" bIns="0">
-            <a:spAutoFit/>
-          </a:bodyPr>
-          <a:lstStyle/>
-          <a:p>
-            <a:pPr algn="l">
-              <a:lnSpc>
-                <a:spcPct val="112000"/>
-              </a:lnSpc>
-            </a:pPr>
-            <a:r>
-              <a:rPr sz="1200" b="1">
-                <a:solidFill>
-                  <a:srgbClr val="1A1A1A"/>
-                </a:solidFill>
-                <a:latin typeface="Arial"/>
-                <a:ea typeface="Arial"/>
-              </a:rPr>
-              <a:t>RBER 백만 배 ↑</a:t>
-            </a:r>
-          </a:p>
-        </p:txBody>
-      </p:sp>
-      <p:sp>
-        <p:nvSpPr>
-          <p:cNvPr id="37" name="TextBox 36"/>
-          <p:cNvSpPr txBox="1"/>
-          <p:nvPr/>
-        </p:nvSpPr>
-        <p:spPr>
-          <a:xfrm>
-            <a:off x="10040943" y="5157216"/>
-            <a:ext cx="2069314" cy="201168"/>
-          </a:xfrm>
-          <a:prstGeom prst="rect">
-            <a:avLst/>
-          </a:prstGeom>
-          <a:noFill/>
-        </p:spPr>
-        <p:txBody>
-          <a:bodyPr wrap="square" anchor="t" lIns="0" rIns="0" tIns="0" bIns="0">
-            <a:spAutoFit/>
-          </a:bodyPr>
-          <a:lstStyle/>
-          <a:p>
-            <a:pPr algn="l">
-              <a:lnSpc>
-                <a:spcPct val="100000"/>
-              </a:lnSpc>
-            </a:pPr>
-            <a:r>
-              <a:rPr sz="875" b="0">
-                <a:solidFill>
-                  <a:srgbClr val="555555"/>
-                </a:solidFill>
-                <a:latin typeface="Arial"/>
-                <a:ea typeface="Arial"/>
-              </a:rPr>
-              <a:t>산포가 시간에 따라 변화</a:t>
-            </a:r>
-          </a:p>
-        </p:txBody>
-      </p:sp>
-      <p:sp>
-        <p:nvSpPr>
-          <p:cNvPr id="38" name="Right Arrow 37"/>
-          <p:cNvSpPr/>
-          <p:nvPr/>
-        </p:nvSpPr>
-        <p:spPr>
-          <a:xfrm>
-            <a:off x="12247418" y="4946904"/>
-            <a:ext cx="219456" cy="182880"/>
-          </a:xfrm>
-          <a:prstGeom prst="rightArrow">
+            <a:off x="10067544" y="7077456"/>
+            <a:ext cx="109728" cy="109728"/>
+          </a:xfrm>
+          <a:prstGeom prst="rect">
             <a:avLst/>
           </a:prstGeom>
           <a:solidFill>
@@ -5028,14 +7427,64 @@
       </p:sp>
       <p:sp>
         <p:nvSpPr>
-          <p:cNvPr id="39" name="Rectangle 38"/>
+          <p:cNvPr id="95" name="TextBox 94"/>
+          <p:cNvSpPr txBox="1"/>
+          <p:nvPr/>
+        </p:nvSpPr>
+        <p:spPr>
+          <a:xfrm>
+            <a:off x="10268712" y="7004304"/>
+            <a:ext cx="3218688" cy="384048"/>
+          </a:xfrm>
+          <a:prstGeom prst="rect">
+            <a:avLst/>
+          </a:prstGeom>
+          <a:noFill/>
+        </p:spPr>
+        <p:txBody>
+          <a:bodyPr wrap="square" anchor="t" lIns="0" rIns="0" tIns="0" bIns="0">
+            <a:spAutoFit/>
+          </a:bodyPr>
+          <a:lstStyle/>
+          <a:p>
+            <a:pPr algn="l">
+              <a:lnSpc>
+                <a:spcPct val="100000"/>
+              </a:lnSpc>
+            </a:pPr>
+            <a:r>
+              <a:rPr sz="975" b="1">
+                <a:solidFill>
+                  <a:srgbClr val="1A1A1A"/>
+                </a:solidFill>
+                <a:latin typeface="Arial"/>
+                <a:ea typeface="Arial"/>
+              </a:rPr>
+              <a:t>다이 패리티  </a:t>
+            </a:r>
+            <a:r>
+              <a:rPr sz="900" b="0">
+                <a:solidFill>
+                  <a:srgbClr val="555555"/>
+                </a:solidFill>
+                <a:latin typeface="Arial"/>
+                <a:ea typeface="Arial"/>
+              </a:rPr>
+              <a:t>슈퍼페이지 XOR 패리티 다이 (Micron RAIN)</a:t>
+            </a:r>
+          </a:p>
+        </p:txBody>
+      </p:sp>
+      <p:sp>
+        <p:nvSpPr>
+          <p:cNvPr id="96" name="Rectangle 95"/>
           <p:cNvSpPr/>
           <p:nvPr/>
         </p:nvSpPr>
         <p:spPr>
           <a:xfrm>
-            <a:off x="12512594" y="4700016"/>
-            <a:ext cx="2252194" cy="676656"/>
+            <a:off x="10067544" y="7534656"/>
+            <a:ext cx="109728" cy="109728"/>
           </a:xfrm>
           <a:prstGeom prst="rect">
             <a:avLst/>
@@ -5072,94 +7521,14 @@
       </p:sp>
       <p:sp>
         <p:nvSpPr>
-          <p:cNvPr id="40" name="TextBox 39"/>
+          <p:cNvPr id="97" name="TextBox 96"/>
           <p:cNvSpPr txBox="1"/>
           <p:nvPr/>
         </p:nvSpPr>
         <p:spPr>
           <a:xfrm>
-            <a:off x="12604034" y="4754879"/>
-            <a:ext cx="2069314" cy="201168"/>
-          </a:xfrm>
-          <a:prstGeom prst="rect">
-            <a:avLst/>
-          </a:prstGeom>
-          <a:noFill/>
-        </p:spPr>
-        <p:txBody>
-          <a:bodyPr wrap="square" anchor="t" lIns="0" rIns="0" tIns="0" bIns="0">
-            <a:spAutoFit/>
-          </a:bodyPr>
-          <a:lstStyle/>
-          <a:p>
-            <a:pPr algn="l">
-              <a:lnSpc>
-                <a:spcPct val="112000"/>
-              </a:lnSpc>
-            </a:pPr>
-            <a:r>
-              <a:rPr sz="975" b="0">
-                <a:solidFill>
-                  <a:srgbClr val="FFFFFF"/>
-                </a:solidFill>
-                <a:latin typeface="Arial"/>
-                <a:ea typeface="Arial"/>
-              </a:rPr>
-              <a:t>컨트롤러</a:t>
-            </a:r>
-          </a:p>
-        </p:txBody>
-      </p:sp>
-      <p:sp>
-        <p:nvSpPr>
-          <p:cNvPr id="41" name="TextBox 40"/>
-          <p:cNvSpPr txBox="1"/>
-          <p:nvPr/>
-        </p:nvSpPr>
-        <p:spPr>
-          <a:xfrm>
-            <a:off x="12604034" y="4946904"/>
-            <a:ext cx="2069314" cy="237744"/>
-          </a:xfrm>
-          <a:prstGeom prst="rect">
-            <a:avLst/>
-          </a:prstGeom>
-          <a:noFill/>
-        </p:spPr>
-        <p:txBody>
-          <a:bodyPr wrap="square" anchor="t" lIns="0" rIns="0" tIns="0" bIns="0">
-            <a:spAutoFit/>
-          </a:bodyPr>
-          <a:lstStyle/>
-          <a:p>
-            <a:pPr algn="l">
-              <a:lnSpc>
-                <a:spcPct val="112000"/>
-              </a:lnSpc>
-            </a:pPr>
-            <a:r>
-              <a:rPr sz="1200" b="1">
-                <a:solidFill>
-                  <a:srgbClr val="FFFFFF"/>
-                </a:solidFill>
-                <a:latin typeface="Arial"/>
-                <a:ea typeface="Arial"/>
-              </a:rPr>
-              <a:t>ECC 60배 ↑</a:t>
-            </a:r>
-          </a:p>
-        </p:txBody>
-      </p:sp>
-      <p:sp>
-        <p:nvSpPr>
-          <p:cNvPr id="42" name="TextBox 41"/>
-          <p:cNvSpPr txBox="1"/>
-          <p:nvPr/>
-        </p:nvSpPr>
-        <p:spPr>
-          <a:xfrm>
-            <a:off x="12604034" y="5157216"/>
-            <a:ext cx="2069314" cy="201168"/>
+            <a:off x="10268712" y="7461504"/>
+            <a:ext cx="3218688" cy="384048"/>
           </a:xfrm>
           <a:prstGeom prst="rect">
             <a:avLst/>
@@ -5178,30 +7547,40 @@
               </a:lnSpc>
             </a:pPr>
             <a:r>
-              <a:rPr sz="875" b="0">
-                <a:solidFill>
-                  <a:srgbClr val="FFFFFF"/>
+              <a:rPr sz="975" b="1">
+                <a:solidFill>
+                  <a:srgbClr val="1A1A1A"/>
                 </a:solidFill>
                 <a:latin typeface="Arial"/>
                 <a:ea typeface="Arial"/>
               </a:rPr>
-              <a:t>1bit/512B → LDPC 120bit/KB</a:t>
-            </a:r>
-          </a:p>
-        </p:txBody>
-      </p:sp>
-      <p:sp>
-        <p:nvSpPr>
-          <p:cNvPr id="43" name="Right Arrow 42"/>
+              <a:t>여분 다이 · 은퇴  </a:t>
+            </a:r>
+            <a:r>
+              <a:rPr sz="900" b="0">
+                <a:solidFill>
+                  <a:srgbClr val="555555"/>
+                </a:solidFill>
+                <a:latin typeface="Arial"/>
+                <a:ea typeface="Arial"/>
+              </a:rPr>
+              <a:t>삼성 Fail-in-Place(PM1733): 고장 다이 제외, 4~8GB 감량 운영</a:t>
+            </a:r>
+          </a:p>
+        </p:txBody>
+      </p:sp>
+      <p:sp>
+        <p:nvSpPr>
+          <p:cNvPr id="98" name="Rectangle 97"/>
           <p:cNvSpPr/>
           <p:nvPr/>
         </p:nvSpPr>
         <p:spPr>
           <a:xfrm>
-            <a:off x="14810509" y="4946904"/>
-            <a:ext cx="219456" cy="182880"/>
-          </a:xfrm>
-          <a:prstGeom prst="rightArrow">
+            <a:off x="10067544" y="7991856"/>
+            <a:ext cx="109728" cy="109728"/>
+          </a:xfrm>
+          <a:prstGeom prst="rect">
             <a:avLst/>
           </a:prstGeom>
           <a:solidFill>
@@ -5236,140 +7615,14 @@
       </p:sp>
       <p:sp>
         <p:nvSpPr>
-          <p:cNvPr id="44" name="Rectangle 43"/>
-          <p:cNvSpPr/>
-          <p:nvPr/>
-        </p:nvSpPr>
-        <p:spPr>
-          <a:xfrm>
-            <a:off x="15075685" y="4700016"/>
-            <a:ext cx="2252194" cy="676656"/>
-          </a:xfrm>
-          <a:prstGeom prst="rect">
-            <a:avLst/>
-          </a:prstGeom>
-          <a:solidFill>
-            <a:srgbClr val="F4F6FC"/>
-          </a:solidFill>
-          <a:ln w="12700">
-            <a:solidFill>
-              <a:srgbClr val="AAB8E8"/>
-            </a:solidFill>
-          </a:ln>
-          <a:effectLst/>
-        </p:spPr>
-        <p:style>
-          <a:lnRef idx="1">
-            <a:schemeClr val="accent1"/>
-          </a:lnRef>
-          <a:fillRef idx="3">
-            <a:schemeClr val="accent1"/>
-          </a:fillRef>
-          <a:effectRef idx="2">
-            <a:schemeClr val="accent1"/>
-          </a:effectRef>
-          <a:fontRef idx="minor">
-            <a:schemeClr val="lt1"/>
-          </a:fontRef>
-        </p:style>
-        <p:txBody>
-          <a:bodyPr rtlCol="0" anchor="ctr"/>
-          <a:lstStyle/>
-          <a:p>
-            <a:pPr algn="ctr"/>
-          </a:p>
-        </p:txBody>
-      </p:sp>
-      <p:sp>
-        <p:nvSpPr>
-          <p:cNvPr id="45" name="TextBox 44"/>
+          <p:cNvPr id="99" name="TextBox 98"/>
           <p:cNvSpPr txBox="1"/>
           <p:nvPr/>
         </p:nvSpPr>
         <p:spPr>
           <a:xfrm>
-            <a:off x="15167125" y="4754879"/>
-            <a:ext cx="2069314" cy="201168"/>
-          </a:xfrm>
-          <a:prstGeom prst="rect">
-            <a:avLst/>
-          </a:prstGeom>
-          <a:noFill/>
-        </p:spPr>
-        <p:txBody>
-          <a:bodyPr wrap="square" anchor="t" lIns="0" rIns="0" tIns="0" bIns="0">
-            <a:spAutoFit/>
-          </a:bodyPr>
-          <a:lstStyle/>
-          <a:p>
-            <a:pPr algn="l">
-              <a:lnSpc>
-                <a:spcPct val="112000"/>
-              </a:lnSpc>
-            </a:pPr>
-            <a:r>
-              <a:rPr sz="975" b="0">
-                <a:solidFill>
-                  <a:srgbClr val="8A8A8A"/>
-                </a:solidFill>
-                <a:latin typeface="Arial"/>
-                <a:ea typeface="Arial"/>
-              </a:rPr>
-              <a:t>고객</a:t>
-            </a:r>
-          </a:p>
-        </p:txBody>
-      </p:sp>
-      <p:sp>
-        <p:nvSpPr>
-          <p:cNvPr id="46" name="TextBox 45"/>
-          <p:cNvSpPr txBox="1"/>
-          <p:nvPr/>
-        </p:nvSpPr>
-        <p:spPr>
-          <a:xfrm>
-            <a:off x="15167125" y="4946904"/>
-            <a:ext cx="2069314" cy="237744"/>
-          </a:xfrm>
-          <a:prstGeom prst="rect">
-            <a:avLst/>
-          </a:prstGeom>
-          <a:noFill/>
-        </p:spPr>
-        <p:txBody>
-          <a:bodyPr wrap="square" anchor="t" lIns="0" rIns="0" tIns="0" bIns="0">
-            <a:spAutoFit/>
-          </a:bodyPr>
-          <a:lstStyle/>
-          <a:p>
-            <a:pPr algn="l">
-              <a:lnSpc>
-                <a:spcPct val="112000"/>
-              </a:lnSpc>
-            </a:pPr>
-            <a:r>
-              <a:rPr sz="1200" b="1">
-                <a:solidFill>
-                  <a:srgbClr val="1A1A1A"/>
-                </a:solidFill>
-                <a:latin typeface="Arial"/>
-                <a:ea typeface="Arial"/>
-              </a:rPr>
-              <a:t>UBER 요구 충족</a:t>
-            </a:r>
-          </a:p>
-        </p:txBody>
-      </p:sp>
-      <p:sp>
-        <p:nvSpPr>
-          <p:cNvPr id="47" name="TextBox 46"/>
-          <p:cNvSpPr txBox="1"/>
-          <p:nvPr/>
-        </p:nvSpPr>
-        <p:spPr>
-          <a:xfrm>
-            <a:off x="15167125" y="5157216"/>
-            <a:ext cx="2069314" cy="201168"/>
+            <a:off x="10268712" y="7918704"/>
+            <a:ext cx="3218688" cy="384048"/>
           </a:xfrm>
           <a:prstGeom prst="rect">
             <a:avLst/>
@@ -5388,2200 +7641,25 @@
               </a:lnSpc>
             </a:pPr>
             <a:r>
-              <a:rPr sz="875" b="0">
-                <a:solidFill>
-                  <a:srgbClr val="555555"/>
+              <a:rPr sz="975" b="1">
+                <a:solidFill>
+                  <a:srgbClr val="1A1A1A"/>
                 </a:solidFill>
                 <a:latin typeface="Arial"/>
                 <a:ea typeface="Arial"/>
               </a:rPr>
-              <a:t>JESD218 유지</a:t>
-            </a:r>
-          </a:p>
-        </p:txBody>
-      </p:sp>
-      <p:sp>
-        <p:nvSpPr>
-          <p:cNvPr id="48" name="TextBox 47"/>
-          <p:cNvSpPr txBox="1"/>
-          <p:nvPr/>
-        </p:nvSpPr>
-        <p:spPr>
-          <a:xfrm>
-            <a:off x="9949503" y="5495544"/>
-            <a:ext cx="5000936" cy="219456"/>
-          </a:xfrm>
-          <a:prstGeom prst="rect">
-            <a:avLst/>
-          </a:prstGeom>
-          <a:noFill/>
-        </p:spPr>
-        <p:txBody>
-          <a:bodyPr wrap="square" anchor="t" lIns="0" rIns="0" tIns="0" bIns="0">
-            <a:spAutoFit/>
-          </a:bodyPr>
-          <a:lstStyle/>
-          <a:p>
-            <a:pPr algn="l">
-              <a:lnSpc>
-                <a:spcPct val="112000"/>
-              </a:lnSpc>
-            </a:pPr>
-            <a:r>
-              <a:rPr sz="1125" b="1">
-                <a:solidFill>
-                  <a:srgbClr val="1A1A1A"/>
+              <a:t>비용  </a:t>
+            </a:r>
+            <a:r>
+              <a:rPr sz="900" b="0">
+                <a:solidFill>
+                  <a:srgbClr val="555555"/>
                 </a:solidFill>
                 <a:latin typeface="Arial"/>
                 <a:ea typeface="Arial"/>
               </a:rPr>
-              <a:t>2단계  SSD 단독 워크로드 최적화  (2014~2019)</a:t>
-            </a:r>
-          </a:p>
-        </p:txBody>
-      </p:sp>
-      <p:sp>
-        <p:nvSpPr>
-          <p:cNvPr id="49" name="TextBox 48"/>
-          <p:cNvSpPr txBox="1"/>
-          <p:nvPr/>
-        </p:nvSpPr>
-        <p:spPr>
-          <a:xfrm>
-            <a:off x="14950439" y="5495544"/>
-            <a:ext cx="2377440" cy="219456"/>
-          </a:xfrm>
-          <a:prstGeom prst="rect">
-            <a:avLst/>
-          </a:prstGeom>
-          <a:noFill/>
-        </p:spPr>
-        <p:txBody>
-          <a:bodyPr wrap="square" anchor="t" lIns="0" rIns="0" tIns="0" bIns="0">
-            <a:spAutoFit/>
-          </a:bodyPr>
-          <a:lstStyle/>
-          <a:p>
-            <a:pPr algn="r">
-              <a:lnSpc>
-                <a:spcPct val="112000"/>
-              </a:lnSpc>
-            </a:pPr>
-            <a:r>
-              <a:rPr sz="1050" b="1">
-                <a:solidFill>
-                  <a:srgbClr val="8A8A8A"/>
-                </a:solidFill>
-                <a:latin typeface="Arial"/>
-                <a:ea typeface="Arial"/>
-              </a:rPr>
-              <a:t>DWPD 요구 미충족 · 부분 성공</a:t>
-            </a:r>
-          </a:p>
-        </p:txBody>
-      </p:sp>
-      <p:sp>
-        <p:nvSpPr>
-          <p:cNvPr id="50" name="Rectangle 49"/>
-          <p:cNvSpPr/>
-          <p:nvPr/>
-        </p:nvSpPr>
-        <p:spPr>
-          <a:xfrm>
-            <a:off x="9949503" y="5769864"/>
-            <a:ext cx="2252194" cy="676656"/>
-          </a:xfrm>
-          <a:prstGeom prst="rect">
-            <a:avLst/>
-          </a:prstGeom>
-          <a:solidFill>
-            <a:srgbClr val="FFFFFF"/>
-          </a:solidFill>
-          <a:ln w="9525">
-            <a:solidFill>
-              <a:srgbClr val="D9D9D9"/>
-            </a:solidFill>
-          </a:ln>
-          <a:effectLst/>
-        </p:spPr>
-        <p:style>
-          <a:lnRef idx="1">
-            <a:schemeClr val="accent1"/>
-          </a:lnRef>
-          <a:fillRef idx="3">
-            <a:schemeClr val="accent1"/>
-          </a:fillRef>
-          <a:effectRef idx="2">
-            <a:schemeClr val="accent1"/>
-          </a:effectRef>
-          <a:fontRef idx="minor">
-            <a:schemeClr val="lt1"/>
-          </a:fontRef>
-        </p:style>
-        <p:txBody>
-          <a:bodyPr rtlCol="0" anchor="ctr"/>
-          <a:lstStyle/>
-          <a:p>
-            <a:pPr algn="ctr"/>
-          </a:p>
-        </p:txBody>
-      </p:sp>
-      <p:sp>
-        <p:nvSpPr>
-          <p:cNvPr id="51" name="TextBox 50"/>
-          <p:cNvSpPr txBox="1"/>
-          <p:nvPr/>
-        </p:nvSpPr>
-        <p:spPr>
-          <a:xfrm>
-            <a:off x="10040943" y="5824727"/>
-            <a:ext cx="2069314" cy="201168"/>
-          </a:xfrm>
-          <a:prstGeom prst="rect">
-            <a:avLst/>
-          </a:prstGeom>
-          <a:noFill/>
-        </p:spPr>
-        <p:txBody>
-          <a:bodyPr wrap="square" anchor="t" lIns="0" rIns="0" tIns="0" bIns="0">
-            <a:spAutoFit/>
-          </a:bodyPr>
-          <a:lstStyle/>
-          <a:p>
-            <a:pPr algn="l">
-              <a:lnSpc>
-                <a:spcPct val="112000"/>
-              </a:lnSpc>
-            </a:pPr>
-            <a:r>
-              <a:rPr sz="975" b="0">
-                <a:solidFill>
-                  <a:srgbClr val="8A8A8A"/>
-                </a:solidFill>
-                <a:latin typeface="Arial"/>
-                <a:ea typeface="Arial"/>
-              </a:rPr>
-              <a:t>셀 · SSD</a:t>
-            </a:r>
-          </a:p>
-        </p:txBody>
-      </p:sp>
-      <p:sp>
-        <p:nvSpPr>
-          <p:cNvPr id="52" name="TextBox 51"/>
-          <p:cNvSpPr txBox="1"/>
-          <p:nvPr/>
-        </p:nvSpPr>
-        <p:spPr>
-          <a:xfrm>
-            <a:off x="10040943" y="6016752"/>
-            <a:ext cx="2069314" cy="237744"/>
-          </a:xfrm>
-          <a:prstGeom prst="rect">
-            <a:avLst/>
-          </a:prstGeom>
-          <a:noFill/>
-        </p:spPr>
-        <p:txBody>
-          <a:bodyPr wrap="square" anchor="t" lIns="0" rIns="0" tIns="0" bIns="0">
-            <a:spAutoFit/>
-          </a:bodyPr>
-          <a:lstStyle/>
-          <a:p>
-            <a:pPr algn="l">
-              <a:lnSpc>
-                <a:spcPct val="112000"/>
-              </a:lnSpc>
-            </a:pPr>
-            <a:r>
-              <a:rPr sz="1200" b="1">
-                <a:solidFill>
-                  <a:srgbClr val="1A1A1A"/>
-                </a:solidFill>
-                <a:latin typeface="Arial"/>
-                <a:ea typeface="Arial"/>
-              </a:rPr>
-              <a:t>P/E 100배 ↓</a:t>
-            </a:r>
-          </a:p>
-        </p:txBody>
-      </p:sp>
-      <p:sp>
-        <p:nvSpPr>
-          <p:cNvPr id="53" name="TextBox 52"/>
-          <p:cNvSpPr txBox="1"/>
-          <p:nvPr/>
-        </p:nvSpPr>
-        <p:spPr>
-          <a:xfrm>
-            <a:off x="10040943" y="6227064"/>
-            <a:ext cx="2069314" cy="201168"/>
-          </a:xfrm>
-          <a:prstGeom prst="rect">
-            <a:avLst/>
-          </a:prstGeom>
-          <a:noFill/>
-        </p:spPr>
-        <p:txBody>
-          <a:bodyPr wrap="square" anchor="t" lIns="0" rIns="0" tIns="0" bIns="0">
-            <a:spAutoFit/>
-          </a:bodyPr>
-          <a:lstStyle/>
-          <a:p>
-            <a:pPr algn="l">
-              <a:lnSpc>
-                <a:spcPct val="100000"/>
-              </a:lnSpc>
-            </a:pPr>
-            <a:r>
-              <a:rPr sz="875" b="0">
-                <a:solidFill>
-                  <a:srgbClr val="555555"/>
-                </a:solidFill>
-                <a:latin typeface="Arial"/>
-                <a:ea typeface="Arial"/>
-              </a:rPr>
-              <a:t>정격 DWPD 0.4</a:t>
-            </a:r>
-          </a:p>
-        </p:txBody>
-      </p:sp>
-      <p:sp>
-        <p:nvSpPr>
-          <p:cNvPr id="54" name="Right Arrow 53"/>
-          <p:cNvSpPr/>
-          <p:nvPr/>
-        </p:nvSpPr>
-        <p:spPr>
-          <a:xfrm>
-            <a:off x="12247418" y="6016752"/>
-            <a:ext cx="219456" cy="182880"/>
-          </a:xfrm>
-          <a:prstGeom prst="rightArrow">
-            <a:avLst/>
-          </a:prstGeom>
-          <a:solidFill>
-            <a:srgbClr val="1428A0"/>
-          </a:solidFill>
-          <a:ln>
-            <a:noFill/>
-          </a:ln>
-          <a:effectLst/>
-        </p:spPr>
-        <p:style>
-          <a:lnRef idx="1">
-            <a:schemeClr val="accent1"/>
-          </a:lnRef>
-          <a:fillRef idx="3">
-            <a:schemeClr val="accent1"/>
-          </a:fillRef>
-          <a:effectRef idx="2">
-            <a:schemeClr val="accent1"/>
-          </a:effectRef>
-          <a:fontRef idx="minor">
-            <a:schemeClr val="lt1"/>
-          </a:fontRef>
-        </p:style>
-        <p:txBody>
-          <a:bodyPr rtlCol="0" anchor="ctr"/>
-          <a:lstStyle/>
-          <a:p>
-            <a:pPr algn="ctr"/>
-          </a:p>
-        </p:txBody>
-      </p:sp>
-      <p:sp>
-        <p:nvSpPr>
-          <p:cNvPr id="55" name="Rectangle 54"/>
-          <p:cNvSpPr/>
-          <p:nvPr/>
-        </p:nvSpPr>
-        <p:spPr>
-          <a:xfrm>
-            <a:off x="12512594" y="5769864"/>
-            <a:ext cx="2252194" cy="676656"/>
-          </a:xfrm>
-          <a:prstGeom prst="rect">
-            <a:avLst/>
-          </a:prstGeom>
-          <a:solidFill>
-            <a:srgbClr val="AAB8E8"/>
-          </a:solidFill>
-          <a:ln>
-            <a:noFill/>
-          </a:ln>
-          <a:effectLst/>
-        </p:spPr>
-        <p:style>
-          <a:lnRef idx="1">
-            <a:schemeClr val="accent1"/>
-          </a:lnRef>
-          <a:fillRef idx="3">
-            <a:schemeClr val="accent1"/>
-          </a:fillRef>
-          <a:effectRef idx="2">
-            <a:schemeClr val="accent1"/>
-          </a:effectRef>
-          <a:fontRef idx="minor">
-            <a:schemeClr val="lt1"/>
-          </a:fontRef>
-        </p:style>
-        <p:txBody>
-          <a:bodyPr rtlCol="0" anchor="ctr"/>
-          <a:lstStyle/>
-          <a:p>
-            <a:pPr algn="ctr"/>
-          </a:p>
-        </p:txBody>
-      </p:sp>
-      <p:sp>
-        <p:nvSpPr>
-          <p:cNvPr id="56" name="TextBox 55"/>
-          <p:cNvSpPr txBox="1"/>
-          <p:nvPr/>
-        </p:nvSpPr>
-        <p:spPr>
-          <a:xfrm>
-            <a:off x="12604034" y="5824727"/>
-            <a:ext cx="2069314" cy="201168"/>
-          </a:xfrm>
-          <a:prstGeom prst="rect">
-            <a:avLst/>
-          </a:prstGeom>
-          <a:noFill/>
-        </p:spPr>
-        <p:txBody>
-          <a:bodyPr wrap="square" anchor="t" lIns="0" rIns="0" tIns="0" bIns="0">
-            <a:spAutoFit/>
-          </a:bodyPr>
-          <a:lstStyle/>
-          <a:p>
-            <a:pPr algn="l">
-              <a:lnSpc>
-                <a:spcPct val="112000"/>
-              </a:lnSpc>
-            </a:pPr>
-            <a:r>
-              <a:rPr sz="975" b="0">
-                <a:solidFill>
-                  <a:srgbClr val="1A1A1A"/>
-                </a:solidFill>
-                <a:latin typeface="Arial"/>
-                <a:ea typeface="Arial"/>
-              </a:rPr>
-              <a:t>SSD · 드라이버</a:t>
-            </a:r>
-          </a:p>
-        </p:txBody>
-      </p:sp>
-      <p:sp>
-        <p:nvSpPr>
-          <p:cNvPr id="57" name="TextBox 56"/>
-          <p:cNvSpPr txBox="1"/>
-          <p:nvPr/>
-        </p:nvSpPr>
-        <p:spPr>
-          <a:xfrm>
-            <a:off x="12604034" y="6016752"/>
-            <a:ext cx="2069314" cy="237744"/>
-          </a:xfrm>
-          <a:prstGeom prst="rect">
-            <a:avLst/>
-          </a:prstGeom>
-          <a:noFill/>
-        </p:spPr>
-        <p:txBody>
-          <a:bodyPr wrap="square" anchor="t" lIns="0" rIns="0" tIns="0" bIns="0">
-            <a:spAutoFit/>
-          </a:bodyPr>
-          <a:lstStyle/>
-          <a:p>
-            <a:pPr algn="l">
-              <a:lnSpc>
-                <a:spcPct val="112000"/>
-              </a:lnSpc>
-            </a:pPr>
-            <a:r>
-              <a:rPr sz="1200" b="1">
-                <a:solidFill>
-                  <a:srgbClr val="1A1A1A"/>
-                </a:solidFill>
-                <a:latin typeface="Arial"/>
-                <a:ea typeface="Arial"/>
-              </a:rPr>
-              <a:t>QoS · 성능 개선</a:t>
-            </a:r>
-          </a:p>
-        </p:txBody>
-      </p:sp>
-      <p:sp>
-        <p:nvSpPr>
-          <p:cNvPr id="58" name="TextBox 57"/>
-          <p:cNvSpPr txBox="1"/>
-          <p:nvPr/>
-        </p:nvSpPr>
-        <p:spPr>
-          <a:xfrm>
-            <a:off x="12604034" y="6227064"/>
-            <a:ext cx="2069314" cy="201168"/>
-          </a:xfrm>
-          <a:prstGeom prst="rect">
-            <a:avLst/>
-          </a:prstGeom>
-          <a:noFill/>
-        </p:spPr>
-        <p:txBody>
-          <a:bodyPr wrap="square" anchor="t" lIns="0" rIns="0" tIns="0" bIns="0">
-            <a:spAutoFit/>
-          </a:bodyPr>
-          <a:lstStyle/>
-          <a:p>
-            <a:pPr algn="l">
-              <a:lnSpc>
-                <a:spcPct val="100000"/>
-              </a:lnSpc>
-            </a:pPr>
-            <a:r>
-              <a:rPr sz="875" b="0">
-                <a:solidFill>
-                  <a:srgbClr val="555555"/>
-                </a:solidFill>
-                <a:latin typeface="Arial"/>
-                <a:ea typeface="Arial"/>
-              </a:rPr>
-              <a:t>추정 배치 · 스트림 · IOD → WAF ≈ 3</a:t>
-            </a:r>
-          </a:p>
-        </p:txBody>
-      </p:sp>
-      <p:sp>
-        <p:nvSpPr>
-          <p:cNvPr id="59" name="Right Arrow 58"/>
-          <p:cNvSpPr/>
-          <p:nvPr/>
-        </p:nvSpPr>
-        <p:spPr>
-          <a:xfrm>
-            <a:off x="14810509" y="6016752"/>
-            <a:ext cx="219456" cy="182880"/>
-          </a:xfrm>
-          <a:prstGeom prst="rightArrow">
-            <a:avLst/>
-          </a:prstGeom>
-          <a:solidFill>
-            <a:srgbClr val="AAB8E8"/>
-          </a:solidFill>
-          <a:ln>
-            <a:noFill/>
-          </a:ln>
-          <a:effectLst/>
-        </p:spPr>
-        <p:style>
-          <a:lnRef idx="1">
-            <a:schemeClr val="accent1"/>
-          </a:lnRef>
-          <a:fillRef idx="3">
-            <a:schemeClr val="accent1"/>
-          </a:fillRef>
-          <a:effectRef idx="2">
-            <a:schemeClr val="accent1"/>
-          </a:effectRef>
-          <a:fontRef idx="minor">
-            <a:schemeClr val="lt1"/>
-          </a:fontRef>
-        </p:style>
-        <p:txBody>
-          <a:bodyPr rtlCol="0" anchor="ctr"/>
-          <a:lstStyle/>
-          <a:p>
-            <a:pPr algn="ctr"/>
-          </a:p>
-        </p:txBody>
-      </p:sp>
-      <p:sp>
-        <p:nvSpPr>
-          <p:cNvPr id="60" name="Rectangle 59"/>
-          <p:cNvSpPr/>
-          <p:nvPr/>
-        </p:nvSpPr>
-        <p:spPr>
-          <a:xfrm>
-            <a:off x="15075685" y="5769864"/>
-            <a:ext cx="2252194" cy="676656"/>
-          </a:xfrm>
-          <a:prstGeom prst="rect">
-            <a:avLst/>
-          </a:prstGeom>
-          <a:solidFill>
-            <a:srgbClr val="FFFFFF"/>
-          </a:solidFill>
-          <a:ln w="12700">
-            <a:solidFill>
-              <a:srgbClr val="8A8A8A"/>
-            </a:solidFill>
-          </a:ln>
-          <a:effectLst/>
-        </p:spPr>
-        <p:style>
-          <a:lnRef idx="1">
-            <a:schemeClr val="accent1"/>
-          </a:lnRef>
-          <a:fillRef idx="3">
-            <a:schemeClr val="accent1"/>
-          </a:fillRef>
-          <a:effectRef idx="2">
-            <a:schemeClr val="accent1"/>
-          </a:effectRef>
-          <a:fontRef idx="minor">
-            <a:schemeClr val="lt1"/>
-          </a:fontRef>
-        </p:style>
-        <p:txBody>
-          <a:bodyPr rtlCol="0" anchor="ctr"/>
-          <a:lstStyle/>
-          <a:p>
-            <a:pPr algn="ctr"/>
-          </a:p>
-        </p:txBody>
-      </p:sp>
-      <p:sp>
-        <p:nvSpPr>
-          <p:cNvPr id="61" name="TextBox 60"/>
-          <p:cNvSpPr txBox="1"/>
-          <p:nvPr/>
-        </p:nvSpPr>
-        <p:spPr>
-          <a:xfrm>
-            <a:off x="15167125" y="5824727"/>
-            <a:ext cx="2069314" cy="201168"/>
-          </a:xfrm>
-          <a:prstGeom prst="rect">
-            <a:avLst/>
-          </a:prstGeom>
-          <a:noFill/>
-        </p:spPr>
-        <p:txBody>
-          <a:bodyPr wrap="square" anchor="t" lIns="0" rIns="0" tIns="0" bIns="0">
-            <a:spAutoFit/>
-          </a:bodyPr>
-          <a:lstStyle/>
-          <a:p>
-            <a:pPr algn="l">
-              <a:lnSpc>
-                <a:spcPct val="112000"/>
-              </a:lnSpc>
-            </a:pPr>
-            <a:r>
-              <a:rPr sz="975" b="0">
-                <a:solidFill>
-                  <a:srgbClr val="8A8A8A"/>
-                </a:solidFill>
-                <a:latin typeface="Arial"/>
-                <a:ea typeface="Arial"/>
-              </a:rPr>
-              <a:t>고객</a:t>
-            </a:r>
-          </a:p>
-        </p:txBody>
-      </p:sp>
-      <p:sp>
-        <p:nvSpPr>
-          <p:cNvPr id="62" name="TextBox 61"/>
-          <p:cNvSpPr txBox="1"/>
-          <p:nvPr/>
-        </p:nvSpPr>
-        <p:spPr>
-          <a:xfrm>
-            <a:off x="15167125" y="6016752"/>
-            <a:ext cx="2069314" cy="237744"/>
-          </a:xfrm>
-          <a:prstGeom prst="rect">
-            <a:avLst/>
-          </a:prstGeom>
-          <a:noFill/>
-        </p:spPr>
-        <p:txBody>
-          <a:bodyPr wrap="square" anchor="t" lIns="0" rIns="0" tIns="0" bIns="0">
-            <a:spAutoFit/>
-          </a:bodyPr>
-          <a:lstStyle/>
-          <a:p>
-            <a:pPr algn="l">
-              <a:lnSpc>
-                <a:spcPct val="112000"/>
-              </a:lnSpc>
-            </a:pPr>
-            <a:r>
-              <a:rPr sz="1200" b="1">
-                <a:solidFill>
-                  <a:srgbClr val="555555"/>
-                </a:solidFill>
-                <a:latin typeface="Arial"/>
-                <a:ea typeface="Arial"/>
-              </a:rPr>
-              <a:t>DWPD 요구 미충족</a:t>
-            </a:r>
-          </a:p>
-        </p:txBody>
-      </p:sp>
-      <p:sp>
-        <p:nvSpPr>
-          <p:cNvPr id="63" name="TextBox 62"/>
-          <p:cNvSpPr txBox="1"/>
-          <p:nvPr/>
-        </p:nvSpPr>
-        <p:spPr>
-          <a:xfrm>
-            <a:off x="15167125" y="6227064"/>
-            <a:ext cx="2069314" cy="201168"/>
-          </a:xfrm>
-          <a:prstGeom prst="rect">
-            <a:avLst/>
-          </a:prstGeom>
-          <a:noFill/>
-        </p:spPr>
-        <p:txBody>
-          <a:bodyPr wrap="square" anchor="t" lIns="0" rIns="0" tIns="0" bIns="0">
-            <a:spAutoFit/>
-          </a:bodyPr>
-          <a:lstStyle/>
-          <a:p>
-            <a:pPr algn="l">
-              <a:lnSpc>
-                <a:spcPct val="100000"/>
-              </a:lnSpc>
-            </a:pPr>
-            <a:r>
-              <a:rPr sz="875" b="0">
-                <a:solidFill>
-                  <a:srgbClr val="8A8A8A"/>
-                </a:solidFill>
-                <a:latin typeface="Arial"/>
-                <a:ea typeface="Arial"/>
-              </a:rPr>
-              <a:t>격차 10~40배</a:t>
-            </a:r>
-          </a:p>
-        </p:txBody>
-      </p:sp>
-      <p:sp>
-        <p:nvSpPr>
-          <p:cNvPr id="64" name="TextBox 63"/>
-          <p:cNvSpPr txBox="1"/>
-          <p:nvPr/>
-        </p:nvSpPr>
-        <p:spPr>
-          <a:xfrm>
-            <a:off x="9949503" y="6565392"/>
-            <a:ext cx="5000936" cy="219456"/>
-          </a:xfrm>
-          <a:prstGeom prst="rect">
-            <a:avLst/>
-          </a:prstGeom>
-          <a:noFill/>
-        </p:spPr>
-        <p:txBody>
-          <a:bodyPr wrap="square" anchor="t" lIns="0" rIns="0" tIns="0" bIns="0">
-            <a:spAutoFit/>
-          </a:bodyPr>
-          <a:lstStyle/>
-          <a:p>
-            <a:pPr algn="l">
-              <a:lnSpc>
-                <a:spcPct val="112000"/>
-              </a:lnSpc>
-            </a:pPr>
-            <a:r>
-              <a:rPr sz="1125" b="1">
-                <a:solidFill>
-                  <a:srgbClr val="1428A0"/>
-                </a:solidFill>
-                <a:latin typeface="Arial"/>
-                <a:ea typeface="Arial"/>
-              </a:rPr>
-              <a:t>3단계  호스트 시스템 공동 설계  (2022~, 본 덱)</a:t>
-            </a:r>
-          </a:p>
-        </p:txBody>
-      </p:sp>
-      <p:sp>
-        <p:nvSpPr>
-          <p:cNvPr id="65" name="TextBox 64"/>
-          <p:cNvSpPr txBox="1"/>
-          <p:nvPr/>
-        </p:nvSpPr>
-        <p:spPr>
-          <a:xfrm>
-            <a:off x="14950439" y="6565392"/>
-            <a:ext cx="2377440" cy="219456"/>
-          </a:xfrm>
-          <a:prstGeom prst="rect">
-            <a:avLst/>
-          </a:prstGeom>
-          <a:noFill/>
-        </p:spPr>
-        <p:txBody>
-          <a:bodyPr wrap="square" anchor="t" lIns="0" rIns="0" tIns="0" bIns="0">
-            <a:spAutoFit/>
-          </a:bodyPr>
-          <a:lstStyle/>
-          <a:p>
-            <a:pPr algn="r">
-              <a:lnSpc>
-                <a:spcPct val="112000"/>
-              </a:lnSpc>
-            </a:pPr>
-            <a:r>
-              <a:rPr sz="1050" b="1">
-                <a:solidFill>
-                  <a:srgbClr val="1428A0"/>
-                </a:solidFill>
-                <a:latin typeface="Arial"/>
-                <a:ea typeface="Arial"/>
-              </a:rPr>
-              <a:t>DWPD 요구 충족 · 유일한 경로</a:t>
-            </a:r>
-          </a:p>
-        </p:txBody>
-      </p:sp>
-      <p:sp>
-        <p:nvSpPr>
-          <p:cNvPr id="66" name="Rectangle 65"/>
-          <p:cNvSpPr/>
-          <p:nvPr/>
-        </p:nvSpPr>
-        <p:spPr>
-          <a:xfrm>
-            <a:off x="9949503" y="6839712"/>
-            <a:ext cx="2252194" cy="676656"/>
-          </a:xfrm>
-          <a:prstGeom prst="rect">
-            <a:avLst/>
-          </a:prstGeom>
-          <a:solidFill>
-            <a:srgbClr val="FFFFFF"/>
-          </a:solidFill>
-          <a:ln w="9525">
-            <a:solidFill>
-              <a:srgbClr val="D9D9D9"/>
-            </a:solidFill>
-          </a:ln>
-          <a:effectLst/>
-        </p:spPr>
-        <p:style>
-          <a:lnRef idx="1">
-            <a:schemeClr val="accent1"/>
-          </a:lnRef>
-          <a:fillRef idx="3">
-            <a:schemeClr val="accent1"/>
-          </a:fillRef>
-          <a:effectRef idx="2">
-            <a:schemeClr val="accent1"/>
-          </a:effectRef>
-          <a:fontRef idx="minor">
-            <a:schemeClr val="lt1"/>
-          </a:fontRef>
-        </p:style>
-        <p:txBody>
-          <a:bodyPr rtlCol="0" anchor="ctr"/>
-          <a:lstStyle/>
-          <a:p>
-            <a:pPr algn="ctr"/>
-          </a:p>
-        </p:txBody>
-      </p:sp>
-      <p:sp>
-        <p:nvSpPr>
-          <p:cNvPr id="67" name="TextBox 66"/>
-          <p:cNvSpPr txBox="1"/>
-          <p:nvPr/>
-        </p:nvSpPr>
-        <p:spPr>
-          <a:xfrm>
-            <a:off x="10040943" y="6894575"/>
-            <a:ext cx="2069314" cy="201168"/>
-          </a:xfrm>
-          <a:prstGeom prst="rect">
-            <a:avLst/>
-          </a:prstGeom>
-          <a:noFill/>
-        </p:spPr>
-        <p:txBody>
-          <a:bodyPr wrap="square" anchor="t" lIns="0" rIns="0" tIns="0" bIns="0">
-            <a:spAutoFit/>
-          </a:bodyPr>
-          <a:lstStyle/>
-          <a:p>
-            <a:pPr algn="l">
-              <a:lnSpc>
-                <a:spcPct val="112000"/>
-              </a:lnSpc>
-            </a:pPr>
-            <a:r>
-              <a:rPr sz="975" b="0">
-                <a:solidFill>
-                  <a:srgbClr val="8A8A8A"/>
-                </a:solidFill>
-                <a:latin typeface="Arial"/>
-                <a:ea typeface="Arial"/>
-              </a:rPr>
-              <a:t>호스트 · 앱</a:t>
-            </a:r>
-          </a:p>
-        </p:txBody>
-      </p:sp>
-      <p:sp>
-        <p:nvSpPr>
-          <p:cNvPr id="68" name="TextBox 67"/>
-          <p:cNvSpPr txBox="1"/>
-          <p:nvPr/>
-        </p:nvSpPr>
-        <p:spPr>
-          <a:xfrm>
-            <a:off x="10040943" y="7086600"/>
-            <a:ext cx="2069314" cy="237744"/>
-          </a:xfrm>
-          <a:prstGeom prst="rect">
-            <a:avLst/>
-          </a:prstGeom>
-          <a:noFill/>
-        </p:spPr>
-        <p:txBody>
-          <a:bodyPr wrap="square" anchor="t" lIns="0" rIns="0" tIns="0" bIns="0">
-            <a:spAutoFit/>
-          </a:bodyPr>
-          <a:lstStyle/>
-          <a:p>
-            <a:pPr algn="l">
-              <a:lnSpc>
-                <a:spcPct val="112000"/>
-              </a:lnSpc>
-            </a:pPr>
-            <a:r>
-              <a:rPr sz="1200" b="1">
-                <a:solidFill>
-                  <a:srgbClr val="1A1A1A"/>
-                </a:solidFill>
-                <a:latin typeface="Arial"/>
-                <a:ea typeface="Arial"/>
-              </a:rPr>
-              <a:t>데이터 수명 지정</a:t>
-            </a:r>
-          </a:p>
-        </p:txBody>
-      </p:sp>
-      <p:sp>
-        <p:nvSpPr>
-          <p:cNvPr id="69" name="TextBox 68"/>
-          <p:cNvSpPr txBox="1"/>
-          <p:nvPr/>
-        </p:nvSpPr>
-        <p:spPr>
-          <a:xfrm>
-            <a:off x="10040943" y="7296912"/>
-            <a:ext cx="2069314" cy="201168"/>
-          </a:xfrm>
-          <a:prstGeom prst="rect">
-            <a:avLst/>
-          </a:prstGeom>
-          <a:noFill/>
-        </p:spPr>
-        <p:txBody>
-          <a:bodyPr wrap="square" anchor="t" lIns="0" rIns="0" tIns="0" bIns="0">
-            <a:spAutoFit/>
-          </a:bodyPr>
-          <a:lstStyle/>
-          <a:p>
-            <a:pPr algn="l">
-              <a:lnSpc>
-                <a:spcPct val="100000"/>
-              </a:lnSpc>
-            </a:pPr>
-            <a:r>
-              <a:rPr sz="875" b="0">
-                <a:solidFill>
-                  <a:srgbClr val="555555"/>
-                </a:solidFill>
-                <a:latin typeface="Arial"/>
-                <a:ea typeface="Arial"/>
-              </a:rPr>
-              <a:t>배치 표준 · 캐시 관리자 정책</a:t>
-            </a:r>
-          </a:p>
-        </p:txBody>
-      </p:sp>
-      <p:sp>
-        <p:nvSpPr>
-          <p:cNvPr id="70" name="Right Arrow 69"/>
-          <p:cNvSpPr/>
-          <p:nvPr/>
-        </p:nvSpPr>
-        <p:spPr>
-          <a:xfrm>
-            <a:off x="12247418" y="7086600"/>
-            <a:ext cx="219456" cy="182880"/>
-          </a:xfrm>
-          <a:prstGeom prst="rightArrow">
-            <a:avLst/>
-          </a:prstGeom>
-          <a:solidFill>
-            <a:srgbClr val="1428A0"/>
-          </a:solidFill>
-          <a:ln>
-            <a:noFill/>
-          </a:ln>
-          <a:effectLst/>
-        </p:spPr>
-        <p:style>
-          <a:lnRef idx="1">
-            <a:schemeClr val="accent1"/>
-          </a:lnRef>
-          <a:fillRef idx="3">
-            <a:schemeClr val="accent1"/>
-          </a:fillRef>
-          <a:effectRef idx="2">
-            <a:schemeClr val="accent1"/>
-          </a:effectRef>
-          <a:fontRef idx="minor">
-            <a:schemeClr val="lt1"/>
-          </a:fontRef>
-        </p:style>
-        <p:txBody>
-          <a:bodyPr rtlCol="0" anchor="ctr"/>
-          <a:lstStyle/>
-          <a:p>
-            <a:pPr algn="ctr"/>
-          </a:p>
-        </p:txBody>
-      </p:sp>
-      <p:sp>
-        <p:nvSpPr>
-          <p:cNvPr id="71" name="Rectangle 70"/>
-          <p:cNvSpPr/>
-          <p:nvPr/>
-        </p:nvSpPr>
-        <p:spPr>
-          <a:xfrm>
-            <a:off x="12512594" y="6839712"/>
-            <a:ext cx="2252194" cy="676656"/>
-          </a:xfrm>
-          <a:prstGeom prst="rect">
-            <a:avLst/>
-          </a:prstGeom>
-          <a:solidFill>
-            <a:srgbClr val="1428A0"/>
-          </a:solidFill>
-          <a:ln>
-            <a:noFill/>
-          </a:ln>
-          <a:effectLst/>
-        </p:spPr>
-        <p:style>
-          <a:lnRef idx="1">
-            <a:schemeClr val="accent1"/>
-          </a:lnRef>
-          <a:fillRef idx="3">
-            <a:schemeClr val="accent1"/>
-          </a:fillRef>
-          <a:effectRef idx="2">
-            <a:schemeClr val="accent1"/>
-          </a:effectRef>
-          <a:fontRef idx="minor">
-            <a:schemeClr val="lt1"/>
-          </a:fontRef>
-        </p:style>
-        <p:txBody>
-          <a:bodyPr rtlCol="0" anchor="ctr"/>
-          <a:lstStyle/>
-          <a:p>
-            <a:pPr algn="ctr"/>
-          </a:p>
-        </p:txBody>
-      </p:sp>
-      <p:sp>
-        <p:nvSpPr>
-          <p:cNvPr id="72" name="TextBox 71"/>
-          <p:cNvSpPr txBox="1"/>
-          <p:nvPr/>
-        </p:nvSpPr>
-        <p:spPr>
-          <a:xfrm>
-            <a:off x="12604034" y="6894575"/>
-            <a:ext cx="2069314" cy="201168"/>
-          </a:xfrm>
-          <a:prstGeom prst="rect">
-            <a:avLst/>
-          </a:prstGeom>
-          <a:noFill/>
-        </p:spPr>
-        <p:txBody>
-          <a:bodyPr wrap="square" anchor="t" lIns="0" rIns="0" tIns="0" bIns="0">
-            <a:spAutoFit/>
-          </a:bodyPr>
-          <a:lstStyle/>
-          <a:p>
-            <a:pPr algn="l">
-              <a:lnSpc>
-                <a:spcPct val="112000"/>
-              </a:lnSpc>
-            </a:pPr>
-            <a:r>
-              <a:rPr sz="975" b="0">
-                <a:solidFill>
-                  <a:srgbClr val="FFFFFF"/>
-                </a:solidFill>
-                <a:latin typeface="Arial"/>
-                <a:ea typeface="Arial"/>
-              </a:rPr>
-              <a:t>삼성 · 고객 공동 설계</a:t>
-            </a:r>
-          </a:p>
-        </p:txBody>
-      </p:sp>
-      <p:sp>
-        <p:nvSpPr>
-          <p:cNvPr id="73" name="TextBox 72"/>
-          <p:cNvSpPr txBox="1"/>
-          <p:nvPr/>
-        </p:nvSpPr>
-        <p:spPr>
-          <a:xfrm>
-            <a:off x="12604034" y="7086600"/>
-            <a:ext cx="2069314" cy="237744"/>
-          </a:xfrm>
-          <a:prstGeom prst="rect">
-            <a:avLst/>
-          </a:prstGeom>
-          <a:noFill/>
-        </p:spPr>
-        <p:txBody>
-          <a:bodyPr wrap="square" anchor="t" lIns="0" rIns="0" tIns="0" bIns="0">
-            <a:spAutoFit/>
-          </a:bodyPr>
-          <a:lstStyle/>
-          <a:p>
-            <a:pPr algn="l">
-              <a:lnSpc>
-                <a:spcPct val="112000"/>
-              </a:lnSpc>
-            </a:pPr>
-            <a:r>
-              <a:rPr sz="1200" b="1">
-                <a:solidFill>
-                  <a:srgbClr val="FFFFFF"/>
-                </a:solidFill>
-                <a:latin typeface="Arial"/>
-                <a:ea typeface="Arial"/>
-              </a:rPr>
-              <a:t>WAF 3.2 → 1.0</a:t>
-            </a:r>
-          </a:p>
-        </p:txBody>
-      </p:sp>
-      <p:sp>
-        <p:nvSpPr>
-          <p:cNvPr id="74" name="TextBox 73"/>
-          <p:cNvSpPr txBox="1"/>
-          <p:nvPr/>
-        </p:nvSpPr>
-        <p:spPr>
-          <a:xfrm>
-            <a:off x="12604034" y="7296912"/>
-            <a:ext cx="2069314" cy="201168"/>
-          </a:xfrm>
-          <a:prstGeom prst="rect">
-            <a:avLst/>
-          </a:prstGeom>
-          <a:noFill/>
-        </p:spPr>
-        <p:txBody>
-          <a:bodyPr wrap="square" anchor="t" lIns="0" rIns="0" tIns="0" bIns="0">
-            <a:spAutoFit/>
-          </a:bodyPr>
-          <a:lstStyle/>
-          <a:p>
-            <a:pPr algn="l">
-              <a:lnSpc>
-                <a:spcPct val="100000"/>
-              </a:lnSpc>
-            </a:pPr>
-            <a:r>
-              <a:rPr sz="875" b="0">
-                <a:solidFill>
-                  <a:srgbClr val="FFFFFF"/>
-                </a:solidFill>
-                <a:latin typeface="Arial"/>
-                <a:ea typeface="Arial"/>
-              </a:rPr>
-              <a:t>FDE · SCA · 유효 DWPD ×3.1</a:t>
-            </a:r>
-          </a:p>
-        </p:txBody>
-      </p:sp>
-      <p:sp>
-        <p:nvSpPr>
-          <p:cNvPr id="75" name="Right Arrow 74"/>
-          <p:cNvSpPr/>
-          <p:nvPr/>
-        </p:nvSpPr>
-        <p:spPr>
-          <a:xfrm>
-            <a:off x="14810509" y="7086600"/>
-            <a:ext cx="219456" cy="182880"/>
-          </a:xfrm>
-          <a:prstGeom prst="rightArrow">
-            <a:avLst/>
-          </a:prstGeom>
-          <a:solidFill>
-            <a:srgbClr val="1428A0"/>
-          </a:solidFill>
-          <a:ln>
-            <a:noFill/>
-          </a:ln>
-          <a:effectLst/>
-        </p:spPr>
-        <p:style>
-          <a:lnRef idx="1">
-            <a:schemeClr val="accent1"/>
-          </a:lnRef>
-          <a:fillRef idx="3">
-            <a:schemeClr val="accent1"/>
-          </a:fillRef>
-          <a:effectRef idx="2">
-            <a:schemeClr val="accent1"/>
-          </a:effectRef>
-          <a:fontRef idx="minor">
-            <a:schemeClr val="lt1"/>
-          </a:fontRef>
-        </p:style>
-        <p:txBody>
-          <a:bodyPr rtlCol="0" anchor="ctr"/>
-          <a:lstStyle/>
-          <a:p>
-            <a:pPr algn="ctr"/>
-          </a:p>
-        </p:txBody>
-      </p:sp>
-      <p:sp>
-        <p:nvSpPr>
-          <p:cNvPr id="76" name="Rectangle 75"/>
-          <p:cNvSpPr/>
-          <p:nvPr/>
-        </p:nvSpPr>
-        <p:spPr>
-          <a:xfrm>
-            <a:off x="15075685" y="6839712"/>
-            <a:ext cx="2252194" cy="676656"/>
-          </a:xfrm>
-          <a:prstGeom prst="rect">
-            <a:avLst/>
-          </a:prstGeom>
-          <a:solidFill>
-            <a:srgbClr val="F4F6FC"/>
-          </a:solidFill>
-          <a:ln w="12700">
-            <a:solidFill>
-              <a:srgbClr val="AAB8E8"/>
-            </a:solidFill>
-          </a:ln>
-          <a:effectLst/>
-        </p:spPr>
-        <p:style>
-          <a:lnRef idx="1">
-            <a:schemeClr val="accent1"/>
-          </a:lnRef>
-          <a:fillRef idx="3">
-            <a:schemeClr val="accent1"/>
-          </a:fillRef>
-          <a:effectRef idx="2">
-            <a:schemeClr val="accent1"/>
-          </a:effectRef>
-          <a:fontRef idx="minor">
-            <a:schemeClr val="lt1"/>
-          </a:fontRef>
-        </p:style>
-        <p:txBody>
-          <a:bodyPr rtlCol="0" anchor="ctr"/>
-          <a:lstStyle/>
-          <a:p>
-            <a:pPr algn="ctr"/>
-          </a:p>
-        </p:txBody>
-      </p:sp>
-      <p:sp>
-        <p:nvSpPr>
-          <p:cNvPr id="77" name="TextBox 76"/>
-          <p:cNvSpPr txBox="1"/>
-          <p:nvPr/>
-        </p:nvSpPr>
-        <p:spPr>
-          <a:xfrm>
-            <a:off x="15167125" y="6894575"/>
-            <a:ext cx="2069314" cy="201168"/>
-          </a:xfrm>
-          <a:prstGeom prst="rect">
-            <a:avLst/>
-          </a:prstGeom>
-          <a:noFill/>
-        </p:spPr>
-        <p:txBody>
-          <a:bodyPr wrap="square" anchor="t" lIns="0" rIns="0" tIns="0" bIns="0">
-            <a:spAutoFit/>
-          </a:bodyPr>
-          <a:lstStyle/>
-          <a:p>
-            <a:pPr algn="l">
-              <a:lnSpc>
-                <a:spcPct val="112000"/>
-              </a:lnSpc>
-            </a:pPr>
-            <a:r>
-              <a:rPr sz="975" b="0">
-                <a:solidFill>
-                  <a:srgbClr val="8A8A8A"/>
-                </a:solidFill>
-                <a:latin typeface="Arial"/>
-                <a:ea typeface="Arial"/>
-              </a:rPr>
-              <a:t>고객</a:t>
-            </a:r>
-          </a:p>
-        </p:txBody>
-      </p:sp>
-      <p:sp>
-        <p:nvSpPr>
-          <p:cNvPr id="78" name="TextBox 77"/>
-          <p:cNvSpPr txBox="1"/>
-          <p:nvPr/>
-        </p:nvSpPr>
-        <p:spPr>
-          <a:xfrm>
-            <a:off x="15167125" y="7086600"/>
-            <a:ext cx="2069314" cy="237744"/>
-          </a:xfrm>
-          <a:prstGeom prst="rect">
-            <a:avLst/>
-          </a:prstGeom>
-          <a:noFill/>
-        </p:spPr>
-        <p:txBody>
-          <a:bodyPr wrap="square" anchor="t" lIns="0" rIns="0" tIns="0" bIns="0">
-            <a:spAutoFit/>
-          </a:bodyPr>
-          <a:lstStyle/>
-          <a:p>
-            <a:pPr algn="l">
-              <a:lnSpc>
-                <a:spcPct val="112000"/>
-              </a:lnSpc>
-            </a:pPr>
-            <a:r>
-              <a:rPr sz="1200" b="1">
-                <a:solidFill>
-                  <a:srgbClr val="1A1A1A"/>
-                </a:solidFill>
-                <a:latin typeface="Arial"/>
-                <a:ea typeface="Arial"/>
-              </a:rPr>
-              <a:t>DWPD 요구 충족</a:t>
-            </a:r>
-          </a:p>
-        </p:txBody>
-      </p:sp>
-      <p:sp>
-        <p:nvSpPr>
-          <p:cNvPr id="79" name="TextBox 78"/>
-          <p:cNvSpPr txBox="1"/>
-          <p:nvPr/>
-        </p:nvSpPr>
-        <p:spPr>
-          <a:xfrm>
-            <a:off x="15167125" y="7296912"/>
-            <a:ext cx="2069314" cy="201168"/>
-          </a:xfrm>
-          <a:prstGeom prst="rect">
-            <a:avLst/>
-          </a:prstGeom>
-          <a:noFill/>
-        </p:spPr>
-        <p:txBody>
-          <a:bodyPr wrap="square" anchor="t" lIns="0" rIns="0" tIns="0" bIns="0">
-            <a:spAutoFit/>
-          </a:bodyPr>
-          <a:lstStyle/>
-          <a:p>
-            <a:pPr algn="l">
-              <a:lnSpc>
-                <a:spcPct val="100000"/>
-              </a:lnSpc>
-            </a:pPr>
-            <a:r>
-              <a:rPr sz="875" b="0">
-                <a:solidFill>
-                  <a:srgbClr val="555555"/>
-                </a:solidFill>
-                <a:latin typeface="Arial"/>
-                <a:ea typeface="Arial"/>
-              </a:rPr>
-              <a:t>QLC로 정격 내 수명 보증</a:t>
-            </a:r>
-          </a:p>
-        </p:txBody>
-      </p:sp>
-      <p:sp>
-        <p:nvSpPr>
-          <p:cNvPr id="80" name="Rectangle 79"/>
-          <p:cNvSpPr/>
-          <p:nvPr/>
-        </p:nvSpPr>
-        <p:spPr>
-          <a:xfrm>
-            <a:off x="722376" y="7644383"/>
-            <a:ext cx="16843248" cy="859536"/>
-          </a:xfrm>
-          <a:prstGeom prst="rect">
-            <a:avLst/>
-          </a:prstGeom>
-          <a:solidFill>
-            <a:srgbClr val="FFFFFF"/>
-          </a:solidFill>
-          <a:ln w="9525">
-            <a:solidFill>
-              <a:srgbClr val="D9D9D9"/>
-            </a:solidFill>
-          </a:ln>
-          <a:effectLst/>
-        </p:spPr>
-        <p:style>
-          <a:lnRef idx="1">
-            <a:schemeClr val="accent1"/>
-          </a:lnRef>
-          <a:fillRef idx="3">
-            <a:schemeClr val="accent1"/>
-          </a:fillRef>
-          <a:effectRef idx="2">
-            <a:schemeClr val="accent1"/>
-          </a:effectRef>
-          <a:fontRef idx="minor">
-            <a:schemeClr val="lt1"/>
-          </a:fontRef>
-        </p:style>
-        <p:txBody>
-          <a:bodyPr rtlCol="0" anchor="ctr"/>
-          <a:lstStyle/>
-          <a:p>
-            <a:pPr algn="ctr"/>
-          </a:p>
-        </p:txBody>
-      </p:sp>
-      <p:sp>
-        <p:nvSpPr>
-          <p:cNvPr id="81" name="Rectangle 80"/>
-          <p:cNvSpPr/>
-          <p:nvPr/>
-        </p:nvSpPr>
-        <p:spPr>
-          <a:xfrm>
-            <a:off x="722376" y="7644383"/>
-            <a:ext cx="54864" cy="859536"/>
-          </a:xfrm>
-          <a:prstGeom prst="rect">
-            <a:avLst/>
-          </a:prstGeom>
-          <a:solidFill>
-            <a:srgbClr val="3C5AC8"/>
-          </a:solidFill>
-          <a:ln>
-            <a:noFill/>
-          </a:ln>
-          <a:effectLst/>
-        </p:spPr>
-        <p:style>
-          <a:lnRef idx="1">
-            <a:schemeClr val="accent1"/>
-          </a:lnRef>
-          <a:fillRef idx="3">
-            <a:schemeClr val="accent1"/>
-          </a:fillRef>
-          <a:effectRef idx="2">
-            <a:schemeClr val="accent1"/>
-          </a:effectRef>
-          <a:fontRef idx="minor">
-            <a:schemeClr val="lt1"/>
-          </a:fontRef>
-        </p:style>
-        <p:txBody>
-          <a:bodyPr rtlCol="0" anchor="ctr"/>
-          <a:lstStyle/>
-          <a:p>
-            <a:pPr algn="ctr"/>
-          </a:p>
-        </p:txBody>
-      </p:sp>
-      <p:sp>
-        <p:nvSpPr>
-          <p:cNvPr id="82" name="TextBox 81"/>
-          <p:cNvSpPr txBox="1"/>
-          <p:nvPr/>
-        </p:nvSpPr>
-        <p:spPr>
-          <a:xfrm>
-            <a:off x="941832" y="7735823"/>
-            <a:ext cx="1828800" cy="219456"/>
-          </a:xfrm>
-          <a:prstGeom prst="rect">
-            <a:avLst/>
-          </a:prstGeom>
-          <a:noFill/>
-        </p:spPr>
-        <p:txBody>
-          <a:bodyPr wrap="square" anchor="t" lIns="0" rIns="0" tIns="0" bIns="0">
-            <a:spAutoFit/>
-          </a:bodyPr>
-          <a:lstStyle/>
-          <a:p>
-            <a:pPr algn="l">
-              <a:lnSpc>
-                <a:spcPct val="112000"/>
-              </a:lnSpc>
-            </a:pPr>
-            <a:r>
-              <a:rPr sz="1125" b="1">
-                <a:solidFill>
-                  <a:srgbClr val="1428A0"/>
-                </a:solidFill>
-                <a:latin typeface="Arial"/>
-                <a:ea typeface="Arial"/>
-              </a:rPr>
-              <a:t>병렬 축 · 다이 고장률</a:t>
-            </a:r>
-          </a:p>
-        </p:txBody>
-      </p:sp>
-      <p:sp>
-        <p:nvSpPr>
-          <p:cNvPr id="83" name="TextBox 82"/>
-          <p:cNvSpPr txBox="1"/>
-          <p:nvPr/>
-        </p:nvSpPr>
-        <p:spPr>
-          <a:xfrm>
-            <a:off x="941832" y="7973567"/>
-            <a:ext cx="1828800" cy="365760"/>
-          </a:xfrm>
-          <a:prstGeom prst="rect">
-            <a:avLst/>
-          </a:prstGeom>
-          <a:noFill/>
-        </p:spPr>
-        <p:txBody>
-          <a:bodyPr wrap="square" anchor="t" lIns="0" rIns="0" tIns="0" bIns="0">
-            <a:spAutoFit/>
-          </a:bodyPr>
-          <a:lstStyle/>
-          <a:p>
-            <a:pPr algn="l">
-              <a:lnSpc>
-                <a:spcPct val="100000"/>
-              </a:lnSpc>
-            </a:pPr>
-            <a:r>
-              <a:rPr sz="975" b="1">
-                <a:solidFill>
-                  <a:srgbClr val="1A1A1A"/>
-                </a:solidFill>
-                <a:latin typeface="Arial"/>
-                <a:ea typeface="Arial"/>
-              </a:rPr>
-              <a:t>요구 FFR ≤ 3% 고정</a:t>
-            </a:r>
-          </a:p>
-          <a:p>
-            <a:pPr algn="l">
-              <a:lnSpc>
-                <a:spcPct val="100000"/>
-              </a:lnSpc>
-            </a:pPr>
-            <a:r>
-              <a:rPr sz="900" b="0">
-                <a:solidFill>
-                  <a:srgbClr val="555555"/>
-                </a:solidFill>
-                <a:latin typeface="Arial"/>
-                <a:ea typeface="Arial"/>
-              </a:rPr>
-              <a:t>JESD218 · 다이 수는 8배 ↑</a:t>
-            </a:r>
-          </a:p>
-        </p:txBody>
-      </p:sp>
-      <p:sp>
-        <p:nvSpPr>
-          <p:cNvPr id="84" name="TextBox 83"/>
-          <p:cNvSpPr txBox="1"/>
-          <p:nvPr/>
-        </p:nvSpPr>
-        <p:spPr>
-          <a:xfrm>
-            <a:off x="2871216" y="7717536"/>
-            <a:ext cx="2880360" cy="182880"/>
-          </a:xfrm>
-          <a:prstGeom prst="rect">
-            <a:avLst/>
-          </a:prstGeom>
-          <a:noFill/>
-        </p:spPr>
-        <p:txBody>
-          <a:bodyPr wrap="square" anchor="t" lIns="0" rIns="0" tIns="0" bIns="0">
-            <a:spAutoFit/>
-          </a:bodyPr>
-          <a:lstStyle/>
-          <a:p>
-            <a:pPr algn="l">
-              <a:lnSpc>
-                <a:spcPct val="112000"/>
-              </a:lnSpc>
-            </a:pPr>
-            <a:r>
-              <a:rPr sz="875" b="0">
-                <a:solidFill>
-                  <a:srgbClr val="8A8A8A"/>
-                </a:solidFill>
-                <a:latin typeface="Arial"/>
-                <a:ea typeface="Arial"/>
-              </a:rPr>
-              <a:t>SSD당 NAND 다이 수 (용량 ÷ 다이 밀도 환산)</a:t>
-            </a:r>
-          </a:p>
-        </p:txBody>
-      </p:sp>
-      <p:sp>
-        <p:nvSpPr>
-          <p:cNvPr id="85" name="Rectangle 84"/>
-          <p:cNvSpPr/>
-          <p:nvPr/>
-        </p:nvSpPr>
-        <p:spPr>
-          <a:xfrm>
-            <a:off x="2871216" y="8129016"/>
-            <a:ext cx="310896" cy="45720"/>
-          </a:xfrm>
-          <a:prstGeom prst="rect">
-            <a:avLst/>
-          </a:prstGeom>
-          <a:solidFill>
-            <a:srgbClr val="AAB8E8"/>
-          </a:solidFill>
-          <a:ln>
-            <a:noFill/>
-          </a:ln>
-          <a:effectLst/>
-        </p:spPr>
-        <p:style>
-          <a:lnRef idx="1">
-            <a:schemeClr val="accent1"/>
-          </a:lnRef>
-          <a:fillRef idx="3">
-            <a:schemeClr val="accent1"/>
-          </a:fillRef>
-          <a:effectRef idx="2">
-            <a:schemeClr val="accent1"/>
-          </a:effectRef>
-          <a:fontRef idx="minor">
-            <a:schemeClr val="lt1"/>
-          </a:fontRef>
-        </p:style>
-        <p:txBody>
-          <a:bodyPr rtlCol="0" anchor="ctr"/>
-          <a:lstStyle/>
-          <a:p>
-            <a:pPr algn="ctr"/>
-          </a:p>
-        </p:txBody>
-      </p:sp>
-      <p:sp>
-        <p:nvSpPr>
-          <p:cNvPr id="86" name="TextBox 85"/>
-          <p:cNvSpPr txBox="1"/>
-          <p:nvPr/>
-        </p:nvSpPr>
-        <p:spPr>
-          <a:xfrm>
-            <a:off x="2688336" y="8193024"/>
-            <a:ext cx="676656" cy="164592"/>
-          </a:xfrm>
-          <a:prstGeom prst="rect">
-            <a:avLst/>
-          </a:prstGeom>
-          <a:noFill/>
-        </p:spPr>
-        <p:txBody>
-          <a:bodyPr wrap="square" anchor="t" lIns="0" rIns="0" tIns="0" bIns="0">
-            <a:spAutoFit/>
-          </a:bodyPr>
-          <a:lstStyle/>
-          <a:p>
-            <a:pPr algn="ctr">
-              <a:lnSpc>
-                <a:spcPct val="112000"/>
-              </a:lnSpc>
-            </a:pPr>
-            <a:r>
-              <a:rPr sz="825" b="0">
-                <a:solidFill>
-                  <a:srgbClr val="555555"/>
-                </a:solidFill>
-                <a:latin typeface="Arial"/>
-                <a:ea typeface="Arial"/>
-              </a:rPr>
-              <a:t>'12  128</a:t>
-            </a:r>
-          </a:p>
-        </p:txBody>
-      </p:sp>
-      <p:sp>
-        <p:nvSpPr>
-          <p:cNvPr id="87" name="Rectangle 86"/>
-          <p:cNvSpPr/>
-          <p:nvPr/>
-        </p:nvSpPr>
-        <p:spPr>
-          <a:xfrm>
-            <a:off x="3513582" y="8129016"/>
-            <a:ext cx="310896" cy="45720"/>
-          </a:xfrm>
-          <a:prstGeom prst="rect">
-            <a:avLst/>
-          </a:prstGeom>
-          <a:solidFill>
-            <a:srgbClr val="AAB8E8"/>
-          </a:solidFill>
-          <a:ln>
-            <a:noFill/>
-          </a:ln>
-          <a:effectLst/>
-        </p:spPr>
-        <p:style>
-          <a:lnRef idx="1">
-            <a:schemeClr val="accent1"/>
-          </a:lnRef>
-          <a:fillRef idx="3">
-            <a:schemeClr val="accent1"/>
-          </a:fillRef>
-          <a:effectRef idx="2">
-            <a:schemeClr val="accent1"/>
-          </a:effectRef>
-          <a:fontRef idx="minor">
-            <a:schemeClr val="lt1"/>
-          </a:fontRef>
-        </p:style>
-        <p:txBody>
-          <a:bodyPr rtlCol="0" anchor="ctr"/>
-          <a:lstStyle/>
-          <a:p>
-            <a:pPr algn="ctr"/>
-          </a:p>
-        </p:txBody>
-      </p:sp>
-      <p:sp>
-        <p:nvSpPr>
-          <p:cNvPr id="88" name="TextBox 87"/>
-          <p:cNvSpPr txBox="1"/>
-          <p:nvPr/>
-        </p:nvSpPr>
-        <p:spPr>
-          <a:xfrm>
-            <a:off x="3330702" y="8193024"/>
-            <a:ext cx="676656" cy="164592"/>
-          </a:xfrm>
-          <a:prstGeom prst="rect">
-            <a:avLst/>
-          </a:prstGeom>
-          <a:noFill/>
-        </p:spPr>
-        <p:txBody>
-          <a:bodyPr wrap="square" anchor="t" lIns="0" rIns="0" tIns="0" bIns="0">
-            <a:spAutoFit/>
-          </a:bodyPr>
-          <a:lstStyle/>
-          <a:p>
-            <a:pPr algn="ctr">
-              <a:lnSpc>
-                <a:spcPct val="112000"/>
-              </a:lnSpc>
-            </a:pPr>
-            <a:r>
-              <a:rPr sz="825" b="0">
-                <a:solidFill>
-                  <a:srgbClr val="555555"/>
-                </a:solidFill>
-                <a:latin typeface="Arial"/>
-                <a:ea typeface="Arial"/>
-              </a:rPr>
-              <a:t>'18  144</a:t>
-            </a:r>
-          </a:p>
-        </p:txBody>
-      </p:sp>
-      <p:sp>
-        <p:nvSpPr>
-          <p:cNvPr id="89" name="Rectangle 88"/>
-          <p:cNvSpPr/>
-          <p:nvPr/>
-        </p:nvSpPr>
-        <p:spPr>
-          <a:xfrm>
-            <a:off x="4155948" y="8110728"/>
-            <a:ext cx="310896" cy="64008"/>
-          </a:xfrm>
-          <a:prstGeom prst="rect">
-            <a:avLst/>
-          </a:prstGeom>
-          <a:solidFill>
-            <a:srgbClr val="AAB8E8"/>
-          </a:solidFill>
-          <a:ln>
-            <a:noFill/>
-          </a:ln>
-          <a:effectLst/>
-        </p:spPr>
-        <p:style>
-          <a:lnRef idx="1">
-            <a:schemeClr val="accent1"/>
-          </a:lnRef>
-          <a:fillRef idx="3">
-            <a:schemeClr val="accent1"/>
-          </a:fillRef>
-          <a:effectRef idx="2">
-            <a:schemeClr val="accent1"/>
-          </a:effectRef>
-          <a:fontRef idx="minor">
-            <a:schemeClr val="lt1"/>
-          </a:fontRef>
-        </p:style>
-        <p:txBody>
-          <a:bodyPr rtlCol="0" anchor="ctr"/>
-          <a:lstStyle/>
-          <a:p>
-            <a:pPr algn="ctr"/>
-          </a:p>
-        </p:txBody>
-      </p:sp>
-      <p:sp>
-        <p:nvSpPr>
-          <p:cNvPr id="90" name="TextBox 89"/>
-          <p:cNvSpPr txBox="1"/>
-          <p:nvPr/>
-        </p:nvSpPr>
-        <p:spPr>
-          <a:xfrm>
-            <a:off x="3973068" y="8193024"/>
-            <a:ext cx="676656" cy="164592"/>
-          </a:xfrm>
-          <a:prstGeom prst="rect">
-            <a:avLst/>
-          </a:prstGeom>
-          <a:noFill/>
-        </p:spPr>
-        <p:txBody>
-          <a:bodyPr wrap="square" anchor="t" lIns="0" rIns="0" tIns="0" bIns="0">
-            <a:spAutoFit/>
-          </a:bodyPr>
-          <a:lstStyle/>
-          <a:p>
-            <a:pPr algn="ctr">
-              <a:lnSpc>
-                <a:spcPct val="112000"/>
-              </a:lnSpc>
-            </a:pPr>
-            <a:r>
-              <a:rPr sz="825" b="0">
-                <a:solidFill>
-                  <a:srgbClr val="555555"/>
-                </a:solidFill>
-                <a:latin typeface="Arial"/>
-                <a:ea typeface="Arial"/>
-              </a:rPr>
-              <a:t>'21  256</a:t>
-            </a:r>
-          </a:p>
-        </p:txBody>
-      </p:sp>
-      <p:sp>
-        <p:nvSpPr>
-          <p:cNvPr id="91" name="Rectangle 90"/>
-          <p:cNvSpPr/>
-          <p:nvPr/>
-        </p:nvSpPr>
-        <p:spPr>
-          <a:xfrm>
-            <a:off x="4798314" y="8046720"/>
-            <a:ext cx="310896" cy="128016"/>
-          </a:xfrm>
-          <a:prstGeom prst="rect">
-            <a:avLst/>
-          </a:prstGeom>
-          <a:solidFill>
-            <a:srgbClr val="AAB8E8"/>
-          </a:solidFill>
-          <a:ln>
-            <a:noFill/>
-          </a:ln>
-          <a:effectLst/>
-        </p:spPr>
-        <p:style>
-          <a:lnRef idx="1">
-            <a:schemeClr val="accent1"/>
-          </a:lnRef>
-          <a:fillRef idx="3">
-            <a:schemeClr val="accent1"/>
-          </a:fillRef>
-          <a:effectRef idx="2">
-            <a:schemeClr val="accent1"/>
-          </a:effectRef>
-          <a:fontRef idx="minor">
-            <a:schemeClr val="lt1"/>
-          </a:fontRef>
-        </p:style>
-        <p:txBody>
-          <a:bodyPr rtlCol="0" anchor="ctr"/>
-          <a:lstStyle/>
-          <a:p>
-            <a:pPr algn="ctr"/>
-          </a:p>
-        </p:txBody>
-      </p:sp>
-      <p:sp>
-        <p:nvSpPr>
-          <p:cNvPr id="92" name="TextBox 91"/>
-          <p:cNvSpPr txBox="1"/>
-          <p:nvPr/>
-        </p:nvSpPr>
-        <p:spPr>
-          <a:xfrm>
-            <a:off x="4615434" y="8193024"/>
-            <a:ext cx="676656" cy="164592"/>
-          </a:xfrm>
-          <a:prstGeom prst="rect">
-            <a:avLst/>
-          </a:prstGeom>
-          <a:noFill/>
-        </p:spPr>
-        <p:txBody>
-          <a:bodyPr wrap="square" anchor="t" lIns="0" rIns="0" tIns="0" bIns="0">
-            <a:spAutoFit/>
-          </a:bodyPr>
-          <a:lstStyle/>
-          <a:p>
-            <a:pPr algn="ctr">
-              <a:lnSpc>
-                <a:spcPct val="112000"/>
-              </a:lnSpc>
-            </a:pPr>
-            <a:r>
-              <a:rPr sz="825" b="0">
-                <a:solidFill>
-                  <a:srgbClr val="555555"/>
-                </a:solidFill>
-                <a:latin typeface="Arial"/>
-                <a:ea typeface="Arial"/>
-              </a:rPr>
-              <a:t>'23  512</a:t>
-            </a:r>
-          </a:p>
-        </p:txBody>
-      </p:sp>
-      <p:sp>
-        <p:nvSpPr>
-          <p:cNvPr id="93" name="Rectangle 92"/>
-          <p:cNvSpPr/>
-          <p:nvPr/>
-        </p:nvSpPr>
-        <p:spPr>
-          <a:xfrm>
-            <a:off x="5440679" y="7918704"/>
-            <a:ext cx="310896" cy="256032"/>
-          </a:xfrm>
-          <a:prstGeom prst="rect">
-            <a:avLst/>
-          </a:prstGeom>
-          <a:solidFill>
-            <a:srgbClr val="1428A0"/>
-          </a:solidFill>
-          <a:ln>
-            <a:noFill/>
-          </a:ln>
-          <a:effectLst/>
-        </p:spPr>
-        <p:style>
-          <a:lnRef idx="1">
-            <a:schemeClr val="accent1"/>
-          </a:lnRef>
-          <a:fillRef idx="3">
-            <a:schemeClr val="accent1"/>
-          </a:fillRef>
-          <a:effectRef idx="2">
-            <a:schemeClr val="accent1"/>
-          </a:effectRef>
-          <a:fontRef idx="minor">
-            <a:schemeClr val="lt1"/>
-          </a:fontRef>
-        </p:style>
-        <p:txBody>
-          <a:bodyPr rtlCol="0" anchor="ctr"/>
-          <a:lstStyle/>
-          <a:p>
-            <a:pPr algn="ctr"/>
-          </a:p>
-        </p:txBody>
-      </p:sp>
-      <p:sp>
-        <p:nvSpPr>
-          <p:cNvPr id="94" name="TextBox 93"/>
-          <p:cNvSpPr txBox="1"/>
-          <p:nvPr/>
-        </p:nvSpPr>
-        <p:spPr>
-          <a:xfrm>
-            <a:off x="5257799" y="8193024"/>
-            <a:ext cx="676656" cy="164592"/>
-          </a:xfrm>
-          <a:prstGeom prst="rect">
-            <a:avLst/>
-          </a:prstGeom>
-          <a:noFill/>
-        </p:spPr>
-        <p:txBody>
-          <a:bodyPr wrap="square" anchor="t" lIns="0" rIns="0" tIns="0" bIns="0">
-            <a:spAutoFit/>
-          </a:bodyPr>
-          <a:lstStyle/>
-          <a:p>
-            <a:pPr algn="ctr">
-              <a:lnSpc>
-                <a:spcPct val="112000"/>
-              </a:lnSpc>
-            </a:pPr>
-            <a:r>
-              <a:rPr sz="825" b="1">
-                <a:solidFill>
-                  <a:srgbClr val="1A1A1A"/>
-                </a:solidFill>
-                <a:latin typeface="Arial"/>
-                <a:ea typeface="Arial"/>
-              </a:rPr>
-              <a:t>'25  1,024</a:t>
-            </a:r>
-          </a:p>
-        </p:txBody>
-      </p:sp>
-      <p:sp>
-        <p:nvSpPr>
-          <p:cNvPr id="95" name="Rectangle 94"/>
-          <p:cNvSpPr/>
-          <p:nvPr/>
-        </p:nvSpPr>
-        <p:spPr>
-          <a:xfrm>
-            <a:off x="6025896" y="7708392"/>
-            <a:ext cx="3535680" cy="731520"/>
-          </a:xfrm>
-          <a:prstGeom prst="rect">
-            <a:avLst/>
-          </a:prstGeom>
-          <a:solidFill>
-            <a:srgbClr val="FFFFFF"/>
-          </a:solidFill>
-          <a:ln w="9525">
-            <a:solidFill>
-              <a:srgbClr val="D9D9D9"/>
-            </a:solidFill>
-          </a:ln>
-          <a:effectLst/>
-        </p:spPr>
-        <p:style>
-          <a:lnRef idx="1">
-            <a:schemeClr val="accent1"/>
-          </a:lnRef>
-          <a:fillRef idx="3">
-            <a:schemeClr val="accent1"/>
-          </a:fillRef>
-          <a:effectRef idx="2">
-            <a:schemeClr val="accent1"/>
-          </a:effectRef>
-          <a:fontRef idx="minor">
-            <a:schemeClr val="lt1"/>
-          </a:fontRef>
-        </p:style>
-        <p:txBody>
-          <a:bodyPr rtlCol="0" anchor="ctr"/>
-          <a:lstStyle/>
-          <a:p>
-            <a:pPr algn="ctr"/>
-          </a:p>
-        </p:txBody>
-      </p:sp>
-      <p:sp>
-        <p:nvSpPr>
-          <p:cNvPr id="96" name="TextBox 95"/>
-          <p:cNvSpPr txBox="1"/>
-          <p:nvPr/>
-        </p:nvSpPr>
-        <p:spPr>
-          <a:xfrm>
-            <a:off x="6135624" y="7744967"/>
-            <a:ext cx="3316224" cy="164592"/>
-          </a:xfrm>
-          <a:prstGeom prst="rect">
-            <a:avLst/>
-          </a:prstGeom>
-          <a:noFill/>
-        </p:spPr>
-        <p:txBody>
-          <a:bodyPr wrap="square" anchor="t" lIns="0" rIns="0" tIns="0" bIns="0">
-            <a:spAutoFit/>
-          </a:bodyPr>
-          <a:lstStyle/>
-          <a:p>
-            <a:pPr algn="l">
-              <a:lnSpc>
-                <a:spcPct val="112000"/>
-              </a:lnSpc>
-            </a:pPr>
-            <a:r>
-              <a:rPr sz="875" b="0">
-                <a:solidFill>
-                  <a:srgbClr val="8A8A8A"/>
-                </a:solidFill>
-                <a:latin typeface="Arial"/>
-                <a:ea typeface="Arial"/>
-              </a:rPr>
-              <a:t>다이 (단품)</a:t>
-            </a:r>
-          </a:p>
-        </p:txBody>
-      </p:sp>
-      <p:sp>
-        <p:nvSpPr>
-          <p:cNvPr id="97" name="TextBox 96"/>
-          <p:cNvSpPr txBox="1"/>
-          <p:nvPr/>
-        </p:nvSpPr>
-        <p:spPr>
-          <a:xfrm>
-            <a:off x="6135624" y="7900416"/>
-            <a:ext cx="3316224" cy="201168"/>
-          </a:xfrm>
-          <a:prstGeom prst="rect">
-            <a:avLst/>
-          </a:prstGeom>
-          <a:noFill/>
-        </p:spPr>
-        <p:txBody>
-          <a:bodyPr wrap="square" anchor="t" lIns="0" rIns="0" tIns="0" bIns="0">
-            <a:spAutoFit/>
-          </a:bodyPr>
-          <a:lstStyle/>
-          <a:p>
-            <a:pPr algn="l">
-              <a:lnSpc>
-                <a:spcPct val="112000"/>
-              </a:lnSpc>
-            </a:pPr>
-            <a:r>
-              <a:rPr sz="1125" b="1">
-                <a:solidFill>
-                  <a:srgbClr val="1A1A1A"/>
-                </a:solidFill>
-                <a:latin typeface="Arial"/>
-                <a:ea typeface="Arial"/>
-              </a:rPr>
-              <a:t>다이 수 8배 ↑ → 다이 고장률 8배 ↓ 필요</a:t>
-            </a:r>
-          </a:p>
-        </p:txBody>
-      </p:sp>
-      <p:sp>
-        <p:nvSpPr>
-          <p:cNvPr id="98" name="TextBox 97"/>
-          <p:cNvSpPr txBox="1"/>
-          <p:nvPr/>
-        </p:nvSpPr>
-        <p:spPr>
-          <a:xfrm>
-            <a:off x="6135624" y="8101583"/>
-            <a:ext cx="3316224" cy="320040"/>
-          </a:xfrm>
-          <a:prstGeom prst="rect">
-            <a:avLst/>
-          </a:prstGeom>
-          <a:noFill/>
-        </p:spPr>
-        <p:txBody>
-          <a:bodyPr wrap="square" anchor="t" lIns="0" rIns="0" tIns="0" bIns="0">
-            <a:spAutoFit/>
-          </a:bodyPr>
-          <a:lstStyle/>
-          <a:p>
-            <a:pPr algn="l">
-              <a:lnSpc>
-                <a:spcPct val="100000"/>
-              </a:lnSpc>
-            </a:pPr>
-            <a:r>
-              <a:rPr sz="825" b="0">
-                <a:solidFill>
-                  <a:srgbClr val="555555"/>
-                </a:solidFill>
-                <a:latin typeface="Arial"/>
-                <a:ea typeface="Arial"/>
-              </a:rPr>
-              <a:t>SSD 고장률 ≈ N × 다이 고장률 · 칩 면적↔수율과 같은 원리 · 다이 고장률 개선은 기술적 한계</a:t>
-            </a:r>
-          </a:p>
-        </p:txBody>
-      </p:sp>
-      <p:sp>
-        <p:nvSpPr>
-          <p:cNvPr id="99" name="Right Arrow 98"/>
-          <p:cNvSpPr/>
-          <p:nvPr/>
-        </p:nvSpPr>
-        <p:spPr>
-          <a:xfrm>
-            <a:off x="9634728" y="7982712"/>
-            <a:ext cx="219456" cy="182880"/>
-          </a:xfrm>
-          <a:prstGeom prst="rightArrow">
-            <a:avLst/>
-          </a:prstGeom>
-          <a:solidFill>
-            <a:srgbClr val="1428A0"/>
-          </a:solidFill>
-          <a:ln>
-            <a:noFill/>
-          </a:ln>
-          <a:effectLst/>
-        </p:spPr>
-        <p:style>
-          <a:lnRef idx="1">
-            <a:schemeClr val="accent1"/>
-          </a:lnRef>
-          <a:fillRef idx="3">
-            <a:schemeClr val="accent1"/>
-          </a:fillRef>
-          <a:effectRef idx="2">
-            <a:schemeClr val="accent1"/>
-          </a:effectRef>
-          <a:fontRef idx="minor">
-            <a:schemeClr val="lt1"/>
-          </a:fontRef>
-        </p:style>
-        <p:txBody>
-          <a:bodyPr rtlCol="0" anchor="ctr"/>
-          <a:lstStyle/>
-          <a:p>
-            <a:pPr algn="ctr"/>
+              <a:t>패리티 · 예비 용량 오버헤드가 다이 수와 함께 증가</a:t>
+            </a:r>
           </a:p>
         </p:txBody>
       </p:sp>
@@ -7593,216 +7671,8 @@
         </p:nvSpPr>
         <p:spPr>
           <a:xfrm>
-            <a:off x="9927336" y="7708392"/>
-            <a:ext cx="3535680" cy="731520"/>
-          </a:xfrm>
-          <a:prstGeom prst="rect">
-            <a:avLst/>
-          </a:prstGeom>
-          <a:solidFill>
-            <a:srgbClr val="AAB8E8"/>
-          </a:solidFill>
-          <a:ln>
-            <a:noFill/>
-          </a:ln>
-          <a:effectLst/>
-        </p:spPr>
-        <p:style>
-          <a:lnRef idx="1">
-            <a:schemeClr val="accent1"/>
-          </a:lnRef>
-          <a:fillRef idx="3">
-            <a:schemeClr val="accent1"/>
-          </a:fillRef>
-          <a:effectRef idx="2">
-            <a:schemeClr val="accent1"/>
-          </a:effectRef>
-          <a:fontRef idx="minor">
-            <a:schemeClr val="lt1"/>
-          </a:fontRef>
-        </p:style>
-        <p:txBody>
-          <a:bodyPr rtlCol="0" anchor="ctr"/>
-          <a:lstStyle/>
-          <a:p>
-            <a:pPr algn="ctr"/>
-          </a:p>
-        </p:txBody>
-      </p:sp>
-      <p:sp>
-        <p:nvSpPr>
-          <p:cNvPr id="101" name="TextBox 100"/>
-          <p:cNvSpPr txBox="1"/>
-          <p:nvPr/>
-        </p:nvSpPr>
-        <p:spPr>
-          <a:xfrm>
-            <a:off x="10037064" y="7744967"/>
-            <a:ext cx="3316224" cy="164592"/>
-          </a:xfrm>
-          <a:prstGeom prst="rect">
-            <a:avLst/>
-          </a:prstGeom>
-          <a:noFill/>
-        </p:spPr>
-        <p:txBody>
-          <a:bodyPr wrap="square" anchor="t" lIns="0" rIns="0" tIns="0" bIns="0">
-            <a:spAutoFit/>
-          </a:bodyPr>
-          <a:lstStyle/>
-          <a:p>
-            <a:pPr algn="l">
-              <a:lnSpc>
-                <a:spcPct val="112000"/>
-              </a:lnSpc>
-            </a:pPr>
-            <a:r>
-              <a:rPr sz="875" b="0">
-                <a:solidFill>
-                  <a:srgbClr val="1A1A1A"/>
-                </a:solidFill>
-                <a:latin typeface="Arial"/>
-                <a:ea typeface="Arial"/>
-              </a:rPr>
-              <a:t>SSD 내부 (현재 해법)</a:t>
-            </a:r>
-          </a:p>
-        </p:txBody>
-      </p:sp>
-      <p:sp>
-        <p:nvSpPr>
-          <p:cNvPr id="102" name="TextBox 101"/>
-          <p:cNvSpPr txBox="1"/>
-          <p:nvPr/>
-        </p:nvSpPr>
-        <p:spPr>
-          <a:xfrm>
-            <a:off x="10037064" y="7900416"/>
-            <a:ext cx="3316224" cy="201168"/>
-          </a:xfrm>
-          <a:prstGeom prst="rect">
-            <a:avLst/>
-          </a:prstGeom>
-          <a:noFill/>
-        </p:spPr>
-        <p:txBody>
-          <a:bodyPr wrap="square" anchor="t" lIns="0" rIns="0" tIns="0" bIns="0">
-            <a:spAutoFit/>
-          </a:bodyPr>
-          <a:lstStyle/>
-          <a:p>
-            <a:pPr algn="l">
-              <a:lnSpc>
-                <a:spcPct val="112000"/>
-              </a:lnSpc>
-            </a:pPr>
-            <a:r>
-              <a:rPr sz="1125" b="1">
-                <a:solidFill>
-                  <a:srgbClr val="1A1A1A"/>
-                </a:solidFill>
-                <a:latin typeface="Arial"/>
-                <a:ea typeface="Arial"/>
-              </a:rPr>
-              <a:t>다이 RAID · 여분 다이 · 다이 은퇴</a:t>
-            </a:r>
-          </a:p>
-        </p:txBody>
-      </p:sp>
-      <p:sp>
-        <p:nvSpPr>
-          <p:cNvPr id="103" name="TextBox 102"/>
-          <p:cNvSpPr txBox="1"/>
-          <p:nvPr/>
-        </p:nvSpPr>
-        <p:spPr>
-          <a:xfrm>
-            <a:off x="10037064" y="8101583"/>
-            <a:ext cx="3316224" cy="320040"/>
-          </a:xfrm>
-          <a:prstGeom prst="rect">
-            <a:avLst/>
-          </a:prstGeom>
-          <a:noFill/>
-        </p:spPr>
-        <p:txBody>
-          <a:bodyPr wrap="square" anchor="t" lIns="0" rIns="0" tIns="0" bIns="0">
-            <a:spAutoFit/>
-          </a:bodyPr>
-          <a:lstStyle/>
-          <a:p>
-            <a:pPr algn="l">
-              <a:lnSpc>
-                <a:spcPct val="100000"/>
-              </a:lnSpc>
-            </a:pPr>
-            <a:r>
-              <a:rPr sz="825" b="0">
-                <a:solidFill>
-                  <a:srgbClr val="555555"/>
-                </a:solidFill>
-                <a:latin typeface="Arial"/>
-                <a:ea typeface="Arial"/>
-              </a:rPr>
-              <a:t>Micron RAIN(XOR 패리티 다이) · 삼성 Fail-in-Place(PM1733, 감량 운영) · 패리티·예비 용량 오버헤드 ↑</a:t>
-            </a:r>
-          </a:p>
-        </p:txBody>
-      </p:sp>
-      <p:sp>
-        <p:nvSpPr>
-          <p:cNvPr id="104" name="Right Arrow 103"/>
-          <p:cNvSpPr/>
-          <p:nvPr/>
-        </p:nvSpPr>
-        <p:spPr>
-          <a:xfrm>
-            <a:off x="13536168" y="7982712"/>
-            <a:ext cx="219456" cy="182880"/>
-          </a:xfrm>
-          <a:prstGeom prst="rightArrow">
-            <a:avLst/>
-          </a:prstGeom>
-          <a:solidFill>
-            <a:srgbClr val="AAB8E8"/>
-          </a:solidFill>
-          <a:ln>
-            <a:noFill/>
-          </a:ln>
-          <a:effectLst/>
-        </p:spPr>
-        <p:style>
-          <a:lnRef idx="1">
-            <a:schemeClr val="accent1"/>
-          </a:lnRef>
-          <a:fillRef idx="3">
-            <a:schemeClr val="accent1"/>
-          </a:fillRef>
-          <a:effectRef idx="2">
-            <a:schemeClr val="accent1"/>
-          </a:effectRef>
-          <a:fontRef idx="minor">
-            <a:schemeClr val="lt1"/>
-          </a:fontRef>
-        </p:style>
-        <p:txBody>
-          <a:bodyPr rtlCol="0" anchor="ctr"/>
-          <a:lstStyle/>
-          <a:p>
-            <a:pPr algn="ctr"/>
-          </a:p>
-        </p:txBody>
-      </p:sp>
-      <p:sp>
-        <p:nvSpPr>
-          <p:cNvPr id="105" name="Rectangle 104"/>
-          <p:cNvSpPr/>
-          <p:nvPr/>
-        </p:nvSpPr>
-        <p:spPr>
-          <a:xfrm>
-            <a:off x="13828776" y="7708392"/>
-            <a:ext cx="3535680" cy="731520"/>
+            <a:off x="13889736" y="6345936"/>
+            <a:ext cx="3675888" cy="2139696"/>
           </a:xfrm>
           <a:prstGeom prst="rect">
             <a:avLst/>
@@ -7842,14 +7712,14 @@
       </p:sp>
       <p:sp>
         <p:nvSpPr>
-          <p:cNvPr id="106" name="TextBox 105"/>
+          <p:cNvPr id="101" name="TextBox 100"/>
           <p:cNvSpPr txBox="1"/>
           <p:nvPr/>
         </p:nvSpPr>
         <p:spPr>
           <a:xfrm>
-            <a:off x="13938504" y="7744967"/>
-            <a:ext cx="3316224" cy="164592"/>
+            <a:off x="14017752" y="6455664"/>
+            <a:ext cx="2377440" cy="182880"/>
           </a:xfrm>
           <a:prstGeom prst="rect">
             <a:avLst/>
@@ -7868,28 +7738,68 @@
               </a:lnSpc>
             </a:pPr>
             <a:r>
-              <a:rPr sz="875" b="0">
+              <a:rPr sz="975" b="0">
                 <a:solidFill>
                   <a:srgbClr val="1428A0"/>
                 </a:solidFill>
                 <a:latin typeface="Arial"/>
                 <a:ea typeface="Arial"/>
               </a:rPr>
-              <a:t>상위 계층 (SSD 단독 한계 시)</a:t>
-            </a:r>
-          </a:p>
-        </p:txBody>
-      </p:sp>
-      <p:sp>
-        <p:nvSpPr>
-          <p:cNvPr id="107" name="TextBox 106"/>
+              <a:t>SSD 단독 한계 시 · 상위 계층</a:t>
+            </a:r>
+          </a:p>
+        </p:txBody>
+      </p:sp>
+      <p:sp>
+        <p:nvSpPr>
+          <p:cNvPr id="102" name="TextBox 101"/>
           <p:cNvSpPr txBox="1"/>
           <p:nvPr/>
         </p:nvSpPr>
         <p:spPr>
           <a:xfrm>
-            <a:off x="13938504" y="7900416"/>
-            <a:ext cx="3316224" cy="201168"/>
+            <a:off x="16157448" y="6455664"/>
+            <a:ext cx="1280160" cy="201168"/>
+          </a:xfrm>
+          <a:prstGeom prst="rect">
+            <a:avLst/>
+          </a:prstGeom>
+          <a:noFill/>
+        </p:spPr>
+        <p:txBody>
+          <a:bodyPr wrap="square" anchor="t" lIns="0" rIns="0" tIns="0" bIns="0">
+            <a:spAutoFit/>
+          </a:bodyPr>
+          <a:lstStyle/>
+          <a:p>
+            <a:pPr algn="r">
+              <a:lnSpc>
+                <a:spcPct val="112000"/>
+              </a:lnSpc>
+            </a:pPr>
+            <a:r>
+              <a:rPr sz="975" b="1">
+                <a:solidFill>
+                  <a:srgbClr val="1428A0"/>
+                </a:solidFill>
+                <a:latin typeface="Arial"/>
+                <a:ea typeface="Arial"/>
+              </a:rPr>
+              <a:t>준비 중</a:t>
+            </a:r>
+          </a:p>
+        </p:txBody>
+      </p:sp>
+      <p:sp>
+        <p:nvSpPr>
+          <p:cNvPr id="103" name="TextBox 102"/>
+          <p:cNvSpPr txBox="1"/>
+          <p:nvPr/>
+        </p:nvSpPr>
+        <p:spPr>
+          <a:xfrm>
+            <a:off x="14017752" y="6675120"/>
+            <a:ext cx="3419856" cy="237744"/>
           </a:xfrm>
           <a:prstGeom prst="rect">
             <a:avLst/>
@@ -7908,7 +7818,7 @@
               </a:lnSpc>
             </a:pPr>
             <a:r>
-              <a:rPr sz="1125" b="1">
+              <a:rPr sz="1275" b="1">
                 <a:solidFill>
                   <a:srgbClr val="1A1A1A"/>
                 </a:solidFill>
@@ -7922,56 +7832,16 @@
       </p:sp>
       <p:sp>
         <p:nvSpPr>
-          <p:cNvPr id="108" name="TextBox 107"/>
-          <p:cNvSpPr txBox="1"/>
-          <p:nvPr/>
-        </p:nvSpPr>
-        <p:spPr>
-          <a:xfrm>
-            <a:off x="13938504" y="8101583"/>
-            <a:ext cx="3316224" cy="320040"/>
-          </a:xfrm>
-          <a:prstGeom prst="rect">
-            <a:avLst/>
-          </a:prstGeom>
-          <a:noFill/>
-        </p:spPr>
-        <p:txBody>
-          <a:bodyPr wrap="square" anchor="t" lIns="0" rIns="0" tIns="0" bIns="0">
-            <a:spAutoFit/>
-          </a:bodyPr>
-          <a:lstStyle/>
-          <a:p>
-            <a:pPr algn="l">
-              <a:lnSpc>
-                <a:spcPct val="100000"/>
-              </a:lnSpc>
-            </a:pPr>
-            <a:r>
-              <a:rPr sz="825" b="0">
-                <a:solidFill>
-                  <a:srgbClr val="555555"/>
-                </a:solidFill>
-                <a:latin typeface="Arial"/>
-                <a:ea typeface="Arial"/>
-              </a:rPr>
-              <a:t>OCP SMART XOR 복구 카운트(호스트 관측) · 플랫폼 fail-in-place(MS Hyrax) · 드라이브 간 소거 부호</a:t>
-            </a:r>
-          </a:p>
-        </p:txBody>
-      </p:sp>
-      <p:sp>
-        <p:nvSpPr>
-          <p:cNvPr id="109" name="Rectangle 108"/>
+          <p:cNvPr id="104" name="Oval 103"/>
           <p:cNvSpPr/>
           <p:nvPr/>
         </p:nvSpPr>
         <p:spPr>
           <a:xfrm>
-            <a:off x="722376" y="8613648"/>
-            <a:ext cx="16843248" cy="731520"/>
-          </a:xfrm>
-          <a:prstGeom prst="rect">
+            <a:off x="14017752" y="7077456"/>
+            <a:ext cx="109728" cy="109728"/>
+          </a:xfrm>
+          <a:prstGeom prst="ellipse">
             <a:avLst/>
           </a:prstGeom>
           <a:solidFill>
@@ -8006,7 +7876,289 @@
       </p:sp>
       <p:sp>
         <p:nvSpPr>
-          <p:cNvPr id="110" name="TextBox 109"/>
+          <p:cNvPr id="105" name="TextBox 104"/>
+          <p:cNvSpPr txBox="1"/>
+          <p:nvPr/>
+        </p:nvSpPr>
+        <p:spPr>
+          <a:xfrm>
+            <a:off x="14218920" y="7004304"/>
+            <a:ext cx="3218688" cy="384048"/>
+          </a:xfrm>
+          <a:prstGeom prst="rect">
+            <a:avLst/>
+          </a:prstGeom>
+          <a:noFill/>
+        </p:spPr>
+        <p:txBody>
+          <a:bodyPr wrap="square" anchor="t" lIns="0" rIns="0" tIns="0" bIns="0">
+            <a:spAutoFit/>
+          </a:bodyPr>
+          <a:lstStyle/>
+          <a:p>
+            <a:pPr algn="l">
+              <a:lnSpc>
+                <a:spcPct val="100000"/>
+              </a:lnSpc>
+            </a:pPr>
+            <a:r>
+              <a:rPr sz="975" b="1">
+                <a:solidFill>
+                  <a:srgbClr val="1A1A1A"/>
+                </a:solidFill>
+                <a:latin typeface="Arial"/>
+                <a:ea typeface="Arial"/>
+              </a:rPr>
+              <a:t>호스트 관측  </a:t>
+            </a:r>
+            <a:r>
+              <a:rPr sz="900" b="0">
+                <a:solidFill>
+                  <a:srgbClr val="555555"/>
+                </a:solidFill>
+                <a:latin typeface="Arial"/>
+                <a:ea typeface="Arial"/>
+              </a:rPr>
+              <a:t>OCP SMART XOR 복구 카운트로 다이 복구 이벤트를 하이퍼스케일러가 감시</a:t>
+            </a:r>
+          </a:p>
+        </p:txBody>
+      </p:sp>
+      <p:sp>
+        <p:nvSpPr>
+          <p:cNvPr id="106" name="Oval 105"/>
+          <p:cNvSpPr/>
+          <p:nvPr/>
+        </p:nvSpPr>
+        <p:spPr>
+          <a:xfrm>
+            <a:off x="14017752" y="7534656"/>
+            <a:ext cx="109728" cy="109728"/>
+          </a:xfrm>
+          <a:prstGeom prst="ellipse">
+            <a:avLst/>
+          </a:prstGeom>
+          <a:solidFill>
+            <a:srgbClr val="1428A0"/>
+          </a:solidFill>
+          <a:ln>
+            <a:noFill/>
+          </a:ln>
+          <a:effectLst/>
+        </p:spPr>
+        <p:style>
+          <a:lnRef idx="1">
+            <a:schemeClr val="accent1"/>
+          </a:lnRef>
+          <a:fillRef idx="3">
+            <a:schemeClr val="accent1"/>
+          </a:fillRef>
+          <a:effectRef idx="2">
+            <a:schemeClr val="accent1"/>
+          </a:effectRef>
+          <a:fontRef idx="minor">
+            <a:schemeClr val="lt1"/>
+          </a:fontRef>
+        </p:style>
+        <p:txBody>
+          <a:bodyPr rtlCol="0" anchor="ctr"/>
+          <a:lstStyle/>
+          <a:p>
+            <a:pPr algn="ctr"/>
+          </a:p>
+        </p:txBody>
+      </p:sp>
+      <p:sp>
+        <p:nvSpPr>
+          <p:cNvPr id="107" name="TextBox 106"/>
+          <p:cNvSpPr txBox="1"/>
+          <p:nvPr/>
+        </p:nvSpPr>
+        <p:spPr>
+          <a:xfrm>
+            <a:off x="14218920" y="7461504"/>
+            <a:ext cx="3218688" cy="384048"/>
+          </a:xfrm>
+          <a:prstGeom prst="rect">
+            <a:avLst/>
+          </a:prstGeom>
+          <a:noFill/>
+        </p:spPr>
+        <p:txBody>
+          <a:bodyPr wrap="square" anchor="t" lIns="0" rIns="0" tIns="0" bIns="0">
+            <a:spAutoFit/>
+          </a:bodyPr>
+          <a:lstStyle/>
+          <a:p>
+            <a:pPr algn="l">
+              <a:lnSpc>
+                <a:spcPct val="100000"/>
+              </a:lnSpc>
+            </a:pPr>
+            <a:r>
+              <a:rPr sz="975" b="1">
+                <a:solidFill>
+                  <a:srgbClr val="1A1A1A"/>
+                </a:solidFill>
+                <a:latin typeface="Arial"/>
+                <a:ea typeface="Arial"/>
+              </a:rPr>
+              <a:t>플랫폼 수용  </a:t>
+            </a:r>
+            <a:r>
+              <a:rPr sz="900" b="0">
+                <a:solidFill>
+                  <a:srgbClr val="555555"/>
+                </a:solidFill>
+                <a:latin typeface="Arial"/>
+                <a:ea typeface="Arial"/>
+              </a:rPr>
+              <a:t>고장 부품의 감량 운영을 스케줄러가 흡수 (Microsoft Hyrax, 수리 -50~60%)</a:t>
+            </a:r>
+          </a:p>
+        </p:txBody>
+      </p:sp>
+      <p:sp>
+        <p:nvSpPr>
+          <p:cNvPr id="108" name="Oval 107"/>
+          <p:cNvSpPr/>
+          <p:nvPr/>
+        </p:nvSpPr>
+        <p:spPr>
+          <a:xfrm>
+            <a:off x="14017752" y="7991856"/>
+            <a:ext cx="109728" cy="109728"/>
+          </a:xfrm>
+          <a:prstGeom prst="ellipse">
+            <a:avLst/>
+          </a:prstGeom>
+          <a:solidFill>
+            <a:srgbClr val="1428A0"/>
+          </a:solidFill>
+          <a:ln>
+            <a:noFill/>
+          </a:ln>
+          <a:effectLst/>
+        </p:spPr>
+        <p:style>
+          <a:lnRef idx="1">
+            <a:schemeClr val="accent1"/>
+          </a:lnRef>
+          <a:fillRef idx="3">
+            <a:schemeClr val="accent1"/>
+          </a:fillRef>
+          <a:effectRef idx="2">
+            <a:schemeClr val="accent1"/>
+          </a:effectRef>
+          <a:fontRef idx="minor">
+            <a:schemeClr val="lt1"/>
+          </a:fontRef>
+        </p:style>
+        <p:txBody>
+          <a:bodyPr rtlCol="0" anchor="ctr"/>
+          <a:lstStyle/>
+          <a:p>
+            <a:pPr algn="ctr"/>
+          </a:p>
+        </p:txBody>
+      </p:sp>
+      <p:sp>
+        <p:nvSpPr>
+          <p:cNvPr id="109" name="TextBox 108"/>
+          <p:cNvSpPr txBox="1"/>
+          <p:nvPr/>
+        </p:nvSpPr>
+        <p:spPr>
+          <a:xfrm>
+            <a:off x="14218920" y="7918704"/>
+            <a:ext cx="3218688" cy="384048"/>
+          </a:xfrm>
+          <a:prstGeom prst="rect">
+            <a:avLst/>
+          </a:prstGeom>
+          <a:noFill/>
+        </p:spPr>
+        <p:txBody>
+          <a:bodyPr wrap="square" anchor="t" lIns="0" rIns="0" tIns="0" bIns="0">
+            <a:spAutoFit/>
+          </a:bodyPr>
+          <a:lstStyle/>
+          <a:p>
+            <a:pPr algn="l">
+              <a:lnSpc>
+                <a:spcPct val="100000"/>
+              </a:lnSpc>
+            </a:pPr>
+            <a:r>
+              <a:rPr sz="975" b="1">
+                <a:solidFill>
+                  <a:srgbClr val="1A1A1A"/>
+                </a:solidFill>
+                <a:latin typeface="Arial"/>
+                <a:ea typeface="Arial"/>
+              </a:rPr>
+              <a:t>드라이브 간  </a:t>
+            </a:r>
+            <a:r>
+              <a:rPr sz="900" b="0">
+                <a:solidFill>
+                  <a:srgbClr val="555555"/>
+                </a:solidFill>
+                <a:latin typeface="Arial"/>
+                <a:ea typeface="Arial"/>
+              </a:rPr>
+              <a:t>소거 부호 · 복제가 SSD 단위 고장을 이미 흡수</a:t>
+            </a:r>
+          </a:p>
+        </p:txBody>
+      </p:sp>
+      <p:sp>
+        <p:nvSpPr>
+          <p:cNvPr id="110" name="Rectangle 109"/>
+          <p:cNvSpPr/>
+          <p:nvPr/>
+        </p:nvSpPr>
+        <p:spPr>
+          <a:xfrm>
+            <a:off x="722376" y="8613648"/>
+            <a:ext cx="16843248" cy="731520"/>
+          </a:xfrm>
+          <a:prstGeom prst="rect">
+            <a:avLst/>
+          </a:prstGeom>
+          <a:solidFill>
+            <a:srgbClr val="1428A0"/>
+          </a:solidFill>
+          <a:ln>
+            <a:noFill/>
+          </a:ln>
+          <a:effectLst/>
+        </p:spPr>
+        <p:style>
+          <a:lnRef idx="1">
+            <a:schemeClr val="accent1"/>
+          </a:lnRef>
+          <a:fillRef idx="3">
+            <a:schemeClr val="accent1"/>
+          </a:fillRef>
+          <a:effectRef idx="2">
+            <a:schemeClr val="accent1"/>
+          </a:effectRef>
+          <a:fontRef idx="minor">
+            <a:schemeClr val="lt1"/>
+          </a:fontRef>
+        </p:style>
+        <p:txBody>
+          <a:bodyPr rtlCol="0" anchor="ctr"/>
+          <a:lstStyle/>
+          <a:p>
+            <a:pPr algn="ctr"/>
+          </a:p>
+        </p:txBody>
+      </p:sp>
+      <p:sp>
+        <p:nvSpPr>
+          <p:cNvPr id="111" name="TextBox 110"/>
           <p:cNvSpPr txBox="1"/>
           <p:nvPr/>
         </p:nvSpPr>
@@ -8046,7 +8198,7 @@
       </p:sp>
       <p:sp>
         <p:nvSpPr>
-          <p:cNvPr id="111" name="TextBox 110"/>
+          <p:cNvPr id="112" name="TextBox 111"/>
           <p:cNvSpPr txBox="1"/>
           <p:nvPr/>
         </p:nvSpPr>
@@ -8103,7 +8255,7 @@
       </p:sp>
       <p:sp>
         <p:nvSpPr>
-          <p:cNvPr id="112" name="TextBox 111"/>
+          <p:cNvPr id="113" name="TextBox 112"/>
           <p:cNvSpPr txBox="1"/>
           <p:nvPr/>
         </p:nvSpPr>
@@ -8143,7 +8295,7 @@
       </p:sp>
       <p:sp>
         <p:nvSpPr>
-          <p:cNvPr id="113" name="TextBox 112"/>
+          <p:cNvPr id="114" name="TextBox 113"/>
           <p:cNvSpPr txBox="1"/>
           <p:nvPr/>
         </p:nvSpPr>

--- a/outputs/presentation/memory-solution-ladder.pptx
+++ b/outputs/presentation/memory-solution-ladder.pptx
@@ -502,7 +502,7 @@
           <a:lstStyle/>
           <a:p>
             <a:r>
-              <a:t>1장은 이관 매트릭스입니다. 열은 이관 단계이고 행은 두 축입니다. 요구는 고객이 정하고 고정입니다. 단품 지표는 셀과 다이의 지표이며 세대마다 악화됩니다. 보상은 먼저 SSD 계층에서, 다음은 호스트·시스템 계층에서 이뤄집니다. 두 행 사이의 산식 DWPD = P/E × (1+OP) ÷ WAF ÷ 365 × 년은 각 항의 결정 주체가 열과 대응함을 보입니다. P/E는 셀, OP는 SSD, WAF는 호스트·앱, 년과 요구 DWPD는 고객입니다. 내구성 행. 요구: 추론 캐시 계층은 DWPD 1~3(현재 TLC 수준, ScaleFlux 제시 유효 요구 7~10), UBER는 JESD218 기준 10의 -15승·-16승으로 고정입니다. 단품: 비트/셀을 늘릴수록 P/E 사이클은 SLC 30K~100K에서 QLC 100~1K로 100배 감소했고, RBER은 약 백만 배 상승했습니다. 보존·사이클링·리드 디스터브로 시간에 따라 변하는 산포는 셀 단독으로 보정할 수 없습니다. SSD 계층: 1단계 컨트롤러 ECC는 1비트/512B에서 LDPC 120비트/KB로 60배 강화돼 UBER 요구를 충족했습니다. 완결된 이관입니다. 2단계 SSD 단독 워크로드 최적화(2014~2019: Multi-stream·AutoStream·FTL 핫/콜드 추정·NVMe IO 결정성)는 QoS와 성능은 개선했으나 데이터 수명을 SSD가 감지할 수 없어 실 워크로드 WAF는 3 수준에 머물렀고, 정격 DWPD는 17에서 0.4로 내려와 요구 1~3과 10~40배 격차가 생겼습니다. 부분 성공입니다. 호스트·시스템 계층: 3단계 호스트 시스템 공동 설계는 호스트가 데이터 수명을 지정(배치 표준)하고 캐시 관리자·애플리케이션 정책까지 함께 설계해 WAF를 3.22에서 1.03으로 낮췄습니다. 68% 감소, 유효 DWPD 3.1배이며 DWPD 요구를 충족합니다. QLC로 요구 DWPD를 충족하는 유일한 경로이고 본 덱 2~5장이 이 단계입니다. 신뢰성 행. 요구: JESD218 기능 고장률 FFR 3% 이하로 고정입니다. 보호가 없으면 SSD 고장률은 다이 수 N에 비례하므로 칩 면적이 커질수록 수율이 떨어지는 것과 같은 구조입니다. 단품: SSD당 NAND 다이 수는 S3700 800GB 128개(2012)에서 Kioxia LC9 245TB 1,024개(2025, 2Tb 다이 32단 스택 32패키지)로 8배 늘었고, 같은 FFR을 지키려면 다이 고장률을 8배 낮추거나 다이 고장을 허용해야 합니다. 다이 고장률 개선은 기술적 한계에 닿았습니다. SSD 계층(현재 해법): 다이 RAID(Micron RAIN, 슈퍼페이지 XOR 패리티 다이), 여분 다이, 다이 은퇴와 감량 운영(삼성 Fail-in-Place PM1733: 고장 다이를 제외하고 4~8GB 감량 운영)입니다. 패리티와 예비 용량 오버헤드가 다이 수와 함께 증가합니다. 상위 계층(SSD 단독 한계 시): OCP SMART의 XOR 복구 카운트로 호스트가 다이 복구를 관측하고, Microsoft Hyrax처럼 플랫폼이 감량 운영을 수용하며, 드라이브 간 소거 부호가 SSD 고장을 흡수합니다. 결론: 두 축 모두 요구는 고정이고 단품은 악화되며 보상은 상위 계층으로 이관됩니다. QLC로 요구 DWPD를 충족하는 경로는 호스트 시스템 공동 설계뿐이며 이는 산식의 귀결입니다. 그 규격이 언제 정의되는지가 2장입니다. 근거 등급은 보고서 부록 A F28~F47에 있습니다.</a:t>
+              <a:t>2장은 이관 매트릭스입니다. 1장의 문제 제기(대용량·1~3 DWPD 요구)를 받아, 지금까지 단품이 못 푼 문제를 어느 계층이 풀어 왔는지의 경향을 보이고 호스트 시스템 수준 해법의 당위성을 세웁니다. 열은 이관 단계이고 행은 두 축입니다. 요구는 고객이 정하고 고정입니다. 단품 지표는 셀과 다이의 지표이며 세대마다 악화됩니다. 보상은 먼저 SSD 계층에서, 다음은 호스트·시스템 계층에서 이뤄집니다. 두 행 사이의 산식 DWPD = P/E × (1+OP) ÷ WAF ÷ 365 × 년은 각 항의 결정 주체가 열과 대응함을 보입니다. P/E는 셀, OP는 SSD, WAF는 호스트·앱, 년과 요구 DWPD는 고객입니다. 내구성 행. 요구: 추론 캐시 계층은 DWPD 1~3(현재 TLC 수준, ScaleFlux 제시 유효 요구 7~10), UBER는 JESD218 기준 10의 -15승·-16승으로 고정입니다. 단품: 비트/셀을 늘릴수록 P/E 사이클은 SLC 30K~100K에서 QLC 100~1K로 100배 감소했고, RBER은 약 백만 배 상승했습니다. 보존·사이클링·리드 디스터브로 시간에 따라 변하는 산포는 셀 단독으로 보정할 수 없습니다. SSD 계층: 1단계 컨트롤러 ECC는 1비트/512B에서 LDPC 120비트/KB로 60배 강화돼 UBER 요구를 충족했습니다. 완결된 이관입니다. 2단계 SSD 단독 워크로드 최적화(2014~2019: Multi-stream·AutoStream·FTL 핫/콜드 추정·NVMe IO 결정성)는 QoS와 성능은 개선했으나 데이터 수명을 SSD가 감지할 수 없어 실 워크로드 WAF는 3 수준에 머물렀고, 정격 DWPD는 17에서 0.4로 내려와 요구 1~3과 10~40배 격차가 생겼습니다. 부분 성공입니다. 호스트·시스템 계층: 3단계 호스트 시스템 공동 설계는 호스트가 데이터 수명을 지정(배치 표준)하고 캐시 관리자·애플리케이션 정책까지 함께 설계해 WAF를 3.22에서 1.03으로 낮췄습니다. 68% 감소, 유효 DWPD 3.1배이며 DWPD 요구를 충족합니다. QLC로 요구 DWPD를 충족하는 유일한 경로이고 본 덱 3~4장이 이 단계입니다. 신뢰성 행. 요구: JESD218 기능 고장률 FFR 3% 이하로 고정입니다. 보호가 없으면 SSD 고장률은 다이 수 N에 비례하므로 칩 면적이 커질수록 수율이 떨어지는 것과 같은 구조입니다. 단품: SSD당 NAND 다이 수는 S3700 800GB 128개(2012)에서 Kioxia LC9 245TB 1,024개(2025, 2Tb 다이 32단 스택 32패키지)로 8배 늘었고, 같은 FFR을 지키려면 다이 고장률을 8배 낮추거나 다이 고장을 허용해야 합니다. 다이 고장률 개선은 기술적 한계에 닿았습니다. SSD 계층(현재 해법): 다이 RAID(Micron RAIN, 슈퍼페이지 XOR 패리티 다이), 여분 다이, 다이 은퇴와 감량 운영(삼성 Fail-in-Place PM1733: 고장 다이를 제외하고 4~8GB 감량 운영)입니다. 패리티와 예비 용량 오버헤드가 다이 수와 함께 증가합니다. 상위 계층(SSD 단독 한계 시): OCP SMART의 XOR 복구 카운트로 호스트가 다이 복구를 관측하고, Microsoft Hyrax처럼 플랫폼이 감량 운영을 수용하며, 드라이브 간 소거 부호가 SSD 고장을 흡수합니다. 결론: 두 축 모두 요구는 고정이고 단품은 악화되며 보상은 상위 계층으로 이관됩니다. QLC로 요구 DWPD를 충족하는 경로는 호스트 시스템 공동 설계뿐이며 이는 산식의 귀결입니다. 1장이 제기한 대용량·높은 DWPD 요구에 대한 당위성이며, 해소 경로가 3장입니다. 근거 등급은 보고서 부록 A F28~F47에 있습니다.</a:t>
             </a:r>
           </a:p>
         </p:txBody>
@@ -4337,7 +4337,7 @@
                 <a:latin typeface="Arial"/>
                 <a:ea typeface="Arial"/>
               </a:rPr>
-              <a:t>3단계 공동 설계 (2022~, 본 덱 2~5장)</a:t>
+              <a:t>3단계 공동 설계 (2022~, 본 덱 3~4장)</a:t>
             </a:r>
           </a:p>
         </p:txBody>
@@ -6838,7 +6838,7 @@
                 <a:latin typeface="Arial"/>
                 <a:ea typeface="Arial"/>
               </a:rPr>
-              <a:t>배치 표준 · 캐시 관리자 정책 · FDE·SCA 공동 설계 = 본 덱 2~5장</a:t>
+              <a:t>배치 표준 · 캐시 관리자 정책 · FDE·SCA 공동 설계 = 본 덱 3~4장</a:t>
             </a:r>
           </a:p>
         </p:txBody>

--- a/outputs/presentation/memory-solution-ladder.pptx
+++ b/outputs/presentation/memory-solution-ladder.pptx
@@ -502,7 +502,7 @@
           <a:lstStyle/>
           <a:p>
             <a:r>
-              <a:t>2장은 이관 매트릭스입니다. 1장의 문제 제기(대용량·1~3 DWPD 요구)를 받아, 지금까지 단품이 못 푼 문제를 어느 계층이 풀어 왔는지의 경향을 보이고 호스트 시스템 수준 해법의 당위성을 세웁니다. 열은 이관 단계이고 행은 두 축입니다. 요구는 고객이 정하고 고정입니다. 단품 지표는 셀과 다이의 지표이며 세대마다 악화됩니다. 보상은 먼저 SSD 계층에서, 다음은 호스트·시스템 계층에서 이뤄집니다. 두 행 사이의 산식 DWPD = P/E × (1+OP) ÷ WAF ÷ 365 × 년은 각 항의 결정 주체가 열과 대응함을 보입니다. P/E는 셀, OP는 SSD, WAF는 호스트·앱, 년과 요구 DWPD는 고객입니다. 내구성 행. 요구: 추론 캐시 계층은 DWPD 1~3(현재 TLC 수준, ScaleFlux 제시 유효 요구 7~10), UBER는 JESD218 기준 10의 -15승·-16승으로 고정입니다. 단품: 비트/셀을 늘릴수록 P/E 사이클은 SLC 30K~100K에서 QLC 100~1K로 100배 감소했고, RBER은 약 백만 배 상승했습니다. 보존·사이클링·리드 디스터브로 시간에 따라 변하는 산포는 셀 단독으로 보정할 수 없습니다. SSD 계층: 1단계 컨트롤러 ECC는 1비트/512B에서 LDPC 120비트/KB로 60배 강화돼 UBER 요구를 충족했습니다. 완결된 이관입니다. 2단계 SSD 단독 워크로드 최적화(2014~2019: Multi-stream·AutoStream·FTL 핫/콜드 추정·NVMe IO 결정성)는 QoS와 성능은 개선했으나 데이터 수명을 SSD가 감지할 수 없어 실 워크로드 WAF는 3 수준에 머물렀고, 정격 DWPD는 17에서 0.4로 내려와 요구 1~3과 10~40배 격차가 생겼습니다. 부분 성공입니다. 호스트·시스템 계층: 3단계 호스트 시스템 공동 설계는 호스트가 데이터 수명을 지정(배치 표준)하고 캐시 관리자·애플리케이션 정책까지 함께 설계해 WAF를 3.22에서 1.03으로 낮췄습니다. 68% 감소, 유효 DWPD 3.1배이며 DWPD 요구를 충족합니다. QLC로 요구 DWPD를 충족하는 유일한 경로이고 본 덱 3~4장이 이 단계입니다. 신뢰성 행. 요구: JESD218 기능 고장률 FFR 3% 이하로 고정입니다. 보호가 없으면 SSD 고장률은 다이 수 N에 비례하므로 칩 면적이 커질수록 수율이 떨어지는 것과 같은 구조입니다. 단품: SSD당 NAND 다이 수는 S3700 800GB 128개(2012)에서 Kioxia LC9 245TB 1,024개(2025, 2Tb 다이 32단 스택 32패키지)로 8배 늘었고, 같은 FFR을 지키려면 다이 고장률을 8배 낮추거나 다이 고장을 허용해야 합니다. 다이 고장률 개선은 기술적 한계에 닿았습니다. SSD 계층(현재 해법): 다이 RAID(Micron RAIN, 슈퍼페이지 XOR 패리티 다이), 여분 다이, 다이 은퇴와 감량 운영(삼성 Fail-in-Place PM1733: 고장 다이를 제외하고 4~8GB 감량 운영)입니다. 패리티와 예비 용량 오버헤드가 다이 수와 함께 증가합니다. 상위 계층(SSD 단독 한계 시): OCP SMART의 XOR 복구 카운트로 호스트가 다이 복구를 관측하고, Microsoft Hyrax처럼 플랫폼이 감량 운영을 수용하며, 드라이브 간 소거 부호가 SSD 고장을 흡수합니다. 결론: 두 축 모두 요구는 고정이고 단품은 악화되며 보상은 상위 계층으로 이관됩니다. QLC로 요구 DWPD를 충족하는 경로는 호스트 시스템 공동 설계뿐이며 이는 산식의 귀결입니다. 1장이 제기한 대용량·높은 DWPD 요구에 대한 당위성이며, 해소 경로가 3장입니다. 근거 등급은 보고서 부록 A F28~F47에 있습니다.</a:t>
+              <a:t>2장은 이관 매트릭스입니다. 1장의 문제(고용량 QLC의 DWPD 격차)를 받아, 지금까지 단품이 못 푼 문제를 어느 계층이 풀어 왔는지의 경향을 보이고 호스트 시스템 수준 해법이 왜 필요한지를 세웁니다. 열은 이관 단계(요구 → 단품 지표 → SSD 계층의 보상 → 호스트·시스템 계층의 보상), 행은 내구성 축입니다. 산식 DWPD = P/E × (1+OP) ÷ WAF ÷ 365 × 년의 각 항은 결정 주체가 열과 대응합니다. 요구: 추론 캐시 계층 제품은 DWPD 1~3(TLC), UBER는 JESD218 기준으로 고정입니다. 단품: P/E 사이클은 SLC 30K~100K에서 QLC 100~1K로 100배 감소, RBER은 약 백만 배 상승했고 셀은 시간에 따라 변하는 산포를 단독으로 보정하지 못합니다. SSD 계층: 1단계 컨트롤러 ECC(1비트/512B → LDPC 120비트/KB, 60배)는 UBER 요구를 충족해 완결됐습니다. 2단계 SSD 단독 워크로드 최적화(2014~2019: Multi-stream·AutoStream·FTL 핫/콜드 추정·NVMe IO 결정성)는 QoS·성능은 개선했으나 데이터 수명을 SSD가 감지할 수 없어 실 워크로드 WAF는 3 수준에 머물렀고, 정격 DWPD는 17에서 0.4로 내려왔습니다. 호스트·시스템 계층: 3단계 호스트 공동 설계는 호스트가 데이터 수명을 지정해 WAF를 약 3에서 약 1로 낮춥니다. 범용 랜덤 워크로드 실측(삼성·NVM Express, 50% 사용률)과 CacheLib 실측(3.22 → 1.03)이 근거이고, 데이터베이스 영역에서는 호스트 쓰기 패턴만으로 SSD WAF 1을 보장한 VLDB 2026 연구가 있습니다. 다만 KV 캐시 워크로드의 FDP WAF 실측은 공개 문헌에 없으므로 이 장의 주장은 검증할 가설이며, 4장 Phase 2 실측이 그 검증입니다. 하단 지렛대 스트립이 이 장의 핵심 정정입니다. 호스트 배치 하나로는 격차가 닫히지 않습니다. WAF 지렛대는 유효 DWPD 약 2.9배이고, 동급 비교 격차는 2~10배이므로 다이 세대(P/E), OP, SLC 캐시·쓰기 정형, 보증연수·TBW 기준, 워크로드 재정의(어드미션·TLC 혼합 계층)와 결합해야 요구에 도달합니다. 이 축들은 모두 병행 중이며 본 보고는 호스트 축만 다룹니다. 호스트·고객 쪽 지렛대가 다수라는 점이 공동 설계의 근거입니다. 결론: 호스트 공동 설계는 QLC DWPD의 남은 지렛대이며, 다른 축과 결합해 격차를 닫습니다. 신뢰성 축(다이 수·고장률)은 호스트가 아니라 SSD가 풀 문제라 3장에서 따로 다룹니다. 근거 등급은 보고서 부록 A F28~F54에 있습니다.</a:t>
             </a:r>
           </a:p>
         </p:txBody>
@@ -3663,7 +3663,7 @@
                 <a:latin typeface="Arial"/>
                 <a:ea typeface="Arial"/>
               </a:rPr>
-              <a:t>요구는 고정, 단품은 악화, 보상은 상위 계층으로: QLC의 DWPD는 호스트 공동 설계로만 충족됩니다</a:t>
+              <a:t>요구는 고정, 단품은 악화, 보상은 상위 계층으로: 남은 지렛대 WAF는 호스트에 있습니다</a:t>
             </a:r>
           </a:p>
         </p:txBody>
@@ -3703,7 +3703,7 @@
                 <a:latin typeface="Arial"/>
                 <a:ea typeface="Arial"/>
               </a:rPr>
-              <a:t>내구성 축과 신뢰성 축 모두 같은 구조입니다. SSD 단독 최적화는 QoS·성능은 개선했으나 WAF는 낮추지 못했습니다.</a:t>
+              <a:t>1장의 격차를 지금까지 어느 계층이 풀어 왔는지 보면, SSD 단독 최적화는 QoS·성능은 개선했으나 WAF는 낮추지 못했습니다.</a:t>
             </a:r>
           </a:p>
         </p:txBody>
@@ -4337,7 +4337,7 @@
                 <a:latin typeface="Arial"/>
                 <a:ea typeface="Arial"/>
               </a:rPr>
-              <a:t>3단계 공동 설계 (2022~, 본 덱 3~4장)</a:t>
+              <a:t>3단계 공동 설계 (2022~, 본 덱 4~5장)</a:t>
             </a:r>
           </a:p>
         </p:txBody>
@@ -5282,7 +5282,7 @@
         <p:spPr>
           <a:xfrm>
             <a:off x="722376" y="3730752"/>
-            <a:ext cx="1188720" cy="2505456"/>
+            <a:ext cx="1188720" cy="2962656"/>
           </a:xfrm>
           <a:prstGeom prst="rect">
             <a:avLst/>
@@ -5326,7 +5326,7 @@
         <p:spPr>
           <a:xfrm>
             <a:off x="722376" y="3730752"/>
-            <a:ext cx="54864" cy="2505456"/>
+            <a:ext cx="54864" cy="2962656"/>
           </a:xfrm>
           <a:prstGeom prst="rect">
             <a:avLst/>
@@ -5466,193 +5466,8 @@
         </p:nvSpPr>
         <p:spPr>
           <a:xfrm>
-            <a:off x="722376" y="6345936"/>
-            <a:ext cx="1188720" cy="2139696"/>
-          </a:xfrm>
-          <a:prstGeom prst="rect">
-            <a:avLst/>
-          </a:prstGeom>
-          <a:solidFill>
-            <a:srgbClr val="F4F6FC"/>
-          </a:solidFill>
-          <a:ln>
-            <a:noFill/>
-          </a:ln>
-          <a:effectLst/>
-        </p:spPr>
-        <p:style>
-          <a:lnRef idx="1">
-            <a:schemeClr val="accent1"/>
-          </a:lnRef>
-          <a:fillRef idx="3">
-            <a:schemeClr val="accent1"/>
-          </a:fillRef>
-          <a:effectRef idx="2">
-            <a:schemeClr val="accent1"/>
-          </a:effectRef>
-          <a:fontRef idx="minor">
-            <a:schemeClr val="lt1"/>
-          </a:fontRef>
-        </p:style>
-        <p:txBody>
-          <a:bodyPr rtlCol="0" anchor="ctr"/>
-          <a:lstStyle/>
-          <a:p>
-            <a:pPr algn="ctr"/>
-          </a:p>
-        </p:txBody>
-      </p:sp>
-      <p:sp>
-        <p:nvSpPr>
-          <p:cNvPr id="49" name="Rectangle 48"/>
-          <p:cNvSpPr/>
-          <p:nvPr/>
-        </p:nvSpPr>
-        <p:spPr>
-          <a:xfrm>
-            <a:off x="722376" y="6345936"/>
-            <a:ext cx="54864" cy="2139696"/>
-          </a:xfrm>
-          <a:prstGeom prst="rect">
-            <a:avLst/>
-          </a:prstGeom>
-          <a:solidFill>
-            <a:srgbClr val="1428A0"/>
-          </a:solidFill>
-          <a:ln>
-            <a:noFill/>
-          </a:ln>
-          <a:effectLst/>
-        </p:spPr>
-        <p:style>
-          <a:lnRef idx="1">
-            <a:schemeClr val="accent1"/>
-          </a:lnRef>
-          <a:fillRef idx="3">
-            <a:schemeClr val="accent1"/>
-          </a:fillRef>
-          <a:effectRef idx="2">
-            <a:schemeClr val="accent1"/>
-          </a:effectRef>
-          <a:fontRef idx="minor">
-            <a:schemeClr val="lt1"/>
-          </a:fontRef>
-        </p:style>
-        <p:txBody>
-          <a:bodyPr rtlCol="0" anchor="ctr"/>
-          <a:lstStyle/>
-          <a:p>
-            <a:pPr algn="ctr"/>
-          </a:p>
-        </p:txBody>
-      </p:sp>
-      <p:sp>
-        <p:nvSpPr>
-          <p:cNvPr id="50" name="TextBox 49"/>
-          <p:cNvSpPr txBox="1"/>
-          <p:nvPr/>
-        </p:nvSpPr>
-        <p:spPr>
-          <a:xfrm>
-            <a:off x="886968" y="6492240"/>
-            <a:ext cx="950976" cy="274320"/>
-          </a:xfrm>
-          <a:prstGeom prst="rect">
-            <a:avLst/>
-          </a:prstGeom>
-          <a:noFill/>
-        </p:spPr>
-        <p:txBody>
-          <a:bodyPr wrap="square" anchor="t" lIns="0" rIns="0" tIns="0" bIns="0">
-            <a:spAutoFit/>
-          </a:bodyPr>
-          <a:lstStyle/>
-          <a:p>
-            <a:pPr algn="l">
-              <a:lnSpc>
-                <a:spcPct val="112000"/>
-              </a:lnSpc>
-            </a:pPr>
-            <a:r>
-              <a:rPr sz="1275" b="1">
-                <a:solidFill>
-                  <a:srgbClr val="1428A0"/>
-                </a:solidFill>
-                <a:latin typeface="Arial"/>
-                <a:ea typeface="Arial"/>
-              </a:rPr>
-              <a:t>신뢰성 축</a:t>
-            </a:r>
-          </a:p>
-        </p:txBody>
-      </p:sp>
-      <p:sp>
-        <p:nvSpPr>
-          <p:cNvPr id="51" name="TextBox 50"/>
-          <p:cNvSpPr txBox="1"/>
-          <p:nvPr/>
-        </p:nvSpPr>
-        <p:spPr>
-          <a:xfrm>
-            <a:off x="886968" y="6803136"/>
-            <a:ext cx="950976" cy="548640"/>
-          </a:xfrm>
-          <a:prstGeom prst="rect">
-            <a:avLst/>
-          </a:prstGeom>
-          <a:noFill/>
-        </p:spPr>
-        <p:txBody>
-          <a:bodyPr wrap="square" anchor="t" lIns="0" rIns="0" tIns="0" bIns="0">
-            <a:spAutoFit/>
-          </a:bodyPr>
-          <a:lstStyle/>
-          <a:p>
-            <a:pPr algn="l">
-              <a:lnSpc>
-                <a:spcPct val="100000"/>
-              </a:lnSpc>
-            </a:pPr>
-            <a:r>
-              <a:rPr sz="975" b="0">
-                <a:solidFill>
-                  <a:srgbClr val="555555"/>
-                </a:solidFill>
-                <a:latin typeface="Arial"/>
-                <a:ea typeface="Arial"/>
-              </a:rPr>
-              <a:t>다이 수</a:t>
-            </a:r>
-          </a:p>
-          <a:p>
-            <a:pPr algn="l">
-              <a:lnSpc>
-                <a:spcPct val="100000"/>
-              </a:lnSpc>
-            </a:pPr>
-            <a:r>
-              <a:rPr sz="975" b="0">
-                <a:solidFill>
-                  <a:srgbClr val="555555"/>
-                </a:solidFill>
-                <a:latin typeface="Arial"/>
-                <a:ea typeface="Arial"/>
-              </a:rPr>
-              <a:t>다이 고장률</a:t>
-            </a:r>
-          </a:p>
-        </p:txBody>
-      </p:sp>
-      <p:sp>
-        <p:nvSpPr>
-          <p:cNvPr id="52" name="Rectangle 51"/>
-          <p:cNvSpPr/>
-          <p:nvPr/>
-        </p:nvSpPr>
-        <p:spPr>
-          <a:xfrm>
             <a:off x="2039112" y="3730752"/>
-            <a:ext cx="3675888" cy="2505456"/>
+            <a:ext cx="3675888" cy="2962656"/>
           </a:xfrm>
           <a:prstGeom prst="rect">
             <a:avLst/>
@@ -5691,7 +5506,7 @@
       </p:sp>
       <p:sp>
         <p:nvSpPr>
-          <p:cNvPr id="53" name="TextBox 52"/>
+          <p:cNvPr id="49" name="TextBox 48"/>
           <p:cNvSpPr txBox="1"/>
           <p:nvPr/>
         </p:nvSpPr>
@@ -5731,7 +5546,7 @@
       </p:sp>
       <p:sp>
         <p:nvSpPr>
-          <p:cNvPr id="54" name="TextBox 53"/>
+          <p:cNvPr id="50" name="TextBox 49"/>
           <p:cNvSpPr txBox="1"/>
           <p:nvPr/>
         </p:nvSpPr>
@@ -5771,7 +5586,7 @@
       </p:sp>
       <p:sp>
         <p:nvSpPr>
-          <p:cNvPr id="55" name="TextBox 54"/>
+          <p:cNvPr id="51" name="TextBox 50"/>
           <p:cNvSpPr txBox="1"/>
           <p:nvPr/>
         </p:nvSpPr>
@@ -5811,7 +5626,7 @@
       </p:sp>
       <p:sp>
         <p:nvSpPr>
-          <p:cNvPr id="56" name="Rectangle 55"/>
+          <p:cNvPr id="52" name="Rectangle 51"/>
           <p:cNvSpPr/>
           <p:nvPr/>
         </p:nvSpPr>
@@ -5855,7 +5670,7 @@
       </p:sp>
       <p:sp>
         <p:nvSpPr>
-          <p:cNvPr id="57" name="TextBox 56"/>
+          <p:cNvPr id="53" name="TextBox 52"/>
           <p:cNvSpPr txBox="1"/>
           <p:nvPr/>
         </p:nvSpPr>
@@ -5895,7 +5710,7 @@
       </p:sp>
       <p:sp>
         <p:nvSpPr>
-          <p:cNvPr id="58" name="TextBox 57"/>
+          <p:cNvPr id="54" name="TextBox 53"/>
           <p:cNvSpPr txBox="1"/>
           <p:nvPr/>
         </p:nvSpPr>
@@ -5965,7 +5780,7 @@
       </p:sp>
       <p:sp>
         <p:nvSpPr>
-          <p:cNvPr id="59" name="TextBox 58"/>
+          <p:cNvPr id="55" name="TextBox 54"/>
           <p:cNvSpPr txBox="1"/>
           <p:nvPr/>
         </p:nvSpPr>
@@ -6005,14 +5820,14 @@
       </p:sp>
       <p:sp>
         <p:nvSpPr>
-          <p:cNvPr id="60" name="Rectangle 59"/>
+          <p:cNvPr id="56" name="Rectangle 55"/>
           <p:cNvSpPr/>
           <p:nvPr/>
         </p:nvSpPr>
         <p:spPr>
           <a:xfrm>
             <a:off x="5989320" y="3730752"/>
-            <a:ext cx="3675888" cy="2505456"/>
+            <a:ext cx="3675888" cy="2962656"/>
           </a:xfrm>
           <a:prstGeom prst="rect">
             <a:avLst/>
@@ -6051,7 +5866,7 @@
       </p:sp>
       <p:pic>
         <p:nvPicPr>
-          <p:cNvPr id="61" name="Picture 60" descr="ladder_cell_component.png"/>
+          <p:cNvPr id="57" name="Picture 56" descr="ladder_cell_component.png"/>
           <p:cNvPicPr>
             <a:picLocks noChangeAspect="1"/>
           </p:cNvPicPr>
@@ -6075,13 +5890,13 @@
       </p:pic>
       <p:sp>
         <p:nvSpPr>
-          <p:cNvPr id="62" name="TextBox 61"/>
+          <p:cNvPr id="58" name="TextBox 57"/>
           <p:cNvSpPr txBox="1"/>
           <p:nvPr/>
         </p:nvSpPr>
         <p:spPr>
           <a:xfrm>
-            <a:off x="6117336" y="5852160"/>
+            <a:off x="6117336" y="6309360"/>
             <a:ext cx="3419856" cy="329184"/>
           </a:xfrm>
           <a:prstGeom prst="rect">
@@ -6115,14 +5930,14 @@
       </p:sp>
       <p:sp>
         <p:nvSpPr>
-          <p:cNvPr id="63" name="Rectangle 62"/>
+          <p:cNvPr id="59" name="Rectangle 58"/>
           <p:cNvSpPr/>
           <p:nvPr/>
         </p:nvSpPr>
         <p:spPr>
           <a:xfrm>
             <a:off x="9939528" y="3730752"/>
-            <a:ext cx="3675888" cy="2505456"/>
+            <a:ext cx="3675888" cy="2962656"/>
           </a:xfrm>
           <a:prstGeom prst="rect">
             <a:avLst/>
@@ -6161,7 +5976,7 @@
       </p:sp>
       <p:sp>
         <p:nvSpPr>
-          <p:cNvPr id="64" name="Rectangle 63"/>
+          <p:cNvPr id="60" name="Rectangle 59"/>
           <p:cNvSpPr/>
           <p:nvPr/>
         </p:nvSpPr>
@@ -6207,7 +6022,7 @@
       </p:sp>
       <p:sp>
         <p:nvSpPr>
-          <p:cNvPr id="65" name="Rectangle 64"/>
+          <p:cNvPr id="61" name="Rectangle 60"/>
           <p:cNvSpPr/>
           <p:nvPr/>
         </p:nvSpPr>
@@ -6251,7 +6066,7 @@
       </p:sp>
       <p:sp>
         <p:nvSpPr>
-          <p:cNvPr id="66" name="TextBox 65"/>
+          <p:cNvPr id="62" name="TextBox 61"/>
           <p:cNvSpPr txBox="1"/>
           <p:nvPr/>
         </p:nvSpPr>
@@ -6291,7 +6106,7 @@
       </p:sp>
       <p:sp>
         <p:nvSpPr>
-          <p:cNvPr id="67" name="TextBox 66"/>
+          <p:cNvPr id="63" name="TextBox 62"/>
           <p:cNvSpPr txBox="1"/>
           <p:nvPr/>
         </p:nvSpPr>
@@ -6331,7 +6146,7 @@
       </p:sp>
       <p:sp>
         <p:nvSpPr>
-          <p:cNvPr id="68" name="TextBox 67"/>
+          <p:cNvPr id="64" name="TextBox 63"/>
           <p:cNvSpPr txBox="1"/>
           <p:nvPr/>
         </p:nvSpPr>
@@ -6371,7 +6186,7 @@
       </p:sp>
       <p:sp>
         <p:nvSpPr>
-          <p:cNvPr id="69" name="TextBox 68"/>
+          <p:cNvPr id="65" name="TextBox 64"/>
           <p:cNvSpPr txBox="1"/>
           <p:nvPr/>
         </p:nvSpPr>
@@ -6411,14 +6226,14 @@
       </p:sp>
       <p:sp>
         <p:nvSpPr>
-          <p:cNvPr id="70" name="Rectangle 69"/>
+          <p:cNvPr id="66" name="Rectangle 65"/>
           <p:cNvSpPr/>
           <p:nvPr/>
         </p:nvSpPr>
         <p:spPr>
           <a:xfrm>
             <a:off x="10030968" y="4571999"/>
-            <a:ext cx="3493008" cy="1572768"/>
+            <a:ext cx="3493008" cy="2029968"/>
           </a:xfrm>
           <a:prstGeom prst="rect">
             <a:avLst/>
@@ -6455,7 +6270,7 @@
       </p:sp>
       <p:sp>
         <p:nvSpPr>
-          <p:cNvPr id="71" name="TextBox 70"/>
+          <p:cNvPr id="67" name="TextBox 66"/>
           <p:cNvSpPr txBox="1"/>
           <p:nvPr/>
         </p:nvSpPr>
@@ -6495,7 +6310,7 @@
       </p:sp>
       <p:sp>
         <p:nvSpPr>
-          <p:cNvPr id="72" name="TextBox 71"/>
+          <p:cNvPr id="68" name="TextBox 67"/>
           <p:cNvSpPr txBox="1"/>
           <p:nvPr/>
         </p:nvSpPr>
@@ -6528,14 +6343,14 @@
                 <a:latin typeface="Arial"/>
                 <a:ea typeface="Arial"/>
               </a:rPr>
-              <a:t>DWPD 요구 미충족</a:t>
-            </a:r>
-          </a:p>
-        </p:txBody>
-      </p:sp>
-      <p:sp>
-        <p:nvSpPr>
-          <p:cNvPr id="73" name="TextBox 72"/>
+              <a:t>요구 미달</a:t>
+            </a:r>
+          </a:p>
+        </p:txBody>
+      </p:sp>
+      <p:sp>
+        <p:nvSpPr>
+          <p:cNvPr id="69" name="TextBox 68"/>
           <p:cNvSpPr txBox="1"/>
           <p:nvPr/>
         </p:nvSpPr>
@@ -6575,7 +6390,7 @@
       </p:sp>
       <p:sp>
         <p:nvSpPr>
-          <p:cNvPr id="74" name="TextBox 73"/>
+          <p:cNvPr id="70" name="TextBox 69"/>
           <p:cNvSpPr txBox="1"/>
           <p:nvPr/>
         </p:nvSpPr>
@@ -6615,7 +6430,7 @@
       </p:sp>
       <p:pic>
         <p:nvPicPr>
-          <p:cNvPr id="75" name="Picture 74" descr="ladder_cell_dwpd.png"/>
+          <p:cNvPr id="71" name="Picture 70" descr="ladder_cell_dwpd.png"/>
           <p:cNvPicPr>
             <a:picLocks noChangeAspect="1"/>
           </p:cNvPicPr>
@@ -6639,14 +6454,14 @@
       </p:pic>
       <p:sp>
         <p:nvSpPr>
-          <p:cNvPr id="76" name="Rectangle 75"/>
+          <p:cNvPr id="72" name="Rectangle 71"/>
           <p:cNvSpPr/>
           <p:nvPr/>
         </p:nvSpPr>
         <p:spPr>
           <a:xfrm>
             <a:off x="13889736" y="3730752"/>
-            <a:ext cx="3675888" cy="2505456"/>
+            <a:ext cx="3675888" cy="2962656"/>
           </a:xfrm>
           <a:prstGeom prst="rect">
             <a:avLst/>
@@ -6685,14 +6500,14 @@
       </p:sp>
       <p:sp>
         <p:nvSpPr>
-          <p:cNvPr id="77" name="TextBox 76"/>
+          <p:cNvPr id="73" name="TextBox 72"/>
           <p:cNvSpPr txBox="1"/>
           <p:nvPr/>
         </p:nvSpPr>
         <p:spPr>
           <a:xfrm>
             <a:off x="14017752" y="3840480"/>
-            <a:ext cx="2377440" cy="182880"/>
+            <a:ext cx="2103120" cy="182880"/>
           </a:xfrm>
           <a:prstGeom prst="rect">
             <a:avLst/>
@@ -6718,21 +6533,21 @@
                 <a:latin typeface="Arial"/>
                 <a:ea typeface="Arial"/>
               </a:rPr>
-              <a:t>3단계 · 호스트 시스템 공동 설계 (2022~)</a:t>
-            </a:r>
-          </a:p>
-        </p:txBody>
-      </p:sp>
-      <p:sp>
-        <p:nvSpPr>
-          <p:cNvPr id="78" name="TextBox 77"/>
+              <a:t>3단계 · 호스트 공동 설계 (2022~)</a:t>
+            </a:r>
+          </a:p>
+        </p:txBody>
+      </p:sp>
+      <p:sp>
+        <p:nvSpPr>
+          <p:cNvPr id="74" name="TextBox 73"/>
           <p:cNvSpPr txBox="1"/>
           <p:nvPr/>
         </p:nvSpPr>
         <p:spPr>
           <a:xfrm>
-            <a:off x="16157448" y="3840480"/>
-            <a:ext cx="1280160" cy="201168"/>
+            <a:off x="16066008" y="3840480"/>
+            <a:ext cx="1371600" cy="201168"/>
           </a:xfrm>
           <a:prstGeom prst="rect">
             <a:avLst/>
@@ -6758,14 +6573,14 @@
                 <a:latin typeface="Arial"/>
                 <a:ea typeface="Arial"/>
               </a:rPr>
-              <a:t>DWPD 요구 충족</a:t>
-            </a:r>
-          </a:p>
-        </p:txBody>
-      </p:sp>
-      <p:sp>
-        <p:nvSpPr>
-          <p:cNvPr id="79" name="TextBox 78"/>
+              <a:t>요구 도달 · 조건부</a:t>
+            </a:r>
+          </a:p>
+        </p:txBody>
+      </p:sp>
+      <p:sp>
+        <p:nvSpPr>
+          <p:cNvPr id="75" name="TextBox 74"/>
           <p:cNvSpPr txBox="1"/>
           <p:nvPr/>
         </p:nvSpPr>
@@ -6798,14 +6613,14 @@
                 <a:latin typeface="Arial"/>
                 <a:ea typeface="Arial"/>
               </a:rPr>
-              <a:t>호스트가 데이터 수명을 지정 → WAF 3.2 → 1.0</a:t>
-            </a:r>
-          </a:p>
-        </p:txBody>
-      </p:sp>
-      <p:sp>
-        <p:nvSpPr>
-          <p:cNvPr id="80" name="TextBox 79"/>
+              <a:t>호스트가 데이터 수명을 지정 → WAF ≈3 → ≈1</a:t>
+            </a:r>
+          </a:p>
+        </p:txBody>
+      </p:sp>
+      <p:sp>
+        <p:nvSpPr>
+          <p:cNvPr id="76" name="TextBox 75"/>
           <p:cNvSpPr txBox="1"/>
           <p:nvPr/>
         </p:nvSpPr>
@@ -6838,14 +6653,14 @@
                 <a:latin typeface="Arial"/>
                 <a:ea typeface="Arial"/>
               </a:rPr>
-              <a:t>배치 표준 · 캐시 관리자 정책 · FDE·SCA 공동 설계 = 본 덱 3~4장</a:t>
+              <a:t>배치 표준 · 캐시 관리자 정책 · 공동 설계 = 본 덱 4~5장</a:t>
             </a:r>
           </a:p>
         </p:txBody>
       </p:sp>
       <p:pic>
         <p:nvPicPr>
-          <p:cNvPr id="81" name="Picture 80" descr="ladder_cell_waf.png"/>
+          <p:cNvPr id="77" name="Picture 76" descr="ladder_cell_waf.png"/>
           <p:cNvPicPr>
             <a:picLocks noChangeAspect="1"/>
           </p:cNvPicPr>
@@ -6869,13 +6684,13 @@
       </p:pic>
       <p:sp>
         <p:nvSpPr>
-          <p:cNvPr id="82" name="TextBox 81"/>
+          <p:cNvPr id="78" name="TextBox 77"/>
           <p:cNvSpPr txBox="1"/>
           <p:nvPr/>
         </p:nvSpPr>
         <p:spPr>
           <a:xfrm>
-            <a:off x="14017752" y="5870448"/>
+            <a:off x="14017752" y="6327648"/>
             <a:ext cx="3419856" cy="310896"/>
           </a:xfrm>
           <a:prstGeom prst="rect">
@@ -6902,21 +6717,21 @@
                 <a:latin typeface="Arial"/>
                 <a:ea typeface="Arial"/>
               </a:rPr>
-              <a:t>QLC로 요구 DWPD를 충족하는 유일한 경로 · 산식의 귀결</a:t>
-            </a:r>
-          </a:p>
-        </p:txBody>
-      </p:sp>
-      <p:sp>
-        <p:nvSpPr>
-          <p:cNvPr id="83" name="Rectangle 82"/>
+              <a:t>호스트가 쥔 남은 지렛대(×2.9) · KV 캐시 실측은 Phase 2 검증 대상</a:t>
+            </a:r>
+          </a:p>
+        </p:txBody>
+      </p:sp>
+      <p:sp>
+        <p:nvSpPr>
+          <p:cNvPr id="79" name="Rectangle 78"/>
           <p:cNvSpPr/>
           <p:nvPr/>
         </p:nvSpPr>
         <p:spPr>
           <a:xfrm>
-            <a:off x="2039112" y="6345936"/>
-            <a:ext cx="3675888" cy="2139696"/>
+            <a:off x="722376" y="6821424"/>
+            <a:ext cx="1188720" cy="1609344"/>
           </a:xfrm>
           <a:prstGeom prst="rect">
             <a:avLst/>
@@ -6924,10 +6739,8 @@
           <a:solidFill>
             <a:srgbClr val="F4F6FC"/>
           </a:solidFill>
-          <a:ln w="12700">
-            <a:solidFill>
-              <a:srgbClr val="AAB8E8"/>
-            </a:solidFill>
+          <a:ln>
+            <a:noFill/>
           </a:ln>
           <a:effectLst/>
         </p:spPr>
@@ -6955,14 +6768,58 @@
       </p:sp>
       <p:sp>
         <p:nvSpPr>
-          <p:cNvPr id="84" name="TextBox 83"/>
+          <p:cNvPr id="80" name="Rectangle 79"/>
+          <p:cNvSpPr/>
+          <p:nvPr/>
+        </p:nvSpPr>
+        <p:spPr>
+          <a:xfrm>
+            <a:off x="722376" y="6821424"/>
+            <a:ext cx="54864" cy="1609344"/>
+          </a:xfrm>
+          <a:prstGeom prst="rect">
+            <a:avLst/>
+          </a:prstGeom>
+          <a:solidFill>
+            <a:srgbClr val="3C5AC8"/>
+          </a:solidFill>
+          <a:ln>
+            <a:noFill/>
+          </a:ln>
+          <a:effectLst/>
+        </p:spPr>
+        <p:style>
+          <a:lnRef idx="1">
+            <a:schemeClr val="accent1"/>
+          </a:lnRef>
+          <a:fillRef idx="3">
+            <a:schemeClr val="accent1"/>
+          </a:fillRef>
+          <a:effectRef idx="2">
+            <a:schemeClr val="accent1"/>
+          </a:effectRef>
+          <a:fontRef idx="minor">
+            <a:schemeClr val="lt1"/>
+          </a:fontRef>
+        </p:style>
+        <p:txBody>
+          <a:bodyPr rtlCol="0" anchor="ctr"/>
+          <a:lstStyle/>
+          <a:p>
+            <a:pPr algn="ctr"/>
+          </a:p>
+        </p:txBody>
+      </p:sp>
+      <p:sp>
+        <p:nvSpPr>
+          <p:cNvPr id="81" name="TextBox 80"/>
           <p:cNvSpPr txBox="1"/>
           <p:nvPr/>
         </p:nvSpPr>
         <p:spPr>
           <a:xfrm>
-            <a:off x="2167128" y="6473952"/>
-            <a:ext cx="3419856" cy="182880"/>
+            <a:off x="886968" y="6967728"/>
+            <a:ext cx="950976" cy="274320"/>
           </a:xfrm>
           <a:prstGeom prst="rect">
             <a:avLst/>
@@ -6977,32 +6834,33 @@
           <a:p>
             <a:pPr algn="l">
               <a:lnSpc>
-                <a:spcPct val="112000"/>
+                <a:spcPct val="100000"/>
               </a:lnSpc>
             </a:pPr>
             <a:r>
-              <a:rPr sz="975" b="0">
-                <a:solidFill>
-                  <a:srgbClr val="8A8A8A"/>
+              <a:rPr sz="1200" b="1">
+                <a:solidFill>
+                  <a:srgbClr val="1428A0"/>
                 </a:solidFill>
                 <a:latin typeface="Arial"/>
                 <a:ea typeface="Arial"/>
               </a:rPr>
-              <a:t>기능 고장률 요구 · JESD218</a:t>
-            </a:r>
-          </a:p>
-        </p:txBody>
-      </p:sp>
-      <p:sp>
-        <p:nvSpPr>
-          <p:cNvPr id="85" name="TextBox 84"/>
+              <a:t>격차를 닫는
+지렛대</a:t>
+            </a:r>
+          </a:p>
+        </p:txBody>
+      </p:sp>
+      <p:sp>
+        <p:nvSpPr>
+          <p:cNvPr id="82" name="TextBox 81"/>
           <p:cNvSpPr txBox="1"/>
           <p:nvPr/>
         </p:nvSpPr>
         <p:spPr>
           <a:xfrm>
-            <a:off x="2167128" y="6711696"/>
-            <a:ext cx="3419856" cy="548640"/>
+            <a:off x="886968" y="7571231"/>
+            <a:ext cx="950976" cy="731520"/>
           </a:xfrm>
           <a:prstGeom prst="rect">
             <a:avLst/>
@@ -7010,113 +6868,40 @@
           <a:noFill/>
         </p:spPr>
         <p:txBody>
-          <a:bodyPr wrap="square" anchor="ctr" lIns="0" rIns="0" tIns="0" bIns="0">
+          <a:bodyPr wrap="square" anchor="t" lIns="0" rIns="0" tIns="0" bIns="0">
             <a:spAutoFit/>
           </a:bodyPr>
           <a:lstStyle/>
           <a:p>
             <a:pPr algn="l">
               <a:lnSpc>
-                <a:spcPct val="112000"/>
+                <a:spcPct val="100000"/>
               </a:lnSpc>
             </a:pPr>
             <a:r>
-              <a:rPr sz="3000" b="1">
-                <a:solidFill>
-                  <a:srgbClr val="1428A0"/>
+              <a:rPr sz="900" b="0">
+                <a:solidFill>
+                  <a:srgbClr val="555555"/>
                 </a:solidFill>
                 <a:latin typeface="Arial"/>
                 <a:ea typeface="Arial"/>
               </a:rPr>
-              <a:t>FFR ≤ 3%</a:t>
-            </a:r>
-          </a:p>
-        </p:txBody>
-      </p:sp>
-      <p:sp>
-        <p:nvSpPr>
-          <p:cNvPr id="86" name="TextBox 85"/>
-          <p:cNvSpPr txBox="1"/>
-          <p:nvPr/>
-        </p:nvSpPr>
-        <p:spPr>
-          <a:xfrm>
-            <a:off x="2167128" y="7333488"/>
-            <a:ext cx="3419856" cy="822960"/>
-          </a:xfrm>
-          <a:prstGeom prst="rect">
-            <a:avLst/>
-          </a:prstGeom>
-          <a:noFill/>
-        </p:spPr>
-        <p:txBody>
-          <a:bodyPr wrap="square" anchor="t" lIns="0" rIns="0" tIns="0" bIns="0">
-            <a:spAutoFit/>
-          </a:bodyPr>
-          <a:lstStyle/>
-          <a:p>
-            <a:pPr algn="l">
-              <a:lnSpc>
-                <a:spcPct val="106000"/>
-              </a:lnSpc>
-            </a:pPr>
-            <a:r>
-              <a:rPr sz="975" b="0">
-                <a:solidFill>
-                  <a:srgbClr val="555555"/>
-                </a:solidFill>
-                <a:latin typeface="Arial"/>
-                <a:ea typeface="Arial"/>
-              </a:rPr>
-              <a:t>클라이언트 · 엔터프라이즈 공통 · 고정</a:t>
-            </a:r>
-          </a:p>
-          <a:p>
-            <a:pPr algn="l">
-              <a:lnSpc>
-                <a:spcPct val="106000"/>
-              </a:lnSpc>
-            </a:pPr>
-            <a:r>
-              <a:rPr sz="975" b="1">
-                <a:solidFill>
-                  <a:srgbClr val="1A1A1A"/>
-                </a:solidFill>
-                <a:latin typeface="Arial"/>
-                <a:ea typeface="Arial"/>
-              </a:rPr>
-              <a:t>보호 없는 SSD 고장률 ≈ N × 다이 고장률</a:t>
-            </a:r>
-          </a:p>
-          <a:p>
-            <a:pPr algn="l">
-              <a:lnSpc>
-                <a:spcPct val="106000"/>
-              </a:lnSpc>
-            </a:pPr>
-            <a:r>
-              <a:rPr sz="900" b="0">
-                <a:solidFill>
-                  <a:srgbClr val="555555"/>
-                </a:solidFill>
-                <a:latin typeface="Arial"/>
-                <a:ea typeface="Arial"/>
-              </a:rPr>
-              <a:t>칩 면적이 클수록 수율이 떨어지는 것과 같은 구조</a:t>
-            </a:r>
-          </a:p>
-        </p:txBody>
-      </p:sp>
-      <p:sp>
-        <p:nvSpPr>
-          <p:cNvPr id="87" name="Rectangle 86"/>
+              <a:t>모두 병행 중 · 본 보고는
+호스트 축을 다룸</a:t>
+            </a:r>
+          </a:p>
+        </p:txBody>
+      </p:sp>
+      <p:sp>
+        <p:nvSpPr>
+          <p:cNvPr id="83" name="Rectangle 82"/>
           <p:cNvSpPr/>
           <p:nvPr/>
         </p:nvSpPr>
         <p:spPr>
           <a:xfrm>
-            <a:off x="5989320" y="6345936"/>
-            <a:ext cx="3675888" cy="2139696"/>
+            <a:off x="2039112" y="6967728"/>
+            <a:ext cx="2496312" cy="896112"/>
           </a:xfrm>
           <a:prstGeom prst="rect">
             <a:avLst/>
@@ -7153,40 +6938,96 @@
           </a:p>
         </p:txBody>
       </p:sp>
-      <p:pic>
-        <p:nvPicPr>
-          <p:cNvPr id="88" name="Picture 87" descr="ladder_cell_dies.png"/>
-          <p:cNvPicPr>
-            <a:picLocks noChangeAspect="1"/>
-          </p:cNvPicPr>
-          <p:nvPr/>
-        </p:nvPicPr>
-        <p:blipFill>
-          <a:blip r:embed="rId5"/>
-          <a:stretch>
-            <a:fillRect/>
-          </a:stretch>
-        </p:blipFill>
-        <p:spPr>
-          <a:xfrm>
-            <a:off x="6080760" y="6437376"/>
-            <a:ext cx="3493008" cy="1433352"/>
-          </a:xfrm>
-          <a:prstGeom prst="rect">
-            <a:avLst/>
-          </a:prstGeom>
-        </p:spPr>
-      </p:pic>
-      <p:sp>
-        <p:nvSpPr>
-          <p:cNvPr id="89" name="TextBox 88"/>
+      <p:sp>
+        <p:nvSpPr>
+          <p:cNvPr id="84" name="TextBox 83"/>
           <p:cNvSpPr txBox="1"/>
           <p:nvPr/>
         </p:nvSpPr>
         <p:spPr>
           <a:xfrm>
-            <a:off x="6117336" y="8010144"/>
-            <a:ext cx="3419856" cy="420624"/>
+            <a:off x="2148840" y="7040880"/>
+            <a:ext cx="2276856" cy="182880"/>
+          </a:xfrm>
+          <a:prstGeom prst="rect">
+            <a:avLst/>
+          </a:prstGeom>
+          <a:noFill/>
+        </p:spPr>
+        <p:txBody>
+          <a:bodyPr wrap="square" anchor="t" lIns="0" rIns="0" tIns="0" bIns="0">
+            <a:spAutoFit/>
+          </a:bodyPr>
+          <a:lstStyle/>
+          <a:p>
+            <a:pPr algn="l">
+              <a:lnSpc>
+                <a:spcPct val="112000"/>
+              </a:lnSpc>
+            </a:pPr>
+            <a:r>
+              <a:rPr sz="875" b="0">
+                <a:solidFill>
+                  <a:srgbClr val="8A8A8A"/>
+                </a:solidFill>
+                <a:latin typeface="Arial"/>
+                <a:ea typeface="Arial"/>
+              </a:rPr>
+              <a:t>셀 · 다이</a:t>
+            </a:r>
+          </a:p>
+        </p:txBody>
+      </p:sp>
+      <p:sp>
+        <p:nvSpPr>
+          <p:cNvPr id="85" name="TextBox 84"/>
+          <p:cNvSpPr txBox="1"/>
+          <p:nvPr/>
+        </p:nvSpPr>
+        <p:spPr>
+          <a:xfrm>
+            <a:off x="2148840" y="7242048"/>
+            <a:ext cx="2276856" cy="237744"/>
+          </a:xfrm>
+          <a:prstGeom prst="rect">
+            <a:avLst/>
+          </a:prstGeom>
+          <a:noFill/>
+        </p:spPr>
+        <p:txBody>
+          <a:bodyPr wrap="square" anchor="t" lIns="0" rIns="0" tIns="0" bIns="0">
+            <a:spAutoFit/>
+          </a:bodyPr>
+          <a:lstStyle/>
+          <a:p>
+            <a:pPr algn="l">
+              <a:lnSpc>
+                <a:spcPct val="112000"/>
+              </a:lnSpc>
+            </a:pPr>
+            <a:r>
+              <a:rPr sz="1125" b="1">
+                <a:solidFill>
+                  <a:srgbClr val="1A1A1A"/>
+                </a:solidFill>
+                <a:latin typeface="Arial"/>
+                <a:ea typeface="Arial"/>
+              </a:rPr>
+              <a:t>다이 세대</a:t>
+            </a:r>
+          </a:p>
+        </p:txBody>
+      </p:sp>
+      <p:sp>
+        <p:nvSpPr>
+          <p:cNvPr id="86" name="TextBox 85"/>
+          <p:cNvSpPr txBox="1"/>
+          <p:nvPr/>
+        </p:nvSpPr>
+        <p:spPr>
+          <a:xfrm>
+            <a:off x="2148840" y="7498079"/>
+            <a:ext cx="2276856" cy="310896"/>
           </a:xfrm>
           <a:prstGeom prst="rect">
             <a:avLst/>
@@ -7205,37 +7046,39 @@
               </a:lnSpc>
             </a:pPr>
             <a:r>
-              <a:rPr sz="850" b="0">
+              <a:rPr sz="875" b="0">
                 <a:solidFill>
                   <a:srgbClr val="555555"/>
                 </a:solidFill>
                 <a:latin typeface="Arial"/>
                 <a:ea typeface="Arial"/>
               </a:rPr>
-              <a:t>다이 수 8배 ↑ → 같은 FFR을 지키려면 다이 고장률 8배 ↓ 또는 다이 고장 허용 필요 · 다이 고장률 개선은 기술적 한계</a:t>
-            </a:r>
-          </a:p>
-        </p:txBody>
-      </p:sp>
-      <p:sp>
-        <p:nvSpPr>
-          <p:cNvPr id="90" name="Rectangle 89"/>
+              <a:t>P/E ↑ · 2Tb QLC</a:t>
+            </a:r>
+          </a:p>
+        </p:txBody>
+      </p:sp>
+      <p:sp>
+        <p:nvSpPr>
+          <p:cNvPr id="87" name="Rectangle 86"/>
           <p:cNvSpPr/>
           <p:nvPr/>
         </p:nvSpPr>
         <p:spPr>
           <a:xfrm>
-            <a:off x="9939528" y="6345936"/>
-            <a:ext cx="3675888" cy="2139696"/>
+            <a:off x="4645152" y="6967728"/>
+            <a:ext cx="2496312" cy="896112"/>
           </a:xfrm>
           <a:prstGeom prst="rect">
             <a:avLst/>
           </a:prstGeom>
           <a:solidFill>
-            <a:srgbClr val="AAB8E8"/>
+            <a:srgbClr val="FFFFFF"/>
           </a:solidFill>
-          <a:ln>
-            <a:noFill/>
+          <a:ln w="9525">
+            <a:solidFill>
+              <a:srgbClr val="D9D9D9"/>
+            </a:solidFill>
           </a:ln>
           <a:effectLst/>
         </p:spPr>
@@ -7263,14 +7106,14 @@
       </p:sp>
       <p:sp>
         <p:nvSpPr>
-          <p:cNvPr id="91" name="TextBox 90"/>
+          <p:cNvPr id="88" name="TextBox 87"/>
           <p:cNvSpPr txBox="1"/>
           <p:nvPr/>
         </p:nvSpPr>
         <p:spPr>
           <a:xfrm>
-            <a:off x="10067544" y="6455664"/>
-            <a:ext cx="2377440" cy="182880"/>
+            <a:off x="4754880" y="7040880"/>
+            <a:ext cx="2276856" cy="182880"/>
           </a:xfrm>
           <a:prstGeom prst="rect">
             <a:avLst/>
@@ -7289,68 +7132,28 @@
               </a:lnSpc>
             </a:pPr>
             <a:r>
-              <a:rPr sz="975" b="0">
-                <a:solidFill>
-                  <a:srgbClr val="1A1A1A"/>
+              <a:rPr sz="875" b="0">
+                <a:solidFill>
+                  <a:srgbClr val="8A8A8A"/>
                 </a:solidFill>
                 <a:latin typeface="Arial"/>
                 <a:ea typeface="Arial"/>
               </a:rPr>
-              <a:t>현재 해법 · SSD 내부</a:t>
-            </a:r>
-          </a:p>
-        </p:txBody>
-      </p:sp>
-      <p:sp>
-        <p:nvSpPr>
-          <p:cNvPr id="92" name="TextBox 91"/>
+              <a:t>SSD</a:t>
+            </a:r>
+          </a:p>
+        </p:txBody>
+      </p:sp>
+      <p:sp>
+        <p:nvSpPr>
+          <p:cNvPr id="89" name="TextBox 88"/>
           <p:cNvSpPr txBox="1"/>
           <p:nvPr/>
         </p:nvSpPr>
         <p:spPr>
           <a:xfrm>
-            <a:off x="12207240" y="6455664"/>
-            <a:ext cx="1280160" cy="201168"/>
-          </a:xfrm>
-          <a:prstGeom prst="rect">
-            <a:avLst/>
-          </a:prstGeom>
-          <a:noFill/>
-        </p:spPr>
-        <p:txBody>
-          <a:bodyPr wrap="square" anchor="t" lIns="0" rIns="0" tIns="0" bIns="0">
-            <a:spAutoFit/>
-          </a:bodyPr>
-          <a:lstStyle/>
-          <a:p>
-            <a:pPr algn="r">
-              <a:lnSpc>
-                <a:spcPct val="112000"/>
-              </a:lnSpc>
-            </a:pPr>
-            <a:r>
-              <a:rPr sz="975" b="1">
-                <a:solidFill>
-                  <a:srgbClr val="8A8A8A"/>
-                </a:solidFill>
-                <a:latin typeface="Arial"/>
-                <a:ea typeface="Arial"/>
-              </a:rPr>
-              <a:t>오버헤드 ↑</a:t>
-            </a:r>
-          </a:p>
-        </p:txBody>
-      </p:sp>
-      <p:sp>
-        <p:nvSpPr>
-          <p:cNvPr id="93" name="TextBox 92"/>
-          <p:cNvSpPr txBox="1"/>
-          <p:nvPr/>
-        </p:nvSpPr>
-        <p:spPr>
-          <a:xfrm>
-            <a:off x="10067544" y="6675120"/>
-            <a:ext cx="3419856" cy="237744"/>
+            <a:off x="4754880" y="7242048"/>
+            <a:ext cx="2276856" cy="237744"/>
           </a:xfrm>
           <a:prstGeom prst="rect">
             <a:avLst/>
@@ -7369,28 +7172,566 @@
               </a:lnSpc>
             </a:pPr>
             <a:r>
-              <a:rPr sz="1275" b="1">
+              <a:rPr sz="1125" b="1">
                 <a:solidFill>
                   <a:srgbClr val="1A1A1A"/>
                 </a:solidFill>
                 <a:latin typeface="Arial"/>
                 <a:ea typeface="Arial"/>
               </a:rPr>
-              <a:t>다이 RAID · 여분 다이 · 다이 은퇴</a:t>
-            </a:r>
-          </a:p>
-        </p:txBody>
-      </p:sp>
-      <p:sp>
-        <p:nvSpPr>
-          <p:cNvPr id="94" name="Rectangle 93"/>
+              <a:t>OP</a:t>
+            </a:r>
+          </a:p>
+        </p:txBody>
+      </p:sp>
+      <p:sp>
+        <p:nvSpPr>
+          <p:cNvPr id="90" name="TextBox 89"/>
+          <p:cNvSpPr txBox="1"/>
+          <p:nvPr/>
+        </p:nvSpPr>
+        <p:spPr>
+          <a:xfrm>
+            <a:off x="4754880" y="7498079"/>
+            <a:ext cx="2276856" cy="310896"/>
+          </a:xfrm>
+          <a:prstGeom prst="rect">
+            <a:avLst/>
+          </a:prstGeom>
+          <a:noFill/>
+        </p:spPr>
+        <p:txBody>
+          <a:bodyPr wrap="square" anchor="t" lIns="0" rIns="0" tIns="0" bIns="0">
+            <a:spAutoFit/>
+          </a:bodyPr>
+          <a:lstStyle/>
+          <a:p>
+            <a:pPr algn="l">
+              <a:lnSpc>
+                <a:spcPct val="100000"/>
+              </a:lnSpc>
+            </a:pPr>
+            <a:r>
+              <a:rPr sz="875" b="0">
+                <a:solidFill>
+                  <a:srgbClr val="555555"/>
+                </a:solidFill>
+                <a:latin typeface="Arial"/>
+                <a:ea typeface="Arial"/>
+              </a:rPr>
+              <a:t>(1 + OP) · 예비 용량</a:t>
+            </a:r>
+          </a:p>
+        </p:txBody>
+      </p:sp>
+      <p:sp>
+        <p:nvSpPr>
+          <p:cNvPr id="91" name="Rectangle 90"/>
           <p:cNvSpPr/>
           <p:nvPr/>
         </p:nvSpPr>
         <p:spPr>
           <a:xfrm>
-            <a:off x="10067544" y="7077456"/>
-            <a:ext cx="109728" cy="109728"/>
+            <a:off x="7251192" y="6967728"/>
+            <a:ext cx="2496312" cy="896112"/>
+          </a:xfrm>
+          <a:prstGeom prst="rect">
+            <a:avLst/>
+          </a:prstGeom>
+          <a:solidFill>
+            <a:srgbClr val="FFFFFF"/>
+          </a:solidFill>
+          <a:ln w="9525">
+            <a:solidFill>
+              <a:srgbClr val="D9D9D9"/>
+            </a:solidFill>
+          </a:ln>
+          <a:effectLst/>
+        </p:spPr>
+        <p:style>
+          <a:lnRef idx="1">
+            <a:schemeClr val="accent1"/>
+          </a:lnRef>
+          <a:fillRef idx="3">
+            <a:schemeClr val="accent1"/>
+          </a:fillRef>
+          <a:effectRef idx="2">
+            <a:schemeClr val="accent1"/>
+          </a:effectRef>
+          <a:fontRef idx="minor">
+            <a:schemeClr val="lt1"/>
+          </a:fontRef>
+        </p:style>
+        <p:txBody>
+          <a:bodyPr rtlCol="0" anchor="ctr"/>
+          <a:lstStyle/>
+          <a:p>
+            <a:pPr algn="ctr"/>
+          </a:p>
+        </p:txBody>
+      </p:sp>
+      <p:sp>
+        <p:nvSpPr>
+          <p:cNvPr id="92" name="TextBox 91"/>
+          <p:cNvSpPr txBox="1"/>
+          <p:nvPr/>
+        </p:nvSpPr>
+        <p:spPr>
+          <a:xfrm>
+            <a:off x="7360919" y="7040880"/>
+            <a:ext cx="2276856" cy="182880"/>
+          </a:xfrm>
+          <a:prstGeom prst="rect">
+            <a:avLst/>
+          </a:prstGeom>
+          <a:noFill/>
+        </p:spPr>
+        <p:txBody>
+          <a:bodyPr wrap="square" anchor="t" lIns="0" rIns="0" tIns="0" bIns="0">
+            <a:spAutoFit/>
+          </a:bodyPr>
+          <a:lstStyle/>
+          <a:p>
+            <a:pPr algn="l">
+              <a:lnSpc>
+                <a:spcPct val="112000"/>
+              </a:lnSpc>
+            </a:pPr>
+            <a:r>
+              <a:rPr sz="875" b="0">
+                <a:solidFill>
+                  <a:srgbClr val="8A8A8A"/>
+                </a:solidFill>
+                <a:latin typeface="Arial"/>
+                <a:ea typeface="Arial"/>
+              </a:rPr>
+              <a:t>SSD</a:t>
+            </a:r>
+          </a:p>
+        </p:txBody>
+      </p:sp>
+      <p:sp>
+        <p:nvSpPr>
+          <p:cNvPr id="93" name="TextBox 92"/>
+          <p:cNvSpPr txBox="1"/>
+          <p:nvPr/>
+        </p:nvSpPr>
+        <p:spPr>
+          <a:xfrm>
+            <a:off x="7360919" y="7242048"/>
+            <a:ext cx="2276856" cy="237744"/>
+          </a:xfrm>
+          <a:prstGeom prst="rect">
+            <a:avLst/>
+          </a:prstGeom>
+          <a:noFill/>
+        </p:spPr>
+        <p:txBody>
+          <a:bodyPr wrap="square" anchor="t" lIns="0" rIns="0" tIns="0" bIns="0">
+            <a:spAutoFit/>
+          </a:bodyPr>
+          <a:lstStyle/>
+          <a:p>
+            <a:pPr algn="l">
+              <a:lnSpc>
+                <a:spcPct val="112000"/>
+              </a:lnSpc>
+            </a:pPr>
+            <a:r>
+              <a:rPr sz="1125" b="1">
+                <a:solidFill>
+                  <a:srgbClr val="1A1A1A"/>
+                </a:solidFill>
+                <a:latin typeface="Arial"/>
+                <a:ea typeface="Arial"/>
+              </a:rPr>
+              <a:t>SLC 캐시 · 쓰기 정형</a:t>
+            </a:r>
+          </a:p>
+        </p:txBody>
+      </p:sp>
+      <p:sp>
+        <p:nvSpPr>
+          <p:cNvPr id="94" name="TextBox 93"/>
+          <p:cNvSpPr txBox="1"/>
+          <p:nvPr/>
+        </p:nvSpPr>
+        <p:spPr>
+          <a:xfrm>
+            <a:off x="7360919" y="7498079"/>
+            <a:ext cx="2276856" cy="310896"/>
+          </a:xfrm>
+          <a:prstGeom prst="rect">
+            <a:avLst/>
+          </a:prstGeom>
+          <a:noFill/>
+        </p:spPr>
+        <p:txBody>
+          <a:bodyPr wrap="square" anchor="t" lIns="0" rIns="0" tIns="0" bIns="0">
+            <a:spAutoFit/>
+          </a:bodyPr>
+          <a:lstStyle/>
+          <a:p>
+            <a:pPr algn="l">
+              <a:lnSpc>
+                <a:spcPct val="100000"/>
+              </a:lnSpc>
+            </a:pPr>
+            <a:r>
+              <a:rPr sz="875" b="0">
+                <a:solidFill>
+                  <a:srgbClr val="555555"/>
+                </a:solidFill>
+                <a:latin typeface="Arial"/>
+                <a:ea typeface="Arial"/>
+              </a:rPr>
+              <a:t>GC 효율 · 순차화</a:t>
+            </a:r>
+          </a:p>
+        </p:txBody>
+      </p:sp>
+      <p:sp>
+        <p:nvSpPr>
+          <p:cNvPr id="95" name="Rectangle 94"/>
+          <p:cNvSpPr/>
+          <p:nvPr/>
+        </p:nvSpPr>
+        <p:spPr>
+          <a:xfrm>
+            <a:off x="9857232" y="6967728"/>
+            <a:ext cx="2496312" cy="896112"/>
+          </a:xfrm>
+          <a:prstGeom prst="rect">
+            <a:avLst/>
+          </a:prstGeom>
+          <a:solidFill>
+            <a:srgbClr val="FFFFFF"/>
+          </a:solidFill>
+          <a:ln w="9525">
+            <a:solidFill>
+              <a:srgbClr val="D9D9D9"/>
+            </a:solidFill>
+          </a:ln>
+          <a:effectLst/>
+        </p:spPr>
+        <p:style>
+          <a:lnRef idx="1">
+            <a:schemeClr val="accent1"/>
+          </a:lnRef>
+          <a:fillRef idx="3">
+            <a:schemeClr val="accent1"/>
+          </a:fillRef>
+          <a:effectRef idx="2">
+            <a:schemeClr val="accent1"/>
+          </a:effectRef>
+          <a:fontRef idx="minor">
+            <a:schemeClr val="lt1"/>
+          </a:fontRef>
+        </p:style>
+        <p:txBody>
+          <a:bodyPr rtlCol="0" anchor="ctr"/>
+          <a:lstStyle/>
+          <a:p>
+            <a:pPr algn="ctr"/>
+          </a:p>
+        </p:txBody>
+      </p:sp>
+      <p:sp>
+        <p:nvSpPr>
+          <p:cNvPr id="96" name="TextBox 95"/>
+          <p:cNvSpPr txBox="1"/>
+          <p:nvPr/>
+        </p:nvSpPr>
+        <p:spPr>
+          <a:xfrm>
+            <a:off x="9966960" y="7040880"/>
+            <a:ext cx="2276856" cy="182880"/>
+          </a:xfrm>
+          <a:prstGeom prst="rect">
+            <a:avLst/>
+          </a:prstGeom>
+          <a:noFill/>
+        </p:spPr>
+        <p:txBody>
+          <a:bodyPr wrap="square" anchor="t" lIns="0" rIns="0" tIns="0" bIns="0">
+            <a:spAutoFit/>
+          </a:bodyPr>
+          <a:lstStyle/>
+          <a:p>
+            <a:pPr algn="l">
+              <a:lnSpc>
+                <a:spcPct val="112000"/>
+              </a:lnSpc>
+            </a:pPr>
+            <a:r>
+              <a:rPr sz="875" b="0">
+                <a:solidFill>
+                  <a:srgbClr val="8A8A8A"/>
+                </a:solidFill>
+                <a:latin typeface="Arial"/>
+                <a:ea typeface="Arial"/>
+              </a:rPr>
+              <a:t>고객 · 계약</a:t>
+            </a:r>
+          </a:p>
+        </p:txBody>
+      </p:sp>
+      <p:sp>
+        <p:nvSpPr>
+          <p:cNvPr id="97" name="TextBox 96"/>
+          <p:cNvSpPr txBox="1"/>
+          <p:nvPr/>
+        </p:nvSpPr>
+        <p:spPr>
+          <a:xfrm>
+            <a:off x="9966960" y="7242048"/>
+            <a:ext cx="2276856" cy="237744"/>
+          </a:xfrm>
+          <a:prstGeom prst="rect">
+            <a:avLst/>
+          </a:prstGeom>
+          <a:noFill/>
+        </p:spPr>
+        <p:txBody>
+          <a:bodyPr wrap="square" anchor="t" lIns="0" rIns="0" tIns="0" bIns="0">
+            <a:spAutoFit/>
+          </a:bodyPr>
+          <a:lstStyle/>
+          <a:p>
+            <a:pPr algn="l">
+              <a:lnSpc>
+                <a:spcPct val="112000"/>
+              </a:lnSpc>
+            </a:pPr>
+            <a:r>
+              <a:rPr sz="1125" b="1">
+                <a:solidFill>
+                  <a:srgbClr val="1A1A1A"/>
+                </a:solidFill>
+                <a:latin typeface="Arial"/>
+                <a:ea typeface="Arial"/>
+              </a:rPr>
+              <a:t>보증연수 · TBW 기준</a:t>
+            </a:r>
+          </a:p>
+        </p:txBody>
+      </p:sp>
+      <p:sp>
+        <p:nvSpPr>
+          <p:cNvPr id="98" name="TextBox 97"/>
+          <p:cNvSpPr txBox="1"/>
+          <p:nvPr/>
+        </p:nvSpPr>
+        <p:spPr>
+          <a:xfrm>
+            <a:off x="9966960" y="7498079"/>
+            <a:ext cx="2276856" cy="310896"/>
+          </a:xfrm>
+          <a:prstGeom prst="rect">
+            <a:avLst/>
+          </a:prstGeom>
+          <a:noFill/>
+        </p:spPr>
+        <p:txBody>
+          <a:bodyPr wrap="square" anchor="t" lIns="0" rIns="0" tIns="0" bIns="0">
+            <a:spAutoFit/>
+          </a:bodyPr>
+          <a:lstStyle/>
+          <a:p>
+            <a:pPr algn="l">
+              <a:lnSpc>
+                <a:spcPct val="100000"/>
+              </a:lnSpc>
+            </a:pPr>
+            <a:r>
+              <a:rPr sz="875" b="0">
+                <a:solidFill>
+                  <a:srgbClr val="555555"/>
+                </a:solidFill>
+                <a:latin typeface="Arial"/>
+                <a:ea typeface="Arial"/>
+              </a:rPr>
+              <a:t>365 × 년 · 정격 산정</a:t>
+            </a:r>
+          </a:p>
+        </p:txBody>
+      </p:sp>
+      <p:sp>
+        <p:nvSpPr>
+          <p:cNvPr id="99" name="Rectangle 98"/>
+          <p:cNvSpPr/>
+          <p:nvPr/>
+        </p:nvSpPr>
+        <p:spPr>
+          <a:xfrm>
+            <a:off x="12463272" y="6967728"/>
+            <a:ext cx="2496312" cy="896112"/>
+          </a:xfrm>
+          <a:prstGeom prst="rect">
+            <a:avLst/>
+          </a:prstGeom>
+          <a:solidFill>
+            <a:srgbClr val="FFFFFF"/>
+          </a:solidFill>
+          <a:ln w="9525">
+            <a:solidFill>
+              <a:srgbClr val="D9D9D9"/>
+            </a:solidFill>
+          </a:ln>
+          <a:effectLst/>
+        </p:spPr>
+        <p:style>
+          <a:lnRef idx="1">
+            <a:schemeClr val="accent1"/>
+          </a:lnRef>
+          <a:fillRef idx="3">
+            <a:schemeClr val="accent1"/>
+          </a:fillRef>
+          <a:effectRef idx="2">
+            <a:schemeClr val="accent1"/>
+          </a:effectRef>
+          <a:fontRef idx="minor">
+            <a:schemeClr val="lt1"/>
+          </a:fontRef>
+        </p:style>
+        <p:txBody>
+          <a:bodyPr rtlCol="0" anchor="ctr"/>
+          <a:lstStyle/>
+          <a:p>
+            <a:pPr algn="ctr"/>
+          </a:p>
+        </p:txBody>
+      </p:sp>
+      <p:sp>
+        <p:nvSpPr>
+          <p:cNvPr id="100" name="TextBox 99"/>
+          <p:cNvSpPr txBox="1"/>
+          <p:nvPr/>
+        </p:nvSpPr>
+        <p:spPr>
+          <a:xfrm>
+            <a:off x="12573000" y="7040880"/>
+            <a:ext cx="2276856" cy="182880"/>
+          </a:xfrm>
+          <a:prstGeom prst="rect">
+            <a:avLst/>
+          </a:prstGeom>
+          <a:noFill/>
+        </p:spPr>
+        <p:txBody>
+          <a:bodyPr wrap="square" anchor="t" lIns="0" rIns="0" tIns="0" bIns="0">
+            <a:spAutoFit/>
+          </a:bodyPr>
+          <a:lstStyle/>
+          <a:p>
+            <a:pPr algn="l">
+              <a:lnSpc>
+                <a:spcPct val="112000"/>
+              </a:lnSpc>
+            </a:pPr>
+            <a:r>
+              <a:rPr sz="875" b="0">
+                <a:solidFill>
+                  <a:srgbClr val="8A8A8A"/>
+                </a:solidFill>
+                <a:latin typeface="Arial"/>
+                <a:ea typeface="Arial"/>
+              </a:rPr>
+              <a:t>고객 · 앱</a:t>
+            </a:r>
+          </a:p>
+        </p:txBody>
+      </p:sp>
+      <p:sp>
+        <p:nvSpPr>
+          <p:cNvPr id="101" name="TextBox 100"/>
+          <p:cNvSpPr txBox="1"/>
+          <p:nvPr/>
+        </p:nvSpPr>
+        <p:spPr>
+          <a:xfrm>
+            <a:off x="12573000" y="7242048"/>
+            <a:ext cx="2276856" cy="237744"/>
+          </a:xfrm>
+          <a:prstGeom prst="rect">
+            <a:avLst/>
+          </a:prstGeom>
+          <a:noFill/>
+        </p:spPr>
+        <p:txBody>
+          <a:bodyPr wrap="square" anchor="t" lIns="0" rIns="0" tIns="0" bIns="0">
+            <a:spAutoFit/>
+          </a:bodyPr>
+          <a:lstStyle/>
+          <a:p>
+            <a:pPr algn="l">
+              <a:lnSpc>
+                <a:spcPct val="112000"/>
+              </a:lnSpc>
+            </a:pPr>
+            <a:r>
+              <a:rPr sz="1125" b="1">
+                <a:solidFill>
+                  <a:srgbClr val="1A1A1A"/>
+                </a:solidFill>
+                <a:latin typeface="Arial"/>
+                <a:ea typeface="Arial"/>
+              </a:rPr>
+              <a:t>워크로드 재정의</a:t>
+            </a:r>
+          </a:p>
+        </p:txBody>
+      </p:sp>
+      <p:sp>
+        <p:nvSpPr>
+          <p:cNvPr id="102" name="TextBox 101"/>
+          <p:cNvSpPr txBox="1"/>
+          <p:nvPr/>
+        </p:nvSpPr>
+        <p:spPr>
+          <a:xfrm>
+            <a:off x="12573000" y="7498079"/>
+            <a:ext cx="2276856" cy="310896"/>
+          </a:xfrm>
+          <a:prstGeom prst="rect">
+            <a:avLst/>
+          </a:prstGeom>
+          <a:noFill/>
+        </p:spPr>
+        <p:txBody>
+          <a:bodyPr wrap="square" anchor="t" lIns="0" rIns="0" tIns="0" bIns="0">
+            <a:spAutoFit/>
+          </a:bodyPr>
+          <a:lstStyle/>
+          <a:p>
+            <a:pPr algn="l">
+              <a:lnSpc>
+                <a:spcPct val="100000"/>
+              </a:lnSpc>
+            </a:pPr>
+            <a:r>
+              <a:rPr sz="875" b="0">
+                <a:solidFill>
+                  <a:srgbClr val="555555"/>
+                </a:solidFill>
+                <a:latin typeface="Arial"/>
+                <a:ea typeface="Arial"/>
+              </a:rPr>
+              <a:t>어드미션 · TLC 혼합 계층</a:t>
+            </a:r>
+          </a:p>
+        </p:txBody>
+      </p:sp>
+      <p:sp>
+        <p:nvSpPr>
+          <p:cNvPr id="103" name="Rectangle 102"/>
+          <p:cNvSpPr/>
+          <p:nvPr/>
+        </p:nvSpPr>
+        <p:spPr>
+          <a:xfrm>
+            <a:off x="15069312" y="6967728"/>
+            <a:ext cx="2496312" cy="896112"/>
           </a:xfrm>
           <a:prstGeom prst="rect">
             <a:avLst/>
@@ -7427,14 +7768,94 @@
       </p:sp>
       <p:sp>
         <p:nvSpPr>
-          <p:cNvPr id="95" name="TextBox 94"/>
+          <p:cNvPr id="104" name="TextBox 103"/>
           <p:cNvSpPr txBox="1"/>
           <p:nvPr/>
         </p:nvSpPr>
         <p:spPr>
           <a:xfrm>
-            <a:off x="10268712" y="7004304"/>
-            <a:ext cx="3218688" cy="384048"/>
+            <a:off x="15179040" y="7040880"/>
+            <a:ext cx="2276856" cy="182880"/>
+          </a:xfrm>
+          <a:prstGeom prst="rect">
+            <a:avLst/>
+          </a:prstGeom>
+          <a:noFill/>
+        </p:spPr>
+        <p:txBody>
+          <a:bodyPr wrap="square" anchor="t" lIns="0" rIns="0" tIns="0" bIns="0">
+            <a:spAutoFit/>
+          </a:bodyPr>
+          <a:lstStyle/>
+          <a:p>
+            <a:pPr algn="l">
+              <a:lnSpc>
+                <a:spcPct val="112000"/>
+              </a:lnSpc>
+            </a:pPr>
+            <a:r>
+              <a:rPr sz="875" b="0">
+                <a:solidFill>
+                  <a:srgbClr val="FFFFFF"/>
+                </a:solidFill>
+                <a:latin typeface="Arial"/>
+                <a:ea typeface="Arial"/>
+              </a:rPr>
+              <a:t>호스트 · 앱 · 본 보고</a:t>
+            </a:r>
+          </a:p>
+        </p:txBody>
+      </p:sp>
+      <p:sp>
+        <p:nvSpPr>
+          <p:cNvPr id="105" name="TextBox 104"/>
+          <p:cNvSpPr txBox="1"/>
+          <p:nvPr/>
+        </p:nvSpPr>
+        <p:spPr>
+          <a:xfrm>
+            <a:off x="15179040" y="7242048"/>
+            <a:ext cx="2276856" cy="237744"/>
+          </a:xfrm>
+          <a:prstGeom prst="rect">
+            <a:avLst/>
+          </a:prstGeom>
+          <a:noFill/>
+        </p:spPr>
+        <p:txBody>
+          <a:bodyPr wrap="square" anchor="t" lIns="0" rIns="0" tIns="0" bIns="0">
+            <a:spAutoFit/>
+          </a:bodyPr>
+          <a:lstStyle/>
+          <a:p>
+            <a:pPr algn="l">
+              <a:lnSpc>
+                <a:spcPct val="112000"/>
+              </a:lnSpc>
+            </a:pPr>
+            <a:r>
+              <a:rPr sz="1125" b="1">
+                <a:solidFill>
+                  <a:srgbClr val="FFFFFF"/>
+                </a:solidFill>
+                <a:latin typeface="Arial"/>
+                <a:ea typeface="Arial"/>
+              </a:rPr>
+              <a:t>호스트 배치 (WAF)</a:t>
+            </a:r>
+          </a:p>
+        </p:txBody>
+      </p:sp>
+      <p:sp>
+        <p:nvSpPr>
+          <p:cNvPr id="106" name="TextBox 105"/>
+          <p:cNvSpPr txBox="1"/>
+          <p:nvPr/>
+        </p:nvSpPr>
+        <p:spPr>
+          <a:xfrm>
+            <a:off x="15179040" y="7498079"/>
+            <a:ext cx="2276856" cy="310896"/>
           </a:xfrm>
           <a:prstGeom prst="rect">
             <a:avLst/>
@@ -7453,15 +7874,45 @@
               </a:lnSpc>
             </a:pPr>
             <a:r>
-              <a:rPr sz="975" b="1">
-                <a:solidFill>
-                  <a:srgbClr val="1A1A1A"/>
+              <a:rPr sz="875" b="0">
+                <a:solidFill>
+                  <a:srgbClr val="FFFFFF"/>
                 </a:solidFill>
                 <a:latin typeface="Arial"/>
                 <a:ea typeface="Arial"/>
               </a:rPr>
-              <a:t>다이 패리티  </a:t>
-            </a:r>
+              <a:t>≈3 → ≈1 · 유효 DWPD ×2.9</a:t>
+            </a:r>
+          </a:p>
+        </p:txBody>
+      </p:sp>
+      <p:sp>
+        <p:nvSpPr>
+          <p:cNvPr id="107" name="TextBox 106"/>
+          <p:cNvSpPr txBox="1"/>
+          <p:nvPr/>
+        </p:nvSpPr>
+        <p:spPr>
+          <a:xfrm>
+            <a:off x="2039112" y="7955279"/>
+            <a:ext cx="15526512" cy="402336"/>
+          </a:xfrm>
+          <a:prstGeom prst="rect">
+            <a:avLst/>
+          </a:prstGeom>
+          <a:noFill/>
+        </p:spPr>
+        <p:txBody>
+          <a:bodyPr wrap="square" anchor="t" lIns="0" rIns="0" tIns="0" bIns="0">
+            <a:spAutoFit/>
+          </a:bodyPr>
+          <a:lstStyle/>
+          <a:p>
+            <a:pPr algn="l">
+              <a:lnSpc>
+                <a:spcPct val="102000"/>
+              </a:lnSpc>
+            </a:pPr>
             <a:r>
               <a:rPr sz="900" b="0">
                 <a:solidFill>
@@ -7470,21 +7921,21 @@
                 <a:latin typeface="Arial"/>
                 <a:ea typeface="Arial"/>
               </a:rPr>
-              <a:t>슈퍼페이지 XOR 패리티 다이 (Micron RAIN)</a:t>
-            </a:r>
-          </a:p>
-        </p:txBody>
-      </p:sp>
-      <p:sp>
-        <p:nvSpPr>
-          <p:cNvPr id="96" name="Rectangle 95"/>
+              <a:t>호스트 배치 하나로는 격차(동급 비교 2~10배)가 닫히지 않습니다. WAF ×2.9는 다이 세대·OP·보증연수·워크로드 재정의와 결합해 요구에 도달하며, 이 중 호스트·고객 쪽 지렛대가 다수라는 점이 공동 설계의 근거입니다</a:t>
+            </a:r>
+          </a:p>
+        </p:txBody>
+      </p:sp>
+      <p:sp>
+        <p:nvSpPr>
+          <p:cNvPr id="108" name="Rectangle 107"/>
           <p:cNvSpPr/>
           <p:nvPr/>
         </p:nvSpPr>
         <p:spPr>
           <a:xfrm>
-            <a:off x="10067544" y="7534656"/>
-            <a:ext cx="109728" cy="109728"/>
+            <a:off x="722376" y="8613648"/>
+            <a:ext cx="16843248" cy="731520"/>
           </a:xfrm>
           <a:prstGeom prst="rect">
             <a:avLst/>
@@ -7521,14 +7972,14 @@
       </p:sp>
       <p:sp>
         <p:nvSpPr>
-          <p:cNvPr id="97" name="TextBox 96"/>
+          <p:cNvPr id="109" name="TextBox 108"/>
           <p:cNvSpPr txBox="1"/>
           <p:nvPr/>
         </p:nvSpPr>
         <p:spPr>
           <a:xfrm>
-            <a:off x="10268712" y="7461504"/>
-            <a:ext cx="3218688" cy="384048"/>
+            <a:off x="1133856" y="8613648"/>
+            <a:ext cx="1463040" cy="731520"/>
           </a:xfrm>
           <a:prstGeom prst="rect">
             <a:avLst/>
@@ -7536,198 +7987,7 @@
           <a:noFill/>
         </p:spPr>
         <p:txBody>
-          <a:bodyPr wrap="square" anchor="t" lIns="0" rIns="0" tIns="0" bIns="0">
-            <a:spAutoFit/>
-          </a:bodyPr>
-          <a:lstStyle/>
-          <a:p>
-            <a:pPr algn="l">
-              <a:lnSpc>
-                <a:spcPct val="100000"/>
-              </a:lnSpc>
-            </a:pPr>
-            <a:r>
-              <a:rPr sz="975" b="1">
-                <a:solidFill>
-                  <a:srgbClr val="1A1A1A"/>
-                </a:solidFill>
-                <a:latin typeface="Arial"/>
-                <a:ea typeface="Arial"/>
-              </a:rPr>
-              <a:t>여분 다이 · 은퇴  </a:t>
-            </a:r>
-            <a:r>
-              <a:rPr sz="900" b="0">
-                <a:solidFill>
-                  <a:srgbClr val="555555"/>
-                </a:solidFill>
-                <a:latin typeface="Arial"/>
-                <a:ea typeface="Arial"/>
-              </a:rPr>
-              <a:t>삼성 Fail-in-Place(PM1733): 고장 다이 제외, 4~8GB 감량 운영</a:t>
-            </a:r>
-          </a:p>
-        </p:txBody>
-      </p:sp>
-      <p:sp>
-        <p:nvSpPr>
-          <p:cNvPr id="98" name="Rectangle 97"/>
-          <p:cNvSpPr/>
-          <p:nvPr/>
-        </p:nvSpPr>
-        <p:spPr>
-          <a:xfrm>
-            <a:off x="10067544" y="7991856"/>
-            <a:ext cx="109728" cy="109728"/>
-          </a:xfrm>
-          <a:prstGeom prst="rect">
-            <a:avLst/>
-          </a:prstGeom>
-          <a:solidFill>
-            <a:srgbClr val="1428A0"/>
-          </a:solidFill>
-          <a:ln>
-            <a:noFill/>
-          </a:ln>
-          <a:effectLst/>
-        </p:spPr>
-        <p:style>
-          <a:lnRef idx="1">
-            <a:schemeClr val="accent1"/>
-          </a:lnRef>
-          <a:fillRef idx="3">
-            <a:schemeClr val="accent1"/>
-          </a:fillRef>
-          <a:effectRef idx="2">
-            <a:schemeClr val="accent1"/>
-          </a:effectRef>
-          <a:fontRef idx="minor">
-            <a:schemeClr val="lt1"/>
-          </a:fontRef>
-        </p:style>
-        <p:txBody>
-          <a:bodyPr rtlCol="0" anchor="ctr"/>
-          <a:lstStyle/>
-          <a:p>
-            <a:pPr algn="ctr"/>
-          </a:p>
-        </p:txBody>
-      </p:sp>
-      <p:sp>
-        <p:nvSpPr>
-          <p:cNvPr id="99" name="TextBox 98"/>
-          <p:cNvSpPr txBox="1"/>
-          <p:nvPr/>
-        </p:nvSpPr>
-        <p:spPr>
-          <a:xfrm>
-            <a:off x="10268712" y="7918704"/>
-            <a:ext cx="3218688" cy="384048"/>
-          </a:xfrm>
-          <a:prstGeom prst="rect">
-            <a:avLst/>
-          </a:prstGeom>
-          <a:noFill/>
-        </p:spPr>
-        <p:txBody>
-          <a:bodyPr wrap="square" anchor="t" lIns="0" rIns="0" tIns="0" bIns="0">
-            <a:spAutoFit/>
-          </a:bodyPr>
-          <a:lstStyle/>
-          <a:p>
-            <a:pPr algn="l">
-              <a:lnSpc>
-                <a:spcPct val="100000"/>
-              </a:lnSpc>
-            </a:pPr>
-            <a:r>
-              <a:rPr sz="975" b="1">
-                <a:solidFill>
-                  <a:srgbClr val="1A1A1A"/>
-                </a:solidFill>
-                <a:latin typeface="Arial"/>
-                <a:ea typeface="Arial"/>
-              </a:rPr>
-              <a:t>비용  </a:t>
-            </a:r>
-            <a:r>
-              <a:rPr sz="900" b="0">
-                <a:solidFill>
-                  <a:srgbClr val="555555"/>
-                </a:solidFill>
-                <a:latin typeface="Arial"/>
-                <a:ea typeface="Arial"/>
-              </a:rPr>
-              <a:t>패리티 · 예비 용량 오버헤드가 다이 수와 함께 증가</a:t>
-            </a:r>
-          </a:p>
-        </p:txBody>
-      </p:sp>
-      <p:sp>
-        <p:nvSpPr>
-          <p:cNvPr id="100" name="Rectangle 99"/>
-          <p:cNvSpPr/>
-          <p:nvPr/>
-        </p:nvSpPr>
-        <p:spPr>
-          <a:xfrm>
-            <a:off x="13889736" y="6345936"/>
-            <a:ext cx="3675888" cy="2139696"/>
-          </a:xfrm>
-          <a:prstGeom prst="rect">
-            <a:avLst/>
-          </a:prstGeom>
-          <a:solidFill>
-            <a:srgbClr val="F4F6FC"/>
-          </a:solidFill>
-          <a:ln w="12700">
-            <a:solidFill>
-              <a:srgbClr val="1428A0"/>
-            </a:solidFill>
-            <a:prstDash val="dash"/>
-          </a:ln>
-          <a:effectLst/>
-        </p:spPr>
-        <p:style>
-          <a:lnRef idx="1">
-            <a:schemeClr val="accent1"/>
-          </a:lnRef>
-          <a:fillRef idx="3">
-            <a:schemeClr val="accent1"/>
-          </a:fillRef>
-          <a:effectRef idx="2">
-            <a:schemeClr val="accent1"/>
-          </a:effectRef>
-          <a:fontRef idx="minor">
-            <a:schemeClr val="lt1"/>
-          </a:fontRef>
-        </p:style>
-        <p:txBody>
-          <a:bodyPr rtlCol="0" anchor="ctr"/>
-          <a:lstStyle/>
-          <a:p>
-            <a:pPr algn="ctr"/>
-          </a:p>
-        </p:txBody>
-      </p:sp>
-      <p:sp>
-        <p:nvSpPr>
-          <p:cNvPr id="101" name="TextBox 100"/>
-          <p:cNvSpPr txBox="1"/>
-          <p:nvPr/>
-        </p:nvSpPr>
-        <p:spPr>
-          <a:xfrm>
-            <a:off x="14017752" y="6455664"/>
-            <a:ext cx="2377440" cy="182880"/>
-          </a:xfrm>
-          <a:prstGeom prst="rect">
-            <a:avLst/>
-          </a:prstGeom>
-          <a:noFill/>
-        </p:spPr>
-        <p:txBody>
-          <a:bodyPr wrap="square" anchor="t" lIns="0" rIns="0" tIns="0" bIns="0">
+          <a:bodyPr wrap="square" anchor="ctr" lIns="0" rIns="0" tIns="0" bIns="0">
             <a:spAutoFit/>
           </a:bodyPr>
           <a:lstStyle/>
@@ -7738,28 +7998,28 @@
               </a:lnSpc>
             </a:pPr>
             <a:r>
-              <a:rPr sz="975" b="0">
-                <a:solidFill>
-                  <a:srgbClr val="1428A0"/>
+              <a:rPr sz="1800" b="0">
+                <a:solidFill>
+                  <a:srgbClr val="FFFFFF"/>
                 </a:solidFill>
                 <a:latin typeface="Arial"/>
                 <a:ea typeface="Arial"/>
               </a:rPr>
-              <a:t>SSD 단독 한계 시 · 상위 계층</a:t>
-            </a:r>
-          </a:p>
-        </p:txBody>
-      </p:sp>
-      <p:sp>
-        <p:nvSpPr>
-          <p:cNvPr id="102" name="TextBox 101"/>
+              <a:t>결론</a:t>
+            </a:r>
+          </a:p>
+        </p:txBody>
+      </p:sp>
+      <p:sp>
+        <p:nvSpPr>
+          <p:cNvPr id="110" name="TextBox 109"/>
           <p:cNvSpPr txBox="1"/>
           <p:nvPr/>
         </p:nvSpPr>
         <p:spPr>
           <a:xfrm>
-            <a:off x="16157448" y="6455664"/>
-            <a:ext cx="1280160" cy="201168"/>
+            <a:off x="2551176" y="8613648"/>
+            <a:ext cx="14648688" cy="731520"/>
           </a:xfrm>
           <a:prstGeom prst="rect">
             <a:avLst/>
@@ -7767,39 +8027,56 @@
           <a:noFill/>
         </p:spPr>
         <p:txBody>
-          <a:bodyPr wrap="square" anchor="t" lIns="0" rIns="0" tIns="0" bIns="0">
+          <a:bodyPr wrap="square" anchor="ctr" lIns="0" rIns="0" tIns="0" bIns="0">
             <a:spAutoFit/>
           </a:bodyPr>
           <a:lstStyle/>
           <a:p>
-            <a:pPr algn="r">
+            <a:pPr algn="l">
               <a:lnSpc>
-                <a:spcPct val="112000"/>
+                <a:spcPct val="108000"/>
               </a:lnSpc>
             </a:pPr>
             <a:r>
-              <a:rPr sz="975" b="1">
-                <a:solidFill>
-                  <a:srgbClr val="1428A0"/>
+              <a:rPr sz="1650" b="1">
+                <a:solidFill>
+                  <a:srgbClr val="FFFFFF"/>
                 </a:solidFill>
                 <a:latin typeface="Arial"/>
                 <a:ea typeface="Arial"/>
               </a:rPr>
-              <a:t>준비 중</a:t>
-            </a:r>
-          </a:p>
-        </p:txBody>
-      </p:sp>
-      <p:sp>
-        <p:nvSpPr>
-          <p:cNvPr id="103" name="TextBox 102"/>
+              <a:t>요구(UBER·DWPD)는 고정, 단품 지표(RBER·P/E)는 악화, 격차는 상위 계층이 보상해 왔습니다.</a:t>
+            </a:r>
+          </a:p>
+          <a:p>
+            <a:pPr algn="l">
+              <a:lnSpc>
+                <a:spcPct val="108000"/>
+              </a:lnSpc>
+            </a:pPr>
+            <a:r>
+              <a:rPr sz="1650" b="1">
+                <a:solidFill>
+                  <a:srgbClr val="FFFFFF"/>
+                </a:solidFill>
+                <a:latin typeface="Arial"/>
+                <a:ea typeface="Arial"/>
+              </a:rPr>
+              <a:t>호스트 공동 설계는 QLC DWPD의 남은 지렛대이며, 다이 세대·OP·보증연수 등 병행 중인 축과 결합해 격차를 닫습니다</a:t>
+            </a:r>
+          </a:p>
+        </p:txBody>
+      </p:sp>
+      <p:sp>
+        <p:nvSpPr>
+          <p:cNvPr id="111" name="TextBox 110"/>
           <p:cNvSpPr txBox="1"/>
           <p:nvPr/>
         </p:nvSpPr>
         <p:spPr>
           <a:xfrm>
-            <a:off x="14017752" y="6675120"/>
-            <a:ext cx="3419856" cy="237744"/>
+            <a:off x="722376" y="9592056"/>
+            <a:ext cx="14264640" cy="310896"/>
           </a:xfrm>
           <a:prstGeom prst="rect">
             <a:avLst/>
@@ -7818,380 +8095,14 @@
               </a:lnSpc>
             </a:pPr>
             <a:r>
-              <a:rPr sz="1275" b="1">
-                <a:solidFill>
-                  <a:srgbClr val="1A1A1A"/>
+              <a:rPr sz="1600" b="0">
+                <a:solidFill>
+                  <a:srgbClr val="555555"/>
                 </a:solidFill>
                 <a:latin typeface="Arial"/>
                 <a:ea typeface="Arial"/>
               </a:rPr>
-              <a:t>감량 운영 수용 · 호스트 소거 부호</a:t>
-            </a:r>
-          </a:p>
-        </p:txBody>
-      </p:sp>
-      <p:sp>
-        <p:nvSpPr>
-          <p:cNvPr id="104" name="Oval 103"/>
-          <p:cNvSpPr/>
-          <p:nvPr/>
-        </p:nvSpPr>
-        <p:spPr>
-          <a:xfrm>
-            <a:off x="14017752" y="7077456"/>
-            <a:ext cx="109728" cy="109728"/>
-          </a:xfrm>
-          <a:prstGeom prst="ellipse">
-            <a:avLst/>
-          </a:prstGeom>
-          <a:solidFill>
-            <a:srgbClr val="1428A0"/>
-          </a:solidFill>
-          <a:ln>
-            <a:noFill/>
-          </a:ln>
-          <a:effectLst/>
-        </p:spPr>
-        <p:style>
-          <a:lnRef idx="1">
-            <a:schemeClr val="accent1"/>
-          </a:lnRef>
-          <a:fillRef idx="3">
-            <a:schemeClr val="accent1"/>
-          </a:fillRef>
-          <a:effectRef idx="2">
-            <a:schemeClr val="accent1"/>
-          </a:effectRef>
-          <a:fontRef idx="minor">
-            <a:schemeClr val="lt1"/>
-          </a:fontRef>
-        </p:style>
-        <p:txBody>
-          <a:bodyPr rtlCol="0" anchor="ctr"/>
-          <a:lstStyle/>
-          <a:p>
-            <a:pPr algn="ctr"/>
-          </a:p>
-        </p:txBody>
-      </p:sp>
-      <p:sp>
-        <p:nvSpPr>
-          <p:cNvPr id="105" name="TextBox 104"/>
-          <p:cNvSpPr txBox="1"/>
-          <p:nvPr/>
-        </p:nvSpPr>
-        <p:spPr>
-          <a:xfrm>
-            <a:off x="14218920" y="7004304"/>
-            <a:ext cx="3218688" cy="384048"/>
-          </a:xfrm>
-          <a:prstGeom prst="rect">
-            <a:avLst/>
-          </a:prstGeom>
-          <a:noFill/>
-        </p:spPr>
-        <p:txBody>
-          <a:bodyPr wrap="square" anchor="t" lIns="0" rIns="0" tIns="0" bIns="0">
-            <a:spAutoFit/>
-          </a:bodyPr>
-          <a:lstStyle/>
-          <a:p>
-            <a:pPr algn="l">
-              <a:lnSpc>
-                <a:spcPct val="100000"/>
-              </a:lnSpc>
-            </a:pPr>
-            <a:r>
-              <a:rPr sz="975" b="1">
-                <a:solidFill>
-                  <a:srgbClr val="1A1A1A"/>
-                </a:solidFill>
-                <a:latin typeface="Arial"/>
-                <a:ea typeface="Arial"/>
-              </a:rPr>
-              <a:t>호스트 관측  </a:t>
-            </a:r>
-            <a:r>
-              <a:rPr sz="900" b="0">
-                <a:solidFill>
-                  <a:srgbClr val="555555"/>
-                </a:solidFill>
-                <a:latin typeface="Arial"/>
-                <a:ea typeface="Arial"/>
-              </a:rPr>
-              <a:t>OCP SMART XOR 복구 카운트로 다이 복구 이벤트를 하이퍼스케일러가 감시</a:t>
-            </a:r>
-          </a:p>
-        </p:txBody>
-      </p:sp>
-      <p:sp>
-        <p:nvSpPr>
-          <p:cNvPr id="106" name="Oval 105"/>
-          <p:cNvSpPr/>
-          <p:nvPr/>
-        </p:nvSpPr>
-        <p:spPr>
-          <a:xfrm>
-            <a:off x="14017752" y="7534656"/>
-            <a:ext cx="109728" cy="109728"/>
-          </a:xfrm>
-          <a:prstGeom prst="ellipse">
-            <a:avLst/>
-          </a:prstGeom>
-          <a:solidFill>
-            <a:srgbClr val="1428A0"/>
-          </a:solidFill>
-          <a:ln>
-            <a:noFill/>
-          </a:ln>
-          <a:effectLst/>
-        </p:spPr>
-        <p:style>
-          <a:lnRef idx="1">
-            <a:schemeClr val="accent1"/>
-          </a:lnRef>
-          <a:fillRef idx="3">
-            <a:schemeClr val="accent1"/>
-          </a:fillRef>
-          <a:effectRef idx="2">
-            <a:schemeClr val="accent1"/>
-          </a:effectRef>
-          <a:fontRef idx="minor">
-            <a:schemeClr val="lt1"/>
-          </a:fontRef>
-        </p:style>
-        <p:txBody>
-          <a:bodyPr rtlCol="0" anchor="ctr"/>
-          <a:lstStyle/>
-          <a:p>
-            <a:pPr algn="ctr"/>
-          </a:p>
-        </p:txBody>
-      </p:sp>
-      <p:sp>
-        <p:nvSpPr>
-          <p:cNvPr id="107" name="TextBox 106"/>
-          <p:cNvSpPr txBox="1"/>
-          <p:nvPr/>
-        </p:nvSpPr>
-        <p:spPr>
-          <a:xfrm>
-            <a:off x="14218920" y="7461504"/>
-            <a:ext cx="3218688" cy="384048"/>
-          </a:xfrm>
-          <a:prstGeom prst="rect">
-            <a:avLst/>
-          </a:prstGeom>
-          <a:noFill/>
-        </p:spPr>
-        <p:txBody>
-          <a:bodyPr wrap="square" anchor="t" lIns="0" rIns="0" tIns="0" bIns="0">
-            <a:spAutoFit/>
-          </a:bodyPr>
-          <a:lstStyle/>
-          <a:p>
-            <a:pPr algn="l">
-              <a:lnSpc>
-                <a:spcPct val="100000"/>
-              </a:lnSpc>
-            </a:pPr>
-            <a:r>
-              <a:rPr sz="975" b="1">
-                <a:solidFill>
-                  <a:srgbClr val="1A1A1A"/>
-                </a:solidFill>
-                <a:latin typeface="Arial"/>
-                <a:ea typeface="Arial"/>
-              </a:rPr>
-              <a:t>플랫폼 수용  </a:t>
-            </a:r>
-            <a:r>
-              <a:rPr sz="900" b="0">
-                <a:solidFill>
-                  <a:srgbClr val="555555"/>
-                </a:solidFill>
-                <a:latin typeface="Arial"/>
-                <a:ea typeface="Arial"/>
-              </a:rPr>
-              <a:t>고장 부품의 감량 운영을 스케줄러가 흡수 (Microsoft Hyrax, 수리 -50~60%)</a:t>
-            </a:r>
-          </a:p>
-        </p:txBody>
-      </p:sp>
-      <p:sp>
-        <p:nvSpPr>
-          <p:cNvPr id="108" name="Oval 107"/>
-          <p:cNvSpPr/>
-          <p:nvPr/>
-        </p:nvSpPr>
-        <p:spPr>
-          <a:xfrm>
-            <a:off x="14017752" y="7991856"/>
-            <a:ext cx="109728" cy="109728"/>
-          </a:xfrm>
-          <a:prstGeom prst="ellipse">
-            <a:avLst/>
-          </a:prstGeom>
-          <a:solidFill>
-            <a:srgbClr val="1428A0"/>
-          </a:solidFill>
-          <a:ln>
-            <a:noFill/>
-          </a:ln>
-          <a:effectLst/>
-        </p:spPr>
-        <p:style>
-          <a:lnRef idx="1">
-            <a:schemeClr val="accent1"/>
-          </a:lnRef>
-          <a:fillRef idx="3">
-            <a:schemeClr val="accent1"/>
-          </a:fillRef>
-          <a:effectRef idx="2">
-            <a:schemeClr val="accent1"/>
-          </a:effectRef>
-          <a:fontRef idx="minor">
-            <a:schemeClr val="lt1"/>
-          </a:fontRef>
-        </p:style>
-        <p:txBody>
-          <a:bodyPr rtlCol="0" anchor="ctr"/>
-          <a:lstStyle/>
-          <a:p>
-            <a:pPr algn="ctr"/>
-          </a:p>
-        </p:txBody>
-      </p:sp>
-      <p:sp>
-        <p:nvSpPr>
-          <p:cNvPr id="109" name="TextBox 108"/>
-          <p:cNvSpPr txBox="1"/>
-          <p:nvPr/>
-        </p:nvSpPr>
-        <p:spPr>
-          <a:xfrm>
-            <a:off x="14218920" y="7918704"/>
-            <a:ext cx="3218688" cy="384048"/>
-          </a:xfrm>
-          <a:prstGeom prst="rect">
-            <a:avLst/>
-          </a:prstGeom>
-          <a:noFill/>
-        </p:spPr>
-        <p:txBody>
-          <a:bodyPr wrap="square" anchor="t" lIns="0" rIns="0" tIns="0" bIns="0">
-            <a:spAutoFit/>
-          </a:bodyPr>
-          <a:lstStyle/>
-          <a:p>
-            <a:pPr algn="l">
-              <a:lnSpc>
-                <a:spcPct val="100000"/>
-              </a:lnSpc>
-            </a:pPr>
-            <a:r>
-              <a:rPr sz="975" b="1">
-                <a:solidFill>
-                  <a:srgbClr val="1A1A1A"/>
-                </a:solidFill>
-                <a:latin typeface="Arial"/>
-                <a:ea typeface="Arial"/>
-              </a:rPr>
-              <a:t>드라이브 간  </a:t>
-            </a:r>
-            <a:r>
-              <a:rPr sz="900" b="0">
-                <a:solidFill>
-                  <a:srgbClr val="555555"/>
-                </a:solidFill>
-                <a:latin typeface="Arial"/>
-                <a:ea typeface="Arial"/>
-              </a:rPr>
-              <a:t>소거 부호 · 복제가 SSD 단위 고장을 이미 흡수</a:t>
-            </a:r>
-          </a:p>
-        </p:txBody>
-      </p:sp>
-      <p:sp>
-        <p:nvSpPr>
-          <p:cNvPr id="110" name="Rectangle 109"/>
-          <p:cNvSpPr/>
-          <p:nvPr/>
-        </p:nvSpPr>
-        <p:spPr>
-          <a:xfrm>
-            <a:off x="722376" y="8613648"/>
-            <a:ext cx="16843248" cy="731520"/>
-          </a:xfrm>
-          <a:prstGeom prst="rect">
-            <a:avLst/>
-          </a:prstGeom>
-          <a:solidFill>
-            <a:srgbClr val="1428A0"/>
-          </a:solidFill>
-          <a:ln>
-            <a:noFill/>
-          </a:ln>
-          <a:effectLst/>
-        </p:spPr>
-        <p:style>
-          <a:lnRef idx="1">
-            <a:schemeClr val="accent1"/>
-          </a:lnRef>
-          <a:fillRef idx="3">
-            <a:schemeClr val="accent1"/>
-          </a:fillRef>
-          <a:effectRef idx="2">
-            <a:schemeClr val="accent1"/>
-          </a:effectRef>
-          <a:fontRef idx="minor">
-            <a:schemeClr val="lt1"/>
-          </a:fontRef>
-        </p:style>
-        <p:txBody>
-          <a:bodyPr rtlCol="0" anchor="ctr"/>
-          <a:lstStyle/>
-          <a:p>
-            <a:pPr algn="ctr"/>
-          </a:p>
-        </p:txBody>
-      </p:sp>
-      <p:sp>
-        <p:nvSpPr>
-          <p:cNvPr id="111" name="TextBox 110"/>
-          <p:cNvSpPr txBox="1"/>
-          <p:nvPr/>
-        </p:nvSpPr>
-        <p:spPr>
-          <a:xfrm>
-            <a:off x="1133856" y="8613648"/>
-            <a:ext cx="1463040" cy="731520"/>
-          </a:xfrm>
-          <a:prstGeom prst="rect">
-            <a:avLst/>
-          </a:prstGeom>
-          <a:noFill/>
-        </p:spPr>
-        <p:txBody>
-          <a:bodyPr wrap="square" anchor="ctr" lIns="0" rIns="0" tIns="0" bIns="0">
-            <a:spAutoFit/>
-          </a:bodyPr>
-          <a:lstStyle/>
-          <a:p>
-            <a:pPr algn="l">
-              <a:lnSpc>
-                <a:spcPct val="112000"/>
-              </a:lnSpc>
-            </a:pPr>
-            <a:r>
-              <a:rPr sz="1800" b="0">
-                <a:solidFill>
-                  <a:srgbClr val="FFFFFF"/>
-                </a:solidFill>
-                <a:latin typeface="Arial"/>
-                <a:ea typeface="Arial"/>
-              </a:rPr>
-              <a:t>결론</a:t>
+              <a:t>출처: JESD218(UBER), ATP·Kioxia(DWPD 산식), Intel·Solidigm 사양(정격 DWPD), Mielke·Cai(RBER), WD(LDPC), CacheLib·삼성·NVMe FDP·VLDB'26(WAF), P5336·6550 ION·CM9·LC9(동급 DWPD) · 등급은 부록 A F28~F54</a:t>
             </a:r>
           </a:p>
         </p:txBody>
@@ -8199,103 +8110,6 @@
       <p:sp>
         <p:nvSpPr>
           <p:cNvPr id="112" name="TextBox 111"/>
-          <p:cNvSpPr txBox="1"/>
-          <p:nvPr/>
-        </p:nvSpPr>
-        <p:spPr>
-          <a:xfrm>
-            <a:off x="2551176" y="8613648"/>
-            <a:ext cx="14648688" cy="731520"/>
-          </a:xfrm>
-          <a:prstGeom prst="rect">
-            <a:avLst/>
-          </a:prstGeom>
-          <a:noFill/>
-        </p:spPr>
-        <p:txBody>
-          <a:bodyPr wrap="square" anchor="ctr" lIns="0" rIns="0" tIns="0" bIns="0">
-            <a:spAutoFit/>
-          </a:bodyPr>
-          <a:lstStyle/>
-          <a:p>
-            <a:pPr algn="l">
-              <a:lnSpc>
-                <a:spcPct val="108000"/>
-              </a:lnSpc>
-            </a:pPr>
-            <a:r>
-              <a:rPr sz="1650" b="1">
-                <a:solidFill>
-                  <a:srgbClr val="FFFFFF"/>
-                </a:solidFill>
-                <a:latin typeface="Arial"/>
-                <a:ea typeface="Arial"/>
-              </a:rPr>
-              <a:t>요구(UBER·DWPD·FFR)는 고정, 단품 지표(RBER·P/E·다이 수)는 악화, 격차는 상위 계층이 보상해 왔습니다.</a:t>
-            </a:r>
-          </a:p>
-          <a:p>
-            <a:pPr algn="l">
-              <a:lnSpc>
-                <a:spcPct val="108000"/>
-              </a:lnSpc>
-            </a:pPr>
-            <a:r>
-              <a:rPr sz="1650" b="1">
-                <a:solidFill>
-                  <a:srgbClr val="FFFFFF"/>
-                </a:solidFill>
-                <a:latin typeface="Arial"/>
-                <a:ea typeface="Arial"/>
-              </a:rPr>
-              <a:t>QLC로 요구 DWPD를 충족하는 경로는 호스트 시스템 공동 설계뿐이며, 이는 산식의 귀결입니다</a:t>
-            </a:r>
-          </a:p>
-        </p:txBody>
-      </p:sp>
-      <p:sp>
-        <p:nvSpPr>
-          <p:cNvPr id="113" name="TextBox 112"/>
-          <p:cNvSpPr txBox="1"/>
-          <p:nvPr/>
-        </p:nvSpPr>
-        <p:spPr>
-          <a:xfrm>
-            <a:off x="722376" y="9592056"/>
-            <a:ext cx="14264640" cy="310896"/>
-          </a:xfrm>
-          <a:prstGeom prst="rect">
-            <a:avLst/>
-          </a:prstGeom>
-          <a:noFill/>
-        </p:spPr>
-        <p:txBody>
-          <a:bodyPr wrap="square" anchor="t" lIns="0" rIns="0" tIns="0" bIns="0">
-            <a:spAutoFit/>
-          </a:bodyPr>
-          <a:lstStyle/>
-          <a:p>
-            <a:pPr algn="l">
-              <a:lnSpc>
-                <a:spcPct val="112000"/>
-              </a:lnSpc>
-            </a:pPr>
-            <a:r>
-              <a:rPr sz="1600" b="0">
-                <a:solidFill>
-                  <a:srgbClr val="555555"/>
-                </a:solidFill>
-                <a:latin typeface="Arial"/>
-                <a:ea typeface="Arial"/>
-              </a:rPr>
-              <a:t>출처: JESD218(UBER·FFR), ATP·Kioxia(DWPD 산식), Intel·Solidigm 사양(정격 DWPD·다이 수), Mielke·Cai(RBER·다이 패리티), WD(LDPC), CacheLib FDP(WAF), HotStorage'14·SYSTOR'17·NVMe 1.4, Kioxia LC9·삼성 FIP·OCP SMART·MS Hyrax · 등급은 보고서 부록 A F28~F47</a:t>
-            </a:r>
-          </a:p>
-        </p:txBody>
-      </p:sp>
-      <p:sp>
-        <p:nvSpPr>
-          <p:cNvPr id="114" name="TextBox 113"/>
           <p:cNvSpPr txBox="1"/>
           <p:nvPr/>
         </p:nvSpPr>

--- a/outputs/presentation/memory-solution-ladder.pptx
+++ b/outputs/presentation/memory-solution-ladder.pptx
@@ -502,7 +502,7 @@
           <a:lstStyle/>
           <a:p>
             <a:r>
-              <a:t>2장은 이관 매트릭스입니다. 1장의 문제(고용량 QLC의 DWPD 격차)를 받아, 지금까지 단품이 못 푼 문제를 어느 계층이 풀어 왔는지의 경향을 보이고 호스트 시스템 수준 해법이 왜 필요한지를 세웁니다. 열은 이관 단계(요구 → 단품 지표 → SSD 계층의 보상 → 호스트·시스템 계층의 보상), 행은 내구성 축입니다. 산식 DWPD = P/E × (1+OP) ÷ WAF ÷ 365 × 년의 각 항은 결정 주체가 열과 대응합니다. 요구: 추론 캐시 계층 제품은 DWPD 1~3(TLC), UBER는 JESD218 기준으로 고정입니다. 단품: P/E 사이클은 SLC 30K~100K에서 QLC 100~1K로 100배 감소, RBER은 약 백만 배 상승했고 셀은 시간에 따라 변하는 산포를 단독으로 보정하지 못합니다. SSD 계층: 1단계 컨트롤러 ECC(1비트/512B → LDPC 120비트/KB, 60배)는 UBER 요구를 충족해 완결됐습니다. 2단계 SSD 단독 워크로드 최적화(2014~2019: Multi-stream·AutoStream·FTL 핫/콜드 추정·NVMe IO 결정성)는 QoS·성능은 개선했으나 데이터 수명을 SSD가 감지할 수 없어 실 워크로드 WAF는 3 수준에 머물렀고, 정격 DWPD는 17에서 0.4로 내려왔습니다. 호스트·시스템 계층: 3단계 호스트 공동 설계는 호스트가 데이터 수명을 지정해 WAF를 약 3에서 약 1로 낮춥니다. 범용 랜덤 워크로드 실측(삼성·NVM Express, 50% 사용률)과 CacheLib 실측(3.22 → 1.03)이 근거이고, 데이터베이스 영역에서는 호스트 쓰기 패턴만으로 SSD WAF 1을 보장한 VLDB 2026 연구가 있습니다. 다만 KV 캐시 워크로드의 FDP WAF 실측은 공개 문헌에 없으므로 이 장의 주장은 검증할 가설이며, 4장 Phase 2 실측이 그 검증입니다. 하단 지렛대 스트립이 이 장의 핵심 정정입니다. 호스트 배치 하나로는 격차가 닫히지 않습니다. WAF 지렛대는 유효 DWPD 약 2.9배이고, 동급 비교 격차는 2~10배이므로 다이 세대(P/E), OP, SLC 캐시·쓰기 정형, 보증연수·TBW 기준, 워크로드 재정의(어드미션·TLC 혼합 계층)와 결합해야 요구에 도달합니다. 이 축들은 모두 병행 중이며 본 보고는 호스트 축만 다룹니다. 호스트·고객 쪽 지렛대가 다수라는 점이 공동 설계의 근거입니다. 결론: 호스트 공동 설계는 QLC DWPD의 남은 지렛대이며, 다른 축과 결합해 격차를 닫습니다. 신뢰성 축(다이 수·고장률)은 호스트가 아니라 SSD가 풀 문제라 3장에서 따로 다룹니다. 근거 등급은 보고서 부록 A F28~F54에 있습니다.</a:t>
+              <a:t>1장은 이관 매트릭스입니다. 고용량 QLC의 DWPD 격차를 받아, 지금까지 단품이 못 푼 문제를 어느 계층이 풀어 왔는지의 경향을 보이고 호스트 시스템 수준 해법이 왜 필요한지를 세웁니다. 열은 이관 단계(요구 → 단품 지표 → SSD 계층의 보상 → 호스트·시스템 계층의 보상), 행은 내구성 축입니다. 산식 DWPD = P/E × (1+OP) ÷ WAF ÷ 365 × 년의 각 항은 결정 주체가 열과 대응합니다. 요구: 추론 캐시 계층 제품은 DWPD 1~3(TLC), UBER는 JESD218 기준으로 고정입니다. 단품: P/E 사이클은 SLC 30K~100K에서 QLC 100~1K로 100배 감소, RBER은 약 백만 배 상승했고 셀은 시간에 따라 변하는 산포를 단독으로 보정하지 못합니다. SSD 계층: 1단계 컨트롤러 ECC(1비트/512B → LDPC 120비트/KB, 60배)는 UBER 요구를 충족해 완결됐습니다. 2단계 SSD 단독 워크로드 최적화(2014~2019: Multi-stream·AutoStream·FTL 핫/콜드 추정·NVMe IO 결정성)는 QoS·성능은 개선했으나 데이터 수명을 SSD가 감지할 수 없어 실 워크로드 WAF는 3 수준에 머물렀고, 정격 DWPD는 17에서 0.4로 내려왔습니다. 호스트·시스템 계층: 3단계 호스트 공동 설계는 호스트가 데이터 수명을 지정해 WAF를 약 3에서 약 1로 낮춥니다. 범용 랜덤 워크로드 실측(삼성·NVM Express, 50% 사용률)과 CacheLib 실측(3.22 → 1.03)이 근거이고, 데이터베이스 영역에서는 호스트 쓰기 패턴만으로 SSD WAF 1을 보장한 VLDB 2026 연구가 있습니다. 다만 KV 캐시 워크로드의 FDP WAF 실측은 공개 문헌에 없으므로 이 장의 주장은 검증할 가설이며, 4장 Phase 2 실측이 그 검증입니다. 하단 지렛대 스트립이 이 장의 핵심 정정입니다. 호스트 배치 하나로는 격차가 닫히지 않습니다. WAF 지렛대는 유효 DWPD 약 2.9배이고, 동급 비교 격차는 2~10배이므로 다이 세대(P/E), OP, SLC 캐시·쓰기 정형, 보증연수·TBW 기준, 워크로드 재정의(어드미션·TLC 혼합 계층)와 결합해야 요구에 도달합니다. 이 축들은 모두 병행 중이며 본 보고는 호스트 축만 다룹니다. 호스트·고객 쪽 지렛대가 다수라는 점이 공동 설계의 근거입니다. 결론: 호스트 공동 설계는 QLC DWPD의 남은 지렛대이며, 다른 축과 결합해 격차를 닫습니다. 신뢰성 축(다이 수·고장률)은 호스트가 아니라 SSD가 풀 문제라 별도로 다룹니다. 근거 등급은 보고서 부록 A F28~F54에 있습니다.</a:t>
             </a:r>
           </a:p>
         </p:txBody>
@@ -3703,7 +3703,7 @@
                 <a:latin typeface="Arial"/>
                 <a:ea typeface="Arial"/>
               </a:rPr>
-              <a:t>1장의 격차를 지금까지 어느 계층이 풀어 왔는지 보면, SSD 단독 최적화는 QoS·성능은 개선했으나 WAF는 낮추지 못했습니다.</a:t>
+              <a:t>고용량 QLC의 DWPD 격차를 지금까지 어느 계층이 풀어 왔는지 보면, SSD 단독 최적화는 QoS·성능은 개선했으나 WAF는 낮추지 못했습니다.</a:t>
             </a:r>
           </a:p>
         </p:txBody>

--- a/outputs/presentation/memory-solution-ladder.pptx
+++ b/outputs/presentation/memory-solution-ladder.pptx
@@ -502,7 +502,7 @@
           <a:lstStyle/>
           <a:p>
             <a:r>
-              <a:t>1장은 이관 매트릭스입니다. 고용량 QLC의 DWPD 격차를 받아, 지금까지 단품이 못 푼 문제를 어느 계층이 풀어 왔는지의 경향을 보이고 호스트 시스템 수준 해법이 왜 필요한지를 세웁니다. 열은 이관 단계(요구 → 단품 지표 → SSD 계층의 보상 → 호스트·시스템 계층의 보상), 행은 내구성 축입니다. 산식 DWPD = P/E × (1+OP) ÷ WAF ÷ 365 × 년의 각 항은 결정 주체가 열과 대응합니다. 요구: 추론 캐시 계층 제품은 DWPD 1~3(TLC), UBER는 JESD218 기준으로 고정입니다. 단품: P/E 사이클은 SLC 30K~100K에서 QLC 100~1K로 100배 감소, RBER은 약 백만 배 상승했고 셀은 시간에 따라 변하는 산포를 단독으로 보정하지 못합니다. SSD 계층: 1단계 컨트롤러 ECC(1비트/512B → LDPC 120비트/KB, 60배)는 UBER 요구를 충족해 완결됐습니다. 2단계 SSD 단독 워크로드 최적화(2014~2019: Multi-stream·AutoStream·FTL 핫/콜드 추정·NVMe IO 결정성)는 QoS·성능은 개선했으나 데이터 수명을 SSD가 감지할 수 없어 실 워크로드 WAF는 3 수준에 머물렀고, 정격 DWPD는 17에서 0.4로 내려왔습니다. 호스트·시스템 계층: 3단계 호스트 공동 설계는 호스트가 데이터 수명을 지정해 WAF를 약 3에서 약 1로 낮춥니다. 범용 랜덤 워크로드 실측(삼성·NVM Express, 50% 사용률)과 CacheLib 실측(3.22 → 1.03)이 근거이고, 데이터베이스 영역에서는 호스트 쓰기 패턴만으로 SSD WAF 1을 보장한 VLDB 2026 연구가 있습니다. 다만 KV 캐시 워크로드의 FDP WAF 실측은 공개 문헌에 없으므로 이 장의 주장은 검증할 가설이며, 4장 Phase 2 실측이 그 검증입니다. 하단 지렛대 스트립이 이 장의 핵심 정정입니다. 호스트 배치 하나로는 격차가 닫히지 않습니다. WAF 지렛대는 유효 DWPD 약 2.9배이고, 동급 비교 격차는 2~10배이므로 다이 세대(P/E), OP, SLC 캐시·쓰기 정형, 보증연수·TBW 기준, 워크로드 재정의(어드미션·TLC 혼합 계층)와 결합해야 요구에 도달합니다. 이 축들은 모두 병행 중이며 본 보고는 호스트 축만 다룹니다. 호스트·고객 쪽 지렛대가 다수라는 점이 공동 설계의 근거입니다. 결론: 호스트 공동 설계는 QLC DWPD의 남은 지렛대이며, 다른 축과 결합해 격차를 닫습니다. 신뢰성 축(다이 수·고장률)은 호스트가 아니라 SSD가 풀 문제라 별도로 다룹니다. 근거 등급은 보고서 부록 A F28~F54에 있습니다.</a:t>
+              <a:t>1장은 이관 매트릭스입니다. 고용량 QLC의 DWPD 격차를 받아, 지금까지 단품이 못 푼 문제를 어느 계층이 풀어 왔는지의 경향을 보이고 호스트 시스템 수준 해법이 왜 필요한지를 세웁니다. 열은 이관 단계(요구 → 단품 지표 → SSD 계층의 보상 → 호스트·시스템 계층의 보상), 행은 내구성 축입니다. 산식 DWPD = P/E × (1+OP) ÷ WAF ÷ 365 × 년의 각 항은 결정 주체가 열과 대응합니다. 요구: 추론 캐시 계층 제품은 DWPD 1~3(TLC), UBER는 JESD218 기준으로 고정입니다. 단품: P/E 사이클은 SLC 30K~100K에서 QLC 100~1K로 100배 감소, RBER은 약 백만 배 상승했고 셀은 시간에 따라 변하는 산포를 단독으로 보정하지 못합니다. SSD 계층: 1단계 컨트롤러 ECC(1비트/512B → LDPC 120비트/KB, 60배)는 UBER 요구를 충족해 완결됐습니다. 2단계 SSD 단독 워크로드 최적화(2014~2019: Multi-stream·AutoStream·FTL 핫/콜드 추정·NVMe IO 결정성)는 QoS·성능은 개선했으나 데이터 수명을 SSD가 감지할 수 없어 실 워크로드 WAF는 3 수준에 머물렀고, 정격 DWPD는 17에서 0.4로 내려왔습니다. 호스트·시스템 계층: 3단계 호스트 공동 설계는 호스트가 데이터 수명을 지정해 WAF를 약 3에서 약 1로 낮춥니다. 범용 랜덤 워크로드 실측(삼성·NVM Express, 50% 사용률)과 CacheLib 실측(3.22 → 1.03)이 근거이고, 데이터베이스 영역에서는 호스트 쓰기 패턴만으로 SSD WAF 1을 보장한 VLDB 2026 연구가 있습니다. 다만 KV 캐시 워크로드의 FDP WAF 실측은 공개 문헌에 없으므로 이 장의 주장은 검증할 가설이며, 4장 Phase 2 실측이 그 검증입니다. 하단 격차 축소 변수 스트립이 이 장의 핵심 정정입니다. 호스트 배치 하나로는 격차가 해소되지 않습니다. WAF 변수는 유효 DWPD 약 2.9배이고, 동급 비교 격차는 2~10배이므로 다이 세대(P/E), OP, SLC 캐시·쓰기 정형, 보증연수·TBW 기준, 워크로드 재정의(어드미션·TLC 혼합 계층)와 결합해야 요구에 도달합니다. 이 축들은 모두 병행 중이며 본 보고는 호스트 축만 다룹니다. 호스트·고객 쪽 변수가 다수라는 점이 공동 설계의 근거입니다. 결론: 호스트 공동 설계는 QLC DWPD의 잔여 변수이며, 다른 축과 결합해 격차를 줄입니다. 신뢰성 축(다이 수·고장률)은 호스트가 아니라 SSD가 풀 문제라 별도로 다룹니다. 근거 등급은 보고서 부록 A F28~F54에 있습니다.</a:t>
             </a:r>
           </a:p>
         </p:txBody>
@@ -3663,7 +3663,7 @@
                 <a:latin typeface="Arial"/>
                 <a:ea typeface="Arial"/>
               </a:rPr>
-              <a:t>요구는 고정, 단품은 악화, 보상은 상위 계층으로: 남은 지렛대 WAF는 호스트에 있습니다</a:t>
+              <a:t>요구는 고정, 단품은 악화, 보상은 상위 계층으로: 잔여 변수 WAF는 호스트에 있습니다</a:t>
             </a:r>
           </a:p>
         </p:txBody>
@@ -6717,7 +6717,7 @@
                 <a:latin typeface="Arial"/>
                 <a:ea typeface="Arial"/>
               </a:rPr>
-              <a:t>호스트가 쥔 남은 지렛대(×2.9) · KV 캐시 실측은 Phase 2 검증 대상</a:t>
+              <a:t>호스트가 결정하는 잔여 변수(유효 DWPD ×2.9) · KV 캐시 실측은 Phase 2 검증 대상</a:t>
             </a:r>
           </a:p>
         </p:txBody>
@@ -6845,8 +6845,8 @@
                 <a:latin typeface="Arial"/>
                 <a:ea typeface="Arial"/>
               </a:rPr>
-              <a:t>격차를 닫는
-지렛대</a:t>
+              <a:t>격차 축소
+변수</a:t>
             </a:r>
           </a:p>
         </p:txBody>
@@ -7921,7 +7921,7 @@
                 <a:latin typeface="Arial"/>
                 <a:ea typeface="Arial"/>
               </a:rPr>
-              <a:t>호스트 배치 하나로는 격차(동급 비교 2~10배)가 닫히지 않습니다. WAF ×2.9는 다이 세대·OP·보증연수·워크로드 재정의와 결합해 요구에 도달하며, 이 중 호스트·고객 쪽 지렛대가 다수라는 점이 공동 설계의 근거입니다</a:t>
+              <a:t>호스트 배치 하나로는 격차(동급 비교 2~10배)가 해소되지 않습니다. WAF ×2.9는 다이 세대·OP·보증연수·워크로드 재정의와 결합해 요구에 도달하며, 이 중 호스트·고객 측 변수가 다수라는 점이 공동 설계의 근거입니다</a:t>
             </a:r>
           </a:p>
         </p:txBody>
@@ -8062,7 +8062,7 @@
                 <a:latin typeface="Arial"/>
                 <a:ea typeface="Arial"/>
               </a:rPr>
-              <a:t>호스트 공동 설계는 QLC DWPD의 남은 지렛대이며, 다이 세대·OP·보증연수 등 병행 중인 축과 결합해 격차를 닫습니다</a:t>
+              <a:t>호스트 공동 설계는 QLC DWPD의 잔여 변수 WAF를 결정하며, 다이 세대·OP·보증연수 등 병행 중인 축과 결합해 격차를 줄입니다</a:t>
             </a:r>
           </a:p>
         </p:txBody>

--- a/outputs/presentation/memory-solution-ladder.pptx
+++ b/outputs/presentation/memory-solution-ladder.pptx
@@ -502,7 +502,7 @@
           <a:lstStyle/>
           <a:p>
             <a:r>
-              <a:t>1장은 이관 매트릭스입니다. 고용량 QLC의 DWPD 격차를 받아, 지금까지 단품이 못 푼 문제를 어느 계층이 풀어 왔는지의 경향을 보이고 호스트 시스템 수준 해법이 왜 필요한지를 세웁니다. 열은 이관 단계(요구 → 단품 지표 → SSD 계층의 보상 → 호스트·시스템 계층의 보상), 행은 내구성 축입니다. 산식 DWPD = P/E × (1+OP) ÷ WAF ÷ 365 × 년의 각 항은 결정 주체가 열과 대응합니다. 요구: 추론 캐시 계층 제품은 DWPD 1~3(TLC), UBER는 JESD218 기준으로 고정입니다. 단품: P/E 사이클은 SLC 30K~100K에서 QLC 100~1K로 100배 감소, RBER은 약 백만 배 상승했고 셀은 시간에 따라 변하는 산포를 단독으로 보정하지 못합니다. SSD 계층: 1단계 컨트롤러 ECC(1비트/512B → LDPC 120비트/KB, 60배)는 UBER 요구를 충족해 완결됐습니다. 2단계 SSD 단독 워크로드 최적화(2014~2019: Multi-stream·AutoStream·FTL 핫/콜드 추정·NVMe IO 결정성)는 QoS·성능은 개선했으나 데이터 수명을 SSD가 감지할 수 없어 실 워크로드 WAF는 3 수준에 머물렀고, 정격 DWPD는 17에서 0.4로 내려왔습니다. 호스트·시스템 계층: 3단계 호스트 공동 설계는 호스트가 데이터 수명을 지정해 WAF를 약 3에서 약 1로 낮춥니다. 범용 랜덤 워크로드 실측(삼성·NVM Express, 50% 사용률)과 CacheLib 실측(3.22 → 1.03)이 근거이고, 데이터베이스 영역에서는 호스트 쓰기 패턴만으로 SSD WAF 1을 보장한 VLDB 2026 연구가 있습니다. 다만 KV 캐시 워크로드의 FDP WAF 실측은 공개 문헌에 없으므로 이 장의 주장은 검증할 가설이며, 4장 Phase 2 실측이 그 검증입니다. 하단 격차 축소 변수 스트립이 이 장의 핵심 정정입니다. 호스트 배치 하나로는 격차가 해소되지 않습니다. WAF 변수는 유효 DWPD 약 2.9배이고, 동급 비교 격차는 2~10배이므로 다이 세대(P/E), OP, SLC 캐시·쓰기 정형, 보증연수·TBW 기준, 워크로드 재정의(어드미션·TLC 혼합 계층)와 결합해야 요구에 도달합니다. 이 축들은 모두 병행 중이며 본 보고는 호스트 축만 다룹니다. 호스트·고객 쪽 변수가 다수라는 점이 공동 설계의 근거입니다. 결론: 호스트 공동 설계는 QLC DWPD의 잔여 변수이며, 다른 축과 결합해 격차를 줄입니다. 신뢰성 축(다이 수·고장률)은 호스트가 아니라 SSD가 풀 문제라 별도로 다룹니다. 근거 등급은 보고서 부록 A F28~F54에 있습니다.</a:t>
+              <a:t>1장은 이관 매트릭스입니다. 고용량 QLC의 DWPD 격차를 받아, 지금까지 단품이 못 푼 문제를 어느 계층이 풀어 왔는지의 경향을 보이고 호스트 시스템 수준 해법이 왜 필요한지를 세웁니다. 열은 이관 단계, 행은 내구성 축입니다. 산식 DWPD = P/E × (1+OP) ÷ WAF ÷ 365 × 년의 각 항은 결정 주체가 열과 대응합니다. 요구 열입니다. 추론 캐시 계층 제품의 정격은 1에서 3 DWPD이고 현 QLC 정격 0.6과는 2배에서 5배 격차입니다. UBER는 JESD218 기준으로 고정이며 드라이브 고장률 요구는 2장에서 SSD 내부 구조로 충족됩니다. 단품 열입니다. P/E 사이클은 SLC 3만에서 10만 회에서 QLC 100에서 1천 회로 약 100배 줄었고 RBER은 약 백만 배 올랐습니다. 셀은 시간에 따라 변하는 산포를 단독으로 보정하지 못합니다. SSD 계층 열입니다. 1단계 컨트롤러 ECC는 512바이트당 1비트에서 킬로바이트당 120비트 LDPC로 60배 강화되어 UBER 요구를 충족했고 완결된 이관입니다. 2단계 SSD 단독 워크로드 최적화는 2014년에서 2019년의 멀티스트림, 오토스트림, FTL 핫콜드 추정, NVMe IO 결정성인데 QoS와 성능은 개선했지만 데이터 수명을 SSD가 감지할 수 없어 실 워크로드 WAF는 3 수준에 머물렀습니다. 차트가 그 결과입니다. 정격 DWPD는 2008년 17에서 2025년 0.3으로 57배 내려갔습니다. 다만 이 숫자만 읽으면 오독입니다. DWPD는 용량으로 나눈 지표이므로 드라이브당 하루 허용 기입량으로 환산하면 1.1TB에서 73.7TB로 67배 올라갔습니다. 요구가 줄어든 것이 아니라 분모가 커진 것입니다. 호스트 계층 열입니다. 호스트가 데이터 수명을 지정하면 WAF가 1 근처로 내려갑니다. 여기서 연도별 추이선을 그리지 않은 이유가 중요합니다. Meta의 CacheLib 공식 문서를 보면 같은 드라이브, 같은 트레이스인데도 디바이스 사용률이 100%일 때 기준 WAF가 3.22, 50%일 때 1.22로 2.6배 차이가 납니다. 연도축에 서로 다른 실험을 늘어놓으면 이 교란변수가 숨습니다. 그래서 기법별로 적용 전과 후를 짝지어 조건과 함께 표기했습니다. CacheLib 사용률 100%에서 3.22에서 1.03, 사용률 50%에서 1.22에서 1.03, Kioxia XD8 CacheBench에서 2.8에서 약 1.0입니다. 주의할 점은 CacheLib의 KV 캐시가 LLM KV 캐시가 아니라 Meta 소셜그래프용 키값 캐시라는 것입니다. LLM KV 캐시 오프로드의 WAF 공개 실측은 2026년 9월 현재 없으며, FAST 2026의 WARP 연구는 수명 오분류나 핸들 간 간섭이 있으면 배치 분리가 WAF를 낮추지 못한다고 보고합니다. 그래서 이 장의 주장은 조건부이고 4장 Phase 2 실측이 그 검증입니다. 하단 격차 축소 변수 스트립이 이 장의 핵심 정정입니다. 호스트 배치 하나로는 요구 대비 2배에서 5배 격차가 해소되지 않습니다. WAF 변수는 유효 DWPD 약 3배이고, 다이 세대, OP, SLC 캐시와 쓰기 정형, 보증연수와 TBW 기준, 워크로드 재정의와 결합해야 요구에 도달합니다. 이 축들은 모두 병행 중이며 본 보고는 호스트 축만 다룹니다. 호스트와 고객 쪽 변수가 다수라는 점이 공동 설계의 근거입니다. 신뢰성 축(다이 수·고장률)은 호스트가 아니라 SSD가 풀 문제라 별도로 다룹니다. 근거 등급은 보고서 부록 A에 있습니다.</a:t>
             </a:r>
           </a:p>
         </p:txBody>
@@ -3761,7 +3761,7 @@
         <p:spPr>
           <a:xfrm>
             <a:off x="2039112" y="2560320"/>
-            <a:ext cx="3675888" cy="512064"/>
+            <a:ext cx="2468880" cy="512064"/>
           </a:xfrm>
           <a:prstGeom prst="rect">
             <a:avLst/>
@@ -3807,7 +3807,7 @@
         <p:spPr>
           <a:xfrm>
             <a:off x="2167128" y="2615184"/>
-            <a:ext cx="3419856" cy="237744"/>
+            <a:ext cx="2212848" cy="237744"/>
           </a:xfrm>
           <a:prstGeom prst="rect">
             <a:avLst/>
@@ -3847,7 +3847,7 @@
         <p:spPr>
           <a:xfrm>
             <a:off x="2167128" y="2843784"/>
-            <a:ext cx="3419856" cy="201168"/>
+            <a:ext cx="2212848" cy="201168"/>
           </a:xfrm>
           <a:prstGeom prst="rect">
             <a:avLst/>
@@ -3886,8 +3886,8 @@
         </p:nvSpPr>
         <p:spPr>
           <a:xfrm>
-            <a:off x="5989320" y="2560320"/>
-            <a:ext cx="3675888" cy="512064"/>
+            <a:off x="4782312" y="2560320"/>
+            <a:ext cx="4078224" cy="512064"/>
           </a:xfrm>
           <a:prstGeom prst="rect">
             <a:avLst/>
@@ -3932,8 +3932,8 @@
         </p:nvSpPr>
         <p:spPr>
           <a:xfrm>
-            <a:off x="6117336" y="2615184"/>
-            <a:ext cx="3419856" cy="237744"/>
+            <a:off x="4910327" y="2615184"/>
+            <a:ext cx="3822192" cy="237744"/>
           </a:xfrm>
           <a:prstGeom prst="rect">
             <a:avLst/>
@@ -3972,8 +3972,8 @@
         </p:nvSpPr>
         <p:spPr>
           <a:xfrm>
-            <a:off x="6117336" y="2843784"/>
-            <a:ext cx="3419856" cy="201168"/>
+            <a:off x="4910327" y="2843784"/>
+            <a:ext cx="3822192" cy="201168"/>
           </a:xfrm>
           <a:prstGeom prst="rect">
             <a:avLst/>
@@ -4012,7 +4012,7 @@
         </p:nvSpPr>
         <p:spPr>
           <a:xfrm>
-            <a:off x="9692640" y="2715768"/>
+            <a:off x="8887968" y="2715768"/>
             <a:ext cx="219456" cy="201168"/>
           </a:xfrm>
           <a:prstGeom prst="rightArrow">
@@ -4056,8 +4056,8 @@
         </p:nvSpPr>
         <p:spPr>
           <a:xfrm>
-            <a:off x="9939528" y="2560320"/>
-            <a:ext cx="3675888" cy="512064"/>
+            <a:off x="9134856" y="2560320"/>
+            <a:ext cx="4078224" cy="512064"/>
           </a:xfrm>
           <a:prstGeom prst="rect">
             <a:avLst/>
@@ -4102,8 +4102,8 @@
         </p:nvSpPr>
         <p:spPr>
           <a:xfrm>
-            <a:off x="10067544" y="2615184"/>
-            <a:ext cx="3419856" cy="237744"/>
+            <a:off x="9262872" y="2615184"/>
+            <a:ext cx="3822192" cy="237744"/>
           </a:xfrm>
           <a:prstGeom prst="rect">
             <a:avLst/>
@@ -4142,8 +4142,8 @@
         </p:nvSpPr>
         <p:spPr>
           <a:xfrm>
-            <a:off x="10067544" y="2843784"/>
-            <a:ext cx="3419856" cy="201168"/>
+            <a:off x="9262872" y="2843784"/>
+            <a:ext cx="3822192" cy="201168"/>
           </a:xfrm>
           <a:prstGeom prst="rect">
             <a:avLst/>
@@ -4182,7 +4182,7 @@
         </p:nvSpPr>
         <p:spPr>
           <a:xfrm>
-            <a:off x="13642848" y="2715768"/>
+            <a:off x="13240512" y="2715768"/>
             <a:ext cx="219456" cy="201168"/>
           </a:xfrm>
           <a:prstGeom prst="rightArrow">
@@ -4226,8 +4226,8 @@
         </p:nvSpPr>
         <p:spPr>
           <a:xfrm>
-            <a:off x="13889736" y="2560320"/>
-            <a:ext cx="3675888" cy="512064"/>
+            <a:off x="13487400" y="2560320"/>
+            <a:ext cx="4078224" cy="512064"/>
           </a:xfrm>
           <a:prstGeom prst="rect">
             <a:avLst/>
@@ -4270,8 +4270,8 @@
         </p:nvSpPr>
         <p:spPr>
           <a:xfrm>
-            <a:off x="14017752" y="2615184"/>
-            <a:ext cx="3419856" cy="237744"/>
+            <a:off x="13615416" y="2615184"/>
+            <a:ext cx="3822192" cy="237744"/>
           </a:xfrm>
           <a:prstGeom prst="rect">
             <a:avLst/>
@@ -4310,8 +4310,8 @@
         </p:nvSpPr>
         <p:spPr>
           <a:xfrm>
-            <a:off x="14017752" y="2843784"/>
-            <a:ext cx="3419856" cy="201168"/>
+            <a:off x="13615416" y="2843784"/>
+            <a:ext cx="3822192" cy="201168"/>
           </a:xfrm>
           <a:prstGeom prst="rect">
             <a:avLst/>
@@ -5281,8 +5281,8 @@
         </p:nvSpPr>
         <p:spPr>
           <a:xfrm>
-            <a:off x="722376" y="3730752"/>
-            <a:ext cx="1188720" cy="2962656"/>
+            <a:off x="722376" y="3712463"/>
+            <a:ext cx="1188720" cy="3310128"/>
           </a:xfrm>
           <a:prstGeom prst="rect">
             <a:avLst/>
@@ -5325,8 +5325,8 @@
         </p:nvSpPr>
         <p:spPr>
           <a:xfrm>
-            <a:off x="722376" y="3730752"/>
-            <a:ext cx="54864" cy="2962656"/>
+            <a:off x="722376" y="3712463"/>
+            <a:ext cx="54864" cy="3310128"/>
           </a:xfrm>
           <a:prstGeom prst="rect">
             <a:avLst/>
@@ -5369,7 +5369,7 @@
         </p:nvSpPr>
         <p:spPr>
           <a:xfrm>
-            <a:off x="886968" y="3877056"/>
+            <a:off x="886968" y="3858768"/>
             <a:ext cx="950976" cy="274320"/>
           </a:xfrm>
           <a:prstGeom prst="rect">
@@ -5409,7 +5409,7 @@
         </p:nvSpPr>
         <p:spPr>
           <a:xfrm>
-            <a:off x="886968" y="4187952"/>
+            <a:off x="886968" y="4169663"/>
             <a:ext cx="950976" cy="548640"/>
           </a:xfrm>
           <a:prstGeom prst="rect">
@@ -5466,8 +5466,8 @@
         </p:nvSpPr>
         <p:spPr>
           <a:xfrm>
-            <a:off x="2039112" y="3730752"/>
-            <a:ext cx="3675888" cy="2962656"/>
+            <a:off x="2039112" y="3712463"/>
+            <a:ext cx="2468880" cy="3310128"/>
           </a:xfrm>
           <a:prstGeom prst="rect">
             <a:avLst/>
@@ -5513,7 +5513,7 @@
         <p:spPr>
           <a:xfrm>
             <a:off x="2167128" y="3858768"/>
-            <a:ext cx="3419856" cy="182880"/>
+            <a:ext cx="2212848" cy="182880"/>
           </a:xfrm>
           <a:prstGeom prst="rect">
             <a:avLst/>
@@ -5552,8 +5552,8 @@
         </p:nvSpPr>
         <p:spPr>
           <a:xfrm>
-            <a:off x="2167128" y="4059936"/>
-            <a:ext cx="3419856" cy="457200"/>
+            <a:off x="2167128" y="4059935"/>
+            <a:ext cx="2212848" cy="475488"/>
           </a:xfrm>
           <a:prstGeom prst="rect">
             <a:avLst/>
@@ -5592,8 +5592,8 @@
         </p:nvSpPr>
         <p:spPr>
           <a:xfrm>
-            <a:off x="2167128" y="4535424"/>
-            <a:ext cx="3419856" cy="365760"/>
+            <a:off x="2167128" y="4553712"/>
+            <a:ext cx="2212848" cy="402336"/>
           </a:xfrm>
           <a:prstGeom prst="rect">
             <a:avLst/>
@@ -5608,7 +5608,7 @@
           <a:p>
             <a:pPr algn="l">
               <a:lnSpc>
-                <a:spcPct val="100000"/>
+                <a:spcPct val="104000"/>
               </a:lnSpc>
             </a:pPr>
             <a:r>
@@ -5619,7 +5619,24 @@
                 <a:latin typeface="Arial"/>
                 <a:ea typeface="Arial"/>
               </a:rPr>
-              <a:t>현재 TLC 수준 · ScaleFlux 제시 유효 요구 7~10</a:t>
+              <a:t>KV 캐시 계층 TLC 제품 정격 수준</a:t>
+            </a:r>
+          </a:p>
+          <a:p>
+            <a:pPr algn="l">
+              <a:lnSpc>
+                <a:spcPct val="104000"/>
+              </a:lnSpc>
+            </a:pPr>
+            <a:r>
+              <a:rPr sz="975" b="1">
+                <a:solidFill>
+                  <a:srgbClr val="1428A0"/>
+                </a:solidFill>
+                <a:latin typeface="Arial"/>
+                <a:ea typeface="Arial"/>
+              </a:rPr>
+              <a:t>현 QLC 정격 0.6 대비 2~5배</a:t>
             </a:r>
           </a:p>
         </p:txBody>
@@ -5632,8 +5649,8 @@
         </p:nvSpPr>
         <p:spPr>
           <a:xfrm>
-            <a:off x="2167128" y="4974336"/>
-            <a:ext cx="3419856" cy="10972"/>
+            <a:off x="2167128" y="5029200"/>
+            <a:ext cx="2212848" cy="10972"/>
           </a:xfrm>
           <a:prstGeom prst="rect">
             <a:avLst/>
@@ -5676,8 +5693,8 @@
         </p:nvSpPr>
         <p:spPr>
           <a:xfrm>
-            <a:off x="2167128" y="5065776"/>
-            <a:ext cx="3419856" cy="182880"/>
+            <a:off x="2167128" y="5138927"/>
+            <a:ext cx="2212848" cy="182880"/>
           </a:xfrm>
           <a:prstGeom prst="rect">
             <a:avLst/>
@@ -5716,8 +5733,8 @@
         </p:nvSpPr>
         <p:spPr>
           <a:xfrm>
-            <a:off x="2167128" y="5266944"/>
-            <a:ext cx="3419856" cy="457200"/>
+            <a:off x="2167128" y="5340096"/>
+            <a:ext cx="2212848" cy="457200"/>
           </a:xfrm>
           <a:prstGeom prst="rect">
             <a:avLst/>
@@ -5736,7 +5753,7 @@
               </a:lnSpc>
             </a:pPr>
             <a:r>
-              <a:rPr sz="2200" b="1">
+              <a:rPr sz="2100" b="1">
                 <a:solidFill>
                   <a:srgbClr val="1428A0"/>
                 </a:solidFill>
@@ -5746,7 +5763,7 @@
               <a:t>UBER 10</a:t>
             </a:r>
             <a:r>
-              <a:rPr sz="1300" b="1" baseline="30000">
+              <a:rPr sz="1250" b="1" baseline="30000">
                 <a:solidFill>
                   <a:srgbClr val="1428A0"/>
                 </a:solidFill>
@@ -5756,7 +5773,7 @@
               <a:t>-15</a:t>
             </a:r>
             <a:r>
-              <a:rPr sz="2200" b="1">
+              <a:rPr sz="2100" b="1">
                 <a:solidFill>
                   <a:srgbClr val="1428A0"/>
                 </a:solidFill>
@@ -5766,7 +5783,7 @@
               <a:t> · 10</a:t>
             </a:r>
             <a:r>
-              <a:rPr sz="1300" b="1" baseline="30000">
+              <a:rPr sz="1250" b="1" baseline="30000">
                 <a:solidFill>
                   <a:srgbClr val="1428A0"/>
                 </a:solidFill>
@@ -5786,8 +5803,8 @@
         </p:nvSpPr>
         <p:spPr>
           <a:xfrm>
-            <a:off x="2167128" y="5742432"/>
-            <a:ext cx="3419856" cy="365760"/>
+            <a:off x="2167128" y="5815583"/>
+            <a:ext cx="2212848" cy="438912"/>
           </a:xfrm>
           <a:prstGeom prst="rect">
             <a:avLst/>
@@ -5796,6 +5813,63 @@
         </p:spPr>
         <p:txBody>
           <a:bodyPr wrap="square" anchor="t" lIns="0" rIns="0" tIns="0" bIns="0">
+            <a:spAutoFit/>
+          </a:bodyPr>
+          <a:lstStyle/>
+          <a:p>
+            <a:pPr algn="l">
+              <a:lnSpc>
+                <a:spcPct val="104000"/>
+              </a:lnSpc>
+            </a:pPr>
+            <a:r>
+              <a:rPr sz="900" b="0">
+                <a:solidFill>
+                  <a:srgbClr val="555555"/>
+                </a:solidFill>
+                <a:latin typeface="Arial"/>
+                <a:ea typeface="Arial"/>
+              </a:rPr>
+              <a:t>클라이언트 · 엔터프라이즈 등급</a:t>
+            </a:r>
+          </a:p>
+          <a:p>
+            <a:pPr algn="l">
+              <a:lnSpc>
+                <a:spcPct val="104000"/>
+              </a:lnSpc>
+            </a:pPr>
+            <a:r>
+              <a:rPr sz="900" b="0">
+                <a:solidFill>
+                  <a:srgbClr val="555555"/>
+                </a:solidFill>
+                <a:latin typeface="Arial"/>
+                <a:ea typeface="Arial"/>
+              </a:rPr>
+              <a:t>드라이브 고장률 5년 2.2%(OCP 사양)</a:t>
+            </a:r>
+          </a:p>
+        </p:txBody>
+      </p:sp>
+      <p:sp>
+        <p:nvSpPr>
+          <p:cNvPr id="56" name="TextBox 55"/>
+          <p:cNvSpPr txBox="1"/>
+          <p:nvPr/>
+        </p:nvSpPr>
+        <p:spPr>
+          <a:xfrm>
+            <a:off x="2167128" y="6510527"/>
+            <a:ext cx="2212848" cy="438912"/>
+          </a:xfrm>
+          <a:prstGeom prst="rect">
+            <a:avLst/>
+          </a:prstGeom>
+          <a:noFill/>
+        </p:spPr>
+        <p:txBody>
+          <a:bodyPr wrap="square" anchor="ctr" lIns="0" rIns="0" tIns="0" bIns="0">
             <a:spAutoFit/>
           </a:bodyPr>
           <a:lstStyle/>
@@ -5806,28 +5880,28 @@
               </a:lnSpc>
             </a:pPr>
             <a:r>
-              <a:rPr sz="900" b="0">
-                <a:solidFill>
-                  <a:srgbClr val="555555"/>
+              <a:rPr sz="975" b="1">
+                <a:solidFill>
+                  <a:srgbClr val="1428A0"/>
                 </a:solidFill>
                 <a:latin typeface="Arial"/>
                 <a:ea typeface="Arial"/>
               </a:rPr>
-              <a:t>클라이언트 · 엔터프라이즈 · 보존 1년@30°C / 3개월@40°C</a:t>
-            </a:r>
-          </a:p>
-        </p:txBody>
-      </p:sp>
-      <p:sp>
-        <p:nvSpPr>
-          <p:cNvPr id="56" name="Rectangle 55"/>
+              <a:t>요구는 고객이 정하고 바뀌지 않습니다</a:t>
+            </a:r>
+          </a:p>
+        </p:txBody>
+      </p:sp>
+      <p:sp>
+        <p:nvSpPr>
+          <p:cNvPr id="57" name="Rectangle 56"/>
           <p:cNvSpPr/>
           <p:nvPr/>
         </p:nvSpPr>
         <p:spPr>
           <a:xfrm>
-            <a:off x="5989320" y="3730752"/>
-            <a:ext cx="3675888" cy="2962656"/>
+            <a:off x="4782312" y="3712463"/>
+            <a:ext cx="4078224" cy="3310128"/>
           </a:xfrm>
           <a:prstGeom prst="rect">
             <a:avLst/>
@@ -5864,9 +5938,133 @@
           </a:p>
         </p:txBody>
       </p:sp>
+      <p:sp>
+        <p:nvSpPr>
+          <p:cNvPr id="58" name="Rectangle 57"/>
+          <p:cNvSpPr/>
+          <p:nvPr/>
+        </p:nvSpPr>
+        <p:spPr>
+          <a:xfrm>
+            <a:off x="4892040" y="3822191"/>
+            <a:ext cx="3858768" cy="329184"/>
+          </a:xfrm>
+          <a:prstGeom prst="rect">
+            <a:avLst/>
+          </a:prstGeom>
+          <a:solidFill>
+            <a:srgbClr val="AAB8E8"/>
+          </a:solidFill>
+          <a:ln>
+            <a:noFill/>
+          </a:ln>
+          <a:effectLst/>
+        </p:spPr>
+        <p:style>
+          <a:lnRef idx="1">
+            <a:schemeClr val="accent1"/>
+          </a:lnRef>
+          <a:fillRef idx="3">
+            <a:schemeClr val="accent1"/>
+          </a:fillRef>
+          <a:effectRef idx="2">
+            <a:schemeClr val="accent1"/>
+          </a:effectRef>
+          <a:fontRef idx="minor">
+            <a:schemeClr val="lt1"/>
+          </a:fontRef>
+        </p:style>
+        <p:txBody>
+          <a:bodyPr rtlCol="0" anchor="ctr"/>
+          <a:lstStyle/>
+          <a:p>
+            <a:pPr algn="ctr"/>
+          </a:p>
+        </p:txBody>
+      </p:sp>
+      <p:sp>
+        <p:nvSpPr>
+          <p:cNvPr id="59" name="TextBox 58"/>
+          <p:cNvSpPr txBox="1"/>
+          <p:nvPr/>
+        </p:nvSpPr>
+        <p:spPr>
+          <a:xfrm>
+            <a:off x="5020055" y="3822191"/>
+            <a:ext cx="2286000" cy="329184"/>
+          </a:xfrm>
+          <a:prstGeom prst="rect">
+            <a:avLst/>
+          </a:prstGeom>
+          <a:noFill/>
+        </p:spPr>
+        <p:txBody>
+          <a:bodyPr wrap="square" anchor="ctr" lIns="0" rIns="0" tIns="0" bIns="0">
+            <a:spAutoFit/>
+          </a:bodyPr>
+          <a:lstStyle/>
+          <a:p>
+            <a:pPr algn="l">
+              <a:lnSpc>
+                <a:spcPct val="112000"/>
+              </a:lnSpc>
+            </a:pPr>
+            <a:r>
+              <a:rPr sz="950" b="0">
+                <a:solidFill>
+                  <a:srgbClr val="1A1A1A"/>
+                </a:solidFill>
+                <a:latin typeface="Arial"/>
+                <a:ea typeface="Arial"/>
+              </a:rPr>
+              <a:t>단품 지표</a:t>
+            </a:r>
+          </a:p>
+        </p:txBody>
+      </p:sp>
+      <p:sp>
+        <p:nvSpPr>
+          <p:cNvPr id="60" name="TextBox 59"/>
+          <p:cNvSpPr txBox="1"/>
+          <p:nvPr/>
+        </p:nvSpPr>
+        <p:spPr>
+          <a:xfrm>
+            <a:off x="5020055" y="3822191"/>
+            <a:ext cx="3602736" cy="329184"/>
+          </a:xfrm>
+          <a:prstGeom prst="rect">
+            <a:avLst/>
+          </a:prstGeom>
+          <a:noFill/>
+        </p:spPr>
+        <p:txBody>
+          <a:bodyPr wrap="square" anchor="ctr" lIns="0" rIns="0" tIns="0" bIns="0">
+            <a:spAutoFit/>
+          </a:bodyPr>
+          <a:lstStyle/>
+          <a:p>
+            <a:pPr algn="r">
+              <a:lnSpc>
+                <a:spcPct val="112000"/>
+              </a:lnSpc>
+            </a:pPr>
+            <a:r>
+              <a:rPr sz="1050" b="1">
+                <a:solidFill>
+                  <a:srgbClr val="1A1A1A"/>
+                </a:solidFill>
+                <a:latin typeface="Arial"/>
+                <a:ea typeface="Arial"/>
+              </a:rPr>
+              <a:t>세대마다 악화</a:t>
+            </a:r>
+          </a:p>
+        </p:txBody>
+      </p:sp>
       <p:pic>
         <p:nvPicPr>
-          <p:cNvPr id="57" name="Picture 56" descr="ladder_cell_component.png"/>
+          <p:cNvPr id="61" name="Picture 60" descr="ladder_component_big.png"/>
           <p:cNvPicPr>
             <a:picLocks noChangeAspect="1"/>
           </p:cNvPicPr>
@@ -5880,8 +6078,8 @@
         </p:blipFill>
         <p:spPr>
           <a:xfrm>
-            <a:off x="6080760" y="3822191"/>
-            <a:ext cx="3493008" cy="1941961"/>
+            <a:off x="5015483" y="4224527"/>
+            <a:ext cx="3611880" cy="2513929"/>
           </a:xfrm>
           <a:prstGeom prst="rect">
             <a:avLst/>
@@ -5890,14 +6088,14 @@
       </p:pic>
       <p:sp>
         <p:nvSpPr>
-          <p:cNvPr id="58" name="TextBox 57"/>
+          <p:cNvPr id="62" name="TextBox 61"/>
           <p:cNvSpPr txBox="1"/>
           <p:nvPr/>
         </p:nvSpPr>
         <p:spPr>
           <a:xfrm>
-            <a:off x="6117336" y="6309360"/>
-            <a:ext cx="3419856" cy="329184"/>
+            <a:off x="4910327" y="6748271"/>
+            <a:ext cx="3822192" cy="256032"/>
           </a:xfrm>
           <a:prstGeom prst="rect">
             <a:avLst/>
@@ -5916,28 +6114,28 @@
               </a:lnSpc>
             </a:pPr>
             <a:r>
-              <a:rPr sz="850" b="0">
+              <a:rPr sz="900" b="0">
                 <a:solidFill>
                   <a:srgbClr val="555555"/>
                 </a:solidFill>
                 <a:latin typeface="Arial"/>
                 <a:ea typeface="Arial"/>
               </a:rPr>
-              <a:t>비트/셀 ↑ → 산포 마진 ↓ · 보존·사이클링·리드 디스터브로 시간에 따라 변하는 산포는 셀 단독으로 보정 불가</a:t>
-            </a:r>
-          </a:p>
-        </p:txBody>
-      </p:sp>
-      <p:sp>
-        <p:nvSpPr>
-          <p:cNvPr id="59" name="Rectangle 58"/>
+              <a:t>시간에 따라 변하는 산포는 셀 단독으로 보정하지 못합니다</a:t>
+            </a:r>
+          </a:p>
+        </p:txBody>
+      </p:sp>
+      <p:sp>
+        <p:nvSpPr>
+          <p:cNvPr id="63" name="Rectangle 62"/>
           <p:cNvSpPr/>
           <p:nvPr/>
         </p:nvSpPr>
         <p:spPr>
           <a:xfrm>
-            <a:off x="9939528" y="3730752"/>
-            <a:ext cx="3675888" cy="2962656"/>
+            <a:off x="9134856" y="3712463"/>
+            <a:ext cx="4078224" cy="3310128"/>
           </a:xfrm>
           <a:prstGeom prst="rect">
             <a:avLst/>
@@ -5976,14 +6174,14 @@
       </p:sp>
       <p:sp>
         <p:nvSpPr>
-          <p:cNvPr id="60" name="Rectangle 59"/>
+          <p:cNvPr id="64" name="Rectangle 63"/>
           <p:cNvSpPr/>
           <p:nvPr/>
         </p:nvSpPr>
         <p:spPr>
           <a:xfrm>
-            <a:off x="10030968" y="3822191"/>
-            <a:ext cx="3493008" cy="658368"/>
+            <a:off x="9244584" y="3822191"/>
+            <a:ext cx="3858768" cy="274320"/>
           </a:xfrm>
           <a:prstGeom prst="rect">
             <a:avLst/>
@@ -6022,58 +6220,14 @@
       </p:sp>
       <p:sp>
         <p:nvSpPr>
-          <p:cNvPr id="61" name="Rectangle 60"/>
-          <p:cNvSpPr/>
-          <p:nvPr/>
-        </p:nvSpPr>
-        <p:spPr>
-          <a:xfrm>
-            <a:off x="10030968" y="3822191"/>
-            <a:ext cx="54864" cy="658368"/>
-          </a:xfrm>
-          <a:prstGeom prst="rect">
-            <a:avLst/>
-          </a:prstGeom>
-          <a:solidFill>
-            <a:srgbClr val="1428A0"/>
-          </a:solidFill>
-          <a:ln>
-            <a:noFill/>
-          </a:ln>
-          <a:effectLst/>
-        </p:spPr>
-        <p:style>
-          <a:lnRef idx="1">
-            <a:schemeClr val="accent1"/>
-          </a:lnRef>
-          <a:fillRef idx="3">
-            <a:schemeClr val="accent1"/>
-          </a:fillRef>
-          <a:effectRef idx="2">
-            <a:schemeClr val="accent1"/>
-          </a:effectRef>
-          <a:fontRef idx="minor">
-            <a:schemeClr val="lt1"/>
-          </a:fontRef>
-        </p:style>
-        <p:txBody>
-          <a:bodyPr rtlCol="0" anchor="ctr"/>
-          <a:lstStyle/>
-          <a:p>
-            <a:pPr algn="ctr"/>
-          </a:p>
-        </p:txBody>
-      </p:sp>
-      <p:sp>
-        <p:nvSpPr>
-          <p:cNvPr id="62" name="TextBox 61"/>
+          <p:cNvPr id="65" name="TextBox 64"/>
           <p:cNvSpPr txBox="1"/>
           <p:nvPr/>
         </p:nvSpPr>
         <p:spPr>
           <a:xfrm>
-            <a:off x="10177272" y="3877055"/>
-            <a:ext cx="2011680" cy="182880"/>
+            <a:off x="9372600" y="3822191"/>
+            <a:ext cx="2286000" cy="274320"/>
           </a:xfrm>
           <a:prstGeom prst="rect">
             <a:avLst/>
@@ -6081,7 +6235,7 @@
           <a:noFill/>
         </p:spPr>
         <p:txBody>
-          <a:bodyPr wrap="square" anchor="t" lIns="0" rIns="0" tIns="0" bIns="0">
+          <a:bodyPr wrap="square" anchor="ctr" lIns="0" rIns="0" tIns="0" bIns="0">
             <a:spAutoFit/>
           </a:bodyPr>
           <a:lstStyle/>
@@ -6092,7 +6246,7 @@
               </a:lnSpc>
             </a:pPr>
             <a:r>
-              <a:rPr sz="975" b="0">
+              <a:rPr sz="950" b="0">
                 <a:solidFill>
                   <a:srgbClr val="8A8A8A"/>
                 </a:solidFill>
@@ -6106,14 +6260,14 @@
       </p:sp>
       <p:sp>
         <p:nvSpPr>
-          <p:cNvPr id="63" name="TextBox 62"/>
+          <p:cNvPr id="66" name="TextBox 65"/>
           <p:cNvSpPr txBox="1"/>
           <p:nvPr/>
         </p:nvSpPr>
         <p:spPr>
           <a:xfrm>
-            <a:off x="12152376" y="3877055"/>
-            <a:ext cx="1280160" cy="201168"/>
+            <a:off x="9372600" y="3822191"/>
+            <a:ext cx="3602736" cy="274320"/>
           </a:xfrm>
           <a:prstGeom prst="rect">
             <a:avLst/>
@@ -6121,7 +6275,7 @@
           <a:noFill/>
         </p:spPr>
         <p:txBody>
-          <a:bodyPr wrap="square" anchor="t" lIns="0" rIns="0" tIns="0" bIns="0">
+          <a:bodyPr wrap="square" anchor="ctr" lIns="0" rIns="0" tIns="0" bIns="0">
             <a:spAutoFit/>
           </a:bodyPr>
           <a:lstStyle/>
@@ -6132,9 +6286,9 @@
               </a:lnSpc>
             </a:pPr>
             <a:r>
-              <a:rPr sz="975" b="1">
-                <a:solidFill>
-                  <a:srgbClr val="1428A0"/>
+              <a:rPr sz="1050" b="1">
+                <a:solidFill>
+                  <a:srgbClr val="1A1A1A"/>
                 </a:solidFill>
                 <a:latin typeface="Arial"/>
                 <a:ea typeface="Arial"/>
@@ -6146,94 +6300,14 @@
       </p:sp>
       <p:sp>
         <p:nvSpPr>
-          <p:cNvPr id="64" name="TextBox 63"/>
-          <p:cNvSpPr txBox="1"/>
-          <p:nvPr/>
-        </p:nvSpPr>
-        <p:spPr>
-          <a:xfrm>
-            <a:off x="10177272" y="4069079"/>
-            <a:ext cx="3255264" cy="237744"/>
-          </a:xfrm>
-          <a:prstGeom prst="rect">
-            <a:avLst/>
-          </a:prstGeom>
-          <a:noFill/>
-        </p:spPr>
-        <p:txBody>
-          <a:bodyPr wrap="square" anchor="t" lIns="0" rIns="0" tIns="0" bIns="0">
-            <a:spAutoFit/>
-          </a:bodyPr>
-          <a:lstStyle/>
-          <a:p>
-            <a:pPr algn="l">
-              <a:lnSpc>
-                <a:spcPct val="112000"/>
-              </a:lnSpc>
-            </a:pPr>
-            <a:r>
-              <a:rPr sz="1125" b="1">
-                <a:solidFill>
-                  <a:srgbClr val="1A1A1A"/>
-                </a:solidFill>
-                <a:latin typeface="Arial"/>
-                <a:ea typeface="Arial"/>
-              </a:rPr>
-              <a:t>ECC 1 bit/512B → LDPC 120 bit/KB · 60배 ↑</a:t>
-            </a:r>
-          </a:p>
-        </p:txBody>
-      </p:sp>
-      <p:sp>
-        <p:nvSpPr>
-          <p:cNvPr id="65" name="TextBox 64"/>
-          <p:cNvSpPr txBox="1"/>
-          <p:nvPr/>
-        </p:nvSpPr>
-        <p:spPr>
-          <a:xfrm>
-            <a:off x="10177272" y="4297679"/>
-            <a:ext cx="3255264" cy="201168"/>
-          </a:xfrm>
-          <a:prstGeom prst="rect">
-            <a:avLst/>
-          </a:prstGeom>
-          <a:noFill/>
-        </p:spPr>
-        <p:txBody>
-          <a:bodyPr wrap="square" anchor="t" lIns="0" rIns="0" tIns="0" bIns="0">
-            <a:spAutoFit/>
-          </a:bodyPr>
-          <a:lstStyle/>
-          <a:p>
-            <a:pPr algn="l">
-              <a:lnSpc>
-                <a:spcPct val="112000"/>
-              </a:lnSpc>
-            </a:pPr>
-            <a:r>
-              <a:rPr sz="850" b="0">
-                <a:solidFill>
-                  <a:srgbClr val="555555"/>
-                </a:solidFill>
-                <a:latin typeface="Arial"/>
-                <a:ea typeface="Arial"/>
-              </a:rPr>
-              <a:t>RBER 백만 배 상승분을 컨트롤러가 흡수 · 완결된 이관</a:t>
-            </a:r>
-          </a:p>
-        </p:txBody>
-      </p:sp>
-      <p:sp>
-        <p:nvSpPr>
-          <p:cNvPr id="66" name="Rectangle 65"/>
+          <p:cNvPr id="67" name="Rectangle 66"/>
           <p:cNvSpPr/>
           <p:nvPr/>
         </p:nvSpPr>
         <p:spPr>
           <a:xfrm>
-            <a:off x="10030968" y="4571999"/>
-            <a:ext cx="3493008" cy="2029968"/>
+            <a:off x="9244584" y="4133087"/>
+            <a:ext cx="3858768" cy="274320"/>
           </a:xfrm>
           <a:prstGeom prst="rect">
             <a:avLst/>
@@ -6270,14 +6344,14 @@
       </p:sp>
       <p:sp>
         <p:nvSpPr>
-          <p:cNvPr id="67" name="TextBox 66"/>
+          <p:cNvPr id="68" name="TextBox 67"/>
           <p:cNvSpPr txBox="1"/>
           <p:nvPr/>
         </p:nvSpPr>
         <p:spPr>
           <a:xfrm>
-            <a:off x="10177272" y="4626863"/>
-            <a:ext cx="2194560" cy="182880"/>
+            <a:off x="9372600" y="4133087"/>
+            <a:ext cx="2286000" cy="274320"/>
           </a:xfrm>
           <a:prstGeom prst="rect">
             <a:avLst/>
@@ -6285,7 +6359,7 @@
           <a:noFill/>
         </p:spPr>
         <p:txBody>
-          <a:bodyPr wrap="square" anchor="t" lIns="0" rIns="0" tIns="0" bIns="0">
+          <a:bodyPr wrap="square" anchor="ctr" lIns="0" rIns="0" tIns="0" bIns="0">
             <a:spAutoFit/>
           </a:bodyPr>
           <a:lstStyle/>
@@ -6296,28 +6370,28 @@
               </a:lnSpc>
             </a:pPr>
             <a:r>
-              <a:rPr sz="975" b="0">
+              <a:rPr sz="950" b="0">
                 <a:solidFill>
                   <a:srgbClr val="1A1A1A"/>
                 </a:solidFill>
                 <a:latin typeface="Arial"/>
                 <a:ea typeface="Arial"/>
               </a:rPr>
-              <a:t>2단계 · SSD 단독 최적화</a:t>
-            </a:r>
-          </a:p>
-        </p:txBody>
-      </p:sp>
-      <p:sp>
-        <p:nvSpPr>
-          <p:cNvPr id="68" name="TextBox 67"/>
+              <a:t>2단계 · SSD 단독 최적화 (~2019)</a:t>
+            </a:r>
+          </a:p>
+        </p:txBody>
+      </p:sp>
+      <p:sp>
+        <p:nvSpPr>
+          <p:cNvPr id="69" name="TextBox 68"/>
           <p:cNvSpPr txBox="1"/>
           <p:nvPr/>
         </p:nvSpPr>
         <p:spPr>
           <a:xfrm>
-            <a:off x="12152376" y="4626863"/>
-            <a:ext cx="1280160" cy="201168"/>
+            <a:off x="9372600" y="4133087"/>
+            <a:ext cx="3602736" cy="274320"/>
           </a:xfrm>
           <a:prstGeom prst="rect">
             <a:avLst/>
@@ -6325,7 +6399,7 @@
           <a:noFill/>
         </p:spPr>
         <p:txBody>
-          <a:bodyPr wrap="square" anchor="t" lIns="0" rIns="0" tIns="0" bIns="0">
+          <a:bodyPr wrap="square" anchor="ctr" lIns="0" rIns="0" tIns="0" bIns="0">
             <a:spAutoFit/>
           </a:bodyPr>
           <a:lstStyle/>
@@ -6336,101 +6410,21 @@
               </a:lnSpc>
             </a:pPr>
             <a:r>
-              <a:rPr sz="975" b="1">
-                <a:solidFill>
-                  <a:srgbClr val="8A8A8A"/>
+              <a:rPr sz="1050" b="1">
+                <a:solidFill>
+                  <a:srgbClr val="1A1A1A"/>
                 </a:solidFill>
                 <a:latin typeface="Arial"/>
                 <a:ea typeface="Arial"/>
               </a:rPr>
-              <a:t>요구 미달</a:t>
-            </a:r>
-          </a:p>
-        </p:txBody>
-      </p:sp>
-      <p:sp>
-        <p:nvSpPr>
-          <p:cNvPr id="69" name="TextBox 68"/>
-          <p:cNvSpPr txBox="1"/>
-          <p:nvPr/>
-        </p:nvSpPr>
-        <p:spPr>
-          <a:xfrm>
-            <a:off x="10177272" y="4818888"/>
-            <a:ext cx="3255264" cy="237744"/>
-          </a:xfrm>
-          <a:prstGeom prst="rect">
-            <a:avLst/>
-          </a:prstGeom>
-          <a:noFill/>
-        </p:spPr>
-        <p:txBody>
-          <a:bodyPr wrap="square" anchor="t" lIns="0" rIns="0" tIns="0" bIns="0">
-            <a:spAutoFit/>
-          </a:bodyPr>
-          <a:lstStyle/>
-          <a:p>
-            <a:pPr algn="l">
-              <a:lnSpc>
-                <a:spcPct val="112000"/>
-              </a:lnSpc>
-            </a:pPr>
-            <a:r>
-              <a:rPr sz="1125" b="1">
-                <a:solidFill>
-                  <a:srgbClr val="1A1A1A"/>
-                </a:solidFill>
-                <a:latin typeface="Arial"/>
-                <a:ea typeface="Arial"/>
-              </a:rPr>
-              <a:t>QoS · 성능 개선, WAF ≈ 3 · 부분 성공</a:t>
-            </a:r>
-          </a:p>
-        </p:txBody>
-      </p:sp>
-      <p:sp>
-        <p:nvSpPr>
-          <p:cNvPr id="70" name="TextBox 69"/>
-          <p:cNvSpPr txBox="1"/>
-          <p:nvPr/>
-        </p:nvSpPr>
-        <p:spPr>
-          <a:xfrm>
-            <a:off x="10177272" y="5047488"/>
-            <a:ext cx="3255264" cy="201168"/>
-          </a:xfrm>
-          <a:prstGeom prst="rect">
-            <a:avLst/>
-          </a:prstGeom>
-          <a:noFill/>
-        </p:spPr>
-        <p:txBody>
-          <a:bodyPr wrap="square" anchor="t" lIns="0" rIns="0" tIns="0" bIns="0">
-            <a:spAutoFit/>
-          </a:bodyPr>
-          <a:lstStyle/>
-          <a:p>
-            <a:pPr algn="l">
-              <a:lnSpc>
-                <a:spcPct val="112000"/>
-              </a:lnSpc>
-            </a:pPr>
-            <a:r>
-              <a:rPr sz="850" b="0">
-                <a:solidFill>
-                  <a:srgbClr val="555555"/>
-                </a:solidFill>
-                <a:latin typeface="Arial"/>
-                <a:ea typeface="Arial"/>
-              </a:rPr>
-              <a:t>'14~'19 추정 배치·스트림·IOD · SSD는 데이터 수명 감지 불가</a:t>
+              <a:t>WAF ≈ 3에서 멈춤</a:t>
             </a:r>
           </a:p>
         </p:txBody>
       </p:sp>
       <p:pic>
         <p:nvPicPr>
-          <p:cNvPr id="71" name="Picture 70" descr="ladder_cell_dwpd.png"/>
+          <p:cNvPr id="70" name="Picture 69" descr="ladder_dwpd_trend.png"/>
           <p:cNvPicPr>
             <a:picLocks noChangeAspect="1"/>
           </p:cNvPicPr>
@@ -6444,14 +6438,54 @@
         </p:blipFill>
         <p:spPr>
           <a:xfrm>
-            <a:off x="10291572" y="5248655"/>
-            <a:ext cx="2971800" cy="878983"/>
+            <a:off x="9528048" y="4443983"/>
+            <a:ext cx="3291840" cy="2291176"/>
           </a:xfrm>
           <a:prstGeom prst="rect">
             <a:avLst/>
           </a:prstGeom>
         </p:spPr>
       </p:pic>
+      <p:sp>
+        <p:nvSpPr>
+          <p:cNvPr id="71" name="TextBox 70"/>
+          <p:cNvSpPr txBox="1"/>
+          <p:nvPr/>
+        </p:nvSpPr>
+        <p:spPr>
+          <a:xfrm>
+            <a:off x="9262872" y="6766559"/>
+            <a:ext cx="3822192" cy="237744"/>
+          </a:xfrm>
+          <a:prstGeom prst="rect">
+            <a:avLst/>
+          </a:prstGeom>
+          <a:noFill/>
+        </p:spPr>
+        <p:txBody>
+          <a:bodyPr wrap="square" anchor="t" lIns="0" rIns="0" tIns="0" bIns="0">
+            <a:spAutoFit/>
+          </a:bodyPr>
+          <a:lstStyle/>
+          <a:p>
+            <a:pPr algn="l">
+              <a:lnSpc>
+                <a:spcPct val="100000"/>
+              </a:lnSpc>
+            </a:pPr>
+            <a:r>
+              <a:rPr sz="900" b="0">
+                <a:solidFill>
+                  <a:srgbClr val="555555"/>
+                </a:solidFill>
+                <a:latin typeface="Arial"/>
+                <a:ea typeface="Arial"/>
+              </a:rPr>
+              <a:t>DWPD는 용량으로 나눈 지표 · 절대 기입량은 오히려 늘었습니다</a:t>
+            </a:r>
+          </a:p>
+        </p:txBody>
+      </p:sp>
       <p:sp>
         <p:nvSpPr>
           <p:cNvPr id="72" name="Rectangle 71"/>
@@ -6460,8 +6494,8 @@
         </p:nvSpPr>
         <p:spPr>
           <a:xfrm>
-            <a:off x="13889736" y="3730752"/>
-            <a:ext cx="3675888" cy="2962656"/>
+            <a:off x="13487400" y="3712463"/>
+            <a:ext cx="4078224" cy="3310128"/>
           </a:xfrm>
           <a:prstGeom prst="rect">
             <a:avLst/>
@@ -6500,14 +6534,58 @@
       </p:sp>
       <p:sp>
         <p:nvSpPr>
-          <p:cNvPr id="73" name="TextBox 72"/>
+          <p:cNvPr id="73" name="Rectangle 72"/>
+          <p:cNvSpPr/>
+          <p:nvPr/>
+        </p:nvSpPr>
+        <p:spPr>
+          <a:xfrm>
+            <a:off x="13597128" y="3822191"/>
+            <a:ext cx="3858768" cy="329184"/>
+          </a:xfrm>
+          <a:prstGeom prst="rect">
+            <a:avLst/>
+          </a:prstGeom>
+          <a:solidFill>
+            <a:srgbClr val="1428A0"/>
+          </a:solidFill>
+          <a:ln>
+            <a:noFill/>
+          </a:ln>
+          <a:effectLst/>
+        </p:spPr>
+        <p:style>
+          <a:lnRef idx="1">
+            <a:schemeClr val="accent1"/>
+          </a:lnRef>
+          <a:fillRef idx="3">
+            <a:schemeClr val="accent1"/>
+          </a:fillRef>
+          <a:effectRef idx="2">
+            <a:schemeClr val="accent1"/>
+          </a:effectRef>
+          <a:fontRef idx="minor">
+            <a:schemeClr val="lt1"/>
+          </a:fontRef>
+        </p:style>
+        <p:txBody>
+          <a:bodyPr rtlCol="0" anchor="ctr"/>
+          <a:lstStyle/>
+          <a:p>
+            <a:pPr algn="ctr"/>
+          </a:p>
+        </p:txBody>
+      </p:sp>
+      <p:sp>
+        <p:nvSpPr>
+          <p:cNvPr id="74" name="TextBox 73"/>
           <p:cNvSpPr txBox="1"/>
           <p:nvPr/>
         </p:nvSpPr>
         <p:spPr>
           <a:xfrm>
-            <a:off x="14017752" y="3840480"/>
-            <a:ext cx="2103120" cy="182880"/>
+            <a:off x="13725144" y="3822191"/>
+            <a:ext cx="2286000" cy="329184"/>
           </a:xfrm>
           <a:prstGeom prst="rect">
             <a:avLst/>
@@ -6515,7 +6593,7 @@
           <a:noFill/>
         </p:spPr>
         <p:txBody>
-          <a:bodyPr wrap="square" anchor="t" lIns="0" rIns="0" tIns="0" bIns="0">
+          <a:bodyPr wrap="square" anchor="ctr" lIns="0" rIns="0" tIns="0" bIns="0">
             <a:spAutoFit/>
           </a:bodyPr>
           <a:lstStyle/>
@@ -6526,9 +6604,9 @@
               </a:lnSpc>
             </a:pPr>
             <a:r>
-              <a:rPr sz="975" b="0">
-                <a:solidFill>
-                  <a:srgbClr val="8A8A8A"/>
+              <a:rPr sz="950" b="0">
+                <a:solidFill>
+                  <a:srgbClr val="AAB8E8"/>
                 </a:solidFill>
                 <a:latin typeface="Arial"/>
                 <a:ea typeface="Arial"/>
@@ -6540,14 +6618,14 @@
       </p:sp>
       <p:sp>
         <p:nvSpPr>
-          <p:cNvPr id="74" name="TextBox 73"/>
+          <p:cNvPr id="75" name="TextBox 74"/>
           <p:cNvSpPr txBox="1"/>
           <p:nvPr/>
         </p:nvSpPr>
         <p:spPr>
           <a:xfrm>
-            <a:off x="16066008" y="3840480"/>
-            <a:ext cx="1371600" cy="201168"/>
+            <a:off x="13725144" y="3822191"/>
+            <a:ext cx="3602736" cy="329184"/>
           </a:xfrm>
           <a:prstGeom prst="rect">
             <a:avLst/>
@@ -6555,7 +6633,7 @@
           <a:noFill/>
         </p:spPr>
         <p:txBody>
-          <a:bodyPr wrap="square" anchor="t" lIns="0" rIns="0" tIns="0" bIns="0">
+          <a:bodyPr wrap="square" anchor="ctr" lIns="0" rIns="0" tIns="0" bIns="0">
             <a:spAutoFit/>
           </a:bodyPr>
           <a:lstStyle/>
@@ -6566,101 +6644,21 @@
               </a:lnSpc>
             </a:pPr>
             <a:r>
-              <a:rPr sz="975" b="1">
-                <a:solidFill>
-                  <a:srgbClr val="1428A0"/>
+              <a:rPr sz="1050" b="1">
+                <a:solidFill>
+                  <a:srgbClr val="FFFFFF"/>
                 </a:solidFill>
                 <a:latin typeface="Arial"/>
                 <a:ea typeface="Arial"/>
               </a:rPr>
-              <a:t>요구 도달 · 조건부</a:t>
-            </a:r>
-          </a:p>
-        </p:txBody>
-      </p:sp>
-      <p:sp>
-        <p:nvSpPr>
-          <p:cNvPr id="75" name="TextBox 74"/>
-          <p:cNvSpPr txBox="1"/>
-          <p:nvPr/>
-        </p:nvSpPr>
-        <p:spPr>
-          <a:xfrm>
-            <a:off x="14017752" y="4041648"/>
-            <a:ext cx="3419856" cy="237744"/>
-          </a:xfrm>
-          <a:prstGeom prst="rect">
-            <a:avLst/>
-          </a:prstGeom>
-          <a:noFill/>
-        </p:spPr>
-        <p:txBody>
-          <a:bodyPr wrap="square" anchor="t" lIns="0" rIns="0" tIns="0" bIns="0">
-            <a:spAutoFit/>
-          </a:bodyPr>
-          <a:lstStyle/>
-          <a:p>
-            <a:pPr algn="l">
-              <a:lnSpc>
-                <a:spcPct val="112000"/>
-              </a:lnSpc>
-            </a:pPr>
-            <a:r>
-              <a:rPr sz="1125" b="1">
-                <a:solidFill>
-                  <a:srgbClr val="1428A0"/>
-                </a:solidFill>
-                <a:latin typeface="Arial"/>
-                <a:ea typeface="Arial"/>
-              </a:rPr>
-              <a:t>호스트가 데이터 수명을 지정 → WAF ≈3 → ≈1</a:t>
-            </a:r>
-          </a:p>
-        </p:txBody>
-      </p:sp>
-      <p:sp>
-        <p:nvSpPr>
-          <p:cNvPr id="76" name="TextBox 75"/>
-          <p:cNvSpPr txBox="1"/>
-          <p:nvPr/>
-        </p:nvSpPr>
-        <p:spPr>
-          <a:xfrm>
-            <a:off x="14017752" y="4279392"/>
-            <a:ext cx="3419856" cy="201168"/>
-          </a:xfrm>
-          <a:prstGeom prst="rect">
-            <a:avLst/>
-          </a:prstGeom>
-          <a:noFill/>
-        </p:spPr>
-        <p:txBody>
-          <a:bodyPr wrap="square" anchor="t" lIns="0" rIns="0" tIns="0" bIns="0">
-            <a:spAutoFit/>
-          </a:bodyPr>
-          <a:lstStyle/>
-          <a:p>
-            <a:pPr algn="l">
-              <a:lnSpc>
-                <a:spcPct val="112000"/>
-              </a:lnSpc>
-            </a:pPr>
-            <a:r>
-              <a:rPr sz="850" b="0">
-                <a:solidFill>
-                  <a:srgbClr val="555555"/>
-                </a:solidFill>
-                <a:latin typeface="Arial"/>
-                <a:ea typeface="Arial"/>
-              </a:rPr>
-              <a:t>배치 표준 · 캐시 관리자 정책 · 공동 설계 = 본 덱 4~5장</a:t>
+              <a:t>조건부 도달</a:t>
             </a:r>
           </a:p>
         </p:txBody>
       </p:sp>
       <p:pic>
         <p:nvPicPr>
-          <p:cNvPr id="77" name="Picture 76" descr="ladder_cell_waf.png"/>
+          <p:cNvPr id="76" name="Picture 75" descr="ladder_waf_pairs.png"/>
           <p:cNvPicPr>
             <a:picLocks noChangeAspect="1"/>
           </p:cNvPicPr>
@@ -6674,8 +6672,8 @@
         </p:blipFill>
         <p:spPr>
           <a:xfrm>
-            <a:off x="14090904" y="4535424"/>
-            <a:ext cx="3273552" cy="1198766"/>
+            <a:off x="13720572" y="4224527"/>
+            <a:ext cx="3611880" cy="2513929"/>
           </a:xfrm>
           <a:prstGeom prst="rect">
             <a:avLst/>
@@ -6684,14 +6682,14 @@
       </p:pic>
       <p:sp>
         <p:nvSpPr>
-          <p:cNvPr id="78" name="TextBox 77"/>
+          <p:cNvPr id="77" name="TextBox 76"/>
           <p:cNvSpPr txBox="1"/>
           <p:nvPr/>
         </p:nvSpPr>
         <p:spPr>
           <a:xfrm>
-            <a:off x="14017752" y="6327648"/>
-            <a:ext cx="3419856" cy="310896"/>
+            <a:off x="13615416" y="6748271"/>
+            <a:ext cx="3822192" cy="256032"/>
           </a:xfrm>
           <a:prstGeom prst="rect">
             <a:avLst/>
@@ -6699,39 +6697,39 @@
           <a:noFill/>
         </p:spPr>
         <p:txBody>
-          <a:bodyPr wrap="square" anchor="ctr" lIns="0" rIns="0" tIns="0" bIns="0">
+          <a:bodyPr wrap="square" anchor="t" lIns="0" rIns="0" tIns="0" bIns="0">
             <a:spAutoFit/>
           </a:bodyPr>
           <a:lstStyle/>
           <a:p>
             <a:pPr algn="l">
               <a:lnSpc>
-                <a:spcPct val="112000"/>
+                <a:spcPct val="100000"/>
               </a:lnSpc>
             </a:pPr>
             <a:r>
-              <a:rPr sz="975" b="1">
+              <a:rPr sz="900" b="1">
                 <a:solidFill>
                   <a:srgbClr val="1428A0"/>
                 </a:solidFill>
                 <a:latin typeface="Arial"/>
                 <a:ea typeface="Arial"/>
               </a:rPr>
-              <a:t>호스트가 결정하는 잔여 변수(유효 DWPD ×2.9) · KV 캐시 실측은 Phase 2 검증 대상</a:t>
-            </a:r>
-          </a:p>
-        </p:txBody>
-      </p:sp>
-      <p:sp>
-        <p:nvSpPr>
-          <p:cNvPr id="79" name="Rectangle 78"/>
+              <a:t>LLM KV 캐시의 WAF 공개 실측은 없습니다 · Phase 2 검증 대상</a:t>
+            </a:r>
+          </a:p>
+        </p:txBody>
+      </p:sp>
+      <p:sp>
+        <p:nvSpPr>
+          <p:cNvPr id="78" name="Rectangle 77"/>
           <p:cNvSpPr/>
           <p:nvPr/>
         </p:nvSpPr>
         <p:spPr>
           <a:xfrm>
-            <a:off x="722376" y="6821424"/>
-            <a:ext cx="1188720" cy="1609344"/>
+            <a:off x="722376" y="7095744"/>
+            <a:ext cx="1188720" cy="1335024"/>
           </a:xfrm>
           <a:prstGeom prst="rect">
             <a:avLst/>
@@ -6768,14 +6766,14 @@
       </p:sp>
       <p:sp>
         <p:nvSpPr>
-          <p:cNvPr id="80" name="Rectangle 79"/>
+          <p:cNvPr id="79" name="Rectangle 78"/>
           <p:cNvSpPr/>
           <p:nvPr/>
         </p:nvSpPr>
         <p:spPr>
           <a:xfrm>
-            <a:off x="722376" y="6821424"/>
-            <a:ext cx="54864" cy="1609344"/>
+            <a:off x="722376" y="7095744"/>
+            <a:ext cx="54864" cy="1335024"/>
           </a:xfrm>
           <a:prstGeom prst="rect">
             <a:avLst/>
@@ -6812,13 +6810,13 @@
       </p:sp>
       <p:sp>
         <p:nvSpPr>
-          <p:cNvPr id="81" name="TextBox 80"/>
+          <p:cNvPr id="80" name="TextBox 79"/>
           <p:cNvSpPr txBox="1"/>
           <p:nvPr/>
         </p:nvSpPr>
         <p:spPr>
           <a:xfrm>
-            <a:off x="886968" y="6967728"/>
+            <a:off x="886968" y="7187183"/>
             <a:ext cx="950976" cy="274320"/>
           </a:xfrm>
           <a:prstGeom prst="rect">
@@ -6853,14 +6851,14 @@
       </p:sp>
       <p:sp>
         <p:nvSpPr>
-          <p:cNvPr id="82" name="TextBox 81"/>
+          <p:cNvPr id="81" name="TextBox 80"/>
           <p:cNvSpPr txBox="1"/>
           <p:nvPr/>
         </p:nvSpPr>
         <p:spPr>
           <a:xfrm>
-            <a:off x="886968" y="7571231"/>
-            <a:ext cx="950976" cy="731520"/>
+            <a:off x="886968" y="7735823"/>
+            <a:ext cx="950976" cy="640080"/>
           </a:xfrm>
           <a:prstGeom prst="rect">
             <a:avLst/>
@@ -6894,14 +6892,14 @@
       </p:sp>
       <p:sp>
         <p:nvSpPr>
-          <p:cNvPr id="83" name="Rectangle 82"/>
+          <p:cNvPr id="82" name="Rectangle 81"/>
           <p:cNvSpPr/>
           <p:nvPr/>
         </p:nvSpPr>
         <p:spPr>
           <a:xfrm>
-            <a:off x="2039112" y="6967728"/>
-            <a:ext cx="2496312" cy="896112"/>
+            <a:off x="2039112" y="7187183"/>
+            <a:ext cx="2496312" cy="786384"/>
           </a:xfrm>
           <a:prstGeom prst="rect">
             <a:avLst/>
@@ -6940,13 +6938,13 @@
       </p:sp>
       <p:sp>
         <p:nvSpPr>
-          <p:cNvPr id="84" name="TextBox 83"/>
+          <p:cNvPr id="83" name="TextBox 82"/>
           <p:cNvSpPr txBox="1"/>
           <p:nvPr/>
         </p:nvSpPr>
         <p:spPr>
           <a:xfrm>
-            <a:off x="2148840" y="7040880"/>
+            <a:off x="2148840" y="7232903"/>
             <a:ext cx="2276856" cy="182880"/>
           </a:xfrm>
           <a:prstGeom prst="rect">
@@ -6980,13 +6978,13 @@
       </p:sp>
       <p:sp>
         <p:nvSpPr>
-          <p:cNvPr id="85" name="TextBox 84"/>
+          <p:cNvPr id="84" name="TextBox 83"/>
           <p:cNvSpPr txBox="1"/>
           <p:nvPr/>
         </p:nvSpPr>
         <p:spPr>
           <a:xfrm>
-            <a:off x="2148840" y="7242048"/>
+            <a:off x="2148840" y="7424927"/>
             <a:ext cx="2276856" cy="237744"/>
           </a:xfrm>
           <a:prstGeom prst="rect">
@@ -7020,14 +7018,14 @@
       </p:sp>
       <p:sp>
         <p:nvSpPr>
-          <p:cNvPr id="86" name="TextBox 85"/>
+          <p:cNvPr id="85" name="TextBox 84"/>
           <p:cNvSpPr txBox="1"/>
           <p:nvPr/>
         </p:nvSpPr>
         <p:spPr>
           <a:xfrm>
-            <a:off x="2148840" y="7498079"/>
-            <a:ext cx="2276856" cy="310896"/>
+            <a:off x="2148840" y="7671815"/>
+            <a:ext cx="2276856" cy="292608"/>
           </a:xfrm>
           <a:prstGeom prst="rect">
             <a:avLst/>
@@ -7060,14 +7058,14 @@
       </p:sp>
       <p:sp>
         <p:nvSpPr>
-          <p:cNvPr id="87" name="Rectangle 86"/>
+          <p:cNvPr id="86" name="Rectangle 85"/>
           <p:cNvSpPr/>
           <p:nvPr/>
         </p:nvSpPr>
         <p:spPr>
           <a:xfrm>
-            <a:off x="4645152" y="6967728"/>
-            <a:ext cx="2496312" cy="896112"/>
+            <a:off x="4645152" y="7187183"/>
+            <a:ext cx="2496312" cy="786384"/>
           </a:xfrm>
           <a:prstGeom prst="rect">
             <a:avLst/>
@@ -7106,13 +7104,13 @@
       </p:sp>
       <p:sp>
         <p:nvSpPr>
-          <p:cNvPr id="88" name="TextBox 87"/>
+          <p:cNvPr id="87" name="TextBox 86"/>
           <p:cNvSpPr txBox="1"/>
           <p:nvPr/>
         </p:nvSpPr>
         <p:spPr>
           <a:xfrm>
-            <a:off x="4754880" y="7040880"/>
+            <a:off x="4754880" y="7232903"/>
             <a:ext cx="2276856" cy="182880"/>
           </a:xfrm>
           <a:prstGeom prst="rect">
@@ -7146,13 +7144,13 @@
       </p:sp>
       <p:sp>
         <p:nvSpPr>
-          <p:cNvPr id="89" name="TextBox 88"/>
+          <p:cNvPr id="88" name="TextBox 87"/>
           <p:cNvSpPr txBox="1"/>
           <p:nvPr/>
         </p:nvSpPr>
         <p:spPr>
           <a:xfrm>
-            <a:off x="4754880" y="7242048"/>
+            <a:off x="4754880" y="7424927"/>
             <a:ext cx="2276856" cy="237744"/>
           </a:xfrm>
           <a:prstGeom prst="rect">
@@ -7186,14 +7184,14 @@
       </p:sp>
       <p:sp>
         <p:nvSpPr>
-          <p:cNvPr id="90" name="TextBox 89"/>
+          <p:cNvPr id="89" name="TextBox 88"/>
           <p:cNvSpPr txBox="1"/>
           <p:nvPr/>
         </p:nvSpPr>
         <p:spPr>
           <a:xfrm>
-            <a:off x="4754880" y="7498079"/>
-            <a:ext cx="2276856" cy="310896"/>
+            <a:off x="4754880" y="7671815"/>
+            <a:ext cx="2276856" cy="292608"/>
           </a:xfrm>
           <a:prstGeom prst="rect">
             <a:avLst/>
@@ -7226,14 +7224,14 @@
       </p:sp>
       <p:sp>
         <p:nvSpPr>
-          <p:cNvPr id="91" name="Rectangle 90"/>
+          <p:cNvPr id="90" name="Rectangle 89"/>
           <p:cNvSpPr/>
           <p:nvPr/>
         </p:nvSpPr>
         <p:spPr>
           <a:xfrm>
-            <a:off x="7251192" y="6967728"/>
-            <a:ext cx="2496312" cy="896112"/>
+            <a:off x="7251192" y="7187183"/>
+            <a:ext cx="2496312" cy="786384"/>
           </a:xfrm>
           <a:prstGeom prst="rect">
             <a:avLst/>
@@ -7272,13 +7270,13 @@
       </p:sp>
       <p:sp>
         <p:nvSpPr>
-          <p:cNvPr id="92" name="TextBox 91"/>
+          <p:cNvPr id="91" name="TextBox 90"/>
           <p:cNvSpPr txBox="1"/>
           <p:nvPr/>
         </p:nvSpPr>
         <p:spPr>
           <a:xfrm>
-            <a:off x="7360919" y="7040880"/>
+            <a:off x="7360919" y="7232903"/>
             <a:ext cx="2276856" cy="182880"/>
           </a:xfrm>
           <a:prstGeom prst="rect">
@@ -7312,13 +7310,13 @@
       </p:sp>
       <p:sp>
         <p:nvSpPr>
-          <p:cNvPr id="93" name="TextBox 92"/>
+          <p:cNvPr id="92" name="TextBox 91"/>
           <p:cNvSpPr txBox="1"/>
           <p:nvPr/>
         </p:nvSpPr>
         <p:spPr>
           <a:xfrm>
-            <a:off x="7360919" y="7242048"/>
+            <a:off x="7360919" y="7424927"/>
             <a:ext cx="2276856" cy="237744"/>
           </a:xfrm>
           <a:prstGeom prst="rect">
@@ -7352,14 +7350,14 @@
       </p:sp>
       <p:sp>
         <p:nvSpPr>
-          <p:cNvPr id="94" name="TextBox 93"/>
+          <p:cNvPr id="93" name="TextBox 92"/>
           <p:cNvSpPr txBox="1"/>
           <p:nvPr/>
         </p:nvSpPr>
         <p:spPr>
           <a:xfrm>
-            <a:off x="7360919" y="7498079"/>
-            <a:ext cx="2276856" cy="310896"/>
+            <a:off x="7360919" y="7671815"/>
+            <a:ext cx="2276856" cy="292608"/>
           </a:xfrm>
           <a:prstGeom prst="rect">
             <a:avLst/>
@@ -7392,14 +7390,14 @@
       </p:sp>
       <p:sp>
         <p:nvSpPr>
-          <p:cNvPr id="95" name="Rectangle 94"/>
+          <p:cNvPr id="94" name="Rectangle 93"/>
           <p:cNvSpPr/>
           <p:nvPr/>
         </p:nvSpPr>
         <p:spPr>
           <a:xfrm>
-            <a:off x="9857232" y="6967728"/>
-            <a:ext cx="2496312" cy="896112"/>
+            <a:off x="9857232" y="7187183"/>
+            <a:ext cx="2496312" cy="786384"/>
           </a:xfrm>
           <a:prstGeom prst="rect">
             <a:avLst/>
@@ -7438,13 +7436,13 @@
       </p:sp>
       <p:sp>
         <p:nvSpPr>
-          <p:cNvPr id="96" name="TextBox 95"/>
+          <p:cNvPr id="95" name="TextBox 94"/>
           <p:cNvSpPr txBox="1"/>
           <p:nvPr/>
         </p:nvSpPr>
         <p:spPr>
           <a:xfrm>
-            <a:off x="9966960" y="7040880"/>
+            <a:off x="9966960" y="7232903"/>
             <a:ext cx="2276856" cy="182880"/>
           </a:xfrm>
           <a:prstGeom prst="rect">
@@ -7478,13 +7476,13 @@
       </p:sp>
       <p:sp>
         <p:nvSpPr>
-          <p:cNvPr id="97" name="TextBox 96"/>
+          <p:cNvPr id="96" name="TextBox 95"/>
           <p:cNvSpPr txBox="1"/>
           <p:nvPr/>
         </p:nvSpPr>
         <p:spPr>
           <a:xfrm>
-            <a:off x="9966960" y="7242048"/>
+            <a:off x="9966960" y="7424927"/>
             <a:ext cx="2276856" cy="237744"/>
           </a:xfrm>
           <a:prstGeom prst="rect">
@@ -7518,14 +7516,14 @@
       </p:sp>
       <p:sp>
         <p:nvSpPr>
-          <p:cNvPr id="98" name="TextBox 97"/>
+          <p:cNvPr id="97" name="TextBox 96"/>
           <p:cNvSpPr txBox="1"/>
           <p:nvPr/>
         </p:nvSpPr>
         <p:spPr>
           <a:xfrm>
-            <a:off x="9966960" y="7498079"/>
-            <a:ext cx="2276856" cy="310896"/>
+            <a:off x="9966960" y="7671815"/>
+            <a:ext cx="2276856" cy="292608"/>
           </a:xfrm>
           <a:prstGeom prst="rect">
             <a:avLst/>
@@ -7558,14 +7556,14 @@
       </p:sp>
       <p:sp>
         <p:nvSpPr>
-          <p:cNvPr id="99" name="Rectangle 98"/>
+          <p:cNvPr id="98" name="Rectangle 97"/>
           <p:cNvSpPr/>
           <p:nvPr/>
         </p:nvSpPr>
         <p:spPr>
           <a:xfrm>
-            <a:off x="12463272" y="6967728"/>
-            <a:ext cx="2496312" cy="896112"/>
+            <a:off x="12463272" y="7187183"/>
+            <a:ext cx="2496312" cy="786384"/>
           </a:xfrm>
           <a:prstGeom prst="rect">
             <a:avLst/>
@@ -7604,13 +7602,13 @@
       </p:sp>
       <p:sp>
         <p:nvSpPr>
-          <p:cNvPr id="100" name="TextBox 99"/>
+          <p:cNvPr id="99" name="TextBox 98"/>
           <p:cNvSpPr txBox="1"/>
           <p:nvPr/>
         </p:nvSpPr>
         <p:spPr>
           <a:xfrm>
-            <a:off x="12573000" y="7040880"/>
+            <a:off x="12573000" y="7232903"/>
             <a:ext cx="2276856" cy="182880"/>
           </a:xfrm>
           <a:prstGeom prst="rect">
@@ -7644,13 +7642,13 @@
       </p:sp>
       <p:sp>
         <p:nvSpPr>
-          <p:cNvPr id="101" name="TextBox 100"/>
+          <p:cNvPr id="100" name="TextBox 99"/>
           <p:cNvSpPr txBox="1"/>
           <p:nvPr/>
         </p:nvSpPr>
         <p:spPr>
           <a:xfrm>
-            <a:off x="12573000" y="7242048"/>
+            <a:off x="12573000" y="7424927"/>
             <a:ext cx="2276856" cy="237744"/>
           </a:xfrm>
           <a:prstGeom prst="rect">
@@ -7684,14 +7682,14 @@
       </p:sp>
       <p:sp>
         <p:nvSpPr>
-          <p:cNvPr id="102" name="TextBox 101"/>
+          <p:cNvPr id="101" name="TextBox 100"/>
           <p:cNvSpPr txBox="1"/>
           <p:nvPr/>
         </p:nvSpPr>
         <p:spPr>
           <a:xfrm>
-            <a:off x="12573000" y="7498079"/>
-            <a:ext cx="2276856" cy="310896"/>
+            <a:off x="12573000" y="7671815"/>
+            <a:ext cx="2276856" cy="292608"/>
           </a:xfrm>
           <a:prstGeom prst="rect">
             <a:avLst/>
@@ -7724,14 +7722,14 @@
       </p:sp>
       <p:sp>
         <p:nvSpPr>
-          <p:cNvPr id="103" name="Rectangle 102"/>
+          <p:cNvPr id="102" name="Rectangle 101"/>
           <p:cNvSpPr/>
           <p:nvPr/>
         </p:nvSpPr>
         <p:spPr>
           <a:xfrm>
-            <a:off x="15069312" y="6967728"/>
-            <a:ext cx="2496312" cy="896112"/>
+            <a:off x="15069312" y="7187183"/>
+            <a:ext cx="2496312" cy="786384"/>
           </a:xfrm>
           <a:prstGeom prst="rect">
             <a:avLst/>
@@ -7768,13 +7766,13 @@
       </p:sp>
       <p:sp>
         <p:nvSpPr>
-          <p:cNvPr id="104" name="TextBox 103"/>
+          <p:cNvPr id="103" name="TextBox 102"/>
           <p:cNvSpPr txBox="1"/>
           <p:nvPr/>
         </p:nvSpPr>
         <p:spPr>
           <a:xfrm>
-            <a:off x="15179040" y="7040880"/>
+            <a:off x="15179040" y="7232903"/>
             <a:ext cx="2276856" cy="182880"/>
           </a:xfrm>
           <a:prstGeom prst="rect">
@@ -7808,13 +7806,13 @@
       </p:sp>
       <p:sp>
         <p:nvSpPr>
-          <p:cNvPr id="105" name="TextBox 104"/>
+          <p:cNvPr id="104" name="TextBox 103"/>
           <p:cNvSpPr txBox="1"/>
           <p:nvPr/>
         </p:nvSpPr>
         <p:spPr>
           <a:xfrm>
-            <a:off x="15179040" y="7242048"/>
+            <a:off x="15179040" y="7424927"/>
             <a:ext cx="2276856" cy="237744"/>
           </a:xfrm>
           <a:prstGeom prst="rect">
@@ -7848,14 +7846,14 @@
       </p:sp>
       <p:sp>
         <p:nvSpPr>
-          <p:cNvPr id="106" name="TextBox 105"/>
+          <p:cNvPr id="105" name="TextBox 104"/>
           <p:cNvSpPr txBox="1"/>
           <p:nvPr/>
         </p:nvSpPr>
         <p:spPr>
           <a:xfrm>
-            <a:off x="15179040" y="7498079"/>
-            <a:ext cx="2276856" cy="310896"/>
+            <a:off x="15179040" y="7671815"/>
+            <a:ext cx="2276856" cy="292608"/>
           </a:xfrm>
           <a:prstGeom prst="rect">
             <a:avLst/>
@@ -7881,21 +7879,21 @@
                 <a:latin typeface="Arial"/>
                 <a:ea typeface="Arial"/>
               </a:rPr>
-              <a:t>≈3 → ≈1 · 유효 DWPD ×2.9</a:t>
-            </a:r>
-          </a:p>
-        </p:txBody>
-      </p:sp>
-      <p:sp>
-        <p:nvSpPr>
-          <p:cNvPr id="107" name="TextBox 106"/>
+              <a:t>≈3 → ≈1 · 유효 DWPD ×3</a:t>
+            </a:r>
+          </a:p>
+        </p:txBody>
+      </p:sp>
+      <p:sp>
+        <p:nvSpPr>
+          <p:cNvPr id="106" name="TextBox 105"/>
           <p:cNvSpPr txBox="1"/>
           <p:nvPr/>
         </p:nvSpPr>
         <p:spPr>
           <a:xfrm>
-            <a:off x="2039112" y="7955279"/>
-            <a:ext cx="15526512" cy="402336"/>
+            <a:off x="2039112" y="8028431"/>
+            <a:ext cx="15526512" cy="365760"/>
           </a:xfrm>
           <a:prstGeom prst="rect">
             <a:avLst/>
@@ -7921,14 +7919,14 @@
                 <a:latin typeface="Arial"/>
                 <a:ea typeface="Arial"/>
               </a:rPr>
-              <a:t>호스트 배치 하나로는 격차(동급 비교 2~10배)가 해소되지 않습니다. WAF ×2.9는 다이 세대·OP·보증연수·워크로드 재정의와 결합해 요구에 도달하며, 이 중 호스트·고객 측 변수가 다수라는 점이 공동 설계의 근거입니다</a:t>
-            </a:r>
-          </a:p>
-        </p:txBody>
-      </p:sp>
-      <p:sp>
-        <p:nvSpPr>
-          <p:cNvPr id="108" name="Rectangle 107"/>
+              <a:t>호스트 배치 하나로는 요구 대비 2~5배 격차가 해소되지 않습니다. WAF 약 3배는 다이 세대·OP·보증연수·워크로드 재정의와 결합해 요구에 도달하며, 이 중 호스트·고객 측 변수가 다수라는 점이 공동 설계의 근거입니다</a:t>
+            </a:r>
+          </a:p>
+        </p:txBody>
+      </p:sp>
+      <p:sp>
+        <p:nvSpPr>
+          <p:cNvPr id="107" name="Rectangle 106"/>
           <p:cNvSpPr/>
           <p:nvPr/>
         </p:nvSpPr>
@@ -7972,7 +7970,7 @@
       </p:sp>
       <p:sp>
         <p:nvSpPr>
-          <p:cNvPr id="109" name="TextBox 108"/>
+          <p:cNvPr id="108" name="TextBox 107"/>
           <p:cNvSpPr txBox="1"/>
           <p:nvPr/>
         </p:nvSpPr>
@@ -8012,7 +8010,7 @@
       </p:sp>
       <p:sp>
         <p:nvSpPr>
-          <p:cNvPr id="110" name="TextBox 109"/>
+          <p:cNvPr id="109" name="TextBox 108"/>
           <p:cNvSpPr txBox="1"/>
           <p:nvPr/>
         </p:nvSpPr>
@@ -8069,7 +8067,7 @@
       </p:sp>
       <p:sp>
         <p:nvSpPr>
-          <p:cNvPr id="111" name="TextBox 110"/>
+          <p:cNvPr id="110" name="TextBox 109"/>
           <p:cNvSpPr txBox="1"/>
           <p:nvPr/>
         </p:nvSpPr>
@@ -8102,14 +8100,14 @@
                 <a:latin typeface="Arial"/>
                 <a:ea typeface="Arial"/>
               </a:rPr>
-              <a:t>출처: JESD218(UBER), ATP·Kioxia(DWPD 산식), Intel·Solidigm 사양(정격 DWPD), Mielke·Cai(RBER), WD(LDPC), CacheLib·삼성·NVMe FDP·VLDB'26(WAF), P5336·6550 ION·CM9·LC9(동급 DWPD) · 등급은 부록 A F28~F54</a:t>
-            </a:r>
-          </a:p>
-        </p:txBody>
-      </p:sp>
-      <p:sp>
-        <p:nvSpPr>
-          <p:cNvPr id="112" name="TextBox 111"/>
+              <a:t>출처: JESD218(UBER)·OCP 사양(고장률), ATP·Kioxia(DWPD 산식), Intel·Solidigm·Kioxia 사양(정격 DWPD·허용 기입량), Mielke·Cai(RBER), WD(LDPC), Meta CacheLib 문서·Kioxia XD8 브리프(WAF 실측), FAST'26 WARP(조건부성) · 등급은 부록 A</a:t>
+            </a:r>
+          </a:p>
+        </p:txBody>
+      </p:sp>
+      <p:sp>
+        <p:nvSpPr>
+          <p:cNvPr id="111" name="TextBox 110"/>
           <p:cNvSpPr txBox="1"/>
           <p:nvPr/>
         </p:nvSpPr>
